--- a/presentation/Corre_que_Derrete_Equipe_20261015.pptx
+++ b/presentation/Corre_que_Derrete_Equipe_20261015.pptx
@@ -2,26 +2,19 @@
 <file path=ppt/presentation.xml><?xml version="1.0" encoding="utf-8"?>
 <p:presentation xmlns:p="http://schemas.openxmlformats.org/presentationml/2006/main">
   <p:sldMasterIdLst>
-    <p:sldMasterId xmlns:r="http://schemas.openxmlformats.org/officeDocument/2006/relationships" id="2147483648" r:id="R5d1403be4001426c"/>
+    <p:sldMasterId xmlns:r="http://schemas.openxmlformats.org/officeDocument/2006/relationships" id="2147483648" r:id="R1ad924c3e4804267"/>
   </p:sldMasterIdLst>
   <p:notesMasterIdLst>
-    <p:notesMasterId xmlns:r="http://schemas.openxmlformats.org/officeDocument/2006/relationships" r:id="Rfda62a5e2e22407a"/>
+    <p:notesMasterId xmlns:r="http://schemas.openxmlformats.org/officeDocument/2006/relationships" r:id="R7ea4454c99ba46d7"/>
   </p:notesMasterIdLst>
   <p:sldIdLst>
-    <p:sldId xmlns:r="http://schemas.openxmlformats.org/officeDocument/2006/relationships" id="256" r:id="Rb4b9ab88177b4279"/>
-    <p:sldId xmlns:r="http://schemas.openxmlformats.org/officeDocument/2006/relationships" id="257" r:id="Rbebe00c9e29744ec"/>
-    <p:sldId xmlns:r="http://schemas.openxmlformats.org/officeDocument/2006/relationships" id="258" r:id="R57804a2fff7c4daa"/>
-    <p:sldId xmlns:r="http://schemas.openxmlformats.org/officeDocument/2006/relationships" id="259" r:id="Rba2495042751446a"/>
-    <p:sldId xmlns:r="http://schemas.openxmlformats.org/officeDocument/2006/relationships" id="260" r:id="R2c47a5f8ff0a4916"/>
-    <p:sldId xmlns:r="http://schemas.openxmlformats.org/officeDocument/2006/relationships" id="261" r:id="R6a01395d2c9d4153"/>
-    <p:sldId xmlns:r="http://schemas.openxmlformats.org/officeDocument/2006/relationships" id="262" r:id="R25819683efe0467e"/>
-    <p:sldId xmlns:r="http://schemas.openxmlformats.org/officeDocument/2006/relationships" id="263" r:id="R070d67d7e0f549a0"/>
-    <p:sldId xmlns:r="http://schemas.openxmlformats.org/officeDocument/2006/relationships" id="264" r:id="R638b3fb9baa848b0"/>
-    <p:sldId xmlns:r="http://schemas.openxmlformats.org/officeDocument/2006/relationships" id="265" r:id="R65b6f40ac6e74769"/>
-    <p:sldId xmlns:r="http://schemas.openxmlformats.org/officeDocument/2006/relationships" id="266" r:id="Re30ba1eeac5c40d6"/>
-    <p:sldId xmlns:r="http://schemas.openxmlformats.org/officeDocument/2006/relationships" id="267" r:id="R3825589c0572420c"/>
-    <p:sldId xmlns:r="http://schemas.openxmlformats.org/officeDocument/2006/relationships" id="268" r:id="R4af75fd751a94916"/>
-    <p:sldId xmlns:r="http://schemas.openxmlformats.org/officeDocument/2006/relationships" id="269" r:id="R6993db94475a4acf"/>
+    <p:sldId xmlns:r="http://schemas.openxmlformats.org/officeDocument/2006/relationships" id="256" r:id="R3cbbcaccc72b454d"/>
+    <p:sldId xmlns:r="http://schemas.openxmlformats.org/officeDocument/2006/relationships" id="257" r:id="R3d7d032826954c3a"/>
+    <p:sldId xmlns:r="http://schemas.openxmlformats.org/officeDocument/2006/relationships" id="258" r:id="Rbcabc42c86304589"/>
+    <p:sldId xmlns:r="http://schemas.openxmlformats.org/officeDocument/2006/relationships" id="259" r:id="R4dcac49bd9d14305"/>
+    <p:sldId xmlns:r="http://schemas.openxmlformats.org/officeDocument/2006/relationships" id="260" r:id="R081e0b3786344022"/>
+    <p:sldId xmlns:r="http://schemas.openxmlformats.org/officeDocument/2006/relationships" id="261" r:id="R4dd1a92b0f604b6c"/>
+    <p:sldId xmlns:r="http://schemas.openxmlformats.org/officeDocument/2006/relationships" id="262" r:id="R5780a82beb6c4f7b"/>
   </p:sldIdLst>
   <p:sldSz cx="12192000" cy="6858000"/>
   <p:notesSz cx="6858000" cy="9144000"/>
@@ -455,7 +448,12 @@
           <a:lstStyle xmlns:a="http://schemas.openxmlformats.org/drawingml/2006/main"/>
           <a:p xmlns:a="http://schemas.openxmlformats.org/drawingml/2006/main">
             <a:r>
-              <a:t>Tempo sugerido: 30 segundos</a:t>
+              <a:t>Fala sugerida</a:t>
+            </a:r>
+          </a:p>
+          <a:p xmlns:a="http://schemas.openxmlformats.org/drawingml/2006/main">
+            <a:r>
+              <a:t>O nosso jogo é uma corrida lateral: um entregador precisa chegar ao cliente antes que o sorvete derreta. Vamos explicar a ideia rapidamente e mostrar o jogo funcionando.</a:t>
             </a:r>
           </a:p>
           <a:p xmlns:a="http://schemas.openxmlformats.org/drawingml/2006/main">
@@ -465,527 +463,12 @@
           </a:p>
           <a:p xmlns:a="http://schemas.openxmlformats.org/drawingml/2006/main">
             <a:r>
-              <a:t>Fala sugerida</a:t>
-            </a:r>
-          </a:p>
-          <a:p xmlns:a="http://schemas.openxmlformats.org/drawingml/2006/main">
-            <a:r>
-              <a:t>O nosso projeto é uma corrida lateral em que o entregador precisa chegar ao cliente antes que o sorvete derreta. O personagem corre sozinho, e o jogador decide quando saltar. Vamos apresentar a ideia, as técnicas gráficas e depois mostrar uma partida.</a:t>
-            </a:r>
-          </a:p>
-          <a:p xmlns:a="http://schemas.openxmlformats.org/drawingml/2006/main">
-            <a:r>
-              <a:t/>
-            </a:r>
-          </a:p>
-          <a:p xmlns:a="http://schemas.openxmlformats.org/drawingml/2006/main">
-            <a:r>
               <a:t>Fontes</a:t>
             </a:r>
           </a:p>
           <a:p xmlns:a="http://schemas.openxmlformats.org/drawingml/2006/main">
             <a:r>
-              <a:t>Projeto Corre que Derrete!, GitHub Danielpr614/corre-que-derrete, implementação 23f755e e documentação de 15/10/2026. Identificação e contribuições informadas por Daniel em 15/10/2026.</a:t>
-            </a:r>
-          </a:p>
-        </p:txBody>
-      </p:sp>
-      <p:sp>
-        <p:nvSpPr>
-          <p:cNvPr id="4" name="Slide Number Placeholder 3"/>
-          <p:cNvSpPr>
-            <a:spLocks xmlns:a="http://schemas.openxmlformats.org/drawingml/2006/main" noGrp="1"/>
-          </p:cNvSpPr>
-          <p:nvPr>
-            <p:ph type="sldNum" idx="5"/>
-          </p:nvPr>
-        </p:nvSpPr>
-        <p:spPr/>
-        <p:txBody>
-          <a:bodyPr xmlns:a="http://schemas.openxmlformats.org/drawingml/2006/main"/>
-          <a:lstStyle xmlns:a="http://schemas.openxmlformats.org/drawingml/2006/main"/>
-          <a:p xmlns:a="http://schemas.openxmlformats.org/drawingml/2006/main"/>
-        </p:txBody>
-      </p:sp>
-    </p:spTree>
-  </p:cSld>
-  <p:clrMapOvr>
-    <a:masterClrMapping xmlns:a="http://schemas.openxmlformats.org/drawingml/2006/main"/>
-  </p:clrMapOvr>
-</p:notes>
-</file>
-
-<file path=ppt/notesSlides/notesSlide10.xml><?xml version="1.0" encoding="utf-8"?>
-<p:notes xmlns:p="http://schemas.openxmlformats.org/presentationml/2006/main">
-  <p:cSld>
-    <p:spTree>
-      <p:nvGrpSpPr>
-        <p:cNvPr id="1" name=""/>
-        <p:cNvGrpSpPr/>
-        <p:nvPr/>
-      </p:nvGrpSpPr>
-      <p:grpSpPr>
-        <a:xfrm xmlns:a="http://schemas.openxmlformats.org/drawingml/2006/main"/>
-      </p:grpSpPr>
-      <p:sp>
-        <p:nvSpPr>
-          <p:cNvPr id="2" name="Slide Image Placeholder 1"/>
-          <p:cNvSpPr>
-            <a:spLocks xmlns:a="http://schemas.openxmlformats.org/drawingml/2006/main" noGrp="1"/>
-          </p:cNvSpPr>
-          <p:nvPr>
-            <p:ph type="sldImg" idx="0"/>
-          </p:nvPr>
-        </p:nvSpPr>
-        <p:spPr/>
-      </p:sp>
-      <p:sp>
-        <p:nvSpPr>
-          <p:cNvPr id="3" name="Notes Placeholder 2"/>
-          <p:cNvSpPr>
-            <a:spLocks xmlns:a="http://schemas.openxmlformats.org/drawingml/2006/main" noGrp="1"/>
-          </p:cNvSpPr>
-          <p:nvPr>
-            <p:ph type="body" idx="1"/>
-          </p:nvPr>
-        </p:nvSpPr>
-        <p:spPr/>
-        <p:txBody>
-          <a:bodyPr xmlns:a="http://schemas.openxmlformats.org/drawingml/2006/main"/>
-          <a:lstStyle xmlns:a="http://schemas.openxmlformats.org/drawingml/2006/main"/>
-          <a:p xmlns:a="http://schemas.openxmlformats.org/drawingml/2006/main">
-            <a:r>
-              <a:t>Tempo sugerido: 55 segundos</a:t>
-            </a:r>
-          </a:p>
-          <a:p xmlns:a="http://schemas.openxmlformats.org/drawingml/2006/main">
-            <a:r>
-              <a:t/>
-            </a:r>
-          </a:p>
-          <a:p xmlns:a="http://schemas.openxmlformats.org/drawingml/2006/main">
-            <a:r>
-              <a:t>Fala sugerida</a:t>
-            </a:r>
-          </a:p>
-          <a:p xmlns:a="http://schemas.openxmlformats.org/drawingml/2006/main">
-            <a:r>
-              <a:t>Começamos com a concepção e um protótipo de formas simples. O histórico registra a corrida, o salto e as primeiras colisões antes das melhorias visuais. Depois entraram as camadas do cenário, os quadros e as partículas. Os testes no Windows mostraram que ampliar a janela deixava a imagem pouco definida. A solução foi desenhar na resolução final. Também corrigimos o rosto do cliente e adicionamos a música. As imagens mostram esses estágios, e os commits e o diário registram as mudanças.</a:t>
-            </a:r>
-          </a:p>
-          <a:p xmlns:a="http://schemas.openxmlformats.org/drawingml/2006/main">
-            <a:r>
-              <a:t/>
-            </a:r>
-          </a:p>
-          <a:p xmlns:a="http://schemas.openxmlformats.org/drawingml/2006/main">
-            <a:r>
-              <a:t>Fontes</a:t>
-            </a:r>
-          </a:p>
-          <a:p xmlns:a="http://schemas.openxmlformats.org/drawingml/2006/main">
-            <a:r>
-              <a:t>Projeto Corre que Derrete!, GitHub Danielpr614/corre-que-derrete, implementação 23f755e e documentação de 15/10/2026. docs/14-evidencias-e-evolucao.md. Esquerda: captura humana do protótipo, image(20261007-144107).png. Centro: captura humana após renderização nativa e antes da correção do cliente, image(20261007-162105).png. Direita: cena preparada do código atual. Todas as imagens originam-se do trabalho da equipe, sem imagens externas.</a:t>
-            </a:r>
-          </a:p>
-        </p:txBody>
-      </p:sp>
-      <p:sp>
-        <p:nvSpPr>
-          <p:cNvPr id="4" name="Slide Number Placeholder 3"/>
-          <p:cNvSpPr>
-            <a:spLocks xmlns:a="http://schemas.openxmlformats.org/drawingml/2006/main" noGrp="1"/>
-          </p:cNvSpPr>
-          <p:nvPr>
-            <p:ph type="sldNum" idx="5"/>
-          </p:nvPr>
-        </p:nvSpPr>
-        <p:spPr/>
-        <p:txBody>
-          <a:bodyPr xmlns:a="http://schemas.openxmlformats.org/drawingml/2006/main"/>
-          <a:lstStyle xmlns:a="http://schemas.openxmlformats.org/drawingml/2006/main"/>
-          <a:p xmlns:a="http://schemas.openxmlformats.org/drawingml/2006/main"/>
-        </p:txBody>
-      </p:sp>
-    </p:spTree>
-  </p:cSld>
-  <p:clrMapOvr>
-    <a:masterClrMapping xmlns:a="http://schemas.openxmlformats.org/drawingml/2006/main"/>
-  </p:clrMapOvr>
-</p:notes>
-</file>
-
-<file path=ppt/notesSlides/notesSlide11.xml><?xml version="1.0" encoding="utf-8"?>
-<p:notes xmlns:p="http://schemas.openxmlformats.org/presentationml/2006/main">
-  <p:cSld>
-    <p:spTree>
-      <p:nvGrpSpPr>
-        <p:cNvPr id="1" name=""/>
-        <p:cNvGrpSpPr/>
-        <p:nvPr/>
-      </p:nvGrpSpPr>
-      <p:grpSpPr>
-        <a:xfrm xmlns:a="http://schemas.openxmlformats.org/drawingml/2006/main"/>
-      </p:grpSpPr>
-      <p:sp>
-        <p:nvSpPr>
-          <p:cNvPr id="2" name="Slide Image Placeholder 1"/>
-          <p:cNvSpPr>
-            <a:spLocks xmlns:a="http://schemas.openxmlformats.org/drawingml/2006/main" noGrp="1"/>
-          </p:cNvSpPr>
-          <p:nvPr>
-            <p:ph type="sldImg" idx="0"/>
-          </p:nvPr>
-        </p:nvSpPr>
-        <p:spPr/>
-      </p:sp>
-      <p:sp>
-        <p:nvSpPr>
-          <p:cNvPr id="3" name="Notes Placeholder 2"/>
-          <p:cNvSpPr>
-            <a:spLocks xmlns:a="http://schemas.openxmlformats.org/drawingml/2006/main" noGrp="1"/>
-          </p:cNvSpPr>
-          <p:nvPr>
-            <p:ph type="body" idx="1"/>
-          </p:nvPr>
-        </p:nvSpPr>
-        <p:spPr/>
-        <p:txBody>
-          <a:bodyPr xmlns:a="http://schemas.openxmlformats.org/drawingml/2006/main"/>
-          <a:lstStyle xmlns:a="http://schemas.openxmlformats.org/drawingml/2006/main"/>
-          <a:p xmlns:a="http://schemas.openxmlformats.org/drawingml/2006/main">
-            <a:r>
-              <a:t>Tempo sugerido: 50 segundos</a:t>
-            </a:r>
-          </a:p>
-          <a:p xmlns:a="http://schemas.openxmlformats.org/drawingml/2006/main">
-            <a:r>
-              <a:t/>
-            </a:r>
-          </a:p>
-          <a:p xmlns:a="http://schemas.openxmlformats.org/drawingml/2006/main">
-            <a:r>
-              <a:t>Fala sugerida</a:t>
-            </a:r>
-          </a:p>
-          <a:p xmlns:a="http://schemas.openxmlformats.org/drawingml/2006/main">
-            <a:r>
-              <a:t>Os testes ajudaram a encontrar problemas visíveis. Algumas setas apareciam como retângulos, então as instruções passaram a usar palavras. A imagem ficava pouco nítida em tela grande, então o desenho passou a usar a resolução final. O cliente frontal parecia ter um olho só e recebeu um rosto com dois olhos e sorriso central. Também verificamos regras, telas e reinício por testes automáticos. Daniel jogou no Windows e aprovou o visual e o áudio. O próximo cuidado é ensaiar no computador da avaliação.</a:t>
-            </a:r>
-          </a:p>
-          <a:p xmlns:a="http://schemas.openxmlformats.org/drawingml/2006/main">
-            <a:r>
-              <a:t/>
-            </a:r>
-          </a:p>
-          <a:p xmlns:a="http://schemas.openxmlformats.org/drawingml/2006/main">
-            <a:r>
-              <a:t>Fontes</a:t>
-            </a:r>
-          </a:p>
-          <a:p xmlns:a="http://schemas.openxmlformats.org/drawingml/2006/main">
-            <a:r>
-              <a:t>Projeto Corre que Derrete!, GitHub Danielpr614/corre-que-derrete, implementação 23f755e e documentação de 15/10/2026. docs/08-revisao-interface.md, docs/10-renderizacao-nativa.md e docs/11-cliente-e-audio.md. A revisão de 15/10 executou 59 testes SDL dummy, sem novo teste humano.</a:t>
-            </a:r>
-          </a:p>
-        </p:txBody>
-      </p:sp>
-      <p:sp>
-        <p:nvSpPr>
-          <p:cNvPr id="4" name="Slide Number Placeholder 3"/>
-          <p:cNvSpPr>
-            <a:spLocks xmlns:a="http://schemas.openxmlformats.org/drawingml/2006/main" noGrp="1"/>
-          </p:cNvSpPr>
-          <p:nvPr>
-            <p:ph type="sldNum" idx="5"/>
-          </p:nvPr>
-        </p:nvSpPr>
-        <p:spPr/>
-        <p:txBody>
-          <a:bodyPr xmlns:a="http://schemas.openxmlformats.org/drawingml/2006/main"/>
-          <a:lstStyle xmlns:a="http://schemas.openxmlformats.org/drawingml/2006/main"/>
-          <a:p xmlns:a="http://schemas.openxmlformats.org/drawingml/2006/main"/>
-        </p:txBody>
-      </p:sp>
-    </p:spTree>
-  </p:cSld>
-  <p:clrMapOvr>
-    <a:masterClrMapping xmlns:a="http://schemas.openxmlformats.org/drawingml/2006/main"/>
-  </p:clrMapOvr>
-</p:notes>
-</file>
-
-<file path=ppt/notesSlides/notesSlide12.xml><?xml version="1.0" encoding="utf-8"?>
-<p:notes xmlns:p="http://schemas.openxmlformats.org/presentationml/2006/main">
-  <p:cSld>
-    <p:spTree>
-      <p:nvGrpSpPr>
-        <p:cNvPr id="1" name=""/>
-        <p:cNvGrpSpPr/>
-        <p:nvPr/>
-      </p:nvGrpSpPr>
-      <p:grpSpPr>
-        <a:xfrm xmlns:a="http://schemas.openxmlformats.org/drawingml/2006/main"/>
-      </p:grpSpPr>
-      <p:sp>
-        <p:nvSpPr>
-          <p:cNvPr id="2" name="Slide Image Placeholder 1"/>
-          <p:cNvSpPr>
-            <a:spLocks xmlns:a="http://schemas.openxmlformats.org/drawingml/2006/main" noGrp="1"/>
-          </p:cNvSpPr>
-          <p:nvPr>
-            <p:ph type="sldImg" idx="0"/>
-          </p:nvPr>
-        </p:nvSpPr>
-        <p:spPr/>
-      </p:sp>
-      <p:sp>
-        <p:nvSpPr>
-          <p:cNvPr id="3" name="Notes Placeholder 2"/>
-          <p:cNvSpPr>
-            <a:spLocks xmlns:a="http://schemas.openxmlformats.org/drawingml/2006/main" noGrp="1"/>
-          </p:cNvSpPr>
-          <p:nvPr>
-            <p:ph type="body" idx="1"/>
-          </p:nvPr>
-        </p:nvSpPr>
-        <p:spPr/>
-        <p:txBody>
-          <a:bodyPr xmlns:a="http://schemas.openxmlformats.org/drawingml/2006/main"/>
-          <a:lstStyle xmlns:a="http://schemas.openxmlformats.org/drawingml/2006/main"/>
-          <a:p xmlns:a="http://schemas.openxmlformats.org/drawingml/2006/main">
-            <a:r>
-              <a:t>Tempo sugerido: 45 segundos</a:t>
-            </a:r>
-          </a:p>
-          <a:p xmlns:a="http://schemas.openxmlformats.org/drawingml/2006/main">
-            <a:r>
-              <a:t/>
-            </a:r>
-          </a:p>
-          <a:p xmlns:a="http://schemas.openxmlformats.org/drawingml/2006/main">
-            <a:r>
-              <a:t>Fala sugerida</a:t>
-            </a:r>
-          </a:p>
-          <a:p xmlns:a="http://schemas.openxmlformats.org/drawingml/2006/main">
-            <a:r>
-              <a:t>Daniel, John e Lucas participaram das escolhas do tema, da corrida lateral, dos obstáculos e dos itens. Daniel executou os testes no Windows e relatou os problemas usados nas revisões. ChatGPT e Codex geraram grande parte do código e apoiaram os desenhos, os testes automatizados e a documentação. Esse uso está registrado com finalidade, partes afetadas e validação. A nossa responsabilidade na apresentação é compreender as regras e explicar as técnicas do projeto.</a:t>
-            </a:r>
-          </a:p>
-          <a:p xmlns:a="http://schemas.openxmlformats.org/drawingml/2006/main">
-            <a:r>
-              <a:t/>
-            </a:r>
-          </a:p>
-          <a:p xmlns:a="http://schemas.openxmlformats.org/drawingml/2006/main">
-            <a:r>
-              <a:t>Fontes</a:t>
-            </a:r>
-          </a:p>
-          <a:p xmlns:a="http://schemas.openxmlformats.org/drawingml/2006/main">
-            <a:r>
-              <a:t>Projeto Corre que Derrete!, GitHub Danielpr614/corre-que-derrete, implementação 23f755e e documentação de 15/10/2026. Relato de Daniel em 15/10/2026 sobre decisões coletivas. docs/06-fontes-e-ia.md e docs/16-equipe-e-entrega.md. Não atribuir programação de módulos a integrantes sem relato.</a:t>
-            </a:r>
-          </a:p>
-        </p:txBody>
-      </p:sp>
-      <p:sp>
-        <p:nvSpPr>
-          <p:cNvPr id="4" name="Slide Number Placeholder 3"/>
-          <p:cNvSpPr>
-            <a:spLocks xmlns:a="http://schemas.openxmlformats.org/drawingml/2006/main" noGrp="1"/>
-          </p:cNvSpPr>
-          <p:nvPr>
-            <p:ph type="sldNum" idx="5"/>
-          </p:nvPr>
-        </p:nvSpPr>
-        <p:spPr/>
-        <p:txBody>
-          <a:bodyPr xmlns:a="http://schemas.openxmlformats.org/drawingml/2006/main"/>
-          <a:lstStyle xmlns:a="http://schemas.openxmlformats.org/drawingml/2006/main"/>
-          <a:p xmlns:a="http://schemas.openxmlformats.org/drawingml/2006/main"/>
-        </p:txBody>
-      </p:sp>
-    </p:spTree>
-  </p:cSld>
-  <p:clrMapOvr>
-    <a:masterClrMapping xmlns:a="http://schemas.openxmlformats.org/drawingml/2006/main"/>
-  </p:clrMapOvr>
-</p:notes>
-</file>
-
-<file path=ppt/notesSlides/notesSlide13.xml><?xml version="1.0" encoding="utf-8"?>
-<p:notes xmlns:p="http://schemas.openxmlformats.org/presentationml/2006/main">
-  <p:cSld>
-    <p:spTree>
-      <p:nvGrpSpPr>
-        <p:cNvPr id="1" name=""/>
-        <p:cNvGrpSpPr/>
-        <p:nvPr/>
-      </p:nvGrpSpPr>
-      <p:grpSpPr>
-        <a:xfrm xmlns:a="http://schemas.openxmlformats.org/drawingml/2006/main"/>
-      </p:grpSpPr>
-      <p:sp>
-        <p:nvSpPr>
-          <p:cNvPr id="2" name="Slide Image Placeholder 1"/>
-          <p:cNvSpPr>
-            <a:spLocks xmlns:a="http://schemas.openxmlformats.org/drawingml/2006/main" noGrp="1"/>
-          </p:cNvSpPr>
-          <p:nvPr>
-            <p:ph type="sldImg" idx="0"/>
-          </p:nvPr>
-        </p:nvSpPr>
-        <p:spPr/>
-      </p:sp>
-      <p:sp>
-        <p:nvSpPr>
-          <p:cNvPr id="3" name="Notes Placeholder 2"/>
-          <p:cNvSpPr>
-            <a:spLocks xmlns:a="http://schemas.openxmlformats.org/drawingml/2006/main" noGrp="1"/>
-          </p:cNvSpPr>
-          <p:nvPr>
-            <p:ph type="body" idx="1"/>
-          </p:nvPr>
-        </p:nvSpPr>
-        <p:spPr/>
-        <p:txBody>
-          <a:bodyPr xmlns:a="http://schemas.openxmlformats.org/drawingml/2006/main"/>
-          <a:lstStyle xmlns:a="http://schemas.openxmlformats.org/drawingml/2006/main"/>
-          <a:p xmlns:a="http://schemas.openxmlformats.org/drawingml/2006/main">
-            <a:r>
-              <a:t>Tempo sugerido: 30 segundos</a:t>
-            </a:r>
-          </a:p>
-          <a:p xmlns:a="http://schemas.openxmlformats.org/drawingml/2006/main">
-            <a:r>
-              <a:t/>
-            </a:r>
-          </a:p>
-          <a:p xmlns:a="http://schemas.openxmlformats.org/drawingml/2006/main">
-            <a:r>
-              <a:t>Fala sugerida</a:t>
-            </a:r>
-          </a:p>
-          <a:p xmlns:a="http://schemas.openxmlformats.org/drawingml/2006/main">
-            <a:r>
-              <a:t>A principal referência foi o enunciado do professor. O jogo usa Python e Pygame, e a arte é desenhada no código. A música é House In a Forest Loop, de HorrorPen, com licença Creative Commons Attribution três ponto zero. Os três repositórios sugeridos estão registrados, mas não copiamos código deles. Os créditos completos e o registro de IA acompanham o projeto.</a:t>
-            </a:r>
-          </a:p>
-          <a:p xmlns:a="http://schemas.openxmlformats.org/drawingml/2006/main">
-            <a:r>
-              <a:t/>
-            </a:r>
-          </a:p>
-          <a:p xmlns:a="http://schemas.openxmlformats.org/drawingml/2006/main">
-            <a:r>
-              <a:t>Fontes</a:t>
-            </a:r>
-          </a:p>
-          <a:p xmlns:a="http://schemas.openxmlformats.org/drawingml/2006/main">
-            <a:r>
-              <a:t>Projeto Corre que Derrete!, GitHub Danielpr614/corre-que-derrete, implementação 23f755e e documentação de 15/10/2026. Enunciado, seção 14; docs/06-fontes-e-ia.md; assets/audio/CREDITOS.md. Python: https://www.python.org/, licença PSF. Pygame: https://www.pygame.org/, LGPL e fonte padrão conforme avisos do pacote. Música: https://opengameart.org/content/loop-house-in-a-forest; https://creativecommons.org/licenses/by/3.0/. ChatGPT/Codex: https://openai.com/chatgpt/. Referências de jogos indicadas: itspyguru/Python-Games, Leonardpepa/pygame-simple-examples e veddegre/python-games-collection; sem reutilização de código e sem afirmar estudo não relatado.</a:t>
-            </a:r>
-          </a:p>
-        </p:txBody>
-      </p:sp>
-      <p:sp>
-        <p:nvSpPr>
-          <p:cNvPr id="4" name="Slide Number Placeholder 3"/>
-          <p:cNvSpPr>
-            <a:spLocks xmlns:a="http://schemas.openxmlformats.org/drawingml/2006/main" noGrp="1"/>
-          </p:cNvSpPr>
-          <p:nvPr>
-            <p:ph type="sldNum" idx="5"/>
-          </p:nvPr>
-        </p:nvSpPr>
-        <p:spPr/>
-        <p:txBody>
-          <a:bodyPr xmlns:a="http://schemas.openxmlformats.org/drawingml/2006/main"/>
-          <a:lstStyle xmlns:a="http://schemas.openxmlformats.org/drawingml/2006/main"/>
-          <a:p xmlns:a="http://schemas.openxmlformats.org/drawingml/2006/main"/>
-        </p:txBody>
-      </p:sp>
-    </p:spTree>
-  </p:cSld>
-  <p:clrMapOvr>
-    <a:masterClrMapping xmlns:a="http://schemas.openxmlformats.org/drawingml/2006/main"/>
-  </p:clrMapOvr>
-</p:notes>
-</file>
-
-<file path=ppt/notesSlides/notesSlide14.xml><?xml version="1.0" encoding="utf-8"?>
-<p:notes xmlns:p="http://schemas.openxmlformats.org/presentationml/2006/main">
-  <p:cSld>
-    <p:spTree>
-      <p:nvGrpSpPr>
-        <p:cNvPr id="1" name=""/>
-        <p:cNvGrpSpPr/>
-        <p:nvPr/>
-      </p:nvGrpSpPr>
-      <p:grpSpPr>
-        <a:xfrm xmlns:a="http://schemas.openxmlformats.org/drawingml/2006/main"/>
-      </p:grpSpPr>
-      <p:sp>
-        <p:nvSpPr>
-          <p:cNvPr id="2" name="Slide Image Placeholder 1"/>
-          <p:cNvSpPr>
-            <a:spLocks xmlns:a="http://schemas.openxmlformats.org/drawingml/2006/main" noGrp="1"/>
-          </p:cNvSpPr>
-          <p:nvPr>
-            <p:ph type="sldImg" idx="0"/>
-          </p:nvPr>
-        </p:nvSpPr>
-        <p:spPr/>
-      </p:sp>
-      <p:sp>
-        <p:nvSpPr>
-          <p:cNvPr id="3" name="Notes Placeholder 2"/>
-          <p:cNvSpPr>
-            <a:spLocks xmlns:a="http://schemas.openxmlformats.org/drawingml/2006/main" noGrp="1"/>
-          </p:cNvSpPr>
-          <p:nvPr>
-            <p:ph type="body" idx="1"/>
-          </p:nvPr>
-        </p:nvSpPr>
-        <p:spPr/>
-        <p:txBody>
-          <a:bodyPr xmlns:a="http://schemas.openxmlformats.org/drawingml/2006/main"/>
-          <a:lstStyle xmlns:a="http://schemas.openxmlformats.org/drawingml/2006/main"/>
-          <a:p xmlns:a="http://schemas.openxmlformats.org/drawingml/2006/main">
-            <a:r>
-              <a:t>Tempo sugerido: 2 a 3 minutos, após exposição e perguntas</a:t>
-            </a:r>
-          </a:p>
-          <a:p xmlns:a="http://schemas.openxmlformats.org/drawingml/2006/main">
-            <a:r>
-              <a:t/>
-            </a:r>
-          </a:p>
-          <a:p xmlns:a="http://schemas.openxmlformats.org/drawingml/2006/main">
-            <a:r>
-              <a:t>Fala sugerida</a:t>
-            </a:r>
-          </a:p>
-          <a:p xmlns:a="http://schemas.openxmlformats.org/drawingml/2006/main">
-            <a:r>
-              <a:t>Agora vamos mostrar o jogo funcionando. Começamos pelo menu, iniciamos a corrida e mostramos salto, gelo e obstáculos. Durante a partida, apontamos o HUD e as camadas do cenário. Pausamos uma vez, abrimos Áudio e retomamos. No resultado, mostramos vitória ou derrota e a opção de jogar novamente. Se perdermos, explicamos a condição e reiniciamos. As imagens da apresentação ajudam a mostrar efeitos que não apareçam nessa partida.</a:t>
-            </a:r>
-          </a:p>
-          <a:p xmlns:a="http://schemas.openxmlformats.org/drawingml/2006/main">
-            <a:r>
-              <a:t/>
-            </a:r>
-          </a:p>
-          <a:p xmlns:a="http://schemas.openxmlformats.org/drawingml/2006/main">
-            <a:r>
-              <a:t>Fontes</a:t>
-            </a:r>
-          </a:p>
-          <a:p xmlns:a="http://schemas.openxmlformats.org/drawingml/2006/main">
-            <a:r>
-              <a:t>Projeto Corre que Derrete!, GitHub Danielpr614/corre-que-derrete, implementação 23f755e e documentação de 15/10/2026. Controles em App.handle_event. Imagem de resultado preparada pelo renderizador com valores definidos, não é registro de partida concluída pela IA.</a:t>
+              <a:t>Código do projeto Danielpr614/corre-que-derrete, implementação 23f755e. Enunciado do professor Pedro Cândido, seções 4 e 8. Relatos de Daniel em 07/10 e 15/10/2026. Capa com os três integrantes informados pelo usuário. Cena preparada pelo renderizador.</a:t>
             </a:r>
           </a:p>
         </p:txBody>
@@ -1055,7 +538,12 @@
           <a:lstStyle xmlns:a="http://schemas.openxmlformats.org/drawingml/2006/main"/>
           <a:p xmlns:a="http://schemas.openxmlformats.org/drawingml/2006/main">
             <a:r>
-              <a:t>Tempo sugerido: 50 segundos</a:t>
+              <a:t>Fala sugerida</a:t>
+            </a:r>
+          </a:p>
+          <a:p xmlns:a="http://schemas.openxmlformats.org/drawingml/2006/main">
+            <a:r>
+              <a:t>Escolhemos uma corrida curta e simples de controlar, voltada para colegas e jogadores iniciantes. O tema liga o calor à conservação do sorvete. O personagem corre sozinho, enquanto o jogador salta obstáculos e pega gelo para chegar ao cliente.</a:t>
             </a:r>
           </a:p>
           <a:p xmlns:a="http://schemas.openxmlformats.org/drawingml/2006/main">
@@ -1065,27 +553,12 @@
           </a:p>
           <a:p xmlns:a="http://schemas.openxmlformats.org/drawingml/2006/main">
             <a:r>
-              <a:t>Fala sugerida</a:t>
-            </a:r>
-          </a:p>
-          <a:p xmlns:a="http://schemas.openxmlformats.org/drawingml/2006/main">
-            <a:r>
-              <a:t>Escolhemos juntos o tema, a corrida lateral e os objetos que aparecem no caminho. Queríamos uma partida curta, com controles simples, para colegas e jogadores iniciantes. O sorvete deu sentido às regras: o calor reduz a barra, os impactos fazem perder conservação e o gelo ajuda a recuperar. O objetivo de projeto foi criar um jogo pequeno, mas com começo, desafio e conclusão.</a:t>
-            </a:r>
-          </a:p>
-          <a:p xmlns:a="http://schemas.openxmlformats.org/drawingml/2006/main">
-            <a:r>
-              <a:t/>
-            </a:r>
-          </a:p>
-          <a:p xmlns:a="http://schemas.openxmlformats.org/drawingml/2006/main">
-            <a:r>
               <a:t>Fontes</a:t>
             </a:r>
           </a:p>
           <a:p xmlns:a="http://schemas.openxmlformats.org/drawingml/2006/main">
             <a:r>
-              <a:t>Projeto Corre que Derrete!, GitHub Danielpr614/corre-que-derrete, implementação 23f755e e documentação de 15/10/2026. docs/01-concepcao.md e docs/02-telas-e-graficos.md. Cena do menu produzida pelo renderizador, sem partida humana.</a:t>
+              <a:t>Código do projeto Danielpr614/corre-que-derrete, implementação 23f755e. Enunciado do professor Pedro Cândido, seções 4 e 8. Relatos de Daniel em 07/10 e 15/10/2026. docs/01-concepcao.md. Menu renderizado pelo código atual.</a:t>
             </a:r>
           </a:p>
         </p:txBody>
@@ -1155,7 +628,12 @@
           <a:lstStyle xmlns:a="http://schemas.openxmlformats.org/drawingml/2006/main"/>
           <a:p xmlns:a="http://schemas.openxmlformats.org/drawingml/2006/main">
             <a:r>
-              <a:t>Tempo sugerido: 50 segundos</a:t>
+              <a:t>Fala sugerida</a:t>
+            </a:r>
+          </a:p>
+          <a:p xmlns:a="http://schemas.openxmlformats.org/drawingml/2006/main">
+            <a:r>
+              <a:t>O calor reduz a barra com o tempo. Bater tira vinte pontos percentuais, e pegar gelo recupera até quinze, sem passar de cem. Por exemplo, um impacto com oitenta deixa sessenta. A rota tem mil e oitocentos metros em três trechos, cada vez mais rápidos. Para vencer, é preciso chegar com conservação acima de zero. Os pontos somam a distância e cem por gelo.</a:t>
             </a:r>
           </a:p>
           <a:p xmlns:a="http://schemas.openxmlformats.org/drawingml/2006/main">
@@ -1165,27 +643,12 @@
           </a:p>
           <a:p xmlns:a="http://schemas.openxmlformats.org/drawingml/2006/main">
             <a:r>
-              <a:t>Fala sugerida</a:t>
-            </a:r>
-          </a:p>
-          <a:p xmlns:a="http://schemas.openxmlformats.org/drawingml/2006/main">
-            <a:r>
-              <a:t>A conservação começa em cem por cento. O calor tira dois pontos percentuais por segundo ativo, e bater em cone ou caixa tira vinte. O gelo recupera até quinze, respeitando o limite de cem. Por exemplo, um impacto com oitenta deixa sessenta. A rota tem mil e oitocentos metros, e a dificuldade aumenta em três trechos. Para vencer, é preciso chegar com conservação acima de zero. A pontuação soma os metros percorridos e cem pontos por gelo.</a:t>
-            </a:r>
-          </a:p>
-          <a:p xmlns:a="http://schemas.openxmlformats.org/drawingml/2006/main">
-            <a:r>
-              <a:t/>
-            </a:r>
-          </a:p>
-          <a:p xmlns:a="http://schemas.openxmlformats.org/drawingml/2006/main">
-            <a:r>
               <a:t>Fontes</a:t>
             </a:r>
           </a:p>
           <a:p xmlns:a="http://schemas.openxmlformats.org/drawingml/2006/main">
             <a:r>
-              <a:t>Projeto Corre que Derrete!, GitHub Danielpr614/corre-que-derrete, implementação 23f755e e documentação de 15/10/2026. game/settings.py, game/run.py e game/entities.py.</a:t>
+              <a:t>Código do projeto Danielpr614/corre-que-derrete, implementação 23f755e. Enunciado do professor Pedro Cândido, seções 4 e 8. Relatos de Daniel em 07/10 e 15/10/2026. game/run.py, entities.py e settings.py.</a:t>
             </a:r>
           </a:p>
         </p:txBody>
@@ -1255,7 +718,12 @@
           <a:lstStyle xmlns:a="http://schemas.openxmlformats.org/drawingml/2006/main"/>
           <a:p xmlns:a="http://schemas.openxmlformats.org/drawingml/2006/main">
             <a:r>
-              <a:t>Tempo sugerido: 45 segundos</a:t>
+              <a:t>Fala sugerida</a:t>
+            </a:r>
+          </a:p>
+          <a:p xmlns:a="http://schemas.openxmlformats.org/drawingml/2006/main">
+            <a:r>
+              <a:t>O menu inicia a corrida. Podemos pausar, retomar e chegar à tela de resultado. Por trás disso, o programa repete três ações: lê as teclas, calcula o que mudou e desenha a tela de novo. App recebe os comandos, Run aplica as regras e Renderer desenha. Para detectar um impacto, ele compara caixas invisíveis ao redor do jogador e dos objetos. No salto, a gravidade traz o personagem de volta ao chão. A câmera desloca o cenário e mantém o painel de informações parado. Na pausa, os dados da corrida não avançam.</a:t>
             </a:r>
           </a:p>
           <a:p xmlns:a="http://schemas.openxmlformats.org/drawingml/2006/main">
@@ -1265,27 +733,12 @@
           </a:p>
           <a:p xmlns:a="http://schemas.openxmlformats.org/drawingml/2006/main">
             <a:r>
-              <a:t>Fala sugerida</a:t>
-            </a:r>
-          </a:p>
-          <a:p xmlns:a="http://schemas.openxmlformats.org/drawingml/2006/main">
-            <a:r>
-              <a:t>O jogo usa estados para decidir o que recebe comandos e o que aparece na tela. No menu, podemos iniciar ou ler as instruções. Na corrida, podemos pausar e retomar. A partida termina no resultado, que pode ser vitória ou derrota. O resultado permite reiniciar ou voltar ao menu. As opções de áudio estão no menu e na pausa. Ao ajustar o volume durante uma pausa, a corrida continua congelada.</a:t>
-            </a:r>
-          </a:p>
-          <a:p xmlns:a="http://schemas.openxmlformats.org/drawingml/2006/main">
-            <a:r>
-              <a:t/>
-            </a:r>
-          </a:p>
-          <a:p xmlns:a="http://schemas.openxmlformats.org/drawingml/2006/main">
-            <a:r>
               <a:t>Fontes</a:t>
             </a:r>
           </a:p>
           <a:p xmlns:a="http://schemas.openxmlformats.org/drawingml/2006/main">
             <a:r>
-              <a:t>Projeto Corre que Derrete!, GitHub Danielpr614/corre-que-derrete, implementação 23f755e e documentação de 15/10/2026. game/app.py: App.set_state, handle_event e activate. Diagrama simplificado do fluxo.</a:t>
+              <a:t>Código do projeto Danielpr614/corre-que-derrete, implementação 23f755e. Enunciado do professor Pedro Cândido, seções 4 e 8. Relatos de Daniel em 07/10 e 15/10/2026. game/app.py:main, App.handle_event e App.update; Run.update; Player.update/rect; Renderer.draw. Colisão AABB com pygame.Rect.colliderect. Termos detalhados ficam nas notas e no manual. Diagrama simplificado.</a:t>
             </a:r>
           </a:p>
         </p:txBody>
@@ -1355,7 +808,12 @@
           <a:lstStyle xmlns:a="http://schemas.openxmlformats.org/drawingml/2006/main"/>
           <a:p xmlns:a="http://schemas.openxmlformats.org/drawingml/2006/main">
             <a:r>
-              <a:t>Tempo sugerido: 60 segundos</a:t>
+              <a:t>Fala sugerida</a:t>
+            </a:r>
+          </a:p>
+          <a:p xmlns:a="http://schemas.openxmlformats.org/drawingml/2006/main">
+            <a:r>
+              <a:t>O primeiro é o fundo em camadas: as nuvens andam devagar e as lojas mais rápido. Isso dá profundidade e se chama parallax. O segundo é a troca de desenhos: o personagem alterna seis poses para parecer que está correndo e usa duas no salto. Isso é animação por quadros. O terceiro são partículas: pequenos cristais, faíscas ou gotas que aparecem, se movem e somem. No código, cada partícula tem um tempo de vida. Vamos apontar esses três recursos durante a partida.</a:t>
             </a:r>
           </a:p>
           <a:p xmlns:a="http://schemas.openxmlformats.org/drawingml/2006/main">
@@ -1365,27 +823,12 @@
           </a:p>
           <a:p xmlns:a="http://schemas.openxmlformats.org/drawingml/2006/main">
             <a:r>
-              <a:t>Fala sugerida</a:t>
-            </a:r>
-          </a:p>
-          <a:p xmlns:a="http://schemas.openxmlformats.org/drawingml/2006/main">
-            <a:r>
-              <a:t>O código separa os comandos, as regras e o desenho. A classe App recebe eventos e controla o estado. Run guarda a corrida e aplica as regras. Renderer desenha, e Window cuida da janela e da tela cheia. A cada repetição do loop, o jogo lê os comandos, atualiza a partida e desenha a tela. O tempo entra nos cálculos para o movimento não depender só da quantidade de quadros. A simulação usa passos fixos de um sessenta avos de segundo. Na pausa, a atualização da corrida para.</a:t>
-            </a:r>
-          </a:p>
-          <a:p xmlns:a="http://schemas.openxmlformats.org/drawingml/2006/main">
-            <a:r>
-              <a:t/>
-            </a:r>
-          </a:p>
-          <a:p xmlns:a="http://schemas.openxmlformats.org/drawingml/2006/main">
-            <a:r>
               <a:t>Fontes</a:t>
             </a:r>
           </a:p>
           <a:p xmlns:a="http://schemas.openxmlformats.org/drawingml/2006/main">
             <a:r>
-              <a:t>Projeto Corre que Derrete!, GitHub Danielpr614/corre-que-derrete, implementação 23f755e e documentação de 15/10/2026. game/app.py:main e App.update; game/run.py; game/graphics.py; game/window.py.</a:t>
+              <a:t>Código do projeto Danielpr614/corre-que-derrete, implementação 23f755e. Enunciado do professor Pedro Cândido, seções 4 e 8. Relatos de Daniel em 07/10 e 15/10/2026. game/parallax.py: velocidades das camadas; game/animation.py: seis quadros de corrida a 10 trocas/s e duas poses de salto; game/particles.py: posição, velocidade e vida, com limite de 100 partículas. Cenas preparadas e sequência real de quadros gerada pelo código.</a:t>
             </a:r>
           </a:p>
         </p:txBody>
@@ -1455,7 +898,12 @@
           <a:lstStyle xmlns:a="http://schemas.openxmlformats.org/drawingml/2006/main"/>
           <a:p xmlns:a="http://schemas.openxmlformats.org/drawingml/2006/main">
             <a:r>
-              <a:t>Tempo sugerido: 55 segundos</a:t>
+              <a:t>Fala sugerida</a:t>
+            </a:r>
+          </a:p>
+          <a:p xmlns:a="http://schemas.openxmlformats.org/drawingml/2006/main">
+            <a:r>
+              <a:t>O protótipo tinha formas simples e as primeiras regras de corrida e salto. Depois entraram cenário, animação e efeitos. Os testes mostraram problemas de nitidez, símbolos nas instruções e no rosto do cliente. As revisões corrigiram esses pontos e acrescentaram música. As duas primeiras imagens são capturas de Daniel no Windows. A terceira é uma cena do código atual. As regras e as telas também passaram por testes automatizados, além das partidas no Windows.</a:t>
             </a:r>
           </a:p>
           <a:p xmlns:a="http://schemas.openxmlformats.org/drawingml/2006/main">
@@ -1465,27 +913,12 @@
           </a:p>
           <a:p xmlns:a="http://schemas.openxmlformats.org/drawingml/2006/main">
             <a:r>
-              <a:t>Fala sugerida</a:t>
-            </a:r>
-          </a:p>
-          <a:p xmlns:a="http://schemas.openxmlformats.org/drawingml/2006/main">
-            <a:r>
-              <a:t>No salto, o personagem recebe velocidade para cima. A gravidade faz ele voltar ao chão. Enquanto isso, a câmera acompanha o avanço da rota: os objetos se deslocam na tela, mas o HUD fica parado. Para colisões, o jogo usa caixas retangulares, chamadas hitboxes. O colliderect verifica quando elas se sobrepõem. Cada obstáculo pode causar dano uma vez por passagem. A proteção evita impactos seguidos por um curto intervalo. A caixa do cone é uma aproximação, não acompanha cada detalhe da sua forma.</a:t>
-            </a:r>
-          </a:p>
-          <a:p xmlns:a="http://schemas.openxmlformats.org/drawingml/2006/main">
-            <a:r>
-              <a:t/>
-            </a:r>
-          </a:p>
-          <a:p xmlns:a="http://schemas.openxmlformats.org/drawingml/2006/main">
-            <a:r>
               <a:t>Fontes</a:t>
             </a:r>
           </a:p>
           <a:p xmlns:a="http://schemas.openxmlformats.org/drawingml/2006/main">
             <a:r>
-              <a:t>Projeto Corre que Derrete!, GitHub Danielpr614/corre-que-derrete, implementação 23f755e e documentação de 15/10/2026. game/entities.py: Player.update/rect e WorldObject.rect; game/run.py: Run.update; game/graphics.py: world/hud. Cena preparada com o código.</a:t>
+              <a:t>Código do projeto Danielpr614/corre-que-derrete, implementação 23f755e. Enunciado do professor Pedro Cândido, seções 4 e 8. Relatos de Daniel em 07/10 e 15/10/2026. docs/05-diario.md e docs/14-evidencias-e-evolucao.md. Captura do protótipo image(20261007-144107).png; revisão nativa anterior à correção do cliente image(20261007-162105).png; cena atual preparada pelo renderizador. 59 testes SDL dummy registrados em 15/10, sem medição de FPS real.</a:t>
             </a:r>
           </a:p>
         </p:txBody>
@@ -1555,7 +988,12 @@
           <a:lstStyle xmlns:a="http://schemas.openxmlformats.org/drawingml/2006/main"/>
           <a:p xmlns:a="http://schemas.openxmlformats.org/drawingml/2006/main">
             <a:r>
-              <a:t>Tempo sugerido: 45 segundos</a:t>
+              <a:t>Fala sugerida</a:t>
+            </a:r>
+          </a:p>
+          <a:p xmlns:a="http://schemas.openxmlformats.org/drawingml/2006/main">
+            <a:r>
+              <a:t>Agora vamos abrir o jogo e mostrar a corrida. Durante a partida, apontamos a coleta, o impacto, as camadas do fundo, a troca de poses e os efeitos. Pausamos uma vez, mostramos o áudio e retomamos. No resultado, mostramos reinício ou retorno ao menu. As escolhas de tema, corrida lateral, obstáculos e itens foram coletivas, de Daniel, John e Lucas. Daniel fez os testes no Windows. ChatGPT/Codex geraram grande parte do código e apoiaram os materiais, conforme registrado no projeto. A música é de HorrorPen, com licença CC BY 3.0. Usamos o enunciado e Python/Pygame, sem reutilizar código dos três jogos sugeridos pelo professor.</a:t>
             </a:r>
           </a:p>
           <a:p xmlns:a="http://schemas.openxmlformats.org/drawingml/2006/main">
@@ -1565,227 +1003,12 @@
           </a:p>
           <a:p xmlns:a="http://schemas.openxmlformats.org/drawingml/2006/main">
             <a:r>
-              <a:t>Fala sugerida</a:t>
-            </a:r>
-          </a:p>
-          <a:p xmlns:a="http://schemas.openxmlformats.org/drawingml/2006/main">
-            <a:r>
-              <a:t>O parallax cria profundidade usando velocidades diferentes. As nuvens andam devagar, os prédios ficam no meio e as fachadas próximas se movem mais rápido. São camadas de um cenário 2D. O fundo se repete para continuar a corrida sem terminar de repente. Na implementação, cada camada usa um fator aplicado à distância da câmera. A operação de módulo faz a repetição.</a:t>
-            </a:r>
-          </a:p>
-          <a:p xmlns:a="http://schemas.openxmlformats.org/drawingml/2006/main">
-            <a:r>
-              <a:t/>
-            </a:r>
-          </a:p>
-          <a:p xmlns:a="http://schemas.openxmlformats.org/drawingml/2006/main">
-            <a:r>
               <a:t>Fontes</a:t>
             </a:r>
           </a:p>
           <a:p xmlns:a="http://schemas.openxmlformats.org/drawingml/2006/main">
             <a:r>
-              <a:t>Projeto Corre que Derrete!, GitHub Danielpr614/corre-que-derrete, implementação 23f755e e documentação de 15/10/2026. game/parallax.py: Parallax.draw e layer_offset; fatores 0,15, 0,35, 0,70. Cena preparada do código.</a:t>
-            </a:r>
-          </a:p>
-        </p:txBody>
-      </p:sp>
-      <p:sp>
-        <p:nvSpPr>
-          <p:cNvPr id="4" name="Slide Number Placeholder 3"/>
-          <p:cNvSpPr>
-            <a:spLocks xmlns:a="http://schemas.openxmlformats.org/drawingml/2006/main" noGrp="1"/>
-          </p:cNvSpPr>
-          <p:nvPr>
-            <p:ph type="sldNum" idx="5"/>
-          </p:nvPr>
-        </p:nvSpPr>
-        <p:spPr/>
-        <p:txBody>
-          <a:bodyPr xmlns:a="http://schemas.openxmlformats.org/drawingml/2006/main"/>
-          <a:lstStyle xmlns:a="http://schemas.openxmlformats.org/drawingml/2006/main"/>
-          <a:p xmlns:a="http://schemas.openxmlformats.org/drawingml/2006/main"/>
-        </p:txBody>
-      </p:sp>
-    </p:spTree>
-  </p:cSld>
-  <p:clrMapOvr>
-    <a:masterClrMapping xmlns:a="http://schemas.openxmlformats.org/drawingml/2006/main"/>
-  </p:clrMapOvr>
-</p:notes>
-</file>
-
-<file path=ppt/notesSlides/notesSlide8.xml><?xml version="1.0" encoding="utf-8"?>
-<p:notes xmlns:p="http://schemas.openxmlformats.org/presentationml/2006/main">
-  <p:cSld>
-    <p:spTree>
-      <p:nvGrpSpPr>
-        <p:cNvPr id="1" name=""/>
-        <p:cNvGrpSpPr/>
-        <p:nvPr/>
-      </p:nvGrpSpPr>
-      <p:grpSpPr>
-        <a:xfrm xmlns:a="http://schemas.openxmlformats.org/drawingml/2006/main"/>
-      </p:grpSpPr>
-      <p:sp>
-        <p:nvSpPr>
-          <p:cNvPr id="2" name="Slide Image Placeholder 1"/>
-          <p:cNvSpPr>
-            <a:spLocks xmlns:a="http://schemas.openxmlformats.org/drawingml/2006/main" noGrp="1"/>
-          </p:cNvSpPr>
-          <p:nvPr>
-            <p:ph type="sldImg" idx="0"/>
-          </p:nvPr>
-        </p:nvSpPr>
-        <p:spPr/>
-      </p:sp>
-      <p:sp>
-        <p:nvSpPr>
-          <p:cNvPr id="3" name="Notes Placeholder 2"/>
-          <p:cNvSpPr>
-            <a:spLocks xmlns:a="http://schemas.openxmlformats.org/drawingml/2006/main" noGrp="1"/>
-          </p:cNvSpPr>
-          <p:nvPr>
-            <p:ph type="body" idx="1"/>
-          </p:nvPr>
-        </p:nvSpPr>
-        <p:spPr/>
-        <p:txBody>
-          <a:bodyPr xmlns:a="http://schemas.openxmlformats.org/drawingml/2006/main"/>
-          <a:lstStyle xmlns:a="http://schemas.openxmlformats.org/drawingml/2006/main"/>
-          <a:p xmlns:a="http://schemas.openxmlformats.org/drawingml/2006/main">
-            <a:r>
-              <a:t>Tempo sugerido: 45 segundos</a:t>
-            </a:r>
-          </a:p>
-          <a:p xmlns:a="http://schemas.openxmlformats.org/drawingml/2006/main">
-            <a:r>
-              <a:t/>
-            </a:r>
-          </a:p>
-          <a:p xmlns:a="http://schemas.openxmlformats.org/drawingml/2006/main">
-            <a:r>
-              <a:t>Fala sugerida</a:t>
-            </a:r>
-          </a:p>
-          <a:p xmlns:a="http://schemas.openxmlformats.org/drawingml/2006/main">
-            <a:r>
-              <a:t>A animação funciona pela troca de quadros. Existem seis poses de corrida, alternadas dez vezes por segundo. As pernas mudam de posição e dão a impressão de movimento. No salto, o jogo escolhe uma pose para a subida e outra para a descida. Os quadros ficam guardados na memória. A animação muda o desenho, enquanto a caixa de colisão mantém o mesmo tamanho.</a:t>
-            </a:r>
-          </a:p>
-          <a:p xmlns:a="http://schemas.openxmlformats.org/drawingml/2006/main">
-            <a:r>
-              <a:t/>
-            </a:r>
-          </a:p>
-          <a:p xmlns:a="http://schemas.openxmlformats.org/drawingml/2006/main">
-            <a:r>
-              <a:t>Fontes</a:t>
-            </a:r>
-          </a:p>
-          <a:p xmlns:a="http://schemas.openxmlformats.org/drawingml/2006/main">
-            <a:r>
-              <a:t>Projeto Corre que Derrete!, GitHub Danielpr614/corre-que-derrete, implementação 23f755e e documentação de 15/10/2026. game/animation.py: CourierAnimation.make_frame, frame_index e draw. Sequência dos seis quadros gerados pelo próprio código.</a:t>
-            </a:r>
-          </a:p>
-        </p:txBody>
-      </p:sp>
-      <p:sp>
-        <p:nvSpPr>
-          <p:cNvPr id="4" name="Slide Number Placeholder 3"/>
-          <p:cNvSpPr>
-            <a:spLocks xmlns:a="http://schemas.openxmlformats.org/drawingml/2006/main" noGrp="1"/>
-          </p:cNvSpPr>
-          <p:nvPr>
-            <p:ph type="sldNum" idx="5"/>
-          </p:nvPr>
-        </p:nvSpPr>
-        <p:spPr/>
-        <p:txBody>
-          <a:bodyPr xmlns:a="http://schemas.openxmlformats.org/drawingml/2006/main"/>
-          <a:lstStyle xmlns:a="http://schemas.openxmlformats.org/drawingml/2006/main"/>
-          <a:p xmlns:a="http://schemas.openxmlformats.org/drawingml/2006/main"/>
-        </p:txBody>
-      </p:sp>
-    </p:spTree>
-  </p:cSld>
-  <p:clrMapOvr>
-    <a:masterClrMapping xmlns:a="http://schemas.openxmlformats.org/drawingml/2006/main"/>
-  </p:clrMapOvr>
-</p:notes>
-</file>
-
-<file path=ppt/notesSlides/notesSlide9.xml><?xml version="1.0" encoding="utf-8"?>
-<p:notes xmlns:p="http://schemas.openxmlformats.org/presentationml/2006/main">
-  <p:cSld>
-    <p:spTree>
-      <p:nvGrpSpPr>
-        <p:cNvPr id="1" name=""/>
-        <p:cNvGrpSpPr/>
-        <p:nvPr/>
-      </p:nvGrpSpPr>
-      <p:grpSpPr>
-        <a:xfrm xmlns:a="http://schemas.openxmlformats.org/drawingml/2006/main"/>
-      </p:grpSpPr>
-      <p:sp>
-        <p:nvSpPr>
-          <p:cNvPr id="2" name="Slide Image Placeholder 1"/>
-          <p:cNvSpPr>
-            <a:spLocks xmlns:a="http://schemas.openxmlformats.org/drawingml/2006/main" noGrp="1"/>
-          </p:cNvSpPr>
-          <p:nvPr>
-            <p:ph type="sldImg" idx="0"/>
-          </p:nvPr>
-        </p:nvSpPr>
-        <p:spPr/>
-      </p:sp>
-      <p:sp>
-        <p:nvSpPr>
-          <p:cNvPr id="3" name="Notes Placeholder 2"/>
-          <p:cNvSpPr>
-            <a:spLocks xmlns:a="http://schemas.openxmlformats.org/drawingml/2006/main" noGrp="1"/>
-          </p:cNvSpPr>
-          <p:nvPr>
-            <p:ph type="body" idx="1"/>
-          </p:nvPr>
-        </p:nvSpPr>
-        <p:spPr/>
-        <p:txBody>
-          <a:bodyPr xmlns:a="http://schemas.openxmlformats.org/drawingml/2006/main"/>
-          <a:lstStyle xmlns:a="http://schemas.openxmlformats.org/drawingml/2006/main"/>
-          <a:p xmlns:a="http://schemas.openxmlformats.org/drawingml/2006/main">
-            <a:r>
-              <a:t>Tempo sugerido: 45 segundos</a:t>
-            </a:r>
-          </a:p>
-          <a:p xmlns:a="http://schemas.openxmlformats.org/drawingml/2006/main">
-            <a:r>
-              <a:t/>
-            </a:r>
-          </a:p>
-          <a:p xmlns:a="http://schemas.openxmlformats.org/drawingml/2006/main">
-            <a:r>
-              <a:t>Fala sugerida</a:t>
-            </a:r>
-          </a:p>
-          <a:p xmlns:a="http://schemas.openxmlformats.org/drawingml/2006/main">
-            <a:r>
-              <a:t>Os efeitos ajudam a entender o que aconteceu. A coleta produz cristais, o impacto gera faíscas e a conservação baixa mostra gotas. Cada partícula nasce com uma posição, uma velocidade e um tempo de vida. Ela se move e desaparece ao acabar esse tempo. O limite de cem partículas evita acumular efeitos. O aviso na tela e a mudança na barra complementam a informação. As partículas são visuais: quem calcula a perda de conservação é a regra da corrida.</a:t>
-            </a:r>
-          </a:p>
-          <a:p xmlns:a="http://schemas.openxmlformats.org/drawingml/2006/main">
-            <a:r>
-              <a:t/>
-            </a:r>
-          </a:p>
-          <a:p xmlns:a="http://schemas.openxmlformats.org/drawingml/2006/main">
-            <a:r>
-              <a:t>Fontes</a:t>
-            </a:r>
-          </a:p>
-          <a:p xmlns:a="http://schemas.openxmlformats.org/drawingml/2006/main">
-            <a:r>
-              <a:t>Projeto Corre que Derrete!, GitHub Danielpr614/corre-que-derrete, implementação 23f755e e documentação de 15/10/2026. game/particles.py e Run.update. Cena preparada para ilustrar coleta e conservação baixa.</a:t>
+              <a:t>Código do projeto Danielpr614/corre-que-derrete, implementação 23f755e. Enunciado do professor Pedro Cândido, seções 4 e 8. Relatos de Daniel em 07/10 e 15/10/2026. docs/06-fontes-e-ia.md e docs/16-equipe-e-entrega.md. Música House In a Forest Loop, HorrorPen, https://opengameart.org/content/loop-house-in-a-forest, licença https://creativecommons.org/licenses/by/3.0/. Python: python.org; Pygame: pygame.org; OpenAI: openai.com/chatgpt/. Imagem de resultado com estado preparado, não é uma partida humana.</a:t>
             </a:r>
           </a:p>
         </p:txBody>
@@ -1832,7 +1055,7 @@
           <p:cNvPr id="3" name="Title">
             <a:extLst xmlns:a="http://schemas.openxmlformats.org/drawingml/2006/main">
               <a:ext uri="{FF2B5EF4-FFF2-40B4-BE49-F238E27FC236}">
-                <a16:creationId xmlns:a16="http://schemas.microsoft.com/office/drawing/2014/main" id="{B8179763-8548-4569-BE63-2B26D9AB1970}"/>
+                <a16:creationId xmlns:a16="http://schemas.microsoft.com/office/drawing/2014/main" id="{2D274616-BD5B-472A-B121-1864F5B3CCF4}"/>
               </a:ext>
             </a:extLst>
           </p:cNvPr>
@@ -1989,7 +1212,7 @@
           <p:cNvPr id="2" name="Subtitle">
             <a:extLst xmlns:a="http://schemas.openxmlformats.org/drawingml/2006/main">
               <a:ext uri="{FF2B5EF4-FFF2-40B4-BE49-F238E27FC236}">
-                <a16:creationId xmlns:a16="http://schemas.microsoft.com/office/drawing/2014/main" id="{3B4C5557-2816-471B-822F-35CD1E468739}"/>
+                <a16:creationId xmlns:a16="http://schemas.microsoft.com/office/drawing/2014/main" id="{B6FC45D5-3E1D-4D82-9F88-B895462703DA}"/>
               </a:ext>
             </a:extLst>
           </p:cNvPr>
@@ -2163,7 +1386,7 @@
           <p:cNvPr id="2" name="Section title">
             <a:extLst xmlns:a="http://schemas.openxmlformats.org/drawingml/2006/main">
               <a:ext uri="{FF2B5EF4-FFF2-40B4-BE49-F238E27FC236}">
-                <a16:creationId xmlns:a16="http://schemas.microsoft.com/office/drawing/2014/main" id="{C3A7A2CB-7B93-420D-A43C-798AE7A138B5}"/>
+                <a16:creationId xmlns:a16="http://schemas.microsoft.com/office/drawing/2014/main" id="{9A075C84-4952-4BD8-A27E-E07D4DD86F11}"/>
               </a:ext>
             </a:extLst>
           </p:cNvPr>
@@ -2337,7 +1560,7 @@
           <p:cNvPr id="3" name="Title">
             <a:extLst xmlns:a="http://schemas.openxmlformats.org/drawingml/2006/main">
               <a:ext uri="{FF2B5EF4-FFF2-40B4-BE49-F238E27FC236}">
-                <a16:creationId xmlns:a16="http://schemas.microsoft.com/office/drawing/2014/main" id="{0CD1ABC0-8FDE-489B-B0C3-0BE0DEAA5256}"/>
+                <a16:creationId xmlns:a16="http://schemas.microsoft.com/office/drawing/2014/main" id="{B174C311-CA5D-4A53-A3F8-93FC8A7F7A20}"/>
               </a:ext>
             </a:extLst>
           </p:cNvPr>
@@ -2494,7 +1717,7 @@
           <p:cNvPr id="2" name="Body">
             <a:extLst xmlns:a="http://schemas.openxmlformats.org/drawingml/2006/main">
               <a:ext uri="{FF2B5EF4-FFF2-40B4-BE49-F238E27FC236}">
-                <a16:creationId xmlns:a16="http://schemas.microsoft.com/office/drawing/2014/main" id="{ECAED0B5-E454-46AB-981C-4D45BEFE8E1B}"/>
+                <a16:creationId xmlns:a16="http://schemas.microsoft.com/office/drawing/2014/main" id="{0EA195DE-FC60-4DB0-B15C-630AE386A519}"/>
               </a:ext>
             </a:extLst>
           </p:cNvPr>
@@ -2668,7 +1891,7 @@
           <p:cNvPr id="4" name="Title">
             <a:extLst xmlns:a="http://schemas.openxmlformats.org/drawingml/2006/main">
               <a:ext uri="{FF2B5EF4-FFF2-40B4-BE49-F238E27FC236}">
-                <a16:creationId xmlns:a16="http://schemas.microsoft.com/office/drawing/2014/main" id="{E283A96B-7A50-4F6B-BE58-AFBF432D52C2}"/>
+                <a16:creationId xmlns:a16="http://schemas.microsoft.com/office/drawing/2014/main" id="{DB0D50FE-D0C5-4536-ABE1-D6344F6F1EC5}"/>
               </a:ext>
             </a:extLst>
           </p:cNvPr>
@@ -2825,7 +2048,7 @@
           <p:cNvPr id="2" name="Left column">
             <a:extLst xmlns:a="http://schemas.openxmlformats.org/drawingml/2006/main">
               <a:ext uri="{FF2B5EF4-FFF2-40B4-BE49-F238E27FC236}">
-                <a16:creationId xmlns:a16="http://schemas.microsoft.com/office/drawing/2014/main" id="{093ED9FF-FD97-4181-95C5-109FECD7002A}"/>
+                <a16:creationId xmlns:a16="http://schemas.microsoft.com/office/drawing/2014/main" id="{8176B630-6EDE-4651-A72C-34DEBFE2D773}"/>
               </a:ext>
             </a:extLst>
           </p:cNvPr>
@@ -2982,7 +2205,7 @@
           <p:cNvPr id="3" name="Right column">
             <a:extLst xmlns:a="http://schemas.openxmlformats.org/drawingml/2006/main">
               <a:ext uri="{FF2B5EF4-FFF2-40B4-BE49-F238E27FC236}">
-                <a16:creationId xmlns:a16="http://schemas.microsoft.com/office/drawing/2014/main" id="{A4EA62E9-85F0-45E6-8E7F-BE030B05CDF5}"/>
+                <a16:creationId xmlns:a16="http://schemas.microsoft.com/office/drawing/2014/main" id="{F21633B5-454D-4930-A063-AC473A3BB95A}"/>
               </a:ext>
             </a:extLst>
           </p:cNvPr>
@@ -3156,7 +2379,7 @@
           <p:cNvPr id="3" name="Title">
             <a:extLst xmlns:a="http://schemas.openxmlformats.org/drawingml/2006/main">
               <a:ext uri="{FF2B5EF4-FFF2-40B4-BE49-F238E27FC236}">
-                <a16:creationId xmlns:a16="http://schemas.microsoft.com/office/drawing/2014/main" id="{9C546BC2-242E-4516-A27D-5301FB336F52}"/>
+                <a16:creationId xmlns:a16="http://schemas.microsoft.com/office/drawing/2014/main" id="{DB2C0B70-A858-4E12-A677-B5A84B2CB840}"/>
               </a:ext>
             </a:extLst>
           </p:cNvPr>
@@ -3313,7 +2536,7 @@
           <p:cNvPr id="2" name="Left column">
             <a:extLst xmlns:a="http://schemas.openxmlformats.org/drawingml/2006/main">
               <a:ext uri="{FF2B5EF4-FFF2-40B4-BE49-F238E27FC236}">
-                <a16:creationId xmlns:a16="http://schemas.microsoft.com/office/drawing/2014/main" id="{37B175D5-5024-4516-8935-F0BD8A3FE839}"/>
+                <a16:creationId xmlns:a16="http://schemas.microsoft.com/office/drawing/2014/main" id="{FDC4CB0E-12C2-4E14-97B8-0362F003646B}"/>
               </a:ext>
             </a:extLst>
           </p:cNvPr>
@@ -3508,12 +2731,12 @@
   </p:cSld>
   <p:clrMap bg1="lt1" tx1="dk1" bg2="lt2" tx2="dk2" accent1="accent1" accent2="accent2" accent3="accent3" accent4="accent4" accent5="accent5" accent6="accent6" hlink="hlink" folHlink="folHlink"/>
   <p:sldLayoutIdLst>
-    <p:sldLayoutId xmlns:r="http://schemas.openxmlformats.org/officeDocument/2006/relationships" id="2147483649" r:id="R0e3ad262219f4ce7"/>
-    <p:sldLayoutId xmlns:r="http://schemas.openxmlformats.org/officeDocument/2006/relationships" id="2147483650" r:id="R63e580c9e5214f50"/>
-    <p:sldLayoutId xmlns:r="http://schemas.openxmlformats.org/officeDocument/2006/relationships" id="2147483651" r:id="R9b68489f78784a9c"/>
-    <p:sldLayoutId xmlns:r="http://schemas.openxmlformats.org/officeDocument/2006/relationships" id="2147483652" r:id="R8d4df4621e5b49eb"/>
-    <p:sldLayoutId xmlns:r="http://schemas.openxmlformats.org/officeDocument/2006/relationships" id="2147483653" r:id="R5088114a09ed4a62"/>
-    <p:sldLayoutId xmlns:r="http://schemas.openxmlformats.org/officeDocument/2006/relationships" id="2147483654" r:id="Re08e464898a6434b"/>
+    <p:sldLayoutId xmlns:r="http://schemas.openxmlformats.org/officeDocument/2006/relationships" id="2147483649" r:id="Rdfe9fa1b4a724aea"/>
+    <p:sldLayoutId xmlns:r="http://schemas.openxmlformats.org/officeDocument/2006/relationships" id="2147483650" r:id="R9231398769854e5c"/>
+    <p:sldLayoutId xmlns:r="http://schemas.openxmlformats.org/officeDocument/2006/relationships" id="2147483651" r:id="R574a3cab62a445db"/>
+    <p:sldLayoutId xmlns:r="http://schemas.openxmlformats.org/officeDocument/2006/relationships" id="2147483652" r:id="R7180337654ca47e6"/>
+    <p:sldLayoutId xmlns:r="http://schemas.openxmlformats.org/officeDocument/2006/relationships" id="2147483653" r:id="R9d047a5ee83d4b9d"/>
+    <p:sldLayoutId xmlns:r="http://schemas.openxmlformats.org/officeDocument/2006/relationships" id="2147483654" r:id="R753159e7f60a42c9"/>
   </p:sldLayoutIdLst>
   <p:txStyles>
     <p:titleStyle>
@@ -4061,10 +3284,10 @@
       </p:grpSpPr>
       <p:sp>
         <p:nvSpPr>
-          <p:cNvPr id="7" name="text-0">
+          <p:cNvPr id="6" name="">
             <a:extLst xmlns:a="http://schemas.openxmlformats.org/drawingml/2006/main">
               <a:ext uri="{FF2B5EF4-FFF2-40B4-BE49-F238E27FC236}">
-                <a16:creationId xmlns:a16="http://schemas.microsoft.com/office/drawing/2014/main" id="{CFFE114F-C5FB-4DD0-9B91-06EBA7A672AA}"/>
+                <a16:creationId xmlns:a16="http://schemas.microsoft.com/office/drawing/2014/main" id="{4A6931F2-2AAC-4301-9963-E492BA067A5F}"/>
               </a:ext>
             </a:extLst>
           </p:cNvPr>
@@ -4130,10 +3353,10 @@
       </p:sp>
       <p:sp>
         <p:nvSpPr>
-          <p:cNvPr id="2" name="text-1">
+          <p:cNvPr id="2" name="">
             <a:extLst xmlns:a="http://schemas.openxmlformats.org/drawingml/2006/main">
               <a:ext uri="{FF2B5EF4-FFF2-40B4-BE49-F238E27FC236}">
-                <a16:creationId xmlns:a16="http://schemas.microsoft.com/office/drawing/2014/main" id="{AE2A24C5-0C52-49F3-A090-8E42DE64688C}"/>
+                <a16:creationId xmlns:a16="http://schemas.microsoft.com/office/drawing/2014/main" id="{A2F87812-282C-4200-91E4-75BAA93DFA99}"/>
               </a:ext>
             </a:extLst>
           </p:cNvPr>
@@ -4144,7 +3367,7 @@
         </p:nvSpPr>
         <p:spPr>
           <a:xfrm xmlns:a="http://schemas.openxmlformats.org/drawingml/2006/main">
-            <a:off x="11239500" y="6419850"/>
+            <a:off x="11239500" y="6429375"/>
             <a:ext cx="457200" cy="238125"/>
           </a:xfrm>
           <a:prstGeom xmlns:a="http://schemas.openxmlformats.org/drawingml/2006/main" prst="rect">
@@ -4199,10 +3422,10 @@
       </p:sp>
       <p:sp>
         <p:nvSpPr>
-          <p:cNvPr id="3" name="text-2">
+          <p:cNvPr id="3" name="">
             <a:extLst xmlns:a="http://schemas.openxmlformats.org/drawingml/2006/main">
               <a:ext uri="{FF2B5EF4-FFF2-40B4-BE49-F238E27FC236}">
-                <a16:creationId xmlns:a16="http://schemas.microsoft.com/office/drawing/2014/main" id="{4F9BA096-6750-48FA-8B6D-58136DA94998}"/>
+                <a16:creationId xmlns:a16="http://schemas.microsoft.com/office/drawing/2014/main" id="{7655F3F0-586C-4162-8991-1DAEE9870CA2}"/>
               </a:ext>
             </a:extLst>
           </p:cNvPr>
@@ -4314,10 +3537,10 @@
       </p:sp>
       <p:sp>
         <p:nvSpPr>
-          <p:cNvPr id="4" name="text-3">
+          <p:cNvPr id="4" name="">
             <a:extLst xmlns:a="http://schemas.openxmlformats.org/drawingml/2006/main">
               <a:ext uri="{FF2B5EF4-FFF2-40B4-BE49-F238E27FC236}">
-                <a16:creationId xmlns:a16="http://schemas.microsoft.com/office/drawing/2014/main" id="{7518CA74-7E8F-453C-9221-6D48FDF03096}"/>
+                <a16:creationId xmlns:a16="http://schemas.microsoft.com/office/drawing/2014/main" id="{FA16CCDC-20B6-4096-A153-3FDD3C2E67B9}"/>
               </a:ext>
             </a:extLst>
           </p:cNvPr>
@@ -4329,7 +3552,7 @@
         <p:spPr>
           <a:xfrm xmlns:a="http://schemas.openxmlformats.org/drawingml/2006/main">
             <a:off x="609600" y="4257675"/>
-            <a:ext cx="4762500" cy="1238250"/>
+            <a:ext cx="4762500" cy="1381125"/>
           </a:xfrm>
           <a:prstGeom xmlns:a="http://schemas.openxmlformats.org/drawingml/2006/main" prst="rect">
             <a:avLst/>
@@ -4432,7 +3655,7 @@
           <p:cNvPr id="5" name="">
             <a:extLst xmlns:a="http://schemas.openxmlformats.org/drawingml/2006/main">
               <a:ext uri="{FF2B5EF4-FFF2-40B4-BE49-F238E27FC236}">
-                <a16:creationId xmlns:a16="http://schemas.microsoft.com/office/drawing/2014/main" id="{83FB03F7-C666-4D24-BF1B-E7F8B54BBD89}"/>
+                <a16:creationId xmlns:a16="http://schemas.microsoft.com/office/drawing/2014/main" id="{4B663C8D-7260-415E-A5B3-BA7C16495454}"/>
               </a:ext>
             </a:extLst>
           </p:cNvPr>
@@ -4442,7 +3665,7 @@
           <p:nvPr/>
         </p:nvPicPr>
         <p:blipFill>
-          <a:blip xmlns:r="http://schemas.openxmlformats.org/officeDocument/2006/relationships" xmlns:a="http://schemas.openxmlformats.org/drawingml/2006/main" r:embed="R69cdff966ebf4972"/>
+          <a:blip xmlns:r="http://schemas.openxmlformats.org/officeDocument/2006/relationships" xmlns:a="http://schemas.openxmlformats.org/drawingml/2006/main" r:embed="R7535c247ea5843a8"/>
           <a:stretch xmlns:a="http://schemas.openxmlformats.org/drawingml/2006/main"/>
         </p:blipFill>
         <p:spPr>
@@ -4455,2694 +3678,10 @@
           </a:prstGeom>
         </p:spPr>
       </p:pic>
-      <p:sp>
-        <p:nvSpPr>
-          <p:cNvPr id="6" name="text-4">
-            <a:extLst xmlns:a="http://schemas.openxmlformats.org/drawingml/2006/main">
-              <a:ext uri="{FF2B5EF4-FFF2-40B4-BE49-F238E27FC236}">
-                <a16:creationId xmlns:a16="http://schemas.microsoft.com/office/drawing/2014/main" id="{BE9D2EFA-2908-4E42-A83D-E4E169DF7D1C}"/>
-              </a:ext>
-            </a:extLst>
-          </p:cNvPr>
-          <p:cNvSpPr>
-            <a:spLocks xmlns:a="http://schemas.openxmlformats.org/drawingml/2006/main" noGrp="1"/>
-          </p:cNvSpPr>
-          <p:nvPr/>
-        </p:nvSpPr>
-        <p:spPr>
-          <a:xfrm xmlns:a="http://schemas.openxmlformats.org/drawingml/2006/main">
-            <a:off x="609600" y="5962650"/>
-            <a:ext cx="10477500" cy="333375"/>
-          </a:xfrm>
-          <a:prstGeom xmlns:a="http://schemas.openxmlformats.org/drawingml/2006/main" prst="rect">
-            <a:avLst/>
-          </a:prstGeom>
-          <a:noFill xmlns:a="http://schemas.openxmlformats.org/drawingml/2006/main"/>
-          <a:ln xmlns:a="http://schemas.openxmlformats.org/drawingml/2006/main" w="0">
-            <a:noFill/>
-            <a:prstDash val="solid"/>
-          </a:ln>
-        </p:spPr>
-        <p:txBody>
-          <a:bodyPr xmlns:a="http://schemas.openxmlformats.org/drawingml/2006/main">
-            <a:noAutofit/>
-          </a:bodyPr>
-          <a:lstStyle xmlns:a="http://schemas.openxmlformats.org/drawingml/2006/main">
-            <a:defPPr>
-              <a:defRPr sz="1800" b="0">
-                <a:solidFill>
-                  <a:srgbClr val="203149"/>
-                </a:solidFill>
-                <a:latin typeface="DejaVu Sans"/>
-                <a:ea typeface="DejaVu Sans"/>
-                <a:cs typeface="DejaVu Sans"/>
-              </a:defRPr>
-            </a:defPPr>
-          </a:lstStyle>
-          <a:p xmlns:a="http://schemas.openxmlformats.org/drawingml/2006/main">
-            <a:pPr>
-              <a:defRPr sz="1800" b="0">
-                <a:solidFill>
-                  <a:srgbClr val="203149"/>
-                </a:solidFill>
-                <a:latin typeface="DejaVu Sans"/>
-                <a:ea typeface="DejaVu Sans"/>
-                <a:cs typeface="DejaVu Sans"/>
-              </a:defRPr>
-            </a:pPr>
-            <a:r>
-              <a:rPr sz="1800" b="0">
-                <a:solidFill>
-                  <a:srgbClr val="203149"/>
-                </a:solidFill>
-                <a:latin typeface="DejaVu Sans"/>
-                <a:ea typeface="DejaVu Sans"/>
-                <a:cs typeface="DejaVu Sans"/>
-              </a:rPr>
-              <a:t>Entrega em 16 de outubro de 2026</a:t>
-            </a:r>
-          </a:p>
-        </p:txBody>
-      </p:sp>
     </p:spTree>
     <p:extLst>
       <p:ext uri="{BB962C8B-B14F-4D97-AF65-F5344CB8AC3E}">
-        <p14:creationId xmlns:p14="http://schemas.microsoft.com/office/powerpoint/2010/main" val="872103339"/>
-      </p:ext>
-    </p:extLst>
-  </p:cSld>
-</p:sld>
-</file>
-
-<file path=ppt/slides/slide10.xml><?xml version="1.0" encoding="utf-8"?>
-<p:sld xmlns:p="http://schemas.openxmlformats.org/presentationml/2006/main">
-  <p:cSld>
-    <p:bg>
-      <p:bgPr>
-        <a:solidFill xmlns:a="http://schemas.openxmlformats.org/drawingml/2006/main">
-          <a:srgbClr val="FFF8E7"/>
-        </a:solidFill>
-      </p:bgPr>
-    </p:bg>
-    <p:spTree>
-      <p:nvGrpSpPr>
-        <p:cNvPr id="1" name=""/>
-        <p:cNvGrpSpPr/>
-        <p:nvPr/>
-      </p:nvGrpSpPr>
-      <p:grpSpPr>
-        <a:xfrm xmlns:a="http://schemas.openxmlformats.org/drawingml/2006/main"/>
-      </p:grpSpPr>
-      <p:sp>
-        <p:nvSpPr>
-          <p:cNvPr id="10" name="text-0">
-            <a:extLst xmlns:a="http://schemas.openxmlformats.org/drawingml/2006/main">
-              <a:ext uri="{FF2B5EF4-FFF2-40B4-BE49-F238E27FC236}">
-                <a16:creationId xmlns:a16="http://schemas.microsoft.com/office/drawing/2014/main" id="{73BB84FC-5F9C-4876-B1CF-0795DF9D6872}"/>
-              </a:ext>
-            </a:extLst>
-          </p:cNvPr>
-          <p:cNvSpPr>
-            <a:spLocks xmlns:a="http://schemas.openxmlformats.org/drawingml/2006/main" noGrp="1"/>
-          </p:cNvSpPr>
-          <p:nvPr/>
-        </p:nvSpPr>
-        <p:spPr>
-          <a:xfrm xmlns:a="http://schemas.openxmlformats.org/drawingml/2006/main">
-            <a:off x="609600" y="400050"/>
-            <a:ext cx="10972800" cy="876300"/>
-          </a:xfrm>
-          <a:prstGeom xmlns:a="http://schemas.openxmlformats.org/drawingml/2006/main" prst="rect">
-            <a:avLst/>
-          </a:prstGeom>
-          <a:noFill xmlns:a="http://schemas.openxmlformats.org/drawingml/2006/main"/>
-          <a:ln xmlns:a="http://schemas.openxmlformats.org/drawingml/2006/main" w="0">
-            <a:noFill/>
-            <a:prstDash val="solid"/>
-          </a:ln>
-        </p:spPr>
-        <p:txBody>
-          <a:bodyPr xmlns:a="http://schemas.openxmlformats.org/drawingml/2006/main">
-            <a:noAutofit/>
-          </a:bodyPr>
-          <a:lstStyle xmlns:a="http://schemas.openxmlformats.org/drawingml/2006/main">
-            <a:defPPr>
-              <a:defRPr sz="3300" b="1">
-                <a:solidFill>
-                  <a:srgbClr val="203149"/>
-                </a:solidFill>
-                <a:latin typeface="DejaVu Sans"/>
-                <a:ea typeface="DejaVu Sans"/>
-                <a:cs typeface="DejaVu Sans"/>
-              </a:defRPr>
-            </a:defPPr>
-          </a:lstStyle>
-          <a:p xmlns:a="http://schemas.openxmlformats.org/drawingml/2006/main">
-            <a:pPr>
-              <a:defRPr sz="3300" b="1">
-                <a:solidFill>
-                  <a:srgbClr val="203149"/>
-                </a:solidFill>
-                <a:latin typeface="DejaVu Sans"/>
-                <a:ea typeface="DejaVu Sans"/>
-                <a:cs typeface="DejaVu Sans"/>
-              </a:defRPr>
-            </a:pPr>
-            <a:r>
-              <a:rPr sz="3300" b="1">
-                <a:solidFill>
-                  <a:srgbClr val="203149"/>
-                </a:solidFill>
-                <a:latin typeface="DejaVu Sans"/>
-                <a:ea typeface="DejaVu Sans"/>
-                <a:cs typeface="DejaVu Sans"/>
-              </a:rPr>
-              <a:t>Evolução do projeto</a:t>
-            </a:r>
-          </a:p>
-        </p:txBody>
-      </p:sp>
-      <p:sp>
-        <p:nvSpPr>
-          <p:cNvPr id="2" name="text-1">
-            <a:extLst xmlns:a="http://schemas.openxmlformats.org/drawingml/2006/main">
-              <a:ext uri="{FF2B5EF4-FFF2-40B4-BE49-F238E27FC236}">
-                <a16:creationId xmlns:a16="http://schemas.microsoft.com/office/drawing/2014/main" id="{EA350187-EADB-48DE-BA30-CB17B63A62C8}"/>
-              </a:ext>
-            </a:extLst>
-          </p:cNvPr>
-          <p:cNvSpPr>
-            <a:spLocks xmlns:a="http://schemas.openxmlformats.org/drawingml/2006/main" noGrp="1"/>
-          </p:cNvSpPr>
-          <p:nvPr/>
-        </p:nvSpPr>
-        <p:spPr>
-          <a:xfrm xmlns:a="http://schemas.openxmlformats.org/drawingml/2006/main">
-            <a:off x="11239500" y="6419850"/>
-            <a:ext cx="457200" cy="238125"/>
-          </a:xfrm>
-          <a:prstGeom xmlns:a="http://schemas.openxmlformats.org/drawingml/2006/main" prst="rect">
-            <a:avLst/>
-          </a:prstGeom>
-          <a:noFill xmlns:a="http://schemas.openxmlformats.org/drawingml/2006/main"/>
-          <a:ln xmlns:a="http://schemas.openxmlformats.org/drawingml/2006/main" w="0">
-            <a:noFill/>
-            <a:prstDash val="solid"/>
-          </a:ln>
-        </p:spPr>
-        <p:txBody>
-          <a:bodyPr xmlns:a="http://schemas.openxmlformats.org/drawingml/2006/main">
-            <a:noAutofit/>
-          </a:bodyPr>
-          <a:lstStyle xmlns:a="http://schemas.openxmlformats.org/drawingml/2006/main">
-            <a:defPPr>
-              <a:defRPr sz="1350" b="0">
-                <a:solidFill>
-                  <a:srgbClr val="526773"/>
-                </a:solidFill>
-                <a:latin typeface="DejaVu Sans"/>
-                <a:ea typeface="DejaVu Sans"/>
-                <a:cs typeface="DejaVu Sans"/>
-              </a:defRPr>
-            </a:defPPr>
-          </a:lstStyle>
-          <a:p xmlns:a="http://schemas.openxmlformats.org/drawingml/2006/main">
-            <a:pPr>
-              <a:defRPr sz="1350" b="0">
-                <a:solidFill>
-                  <a:srgbClr val="526773"/>
-                </a:solidFill>
-                <a:latin typeface="DejaVu Sans"/>
-                <a:ea typeface="DejaVu Sans"/>
-                <a:cs typeface="DejaVu Sans"/>
-              </a:defRPr>
-            </a:pPr>
-            <a:r>
-              <a:rPr sz="1350" b="0">
-                <a:solidFill>
-                  <a:srgbClr val="526773"/>
-                </a:solidFill>
-                <a:latin typeface="DejaVu Sans"/>
-                <a:ea typeface="DejaVu Sans"/>
-                <a:cs typeface="DejaVu Sans"/>
-              </a:rPr>
-              <a:t>10</a:t>
-            </a:r>
-          </a:p>
-        </p:txBody>
-      </p:sp>
-      <p:pic>
-        <p:nvPicPr>
-          <p:cNvPr id="3" name="">
-            <a:extLst xmlns:a="http://schemas.openxmlformats.org/drawingml/2006/main">
-              <a:ext uri="{FF2B5EF4-FFF2-40B4-BE49-F238E27FC236}">
-                <a16:creationId xmlns:a16="http://schemas.microsoft.com/office/drawing/2014/main" id="{41BFDE89-210D-4018-89A2-DA14964191AD}"/>
-              </a:ext>
-            </a:extLst>
-          </p:cNvPr>
-          <p:cNvPicPr>
-            <a:picLocks xmlns:a="http://schemas.openxmlformats.org/drawingml/2006/main" noChangeAspect="1"/>
-          </p:cNvPicPr>
-          <p:nvPr/>
-        </p:nvPicPr>
-        <p:blipFill>
-          <a:blip xmlns:r="http://schemas.openxmlformats.org/officeDocument/2006/relationships" xmlns:a="http://schemas.openxmlformats.org/drawingml/2006/main" r:embed="R72276260f4ad42ce"/>
-          <a:stretch xmlns:a="http://schemas.openxmlformats.org/drawingml/2006/main"/>
-        </p:blipFill>
-        <p:spPr>
-          <a:xfrm xmlns:a="http://schemas.openxmlformats.org/drawingml/2006/main">
-            <a:off x="609600" y="1897261"/>
-            <a:ext cx="3429000" cy="2025253"/>
-          </a:xfrm>
-          <a:prstGeom xmlns:a="http://schemas.openxmlformats.org/drawingml/2006/main" prst="rect">
-            <a:avLst/>
-          </a:prstGeom>
-        </p:spPr>
-      </p:pic>
-      <p:pic>
-        <p:nvPicPr>
-          <p:cNvPr id="4" name="">
-            <a:extLst xmlns:a="http://schemas.openxmlformats.org/drawingml/2006/main">
-              <a:ext uri="{FF2B5EF4-FFF2-40B4-BE49-F238E27FC236}">
-                <a16:creationId xmlns:a16="http://schemas.microsoft.com/office/drawing/2014/main" id="{D46E3B6F-2151-45C4-ADE7-9312FB6AD937}"/>
-              </a:ext>
-            </a:extLst>
-          </p:cNvPr>
-          <p:cNvPicPr>
-            <a:picLocks xmlns:a="http://schemas.openxmlformats.org/drawingml/2006/main" noChangeAspect="1"/>
-          </p:cNvPicPr>
-          <p:nvPr/>
-        </p:nvPicPr>
-        <p:blipFill>
-          <a:blip xmlns:r="http://schemas.openxmlformats.org/officeDocument/2006/relationships" xmlns:a="http://schemas.openxmlformats.org/drawingml/2006/main" r:embed="R4b2a838e5f704870"/>
-          <a:stretch xmlns:a="http://schemas.openxmlformats.org/drawingml/2006/main"/>
-        </p:blipFill>
-        <p:spPr>
-          <a:xfrm xmlns:a="http://schemas.openxmlformats.org/drawingml/2006/main">
-            <a:off x="4381500" y="2009977"/>
-            <a:ext cx="3429000" cy="1799821"/>
-          </a:xfrm>
-          <a:prstGeom xmlns:a="http://schemas.openxmlformats.org/drawingml/2006/main" prst="rect">
-            <a:avLst/>
-          </a:prstGeom>
-        </p:spPr>
-      </p:pic>
-      <p:pic>
-        <p:nvPicPr>
-          <p:cNvPr id="5" name="">
-            <a:extLst xmlns:a="http://schemas.openxmlformats.org/drawingml/2006/main">
-              <a:ext uri="{FF2B5EF4-FFF2-40B4-BE49-F238E27FC236}">
-                <a16:creationId xmlns:a16="http://schemas.microsoft.com/office/drawing/2014/main" id="{A03D9B09-7832-4686-B025-A91FAA0BBCCC}"/>
-              </a:ext>
-            </a:extLst>
-          </p:cNvPr>
-          <p:cNvPicPr>
-            <a:picLocks xmlns:a="http://schemas.openxmlformats.org/drawingml/2006/main" noChangeAspect="1"/>
-          </p:cNvPicPr>
-          <p:nvPr/>
-        </p:nvPicPr>
-        <p:blipFill>
-          <a:blip xmlns:r="http://schemas.openxmlformats.org/officeDocument/2006/relationships" xmlns:a="http://schemas.openxmlformats.org/drawingml/2006/main" r:embed="Rb5d45aa6b7d541ac"/>
-          <a:stretch xmlns:a="http://schemas.openxmlformats.org/drawingml/2006/main"/>
-        </p:blipFill>
-        <p:spPr>
-          <a:xfrm xmlns:a="http://schemas.openxmlformats.org/drawingml/2006/main">
-            <a:off x="8153400" y="1945481"/>
-            <a:ext cx="3429000" cy="1928813"/>
-          </a:xfrm>
-          <a:prstGeom xmlns:a="http://schemas.openxmlformats.org/drawingml/2006/main" prst="rect">
-            <a:avLst/>
-          </a:prstGeom>
-        </p:spPr>
-      </p:pic>
-      <p:sp>
-        <p:nvSpPr>
-          <p:cNvPr id="6" name="text-2">
-            <a:extLst xmlns:a="http://schemas.openxmlformats.org/drawingml/2006/main">
-              <a:ext uri="{FF2B5EF4-FFF2-40B4-BE49-F238E27FC236}">
-                <a16:creationId xmlns:a16="http://schemas.microsoft.com/office/drawing/2014/main" id="{18FCA44B-0A01-44E4-9514-B3B6C955D4C2}"/>
-              </a:ext>
-            </a:extLst>
-          </p:cNvPr>
-          <p:cNvSpPr>
-            <a:spLocks xmlns:a="http://schemas.openxmlformats.org/drawingml/2006/main" noGrp="1"/>
-          </p:cNvSpPr>
-          <p:nvPr/>
-        </p:nvSpPr>
-        <p:spPr>
-          <a:xfrm xmlns:a="http://schemas.openxmlformats.org/drawingml/2006/main">
-            <a:off x="609600" y="4219575"/>
-            <a:ext cx="3429000" cy="857250"/>
-          </a:xfrm>
-          <a:prstGeom xmlns:a="http://schemas.openxmlformats.org/drawingml/2006/main" prst="rect">
-            <a:avLst/>
-          </a:prstGeom>
-          <a:noFill xmlns:a="http://schemas.openxmlformats.org/drawingml/2006/main"/>
-          <a:ln xmlns:a="http://schemas.openxmlformats.org/drawingml/2006/main" w="0">
-            <a:noFill/>
-            <a:prstDash val="solid"/>
-          </a:ln>
-        </p:spPr>
-        <p:txBody>
-          <a:bodyPr xmlns:a="http://schemas.openxmlformats.org/drawingml/2006/main">
-            <a:noAutofit/>
-          </a:bodyPr>
-          <a:lstStyle xmlns:a="http://schemas.openxmlformats.org/drawingml/2006/main">
-            <a:defPPr>
-              <a:defRPr sz="1875" b="1">
-                <a:solidFill>
-                  <a:srgbClr val="203149"/>
-                </a:solidFill>
-                <a:latin typeface="DejaVu Sans"/>
-                <a:ea typeface="DejaVu Sans"/>
-                <a:cs typeface="DejaVu Sans"/>
-              </a:defRPr>
-            </a:defPPr>
-          </a:lstStyle>
-          <a:p xmlns:a="http://schemas.openxmlformats.org/drawingml/2006/main">
-            <a:pPr>
-              <a:defRPr sz="1875" b="1">
-                <a:solidFill>
-                  <a:srgbClr val="203149"/>
-                </a:solidFill>
-                <a:latin typeface="DejaVu Sans"/>
-                <a:ea typeface="DejaVu Sans"/>
-                <a:cs typeface="DejaVu Sans"/>
-              </a:defRPr>
-            </a:pPr>
-            <a:r>
-              <a:rPr sz="1875" b="1">
-                <a:solidFill>
-                  <a:srgbClr val="203149"/>
-                </a:solidFill>
-                <a:latin typeface="DejaVu Sans"/>
-                <a:ea typeface="DejaVu Sans"/>
-                <a:cs typeface="DejaVu Sans"/>
-              </a:rPr>
-              <a:t>Protótipo</a:t>
-            </a:r>
-          </a:p>
-          <a:p xmlns:a="http://schemas.openxmlformats.org/drawingml/2006/main">
-            <a:pPr>
-              <a:defRPr sz="1875" b="1">
-                <a:solidFill>
-                  <a:srgbClr val="203149"/>
-                </a:solidFill>
-                <a:latin typeface="DejaVu Sans"/>
-                <a:ea typeface="DejaVu Sans"/>
-                <a:cs typeface="DejaVu Sans"/>
-              </a:defRPr>
-            </a:pPr>
-            <a:r>
-              <a:rPr sz="1875" b="1">
-                <a:solidFill>
-                  <a:srgbClr val="203149"/>
-                </a:solidFill>
-                <a:latin typeface="DejaVu Sans"/>
-                <a:ea typeface="DejaVu Sans"/>
-                <a:cs typeface="DejaVu Sans"/>
-              </a:rPr>
-              <a:t>Captura no Windows</a:t>
-            </a:r>
-          </a:p>
-        </p:txBody>
-      </p:sp>
-      <p:sp>
-        <p:nvSpPr>
-          <p:cNvPr id="7" name="text-3">
-            <a:extLst xmlns:a="http://schemas.openxmlformats.org/drawingml/2006/main">
-              <a:ext uri="{FF2B5EF4-FFF2-40B4-BE49-F238E27FC236}">
-                <a16:creationId xmlns:a16="http://schemas.microsoft.com/office/drawing/2014/main" id="{048BD158-64BA-4170-BDCC-F19E2B5A46C4}"/>
-              </a:ext>
-            </a:extLst>
-          </p:cNvPr>
-          <p:cNvSpPr>
-            <a:spLocks xmlns:a="http://schemas.openxmlformats.org/drawingml/2006/main" noGrp="1"/>
-          </p:cNvSpPr>
-          <p:nvPr/>
-        </p:nvSpPr>
-        <p:spPr>
-          <a:xfrm xmlns:a="http://schemas.openxmlformats.org/drawingml/2006/main">
-            <a:off x="4381500" y="4219575"/>
-            <a:ext cx="3429000" cy="857250"/>
-          </a:xfrm>
-          <a:prstGeom xmlns:a="http://schemas.openxmlformats.org/drawingml/2006/main" prst="rect">
-            <a:avLst/>
-          </a:prstGeom>
-          <a:noFill xmlns:a="http://schemas.openxmlformats.org/drawingml/2006/main"/>
-          <a:ln xmlns:a="http://schemas.openxmlformats.org/drawingml/2006/main" w="0">
-            <a:noFill/>
-            <a:prstDash val="solid"/>
-          </a:ln>
-        </p:spPr>
-        <p:txBody>
-          <a:bodyPr xmlns:a="http://schemas.openxmlformats.org/drawingml/2006/main">
-            <a:noAutofit/>
-          </a:bodyPr>
-          <a:lstStyle xmlns:a="http://schemas.openxmlformats.org/drawingml/2006/main">
-            <a:defPPr>
-              <a:defRPr sz="1875" b="1">
-                <a:solidFill>
-                  <a:srgbClr val="203149"/>
-                </a:solidFill>
-                <a:latin typeface="DejaVu Sans"/>
-                <a:ea typeface="DejaVu Sans"/>
-                <a:cs typeface="DejaVu Sans"/>
-              </a:defRPr>
-            </a:defPPr>
-          </a:lstStyle>
-          <a:p xmlns:a="http://schemas.openxmlformats.org/drawingml/2006/main">
-            <a:pPr>
-              <a:defRPr sz="1875" b="1">
-                <a:solidFill>
-                  <a:srgbClr val="203149"/>
-                </a:solidFill>
-                <a:latin typeface="DejaVu Sans"/>
-                <a:ea typeface="DejaVu Sans"/>
-                <a:cs typeface="DejaVu Sans"/>
-              </a:defRPr>
-            </a:pPr>
-            <a:r>
-              <a:rPr sz="1875" b="1">
-                <a:solidFill>
-                  <a:srgbClr val="203149"/>
-                </a:solidFill>
-                <a:latin typeface="DejaVu Sans"/>
-                <a:ea typeface="DejaVu Sans"/>
-                <a:cs typeface="DejaVu Sans"/>
-              </a:rPr>
-              <a:t>Revisão visual</a:t>
-            </a:r>
-          </a:p>
-          <a:p xmlns:a="http://schemas.openxmlformats.org/drawingml/2006/main">
-            <a:pPr>
-              <a:defRPr sz="1875" b="1">
-                <a:solidFill>
-                  <a:srgbClr val="203149"/>
-                </a:solidFill>
-                <a:latin typeface="DejaVu Sans"/>
-                <a:ea typeface="DejaVu Sans"/>
-                <a:cs typeface="DejaVu Sans"/>
-              </a:defRPr>
-            </a:pPr>
-            <a:r>
-              <a:rPr sz="1875" b="1">
-                <a:solidFill>
-                  <a:srgbClr val="203149"/>
-                </a:solidFill>
-                <a:latin typeface="DejaVu Sans"/>
-                <a:ea typeface="DejaVu Sans"/>
-                <a:cs typeface="DejaVu Sans"/>
-              </a:rPr>
-              <a:t>Captura no Windows</a:t>
-            </a:r>
-          </a:p>
-        </p:txBody>
-      </p:sp>
-      <p:sp>
-        <p:nvSpPr>
-          <p:cNvPr id="8" name="text-4">
-            <a:extLst xmlns:a="http://schemas.openxmlformats.org/drawingml/2006/main">
-              <a:ext uri="{FF2B5EF4-FFF2-40B4-BE49-F238E27FC236}">
-                <a16:creationId xmlns:a16="http://schemas.microsoft.com/office/drawing/2014/main" id="{B5C2F485-13EC-4A05-B357-862292C29C9D}"/>
-              </a:ext>
-            </a:extLst>
-          </p:cNvPr>
-          <p:cNvSpPr>
-            <a:spLocks xmlns:a="http://schemas.openxmlformats.org/drawingml/2006/main" noGrp="1"/>
-          </p:cNvSpPr>
-          <p:nvPr/>
-        </p:nvSpPr>
-        <p:spPr>
-          <a:xfrm xmlns:a="http://schemas.openxmlformats.org/drawingml/2006/main">
-            <a:off x="8153400" y="4219575"/>
-            <a:ext cx="3429000" cy="857250"/>
-          </a:xfrm>
-          <a:prstGeom xmlns:a="http://schemas.openxmlformats.org/drawingml/2006/main" prst="rect">
-            <a:avLst/>
-          </a:prstGeom>
-          <a:noFill xmlns:a="http://schemas.openxmlformats.org/drawingml/2006/main"/>
-          <a:ln xmlns:a="http://schemas.openxmlformats.org/drawingml/2006/main" w="0">
-            <a:noFill/>
-            <a:prstDash val="solid"/>
-          </a:ln>
-        </p:spPr>
-        <p:txBody>
-          <a:bodyPr xmlns:a="http://schemas.openxmlformats.org/drawingml/2006/main">
-            <a:noAutofit/>
-          </a:bodyPr>
-          <a:lstStyle xmlns:a="http://schemas.openxmlformats.org/drawingml/2006/main">
-            <a:defPPr>
-              <a:defRPr sz="1875" b="1">
-                <a:solidFill>
-                  <a:srgbClr val="203149"/>
-                </a:solidFill>
-                <a:latin typeface="DejaVu Sans"/>
-                <a:ea typeface="DejaVu Sans"/>
-                <a:cs typeface="DejaVu Sans"/>
-              </a:defRPr>
-            </a:defPPr>
-          </a:lstStyle>
-          <a:p xmlns:a="http://schemas.openxmlformats.org/drawingml/2006/main">
-            <a:pPr>
-              <a:defRPr sz="1875" b="1">
-                <a:solidFill>
-                  <a:srgbClr val="203149"/>
-                </a:solidFill>
-                <a:latin typeface="DejaVu Sans"/>
-                <a:ea typeface="DejaVu Sans"/>
-                <a:cs typeface="DejaVu Sans"/>
-              </a:defRPr>
-            </a:pPr>
-            <a:r>
-              <a:rPr sz="1875" b="1">
-                <a:solidFill>
-                  <a:srgbClr val="203149"/>
-                </a:solidFill>
-                <a:latin typeface="DejaVu Sans"/>
-                <a:ea typeface="DejaVu Sans"/>
-                <a:cs typeface="DejaVu Sans"/>
-              </a:rPr>
-              <a:t>Versão atual</a:t>
-            </a:r>
-          </a:p>
-          <a:p xmlns:a="http://schemas.openxmlformats.org/drawingml/2006/main">
-            <a:pPr>
-              <a:defRPr sz="1875" b="1">
-                <a:solidFill>
-                  <a:srgbClr val="203149"/>
-                </a:solidFill>
-                <a:latin typeface="DejaVu Sans"/>
-                <a:ea typeface="DejaVu Sans"/>
-                <a:cs typeface="DejaVu Sans"/>
-              </a:defRPr>
-            </a:pPr>
-            <a:r>
-              <a:rPr sz="1875" b="1">
-                <a:solidFill>
-                  <a:srgbClr val="203149"/>
-                </a:solidFill>
-                <a:latin typeface="DejaVu Sans"/>
-                <a:ea typeface="DejaVu Sans"/>
-                <a:cs typeface="DejaVu Sans"/>
-              </a:rPr>
-              <a:t>Cena do renderizador</a:t>
-            </a:r>
-          </a:p>
-        </p:txBody>
-      </p:sp>
-      <p:sp>
-        <p:nvSpPr>
-          <p:cNvPr id="9" name="text-5">
-            <a:extLst xmlns:a="http://schemas.openxmlformats.org/drawingml/2006/main">
-              <a:ext uri="{FF2B5EF4-FFF2-40B4-BE49-F238E27FC236}">
-                <a16:creationId xmlns:a16="http://schemas.microsoft.com/office/drawing/2014/main" id="{28A87592-436D-4EC7-BBB6-3EFE885C303C}"/>
-              </a:ext>
-            </a:extLst>
-          </p:cNvPr>
-          <p:cNvSpPr>
-            <a:spLocks xmlns:a="http://schemas.openxmlformats.org/drawingml/2006/main" noGrp="1"/>
-          </p:cNvSpPr>
-          <p:nvPr/>
-        </p:nvSpPr>
-        <p:spPr>
-          <a:xfrm xmlns:a="http://schemas.openxmlformats.org/drawingml/2006/main">
-            <a:off x="609600" y="5715000"/>
-            <a:ext cx="10858500" cy="571500"/>
-          </a:xfrm>
-          <a:prstGeom xmlns:a="http://schemas.openxmlformats.org/drawingml/2006/main" prst="rect">
-            <a:avLst/>
-          </a:prstGeom>
-          <a:noFill xmlns:a="http://schemas.openxmlformats.org/drawingml/2006/main"/>
-          <a:ln xmlns:a="http://schemas.openxmlformats.org/drawingml/2006/main" w="0">
-            <a:noFill/>
-            <a:prstDash val="solid"/>
-          </a:ln>
-        </p:spPr>
-        <p:txBody>
-          <a:bodyPr xmlns:a="http://schemas.openxmlformats.org/drawingml/2006/main">
-            <a:noAutofit/>
-          </a:bodyPr>
-          <a:lstStyle xmlns:a="http://schemas.openxmlformats.org/drawingml/2006/main">
-            <a:defPPr>
-              <a:defRPr sz="1950" b="0">
-                <a:solidFill>
-                  <a:srgbClr val="203149"/>
-                </a:solidFill>
-                <a:latin typeface="DejaVu Sans"/>
-                <a:ea typeface="DejaVu Sans"/>
-                <a:cs typeface="DejaVu Sans"/>
-              </a:defRPr>
-            </a:defPPr>
-          </a:lstStyle>
-          <a:p xmlns:a="http://schemas.openxmlformats.org/drawingml/2006/main">
-            <a:pPr>
-              <a:defRPr sz="1950" b="0">
-                <a:solidFill>
-                  <a:srgbClr val="203149"/>
-                </a:solidFill>
-                <a:latin typeface="DejaVu Sans"/>
-                <a:ea typeface="DejaVu Sans"/>
-                <a:cs typeface="DejaVu Sans"/>
-              </a:defRPr>
-            </a:pPr>
-            <a:r>
-              <a:rPr sz="1950" b="0">
-                <a:solidFill>
-                  <a:srgbClr val="203149"/>
-                </a:solidFill>
-                <a:latin typeface="DejaVu Sans"/>
-                <a:ea typeface="DejaVu Sans"/>
-                <a:cs typeface="DejaVu Sans"/>
-              </a:rPr>
-              <a:t>Concepção, protótipo e revisões registrados no Git e no diário.</a:t>
-            </a:r>
-          </a:p>
-        </p:txBody>
-      </p:sp>
-    </p:spTree>
-    <p:extLst>
-      <p:ext uri="{BB962C8B-B14F-4D97-AF65-F5344CB8AC3E}">
-        <p14:creationId xmlns:p14="http://schemas.microsoft.com/office/powerpoint/2010/main" val="1173776540"/>
-      </p:ext>
-    </p:extLst>
-  </p:cSld>
-</p:sld>
-</file>
-
-<file path=ppt/slides/slide11.xml><?xml version="1.0" encoding="utf-8"?>
-<p:sld xmlns:p="http://schemas.openxmlformats.org/presentationml/2006/main">
-  <p:cSld>
-    <p:bg>
-      <p:bgPr>
-        <a:solidFill xmlns:a="http://schemas.openxmlformats.org/drawingml/2006/main">
-          <a:srgbClr val="FFF8E7"/>
-        </a:solidFill>
-      </p:bgPr>
-    </p:bg>
-    <p:spTree>
-      <p:nvGrpSpPr>
-        <p:cNvPr id="1" name=""/>
-        <p:cNvGrpSpPr/>
-        <p:nvPr/>
-      </p:nvGrpSpPr>
-      <p:grpSpPr>
-        <a:xfrm xmlns:a="http://schemas.openxmlformats.org/drawingml/2006/main"/>
-      </p:grpSpPr>
-      <p:sp>
-        <p:nvSpPr>
-          <p:cNvPr id="8" name="text-0">
-            <a:extLst xmlns:a="http://schemas.openxmlformats.org/drawingml/2006/main">
-              <a:ext uri="{FF2B5EF4-FFF2-40B4-BE49-F238E27FC236}">
-                <a16:creationId xmlns:a16="http://schemas.microsoft.com/office/drawing/2014/main" id="{3623D285-9AF3-425E-91BC-54571B71A103}"/>
-              </a:ext>
-            </a:extLst>
-          </p:cNvPr>
-          <p:cNvSpPr>
-            <a:spLocks xmlns:a="http://schemas.openxmlformats.org/drawingml/2006/main" noGrp="1"/>
-          </p:cNvSpPr>
-          <p:nvPr/>
-        </p:nvSpPr>
-        <p:spPr>
-          <a:xfrm xmlns:a="http://schemas.openxmlformats.org/drawingml/2006/main">
-            <a:off x="609600" y="400050"/>
-            <a:ext cx="10972800" cy="876300"/>
-          </a:xfrm>
-          <a:prstGeom xmlns:a="http://schemas.openxmlformats.org/drawingml/2006/main" prst="rect">
-            <a:avLst/>
-          </a:prstGeom>
-          <a:noFill xmlns:a="http://schemas.openxmlformats.org/drawingml/2006/main"/>
-          <a:ln xmlns:a="http://schemas.openxmlformats.org/drawingml/2006/main" w="0">
-            <a:noFill/>
-            <a:prstDash val="solid"/>
-          </a:ln>
-        </p:spPr>
-        <p:txBody>
-          <a:bodyPr xmlns:a="http://schemas.openxmlformats.org/drawingml/2006/main">
-            <a:noAutofit/>
-          </a:bodyPr>
-          <a:lstStyle xmlns:a="http://schemas.openxmlformats.org/drawingml/2006/main">
-            <a:defPPr>
-              <a:defRPr sz="3300" b="1">
-                <a:solidFill>
-                  <a:srgbClr val="203149"/>
-                </a:solidFill>
-                <a:latin typeface="DejaVu Sans"/>
-                <a:ea typeface="DejaVu Sans"/>
-                <a:cs typeface="DejaVu Sans"/>
-              </a:defRPr>
-            </a:defPPr>
-          </a:lstStyle>
-          <a:p xmlns:a="http://schemas.openxmlformats.org/drawingml/2006/main">
-            <a:pPr>
-              <a:defRPr sz="3300" b="1">
-                <a:solidFill>
-                  <a:srgbClr val="203149"/>
-                </a:solidFill>
-                <a:latin typeface="DejaVu Sans"/>
-                <a:ea typeface="DejaVu Sans"/>
-                <a:cs typeface="DejaVu Sans"/>
-              </a:defRPr>
-            </a:pPr>
-            <a:r>
-              <a:rPr sz="3300" b="1">
-                <a:solidFill>
-                  <a:srgbClr val="203149"/>
-                </a:solidFill>
-                <a:latin typeface="DejaVu Sans"/>
-                <a:ea typeface="DejaVu Sans"/>
-                <a:cs typeface="DejaVu Sans"/>
-              </a:rPr>
-              <a:t>O que precisou de ajuste</a:t>
-            </a:r>
-          </a:p>
-        </p:txBody>
-      </p:sp>
-      <p:sp>
-        <p:nvSpPr>
-          <p:cNvPr id="2" name="text-1">
-            <a:extLst xmlns:a="http://schemas.openxmlformats.org/drawingml/2006/main">
-              <a:ext uri="{FF2B5EF4-FFF2-40B4-BE49-F238E27FC236}">
-                <a16:creationId xmlns:a16="http://schemas.microsoft.com/office/drawing/2014/main" id="{90F08E30-6E38-4C3A-93F6-5AA27C502409}"/>
-              </a:ext>
-            </a:extLst>
-          </p:cNvPr>
-          <p:cNvSpPr>
-            <a:spLocks xmlns:a="http://schemas.openxmlformats.org/drawingml/2006/main" noGrp="1"/>
-          </p:cNvSpPr>
-          <p:nvPr/>
-        </p:nvSpPr>
-        <p:spPr>
-          <a:xfrm xmlns:a="http://schemas.openxmlformats.org/drawingml/2006/main">
-            <a:off x="11239500" y="6419850"/>
-            <a:ext cx="457200" cy="238125"/>
-          </a:xfrm>
-          <a:prstGeom xmlns:a="http://schemas.openxmlformats.org/drawingml/2006/main" prst="rect">
-            <a:avLst/>
-          </a:prstGeom>
-          <a:noFill xmlns:a="http://schemas.openxmlformats.org/drawingml/2006/main"/>
-          <a:ln xmlns:a="http://schemas.openxmlformats.org/drawingml/2006/main" w="0">
-            <a:noFill/>
-            <a:prstDash val="solid"/>
-          </a:ln>
-        </p:spPr>
-        <p:txBody>
-          <a:bodyPr xmlns:a="http://schemas.openxmlformats.org/drawingml/2006/main">
-            <a:noAutofit/>
-          </a:bodyPr>
-          <a:lstStyle xmlns:a="http://schemas.openxmlformats.org/drawingml/2006/main">
-            <a:defPPr>
-              <a:defRPr sz="1350" b="0">
-                <a:solidFill>
-                  <a:srgbClr val="526773"/>
-                </a:solidFill>
-                <a:latin typeface="DejaVu Sans"/>
-                <a:ea typeface="DejaVu Sans"/>
-                <a:cs typeface="DejaVu Sans"/>
-              </a:defRPr>
-            </a:defPPr>
-          </a:lstStyle>
-          <a:p xmlns:a="http://schemas.openxmlformats.org/drawingml/2006/main">
-            <a:pPr>
-              <a:defRPr sz="1350" b="0">
-                <a:solidFill>
-                  <a:srgbClr val="526773"/>
-                </a:solidFill>
-                <a:latin typeface="DejaVu Sans"/>
-                <a:ea typeface="DejaVu Sans"/>
-                <a:cs typeface="DejaVu Sans"/>
-              </a:defRPr>
-            </a:pPr>
-            <a:r>
-              <a:rPr sz="1350" b="0">
-                <a:solidFill>
-                  <a:srgbClr val="526773"/>
-                </a:solidFill>
-                <a:latin typeface="DejaVu Sans"/>
-                <a:ea typeface="DejaVu Sans"/>
-                <a:cs typeface="DejaVu Sans"/>
-              </a:rPr>
-              <a:t>11</a:t>
-            </a:r>
-          </a:p>
-        </p:txBody>
-      </p:sp>
-      <p:sp>
-        <p:nvSpPr>
-          <p:cNvPr id="3" name="text-2">
-            <a:extLst xmlns:a="http://schemas.openxmlformats.org/drawingml/2006/main">
-              <a:ext uri="{FF2B5EF4-FFF2-40B4-BE49-F238E27FC236}">
-                <a16:creationId xmlns:a16="http://schemas.microsoft.com/office/drawing/2014/main" id="{FF8AAA6C-7ACB-476F-9961-D96526509C9E}"/>
-              </a:ext>
-            </a:extLst>
-          </p:cNvPr>
-          <p:cNvSpPr>
-            <a:spLocks xmlns:a="http://schemas.openxmlformats.org/drawingml/2006/main" noGrp="1"/>
-          </p:cNvSpPr>
-          <p:nvPr/>
-        </p:nvSpPr>
-        <p:spPr>
-          <a:xfrm xmlns:a="http://schemas.openxmlformats.org/drawingml/2006/main">
-            <a:off x="609600" y="1562100"/>
-            <a:ext cx="5000625" cy="438150"/>
-          </a:xfrm>
-          <a:prstGeom xmlns:a="http://schemas.openxmlformats.org/drawingml/2006/main" prst="rect">
-            <a:avLst/>
-          </a:prstGeom>
-          <a:noFill xmlns:a="http://schemas.openxmlformats.org/drawingml/2006/main"/>
-          <a:ln xmlns:a="http://schemas.openxmlformats.org/drawingml/2006/main" w="0">
-            <a:noFill/>
-            <a:prstDash val="solid"/>
-          </a:ln>
-        </p:spPr>
-        <p:txBody>
-          <a:bodyPr xmlns:a="http://schemas.openxmlformats.org/drawingml/2006/main">
-            <a:noAutofit/>
-          </a:bodyPr>
-          <a:lstStyle xmlns:a="http://schemas.openxmlformats.org/drawingml/2006/main">
-            <a:defPPr>
-              <a:defRPr sz="2250" b="1">
-                <a:solidFill>
-                  <a:srgbClr val="203149"/>
-                </a:solidFill>
-                <a:latin typeface="DejaVu Sans"/>
-                <a:ea typeface="DejaVu Sans"/>
-                <a:cs typeface="DejaVu Sans"/>
-              </a:defRPr>
-            </a:defPPr>
-          </a:lstStyle>
-          <a:p xmlns:a="http://schemas.openxmlformats.org/drawingml/2006/main">
-            <a:pPr>
-              <a:defRPr sz="2250" b="1">
-                <a:solidFill>
-                  <a:srgbClr val="203149"/>
-                </a:solidFill>
-                <a:latin typeface="DejaVu Sans"/>
-                <a:ea typeface="DejaVu Sans"/>
-                <a:cs typeface="DejaVu Sans"/>
-              </a:defRPr>
-            </a:pPr>
-            <a:r>
-              <a:rPr sz="2250" b="1">
-                <a:solidFill>
-                  <a:srgbClr val="203149"/>
-                </a:solidFill>
-                <a:latin typeface="DejaVu Sans"/>
-                <a:ea typeface="DejaVu Sans"/>
-                <a:cs typeface="DejaVu Sans"/>
-              </a:rPr>
-              <a:t>Problema encontrado</a:t>
-            </a:r>
-          </a:p>
-        </p:txBody>
-      </p:sp>
-      <p:sp>
-        <p:nvSpPr>
-          <p:cNvPr id="4" name="text-3">
-            <a:extLst xmlns:a="http://schemas.openxmlformats.org/drawingml/2006/main">
-              <a:ext uri="{FF2B5EF4-FFF2-40B4-BE49-F238E27FC236}">
-                <a16:creationId xmlns:a16="http://schemas.microsoft.com/office/drawing/2014/main" id="{FAD6D8B4-DDCF-44F3-B933-CB78AF4F72EF}"/>
-              </a:ext>
-            </a:extLst>
-          </p:cNvPr>
-          <p:cNvSpPr>
-            <a:spLocks xmlns:a="http://schemas.openxmlformats.org/drawingml/2006/main" noGrp="1"/>
-          </p:cNvSpPr>
-          <p:nvPr/>
-        </p:nvSpPr>
-        <p:spPr>
-          <a:xfrm xmlns:a="http://schemas.openxmlformats.org/drawingml/2006/main">
-            <a:off x="6238875" y="1562100"/>
-            <a:ext cx="5334000" cy="438150"/>
-          </a:xfrm>
-          <a:prstGeom xmlns:a="http://schemas.openxmlformats.org/drawingml/2006/main" prst="rect">
-            <a:avLst/>
-          </a:prstGeom>
-          <a:noFill xmlns:a="http://schemas.openxmlformats.org/drawingml/2006/main"/>
-          <a:ln xmlns:a="http://schemas.openxmlformats.org/drawingml/2006/main" w="0">
-            <a:noFill/>
-            <a:prstDash val="solid"/>
-          </a:ln>
-        </p:spPr>
-        <p:txBody>
-          <a:bodyPr xmlns:a="http://schemas.openxmlformats.org/drawingml/2006/main">
-            <a:noAutofit/>
-          </a:bodyPr>
-          <a:lstStyle xmlns:a="http://schemas.openxmlformats.org/drawingml/2006/main">
-            <a:defPPr>
-              <a:defRPr sz="2250" b="1">
-                <a:solidFill>
-                  <a:srgbClr val="203149"/>
-                </a:solidFill>
-                <a:latin typeface="DejaVu Sans"/>
-                <a:ea typeface="DejaVu Sans"/>
-                <a:cs typeface="DejaVu Sans"/>
-              </a:defRPr>
-            </a:defPPr>
-          </a:lstStyle>
-          <a:p xmlns:a="http://schemas.openxmlformats.org/drawingml/2006/main">
-            <a:pPr>
-              <a:defRPr sz="2250" b="1">
-                <a:solidFill>
-                  <a:srgbClr val="203149"/>
-                </a:solidFill>
-                <a:latin typeface="DejaVu Sans"/>
-                <a:ea typeface="DejaVu Sans"/>
-                <a:cs typeface="DejaVu Sans"/>
-              </a:defRPr>
-            </a:pPr>
-            <a:r>
-              <a:rPr sz="2250" b="1">
-                <a:solidFill>
-                  <a:srgbClr val="203149"/>
-                </a:solidFill>
-                <a:latin typeface="DejaVu Sans"/>
-                <a:ea typeface="DejaVu Sans"/>
-                <a:cs typeface="DejaVu Sans"/>
-              </a:rPr>
-              <a:t>Ajuste aplicado</a:t>
-            </a:r>
-          </a:p>
-        </p:txBody>
-      </p:sp>
-      <p:sp>
-        <p:nvSpPr>
-          <p:cNvPr id="5" name="text-4">
-            <a:extLst xmlns:a="http://schemas.openxmlformats.org/drawingml/2006/main">
-              <a:ext uri="{FF2B5EF4-FFF2-40B4-BE49-F238E27FC236}">
-                <a16:creationId xmlns:a16="http://schemas.microsoft.com/office/drawing/2014/main" id="{E64D6E0A-3E16-434C-A2B7-BD4A93708808}"/>
-              </a:ext>
-            </a:extLst>
-          </p:cNvPr>
-          <p:cNvSpPr>
-            <a:spLocks xmlns:a="http://schemas.openxmlformats.org/drawingml/2006/main" noGrp="1"/>
-          </p:cNvSpPr>
-          <p:nvPr/>
-        </p:nvSpPr>
-        <p:spPr>
-          <a:xfrm xmlns:a="http://schemas.openxmlformats.org/drawingml/2006/main">
-            <a:off x="609600" y="2266950"/>
-            <a:ext cx="5095875" cy="2190750"/>
-          </a:xfrm>
-          <a:prstGeom xmlns:a="http://schemas.openxmlformats.org/drawingml/2006/main" prst="rect">
-            <a:avLst/>
-          </a:prstGeom>
-          <a:noFill xmlns:a="http://schemas.openxmlformats.org/drawingml/2006/main"/>
-          <a:ln xmlns:a="http://schemas.openxmlformats.org/drawingml/2006/main" w="0">
-            <a:noFill/>
-            <a:prstDash val="solid"/>
-          </a:ln>
-        </p:spPr>
-        <p:txBody>
-          <a:bodyPr xmlns:a="http://schemas.openxmlformats.org/drawingml/2006/main">
-            <a:noAutofit/>
-          </a:bodyPr>
-          <a:lstStyle xmlns:a="http://schemas.openxmlformats.org/drawingml/2006/main">
-            <a:defPPr>
-              <a:defRPr sz="2100" b="0">
-                <a:solidFill>
-                  <a:srgbClr val="203149"/>
-                </a:solidFill>
-                <a:latin typeface="DejaVu Sans"/>
-                <a:ea typeface="DejaVu Sans"/>
-                <a:cs typeface="DejaVu Sans"/>
-              </a:defRPr>
-            </a:defPPr>
-          </a:lstStyle>
-          <a:p xmlns:a="http://schemas.openxmlformats.org/drawingml/2006/main">
-            <a:pPr>
-              <a:defRPr sz="2100" b="0">
-                <a:solidFill>
-                  <a:srgbClr val="203149"/>
-                </a:solidFill>
-                <a:latin typeface="DejaVu Sans"/>
-                <a:ea typeface="DejaVu Sans"/>
-                <a:cs typeface="DejaVu Sans"/>
-              </a:defRPr>
-            </a:pPr>
-            <a:r>
-              <a:rPr sz="2100" b="0">
-                <a:solidFill>
-                  <a:srgbClr val="203149"/>
-                </a:solidFill>
-                <a:latin typeface="DejaVu Sans"/>
-                <a:ea typeface="DejaVu Sans"/>
-                <a:cs typeface="DejaVu Sans"/>
-              </a:rPr>
-              <a:t>Símbolos ilegíveis</a:t>
-            </a:r>
-          </a:p>
-          <a:p xmlns:a="http://schemas.openxmlformats.org/drawingml/2006/main">
-            <a:r>
-              <a:t/>
-            </a:r>
-          </a:p>
-          <a:p xmlns:a="http://schemas.openxmlformats.org/drawingml/2006/main">
-            <a:pPr>
-              <a:defRPr sz="2100" b="0">
-                <a:solidFill>
-                  <a:srgbClr val="203149"/>
-                </a:solidFill>
-                <a:latin typeface="DejaVu Sans"/>
-                <a:ea typeface="DejaVu Sans"/>
-                <a:cs typeface="DejaVu Sans"/>
-              </a:defRPr>
-            </a:pPr>
-            <a:r>
-              <a:rPr sz="2100" b="0">
-                <a:solidFill>
-                  <a:srgbClr val="203149"/>
-                </a:solidFill>
-                <a:latin typeface="DejaVu Sans"/>
-                <a:ea typeface="DejaVu Sans"/>
-                <a:cs typeface="DejaVu Sans"/>
-              </a:rPr>
-              <a:t>Imagem pouco nítida</a:t>
-            </a:r>
-          </a:p>
-          <a:p xmlns:a="http://schemas.openxmlformats.org/drawingml/2006/main">
-            <a:r>
-              <a:t/>
-            </a:r>
-          </a:p>
-          <a:p xmlns:a="http://schemas.openxmlformats.org/drawingml/2006/main">
-            <a:pPr>
-              <a:defRPr sz="2100" b="0">
-                <a:solidFill>
-                  <a:srgbClr val="203149"/>
-                </a:solidFill>
-                <a:latin typeface="DejaVu Sans"/>
-                <a:ea typeface="DejaVu Sans"/>
-                <a:cs typeface="DejaVu Sans"/>
-              </a:defRPr>
-            </a:pPr>
-            <a:r>
-              <a:rPr sz="2100" b="0">
-                <a:solidFill>
-                  <a:srgbClr val="203149"/>
-                </a:solidFill>
-                <a:latin typeface="DejaVu Sans"/>
-                <a:ea typeface="DejaVu Sans"/>
-                <a:cs typeface="DejaVu Sans"/>
-              </a:rPr>
-              <a:t>Rosto estranho no cliente</a:t>
-            </a:r>
-          </a:p>
-        </p:txBody>
-      </p:sp>
-      <p:sp>
-        <p:nvSpPr>
-          <p:cNvPr id="6" name="text-5">
-            <a:extLst xmlns:a="http://schemas.openxmlformats.org/drawingml/2006/main">
-              <a:ext uri="{FF2B5EF4-FFF2-40B4-BE49-F238E27FC236}">
-                <a16:creationId xmlns:a16="http://schemas.microsoft.com/office/drawing/2014/main" id="{7441517F-90CD-4885-93BE-96A414C3E27F}"/>
-              </a:ext>
-            </a:extLst>
-          </p:cNvPr>
-          <p:cNvSpPr>
-            <a:spLocks xmlns:a="http://schemas.openxmlformats.org/drawingml/2006/main" noGrp="1"/>
-          </p:cNvSpPr>
-          <p:nvPr/>
-        </p:nvSpPr>
-        <p:spPr>
-          <a:xfrm xmlns:a="http://schemas.openxmlformats.org/drawingml/2006/main">
-            <a:off x="6238875" y="2266950"/>
-            <a:ext cx="5286375" cy="2190750"/>
-          </a:xfrm>
-          <a:prstGeom xmlns:a="http://schemas.openxmlformats.org/drawingml/2006/main" prst="rect">
-            <a:avLst/>
-          </a:prstGeom>
-          <a:noFill xmlns:a="http://schemas.openxmlformats.org/drawingml/2006/main"/>
-          <a:ln xmlns:a="http://schemas.openxmlformats.org/drawingml/2006/main" w="0">
-            <a:noFill/>
-            <a:prstDash val="solid"/>
-          </a:ln>
-        </p:spPr>
-        <p:txBody>
-          <a:bodyPr xmlns:a="http://schemas.openxmlformats.org/drawingml/2006/main">
-            <a:noAutofit/>
-          </a:bodyPr>
-          <a:lstStyle xmlns:a="http://schemas.openxmlformats.org/drawingml/2006/main">
-            <a:defPPr>
-              <a:defRPr sz="2100" b="0">
-                <a:solidFill>
-                  <a:srgbClr val="203149"/>
-                </a:solidFill>
-                <a:latin typeface="DejaVu Sans"/>
-                <a:ea typeface="DejaVu Sans"/>
-                <a:cs typeface="DejaVu Sans"/>
-              </a:defRPr>
-            </a:defPPr>
-          </a:lstStyle>
-          <a:p xmlns:a="http://schemas.openxmlformats.org/drawingml/2006/main">
-            <a:pPr>
-              <a:defRPr sz="2100" b="0">
-                <a:solidFill>
-                  <a:srgbClr val="203149"/>
-                </a:solidFill>
-                <a:latin typeface="DejaVu Sans"/>
-                <a:ea typeface="DejaVu Sans"/>
-                <a:cs typeface="DejaVu Sans"/>
-              </a:defRPr>
-            </a:pPr>
-            <a:r>
-              <a:rPr sz="2100" b="0">
-                <a:solidFill>
-                  <a:srgbClr val="203149"/>
-                </a:solidFill>
-                <a:latin typeface="DejaVu Sans"/>
-                <a:ea typeface="DejaVu Sans"/>
-                <a:cs typeface="DejaVu Sans"/>
-              </a:rPr>
-              <a:t>Instruções por extenso</a:t>
-            </a:r>
-          </a:p>
-          <a:p xmlns:a="http://schemas.openxmlformats.org/drawingml/2006/main">
-            <a:r>
-              <a:t/>
-            </a:r>
-          </a:p>
-          <a:p xmlns:a="http://schemas.openxmlformats.org/drawingml/2006/main">
-            <a:pPr>
-              <a:defRPr sz="2100" b="0">
-                <a:solidFill>
-                  <a:srgbClr val="203149"/>
-                </a:solidFill>
-                <a:latin typeface="DejaVu Sans"/>
-                <a:ea typeface="DejaVu Sans"/>
-                <a:cs typeface="DejaVu Sans"/>
-              </a:defRPr>
-            </a:pPr>
-            <a:r>
-              <a:rPr sz="2100" b="0">
-                <a:solidFill>
-                  <a:srgbClr val="203149"/>
-                </a:solidFill>
-                <a:latin typeface="DejaVu Sans"/>
-                <a:ea typeface="DejaVu Sans"/>
-                <a:cs typeface="DejaVu Sans"/>
-              </a:rPr>
-              <a:t>Desenho na resolução final</a:t>
-            </a:r>
-          </a:p>
-          <a:p xmlns:a="http://schemas.openxmlformats.org/drawingml/2006/main">
-            <a:r>
-              <a:t/>
-            </a:r>
-          </a:p>
-          <a:p xmlns:a="http://schemas.openxmlformats.org/drawingml/2006/main">
-            <a:pPr>
-              <a:defRPr sz="2100" b="0">
-                <a:solidFill>
-                  <a:srgbClr val="203149"/>
-                </a:solidFill>
-                <a:latin typeface="DejaVu Sans"/>
-                <a:ea typeface="DejaVu Sans"/>
-                <a:cs typeface="DejaVu Sans"/>
-              </a:defRPr>
-            </a:pPr>
-            <a:r>
-              <a:rPr sz="2100" b="0">
-                <a:solidFill>
-                  <a:srgbClr val="203149"/>
-                </a:solidFill>
-                <a:latin typeface="DejaVu Sans"/>
-                <a:ea typeface="DejaVu Sans"/>
-                <a:cs typeface="DejaVu Sans"/>
-              </a:rPr>
-              <a:t>Dois olhos e sorriso central</a:t>
-            </a:r>
-          </a:p>
-        </p:txBody>
-      </p:sp>
-      <p:sp>
-        <p:nvSpPr>
-          <p:cNvPr id="7" name="text-6">
-            <a:extLst xmlns:a="http://schemas.openxmlformats.org/drawingml/2006/main">
-              <a:ext uri="{FF2B5EF4-FFF2-40B4-BE49-F238E27FC236}">
-                <a16:creationId xmlns:a16="http://schemas.microsoft.com/office/drawing/2014/main" id="{CCD48114-1BAC-4E75-AAB1-0FDC1C7DE1E1}"/>
-              </a:ext>
-            </a:extLst>
-          </p:cNvPr>
-          <p:cNvSpPr>
-            <a:spLocks xmlns:a="http://schemas.openxmlformats.org/drawingml/2006/main" noGrp="1"/>
-          </p:cNvSpPr>
-          <p:nvPr/>
-        </p:nvSpPr>
-        <p:spPr>
-          <a:xfrm xmlns:a="http://schemas.openxmlformats.org/drawingml/2006/main">
-            <a:off x="609600" y="5172075"/>
-            <a:ext cx="10858500" cy="981075"/>
-          </a:xfrm>
-          <a:prstGeom xmlns:a="http://schemas.openxmlformats.org/drawingml/2006/main" prst="rect">
-            <a:avLst/>
-          </a:prstGeom>
-          <a:noFill xmlns:a="http://schemas.openxmlformats.org/drawingml/2006/main"/>
-          <a:ln xmlns:a="http://schemas.openxmlformats.org/drawingml/2006/main" w="0">
-            <a:noFill/>
-            <a:prstDash val="solid"/>
-          </a:ln>
-        </p:spPr>
-        <p:txBody>
-          <a:bodyPr xmlns:a="http://schemas.openxmlformats.org/drawingml/2006/main">
-            <a:noAutofit/>
-          </a:bodyPr>
-          <a:lstStyle xmlns:a="http://schemas.openxmlformats.org/drawingml/2006/main">
-            <a:defPPr>
-              <a:defRPr sz="2250" b="0">
-                <a:solidFill>
-                  <a:srgbClr val="275F83"/>
-                </a:solidFill>
-                <a:latin typeface="DejaVu Sans"/>
-                <a:ea typeface="DejaVu Sans"/>
-                <a:cs typeface="DejaVu Sans"/>
-              </a:defRPr>
-            </a:defPPr>
-          </a:lstStyle>
-          <a:p xmlns:a="http://schemas.openxmlformats.org/drawingml/2006/main">
-            <a:pPr>
-              <a:defRPr sz="2250" b="0">
-                <a:solidFill>
-                  <a:srgbClr val="275F83"/>
-                </a:solidFill>
-                <a:latin typeface="DejaVu Sans"/>
-                <a:ea typeface="DejaVu Sans"/>
-                <a:cs typeface="DejaVu Sans"/>
-              </a:defRPr>
-            </a:pPr>
-            <a:r>
-              <a:rPr sz="2250" b="0">
-                <a:solidFill>
-                  <a:srgbClr val="275F83"/>
-                </a:solidFill>
-                <a:latin typeface="DejaVu Sans"/>
-                <a:ea typeface="DejaVu Sans"/>
-                <a:cs typeface="DejaVu Sans"/>
-              </a:rPr>
-              <a:t>Verificações de regras, telas e reinício</a:t>
-            </a:r>
-          </a:p>
-          <a:p xmlns:a="http://schemas.openxmlformats.org/drawingml/2006/main">
-            <a:pPr>
-              <a:defRPr sz="2250" b="0">
-                <a:solidFill>
-                  <a:srgbClr val="275F83"/>
-                </a:solidFill>
-                <a:latin typeface="DejaVu Sans"/>
-                <a:ea typeface="DejaVu Sans"/>
-                <a:cs typeface="DejaVu Sans"/>
-              </a:defRPr>
-            </a:pPr>
-            <a:r>
-              <a:rPr sz="2250" b="0">
-                <a:solidFill>
-                  <a:srgbClr val="275F83"/>
-                </a:solidFill>
-                <a:latin typeface="DejaVu Sans"/>
-                <a:ea typeface="DejaVu Sans"/>
-                <a:cs typeface="DejaVu Sans"/>
-              </a:rPr>
-              <a:t>Partidas e avaliação visual no Windows</a:t>
-            </a:r>
-          </a:p>
-        </p:txBody>
-      </p:sp>
-    </p:spTree>
-    <p:extLst>
-      <p:ext uri="{BB962C8B-B14F-4D97-AF65-F5344CB8AC3E}">
-        <p14:creationId xmlns:p14="http://schemas.microsoft.com/office/powerpoint/2010/main" val="386798727"/>
-      </p:ext>
-    </p:extLst>
-  </p:cSld>
-</p:sld>
-</file>
-
-<file path=ppt/slides/slide12.xml><?xml version="1.0" encoding="utf-8"?>
-<p:sld xmlns:p="http://schemas.openxmlformats.org/presentationml/2006/main">
-  <p:cSld>
-    <p:bg>
-      <p:bgPr>
-        <a:solidFill xmlns:a="http://schemas.openxmlformats.org/drawingml/2006/main">
-          <a:srgbClr val="FFF8E7"/>
-        </a:solidFill>
-      </p:bgPr>
-    </p:bg>
-    <p:spTree>
-      <p:nvGrpSpPr>
-        <p:cNvPr id="1" name=""/>
-        <p:cNvGrpSpPr/>
-        <p:nvPr/>
-      </p:nvGrpSpPr>
-      <p:grpSpPr>
-        <a:xfrm xmlns:a="http://schemas.openxmlformats.org/drawingml/2006/main"/>
-      </p:grpSpPr>
-      <p:sp>
-        <p:nvSpPr>
-          <p:cNvPr id="6" name="text-0">
-            <a:extLst xmlns:a="http://schemas.openxmlformats.org/drawingml/2006/main">
-              <a:ext uri="{FF2B5EF4-FFF2-40B4-BE49-F238E27FC236}">
-                <a16:creationId xmlns:a16="http://schemas.microsoft.com/office/drawing/2014/main" id="{80B60B78-3D03-4455-8CE5-E9EC6E448B20}"/>
-              </a:ext>
-            </a:extLst>
-          </p:cNvPr>
-          <p:cNvSpPr>
-            <a:spLocks xmlns:a="http://schemas.openxmlformats.org/drawingml/2006/main" noGrp="1"/>
-          </p:cNvSpPr>
-          <p:nvPr/>
-        </p:nvSpPr>
-        <p:spPr>
-          <a:xfrm xmlns:a="http://schemas.openxmlformats.org/drawingml/2006/main">
-            <a:off x="609600" y="400050"/>
-            <a:ext cx="10972800" cy="876300"/>
-          </a:xfrm>
-          <a:prstGeom xmlns:a="http://schemas.openxmlformats.org/drawingml/2006/main" prst="rect">
-            <a:avLst/>
-          </a:prstGeom>
-          <a:noFill xmlns:a="http://schemas.openxmlformats.org/drawingml/2006/main"/>
-          <a:ln xmlns:a="http://schemas.openxmlformats.org/drawingml/2006/main" w="0">
-            <a:noFill/>
-            <a:prstDash val="solid"/>
-          </a:ln>
-        </p:spPr>
-        <p:txBody>
-          <a:bodyPr xmlns:a="http://schemas.openxmlformats.org/drawingml/2006/main">
-            <a:noAutofit/>
-          </a:bodyPr>
-          <a:lstStyle xmlns:a="http://schemas.openxmlformats.org/drawingml/2006/main">
-            <a:defPPr>
-              <a:defRPr sz="3300" b="1">
-                <a:solidFill>
-                  <a:srgbClr val="203149"/>
-                </a:solidFill>
-                <a:latin typeface="DejaVu Sans"/>
-                <a:ea typeface="DejaVu Sans"/>
-                <a:cs typeface="DejaVu Sans"/>
-              </a:defRPr>
-            </a:defPPr>
-          </a:lstStyle>
-          <a:p xmlns:a="http://schemas.openxmlformats.org/drawingml/2006/main">
-            <a:pPr>
-              <a:defRPr sz="3300" b="1">
-                <a:solidFill>
-                  <a:srgbClr val="203149"/>
-                </a:solidFill>
-                <a:latin typeface="DejaVu Sans"/>
-                <a:ea typeface="DejaVu Sans"/>
-                <a:cs typeface="DejaVu Sans"/>
-              </a:defRPr>
-            </a:pPr>
-            <a:r>
-              <a:rPr sz="3300" b="1">
-                <a:solidFill>
-                  <a:srgbClr val="203149"/>
-                </a:solidFill>
-                <a:latin typeface="DejaVu Sans"/>
-                <a:ea typeface="DejaVu Sans"/>
-                <a:cs typeface="DejaVu Sans"/>
-              </a:rPr>
-              <a:t>Participação da equipe e da IA</a:t>
-            </a:r>
-          </a:p>
-        </p:txBody>
-      </p:sp>
-      <p:sp>
-        <p:nvSpPr>
-          <p:cNvPr id="2" name="text-1">
-            <a:extLst xmlns:a="http://schemas.openxmlformats.org/drawingml/2006/main">
-              <a:ext uri="{FF2B5EF4-FFF2-40B4-BE49-F238E27FC236}">
-                <a16:creationId xmlns:a16="http://schemas.microsoft.com/office/drawing/2014/main" id="{5451326B-75D9-4ACA-832E-0F73F6CF170B}"/>
-              </a:ext>
-            </a:extLst>
-          </p:cNvPr>
-          <p:cNvSpPr>
-            <a:spLocks xmlns:a="http://schemas.openxmlformats.org/drawingml/2006/main" noGrp="1"/>
-          </p:cNvSpPr>
-          <p:nvPr/>
-        </p:nvSpPr>
-        <p:spPr>
-          <a:xfrm xmlns:a="http://schemas.openxmlformats.org/drawingml/2006/main">
-            <a:off x="11239500" y="6419850"/>
-            <a:ext cx="457200" cy="238125"/>
-          </a:xfrm>
-          <a:prstGeom xmlns:a="http://schemas.openxmlformats.org/drawingml/2006/main" prst="rect">
-            <a:avLst/>
-          </a:prstGeom>
-          <a:noFill xmlns:a="http://schemas.openxmlformats.org/drawingml/2006/main"/>
-          <a:ln xmlns:a="http://schemas.openxmlformats.org/drawingml/2006/main" w="0">
-            <a:noFill/>
-            <a:prstDash val="solid"/>
-          </a:ln>
-        </p:spPr>
-        <p:txBody>
-          <a:bodyPr xmlns:a="http://schemas.openxmlformats.org/drawingml/2006/main">
-            <a:noAutofit/>
-          </a:bodyPr>
-          <a:lstStyle xmlns:a="http://schemas.openxmlformats.org/drawingml/2006/main">
-            <a:defPPr>
-              <a:defRPr sz="1350" b="0">
-                <a:solidFill>
-                  <a:srgbClr val="526773"/>
-                </a:solidFill>
-                <a:latin typeface="DejaVu Sans"/>
-                <a:ea typeface="DejaVu Sans"/>
-                <a:cs typeface="DejaVu Sans"/>
-              </a:defRPr>
-            </a:defPPr>
-          </a:lstStyle>
-          <a:p xmlns:a="http://schemas.openxmlformats.org/drawingml/2006/main">
-            <a:pPr>
-              <a:defRPr sz="1350" b="0">
-                <a:solidFill>
-                  <a:srgbClr val="526773"/>
-                </a:solidFill>
-                <a:latin typeface="DejaVu Sans"/>
-                <a:ea typeface="DejaVu Sans"/>
-                <a:cs typeface="DejaVu Sans"/>
-              </a:defRPr>
-            </a:pPr>
-            <a:r>
-              <a:rPr sz="1350" b="0">
-                <a:solidFill>
-                  <a:srgbClr val="526773"/>
-                </a:solidFill>
-                <a:latin typeface="DejaVu Sans"/>
-                <a:ea typeface="DejaVu Sans"/>
-                <a:cs typeface="DejaVu Sans"/>
-              </a:rPr>
-              <a:t>12</a:t>
-            </a:r>
-          </a:p>
-        </p:txBody>
-      </p:sp>
-      <p:sp>
-        <p:nvSpPr>
-          <p:cNvPr id="3" name="text-2">
-            <a:extLst xmlns:a="http://schemas.openxmlformats.org/drawingml/2006/main">
-              <a:ext uri="{FF2B5EF4-FFF2-40B4-BE49-F238E27FC236}">
-                <a16:creationId xmlns:a16="http://schemas.microsoft.com/office/drawing/2014/main" id="{42B82E19-63B8-4F2E-B3BD-85669673E937}"/>
-              </a:ext>
-            </a:extLst>
-          </p:cNvPr>
-          <p:cNvSpPr>
-            <a:spLocks xmlns:a="http://schemas.openxmlformats.org/drawingml/2006/main" noGrp="1"/>
-          </p:cNvSpPr>
-          <p:nvPr/>
-        </p:nvSpPr>
-        <p:spPr>
-          <a:xfrm xmlns:a="http://schemas.openxmlformats.org/drawingml/2006/main">
-            <a:off x="609600" y="1581150"/>
-            <a:ext cx="10953750" cy="1000125"/>
-          </a:xfrm>
-          <a:prstGeom xmlns:a="http://schemas.openxmlformats.org/drawingml/2006/main" prst="rect">
-            <a:avLst/>
-          </a:prstGeom>
-          <a:noFill xmlns:a="http://schemas.openxmlformats.org/drawingml/2006/main"/>
-          <a:ln xmlns:a="http://schemas.openxmlformats.org/drawingml/2006/main" w="0">
-            <a:noFill/>
-            <a:prstDash val="solid"/>
-          </a:ln>
-        </p:spPr>
-        <p:txBody>
-          <a:bodyPr xmlns:a="http://schemas.openxmlformats.org/drawingml/2006/main">
-            <a:noAutofit/>
-          </a:bodyPr>
-          <a:lstStyle xmlns:a="http://schemas.openxmlformats.org/drawingml/2006/main">
-            <a:defPPr>
-              <a:defRPr sz="2250" b="1">
-                <a:solidFill>
-                  <a:srgbClr val="203149"/>
-                </a:solidFill>
-                <a:latin typeface="DejaVu Sans"/>
-                <a:ea typeface="DejaVu Sans"/>
-                <a:cs typeface="DejaVu Sans"/>
-              </a:defRPr>
-            </a:defPPr>
-          </a:lstStyle>
-          <a:p xmlns:a="http://schemas.openxmlformats.org/drawingml/2006/main">
-            <a:pPr>
-              <a:defRPr sz="2250" b="1">
-                <a:solidFill>
-                  <a:srgbClr val="203149"/>
-                </a:solidFill>
-                <a:latin typeface="DejaVu Sans"/>
-                <a:ea typeface="DejaVu Sans"/>
-                <a:cs typeface="DejaVu Sans"/>
-              </a:defRPr>
-            </a:pPr>
-            <a:r>
-              <a:rPr sz="2250" b="1">
-                <a:solidFill>
-                  <a:srgbClr val="203149"/>
-                </a:solidFill>
-                <a:latin typeface="DejaVu Sans"/>
-                <a:ea typeface="DejaVu Sans"/>
-                <a:cs typeface="DejaVu Sans"/>
-              </a:rPr>
-              <a:t>Daniel Pena, John Lucas e Lucas Oliveira</a:t>
-            </a:r>
-          </a:p>
-          <a:p xmlns:a="http://schemas.openxmlformats.org/drawingml/2006/main">
-            <a:pPr>
-              <a:defRPr sz="2250" b="1">
-                <a:solidFill>
-                  <a:srgbClr val="203149"/>
-                </a:solidFill>
-                <a:latin typeface="DejaVu Sans"/>
-                <a:ea typeface="DejaVu Sans"/>
-                <a:cs typeface="DejaVu Sans"/>
-              </a:defRPr>
-            </a:pPr>
-            <a:r>
-              <a:rPr sz="2250" b="1">
-                <a:solidFill>
-                  <a:srgbClr val="203149"/>
-                </a:solidFill>
-                <a:latin typeface="DejaVu Sans"/>
-                <a:ea typeface="DejaVu Sans"/>
-                <a:cs typeface="DejaVu Sans"/>
-              </a:rPr>
-              <a:t>Escolha do tema, corrida lateral, obstáculos e itens</a:t>
-            </a:r>
-          </a:p>
-        </p:txBody>
-      </p:sp>
-      <p:sp>
-        <p:nvSpPr>
-          <p:cNvPr id="4" name="text-3">
-            <a:extLst xmlns:a="http://schemas.openxmlformats.org/drawingml/2006/main">
-              <a:ext uri="{FF2B5EF4-FFF2-40B4-BE49-F238E27FC236}">
-                <a16:creationId xmlns:a16="http://schemas.microsoft.com/office/drawing/2014/main" id="{0E47D83C-44F3-4753-BF8D-8AC80EEDB726}"/>
-              </a:ext>
-            </a:extLst>
-          </p:cNvPr>
-          <p:cNvSpPr>
-            <a:spLocks xmlns:a="http://schemas.openxmlformats.org/drawingml/2006/main" noGrp="1"/>
-          </p:cNvSpPr>
-          <p:nvPr/>
-        </p:nvSpPr>
-        <p:spPr>
-          <a:xfrm xmlns:a="http://schemas.openxmlformats.org/drawingml/2006/main">
-            <a:off x="609600" y="3076575"/>
-            <a:ext cx="10953750" cy="952500"/>
-          </a:xfrm>
-          <a:prstGeom xmlns:a="http://schemas.openxmlformats.org/drawingml/2006/main" prst="rect">
-            <a:avLst/>
-          </a:prstGeom>
-          <a:noFill xmlns:a="http://schemas.openxmlformats.org/drawingml/2006/main"/>
-          <a:ln xmlns:a="http://schemas.openxmlformats.org/drawingml/2006/main" w="0">
-            <a:noFill/>
-            <a:prstDash val="solid"/>
-          </a:ln>
-        </p:spPr>
-        <p:txBody>
-          <a:bodyPr xmlns:a="http://schemas.openxmlformats.org/drawingml/2006/main">
-            <a:noAutofit/>
-          </a:bodyPr>
-          <a:lstStyle xmlns:a="http://schemas.openxmlformats.org/drawingml/2006/main">
-            <a:defPPr>
-              <a:defRPr sz="2100" b="0">
-                <a:solidFill>
-                  <a:srgbClr val="203149"/>
-                </a:solidFill>
-                <a:latin typeface="DejaVu Sans"/>
-                <a:ea typeface="DejaVu Sans"/>
-                <a:cs typeface="DejaVu Sans"/>
-              </a:defRPr>
-            </a:defPPr>
-          </a:lstStyle>
-          <a:p xmlns:a="http://schemas.openxmlformats.org/drawingml/2006/main">
-            <a:pPr>
-              <a:defRPr sz="2100" b="0">
-                <a:solidFill>
-                  <a:srgbClr val="203149"/>
-                </a:solidFill>
-                <a:latin typeface="DejaVu Sans"/>
-                <a:ea typeface="DejaVu Sans"/>
-                <a:cs typeface="DejaVu Sans"/>
-              </a:defRPr>
-            </a:pPr>
-            <a:r>
-              <a:rPr sz="2100" b="0">
-                <a:solidFill>
-                  <a:srgbClr val="203149"/>
-                </a:solidFill>
-                <a:latin typeface="DejaVu Sans"/>
-                <a:ea typeface="DejaVu Sans"/>
-                <a:cs typeface="DejaVu Sans"/>
-              </a:rPr>
-              <a:t>Daniel Pena</a:t>
-            </a:r>
-          </a:p>
-          <a:p xmlns:a="http://schemas.openxmlformats.org/drawingml/2006/main">
-            <a:pPr>
-              <a:defRPr sz="2100" b="0">
-                <a:solidFill>
-                  <a:srgbClr val="203149"/>
-                </a:solidFill>
-                <a:latin typeface="DejaVu Sans"/>
-                <a:ea typeface="DejaVu Sans"/>
-                <a:cs typeface="DejaVu Sans"/>
-              </a:defRPr>
-            </a:pPr>
-            <a:r>
-              <a:rPr sz="2100" b="0">
-                <a:solidFill>
-                  <a:srgbClr val="203149"/>
-                </a:solidFill>
-                <a:latin typeface="DejaVu Sans"/>
-                <a:ea typeface="DejaVu Sans"/>
-                <a:cs typeface="DejaVu Sans"/>
-              </a:rPr>
-              <a:t>Testes no Windows e retorno sobre as correções</a:t>
-            </a:r>
-          </a:p>
-        </p:txBody>
-      </p:sp>
-      <p:sp>
-        <p:nvSpPr>
-          <p:cNvPr id="5" name="text-4">
-            <a:extLst xmlns:a="http://schemas.openxmlformats.org/drawingml/2006/main">
-              <a:ext uri="{FF2B5EF4-FFF2-40B4-BE49-F238E27FC236}">
-                <a16:creationId xmlns:a16="http://schemas.microsoft.com/office/drawing/2014/main" id="{49B06712-237C-4F44-AB72-977B88D0D543}"/>
-              </a:ext>
-            </a:extLst>
-          </p:cNvPr>
-          <p:cNvSpPr>
-            <a:spLocks xmlns:a="http://schemas.openxmlformats.org/drawingml/2006/main" noGrp="1"/>
-          </p:cNvSpPr>
-          <p:nvPr/>
-        </p:nvSpPr>
-        <p:spPr>
-          <a:xfrm xmlns:a="http://schemas.openxmlformats.org/drawingml/2006/main">
-            <a:off x="609600" y="4572000"/>
-            <a:ext cx="10953750" cy="1428750"/>
-          </a:xfrm>
-          <a:prstGeom xmlns:a="http://schemas.openxmlformats.org/drawingml/2006/main" prst="rect">
-            <a:avLst/>
-          </a:prstGeom>
-          <a:noFill xmlns:a="http://schemas.openxmlformats.org/drawingml/2006/main"/>
-          <a:ln xmlns:a="http://schemas.openxmlformats.org/drawingml/2006/main" w="0">
-            <a:noFill/>
-            <a:prstDash val="solid"/>
-          </a:ln>
-        </p:spPr>
-        <p:txBody>
-          <a:bodyPr xmlns:a="http://schemas.openxmlformats.org/drawingml/2006/main">
-            <a:noAutofit/>
-          </a:bodyPr>
-          <a:lstStyle xmlns:a="http://schemas.openxmlformats.org/drawingml/2006/main">
-            <a:defPPr>
-              <a:defRPr sz="2100" b="0">
-                <a:solidFill>
-                  <a:srgbClr val="203149"/>
-                </a:solidFill>
-                <a:latin typeface="DejaVu Sans"/>
-                <a:ea typeface="DejaVu Sans"/>
-                <a:cs typeface="DejaVu Sans"/>
-              </a:defRPr>
-            </a:defPPr>
-          </a:lstStyle>
-          <a:p xmlns:a="http://schemas.openxmlformats.org/drawingml/2006/main">
-            <a:pPr>
-              <a:defRPr sz="2100" b="0">
-                <a:solidFill>
-                  <a:srgbClr val="203149"/>
-                </a:solidFill>
-                <a:latin typeface="DejaVu Sans"/>
-                <a:ea typeface="DejaVu Sans"/>
-                <a:cs typeface="DejaVu Sans"/>
-              </a:defRPr>
-            </a:pPr>
-            <a:r>
-              <a:rPr sz="2100" b="0">
-                <a:solidFill>
-                  <a:srgbClr val="203149"/>
-                </a:solidFill>
-                <a:latin typeface="DejaVu Sans"/>
-                <a:ea typeface="DejaVu Sans"/>
-                <a:cs typeface="DejaVu Sans"/>
-              </a:rPr>
-              <a:t>ChatGPT / Codex, OpenAI</a:t>
-            </a:r>
-          </a:p>
-          <a:p xmlns:a="http://schemas.openxmlformats.org/drawingml/2006/main">
-            <a:pPr>
-              <a:defRPr sz="2100" b="0">
-                <a:solidFill>
-                  <a:srgbClr val="203149"/>
-                </a:solidFill>
-                <a:latin typeface="DejaVu Sans"/>
-                <a:ea typeface="DejaVu Sans"/>
-                <a:cs typeface="DejaVu Sans"/>
-              </a:defRPr>
-            </a:pPr>
-            <a:r>
-              <a:rPr sz="2100" b="0">
-                <a:solidFill>
-                  <a:srgbClr val="203149"/>
-                </a:solidFill>
-                <a:latin typeface="DejaVu Sans"/>
-                <a:ea typeface="DejaVu Sans"/>
-                <a:cs typeface="DejaVu Sans"/>
-              </a:rPr>
-              <a:t>Geração de grande parte do código e apoio aos desenhos,</a:t>
-            </a:r>
-          </a:p>
-          <a:p xmlns:a="http://schemas.openxmlformats.org/drawingml/2006/main">
-            <a:pPr>
-              <a:defRPr sz="2100" b="0">
-                <a:solidFill>
-                  <a:srgbClr val="203149"/>
-                </a:solidFill>
-                <a:latin typeface="DejaVu Sans"/>
-                <a:ea typeface="DejaVu Sans"/>
-                <a:cs typeface="DejaVu Sans"/>
-              </a:defRPr>
-            </a:pPr>
-            <a:r>
-              <a:rPr sz="2100" b="0">
-                <a:solidFill>
-                  <a:srgbClr val="203149"/>
-                </a:solidFill>
-                <a:latin typeface="DejaVu Sans"/>
-                <a:ea typeface="DejaVu Sans"/>
-                <a:cs typeface="DejaVu Sans"/>
-              </a:rPr>
-              <a:t>testes automatizados, documentação e apresentação</a:t>
-            </a:r>
-          </a:p>
-        </p:txBody>
-      </p:sp>
-    </p:spTree>
-    <p:extLst>
-      <p:ext uri="{BB962C8B-B14F-4D97-AF65-F5344CB8AC3E}">
-        <p14:creationId xmlns:p14="http://schemas.microsoft.com/office/powerpoint/2010/main" val="382423432"/>
-      </p:ext>
-    </p:extLst>
-  </p:cSld>
-</p:sld>
-</file>
-
-<file path=ppt/slides/slide13.xml><?xml version="1.0" encoding="utf-8"?>
-<p:sld xmlns:p="http://schemas.openxmlformats.org/presentationml/2006/main">
-  <p:cSld>
-    <p:bg>
-      <p:bgPr>
-        <a:solidFill xmlns:a="http://schemas.openxmlformats.org/drawingml/2006/main">
-          <a:srgbClr val="FFF8E7"/>
-        </a:solidFill>
-      </p:bgPr>
-    </p:bg>
-    <p:spTree>
-      <p:nvGrpSpPr>
-        <p:cNvPr id="1" name=""/>
-        <p:cNvGrpSpPr/>
-        <p:nvPr/>
-      </p:nvGrpSpPr>
-      <p:grpSpPr>
-        <a:xfrm xmlns:a="http://schemas.openxmlformats.org/drawingml/2006/main"/>
-      </p:grpSpPr>
-      <p:sp>
-        <p:nvSpPr>
-          <p:cNvPr id="6" name="text-0">
-            <a:extLst xmlns:a="http://schemas.openxmlformats.org/drawingml/2006/main">
-              <a:ext uri="{FF2B5EF4-FFF2-40B4-BE49-F238E27FC236}">
-                <a16:creationId xmlns:a16="http://schemas.microsoft.com/office/drawing/2014/main" id="{A9DA479E-6541-42B9-9B46-4E9DA49455C4}"/>
-              </a:ext>
-            </a:extLst>
-          </p:cNvPr>
-          <p:cNvSpPr>
-            <a:spLocks xmlns:a="http://schemas.openxmlformats.org/drawingml/2006/main" noGrp="1"/>
-          </p:cNvSpPr>
-          <p:nvPr/>
-        </p:nvSpPr>
-        <p:spPr>
-          <a:xfrm xmlns:a="http://schemas.openxmlformats.org/drawingml/2006/main">
-            <a:off x="609600" y="400050"/>
-            <a:ext cx="10972800" cy="876300"/>
-          </a:xfrm>
-          <a:prstGeom xmlns:a="http://schemas.openxmlformats.org/drawingml/2006/main" prst="rect">
-            <a:avLst/>
-          </a:prstGeom>
-          <a:noFill xmlns:a="http://schemas.openxmlformats.org/drawingml/2006/main"/>
-          <a:ln xmlns:a="http://schemas.openxmlformats.org/drawingml/2006/main" w="0">
-            <a:noFill/>
-            <a:prstDash val="solid"/>
-          </a:ln>
-        </p:spPr>
-        <p:txBody>
-          <a:bodyPr xmlns:a="http://schemas.openxmlformats.org/drawingml/2006/main">
-            <a:noAutofit/>
-          </a:bodyPr>
-          <a:lstStyle xmlns:a="http://schemas.openxmlformats.org/drawingml/2006/main">
-            <a:defPPr>
-              <a:defRPr sz="3300" b="1">
-                <a:solidFill>
-                  <a:srgbClr val="203149"/>
-                </a:solidFill>
-                <a:latin typeface="DejaVu Sans"/>
-                <a:ea typeface="DejaVu Sans"/>
-                <a:cs typeface="DejaVu Sans"/>
-              </a:defRPr>
-            </a:defPPr>
-          </a:lstStyle>
-          <a:p xmlns:a="http://schemas.openxmlformats.org/drawingml/2006/main">
-            <a:pPr>
-              <a:defRPr sz="3300" b="1">
-                <a:solidFill>
-                  <a:srgbClr val="203149"/>
-                </a:solidFill>
-                <a:latin typeface="DejaVu Sans"/>
-                <a:ea typeface="DejaVu Sans"/>
-                <a:cs typeface="DejaVu Sans"/>
-              </a:defRPr>
-            </a:pPr>
-            <a:r>
-              <a:rPr sz="3300" b="1">
-                <a:solidFill>
-                  <a:srgbClr val="203149"/>
-                </a:solidFill>
-                <a:latin typeface="DejaVu Sans"/>
-                <a:ea typeface="DejaVu Sans"/>
-                <a:cs typeface="DejaVu Sans"/>
-              </a:rPr>
-              <a:t>Materiais e créditos</a:t>
-            </a:r>
-          </a:p>
-        </p:txBody>
-      </p:sp>
-      <p:sp>
-        <p:nvSpPr>
-          <p:cNvPr id="2" name="text-1">
-            <a:extLst xmlns:a="http://schemas.openxmlformats.org/drawingml/2006/main">
-              <a:ext uri="{FF2B5EF4-FFF2-40B4-BE49-F238E27FC236}">
-                <a16:creationId xmlns:a16="http://schemas.microsoft.com/office/drawing/2014/main" id="{EAC9FCDF-5635-4546-B8AD-238A082CD70B}"/>
-              </a:ext>
-            </a:extLst>
-          </p:cNvPr>
-          <p:cNvSpPr>
-            <a:spLocks xmlns:a="http://schemas.openxmlformats.org/drawingml/2006/main" noGrp="1"/>
-          </p:cNvSpPr>
-          <p:nvPr/>
-        </p:nvSpPr>
-        <p:spPr>
-          <a:xfrm xmlns:a="http://schemas.openxmlformats.org/drawingml/2006/main">
-            <a:off x="11239500" y="6419850"/>
-            <a:ext cx="457200" cy="238125"/>
-          </a:xfrm>
-          <a:prstGeom xmlns:a="http://schemas.openxmlformats.org/drawingml/2006/main" prst="rect">
-            <a:avLst/>
-          </a:prstGeom>
-          <a:noFill xmlns:a="http://schemas.openxmlformats.org/drawingml/2006/main"/>
-          <a:ln xmlns:a="http://schemas.openxmlformats.org/drawingml/2006/main" w="0">
-            <a:noFill/>
-            <a:prstDash val="solid"/>
-          </a:ln>
-        </p:spPr>
-        <p:txBody>
-          <a:bodyPr xmlns:a="http://schemas.openxmlformats.org/drawingml/2006/main">
-            <a:noAutofit/>
-          </a:bodyPr>
-          <a:lstStyle xmlns:a="http://schemas.openxmlformats.org/drawingml/2006/main">
-            <a:defPPr>
-              <a:defRPr sz="1350" b="0">
-                <a:solidFill>
-                  <a:srgbClr val="526773"/>
-                </a:solidFill>
-                <a:latin typeface="DejaVu Sans"/>
-                <a:ea typeface="DejaVu Sans"/>
-                <a:cs typeface="DejaVu Sans"/>
-              </a:defRPr>
-            </a:defPPr>
-          </a:lstStyle>
-          <a:p xmlns:a="http://schemas.openxmlformats.org/drawingml/2006/main">
-            <a:pPr>
-              <a:defRPr sz="1350" b="0">
-                <a:solidFill>
-                  <a:srgbClr val="526773"/>
-                </a:solidFill>
-                <a:latin typeface="DejaVu Sans"/>
-                <a:ea typeface="DejaVu Sans"/>
-                <a:cs typeface="DejaVu Sans"/>
-              </a:defRPr>
-            </a:pPr>
-            <a:r>
-              <a:rPr sz="1350" b="0">
-                <a:solidFill>
-                  <a:srgbClr val="526773"/>
-                </a:solidFill>
-                <a:latin typeface="DejaVu Sans"/>
-                <a:ea typeface="DejaVu Sans"/>
-                <a:cs typeface="DejaVu Sans"/>
-              </a:rPr>
-              <a:t>13</a:t>
-            </a:r>
-          </a:p>
-        </p:txBody>
-      </p:sp>
-      <p:sp>
-        <p:nvSpPr>
-          <p:cNvPr id="3" name="text-2">
-            <a:extLst xmlns:a="http://schemas.openxmlformats.org/drawingml/2006/main">
-              <a:ext uri="{FF2B5EF4-FFF2-40B4-BE49-F238E27FC236}">
-                <a16:creationId xmlns:a16="http://schemas.microsoft.com/office/drawing/2014/main" id="{B2C6E5FA-96BD-42E4-A52C-E6867F3B7206}"/>
-              </a:ext>
-            </a:extLst>
-          </p:cNvPr>
-          <p:cNvSpPr>
-            <a:spLocks xmlns:a="http://schemas.openxmlformats.org/drawingml/2006/main" noGrp="1"/>
-          </p:cNvSpPr>
-          <p:nvPr/>
-        </p:nvSpPr>
-        <p:spPr>
-          <a:xfrm xmlns:a="http://schemas.openxmlformats.org/drawingml/2006/main">
-            <a:off x="609600" y="1609725"/>
-            <a:ext cx="10906125" cy="1619250"/>
-          </a:xfrm>
-          <a:prstGeom xmlns:a="http://schemas.openxmlformats.org/drawingml/2006/main" prst="rect">
-            <a:avLst/>
-          </a:prstGeom>
-          <a:noFill xmlns:a="http://schemas.openxmlformats.org/drawingml/2006/main"/>
-          <a:ln xmlns:a="http://schemas.openxmlformats.org/drawingml/2006/main" w="0">
-            <a:noFill/>
-            <a:prstDash val="solid"/>
-          </a:ln>
-        </p:spPr>
-        <p:txBody>
-          <a:bodyPr xmlns:a="http://schemas.openxmlformats.org/drawingml/2006/main">
-            <a:noAutofit/>
-          </a:bodyPr>
-          <a:lstStyle xmlns:a="http://schemas.openxmlformats.org/drawingml/2006/main">
-            <a:defPPr>
-              <a:defRPr sz="2250" b="0">
-                <a:solidFill>
-                  <a:srgbClr val="203149"/>
-                </a:solidFill>
-                <a:latin typeface="DejaVu Sans"/>
-                <a:ea typeface="DejaVu Sans"/>
-                <a:cs typeface="DejaVu Sans"/>
-              </a:defRPr>
-            </a:defPPr>
-          </a:lstStyle>
-          <a:p xmlns:a="http://schemas.openxmlformats.org/drawingml/2006/main">
-            <a:pPr>
-              <a:defRPr sz="2250" b="0">
-                <a:solidFill>
-                  <a:srgbClr val="203149"/>
-                </a:solidFill>
-                <a:latin typeface="DejaVu Sans"/>
-                <a:ea typeface="DejaVu Sans"/>
-                <a:cs typeface="DejaVu Sans"/>
-              </a:defRPr>
-            </a:pPr>
-            <a:r>
-              <a:rPr sz="2250" b="0">
-                <a:solidFill>
-                  <a:srgbClr val="203149"/>
-                </a:solidFill>
-                <a:latin typeface="DejaVu Sans"/>
-                <a:ea typeface="DejaVu Sans"/>
-                <a:cs typeface="DejaVu Sans"/>
-              </a:rPr>
-              <a:t>Projeto orientado pelo enunciado do professor</a:t>
-            </a:r>
-          </a:p>
-          <a:p xmlns:a="http://schemas.openxmlformats.org/drawingml/2006/main">
-            <a:pPr>
-              <a:defRPr sz="2250" b="0">
-                <a:solidFill>
-                  <a:srgbClr val="203149"/>
-                </a:solidFill>
-                <a:latin typeface="DejaVu Sans"/>
-                <a:ea typeface="DejaVu Sans"/>
-                <a:cs typeface="DejaVu Sans"/>
-              </a:defRPr>
-            </a:pPr>
-            <a:r>
-              <a:rPr sz="2250" b="0">
-                <a:solidFill>
-                  <a:srgbClr val="203149"/>
-                </a:solidFill>
-                <a:latin typeface="DejaVu Sans"/>
-                <a:ea typeface="DejaVu Sans"/>
-                <a:cs typeface="DejaVu Sans"/>
-              </a:rPr>
-              <a:t>Python 3 e Pygame 2.6.1</a:t>
-            </a:r>
-          </a:p>
-          <a:p xmlns:a="http://schemas.openxmlformats.org/drawingml/2006/main">
-            <a:pPr>
-              <a:defRPr sz="2250" b="0">
-                <a:solidFill>
-                  <a:srgbClr val="203149"/>
-                </a:solidFill>
-                <a:latin typeface="DejaVu Sans"/>
-                <a:ea typeface="DejaVu Sans"/>
-                <a:cs typeface="DejaVu Sans"/>
-              </a:defRPr>
-            </a:pPr>
-            <a:r>
-              <a:rPr sz="2250" b="0">
-                <a:solidFill>
-                  <a:srgbClr val="203149"/>
-                </a:solidFill>
-                <a:latin typeface="DejaVu Sans"/>
-                <a:ea typeface="DejaVu Sans"/>
-                <a:cs typeface="DejaVu Sans"/>
-              </a:rPr>
-              <a:t>Personagens e cenário desenhados no código</a:t>
-            </a:r>
-          </a:p>
-        </p:txBody>
-      </p:sp>
-      <p:sp>
-        <p:nvSpPr>
-          <p:cNvPr id="4" name="text-3">
-            <a:extLst xmlns:a="http://schemas.openxmlformats.org/drawingml/2006/main">
-              <a:ext uri="{FF2B5EF4-FFF2-40B4-BE49-F238E27FC236}">
-                <a16:creationId xmlns:a16="http://schemas.microsoft.com/office/drawing/2014/main" id="{4A9412FB-36D3-49DA-BA9D-636ED6EF8281}"/>
-              </a:ext>
-            </a:extLst>
-          </p:cNvPr>
-          <p:cNvSpPr>
-            <a:spLocks xmlns:a="http://schemas.openxmlformats.org/drawingml/2006/main" noGrp="1"/>
-          </p:cNvSpPr>
-          <p:nvPr/>
-        </p:nvSpPr>
-        <p:spPr>
-          <a:xfrm xmlns:a="http://schemas.openxmlformats.org/drawingml/2006/main">
-            <a:off x="609600" y="3714750"/>
-            <a:ext cx="10858500" cy="1428750"/>
-          </a:xfrm>
-          <a:prstGeom xmlns:a="http://schemas.openxmlformats.org/drawingml/2006/main" prst="rect">
-            <a:avLst/>
-          </a:prstGeom>
-          <a:noFill xmlns:a="http://schemas.openxmlformats.org/drawingml/2006/main"/>
-          <a:ln xmlns:a="http://schemas.openxmlformats.org/drawingml/2006/main" w="0">
-            <a:noFill/>
-            <a:prstDash val="solid"/>
-          </a:ln>
-        </p:spPr>
-        <p:txBody>
-          <a:bodyPr xmlns:a="http://schemas.openxmlformats.org/drawingml/2006/main">
-            <a:noAutofit/>
-          </a:bodyPr>
-          <a:lstStyle xmlns:a="http://schemas.openxmlformats.org/drawingml/2006/main">
-            <a:defPPr>
-              <a:defRPr sz="2175" b="1">
-                <a:solidFill>
-                  <a:srgbClr val="275F83"/>
-                </a:solidFill>
-                <a:latin typeface="DejaVu Sans"/>
-                <a:ea typeface="DejaVu Sans"/>
-                <a:cs typeface="DejaVu Sans"/>
-              </a:defRPr>
-            </a:defPPr>
-          </a:lstStyle>
-          <a:p xmlns:a="http://schemas.openxmlformats.org/drawingml/2006/main">
-            <a:pPr>
-              <a:defRPr sz="2175" b="1">
-                <a:solidFill>
-                  <a:srgbClr val="275F83"/>
-                </a:solidFill>
-                <a:latin typeface="DejaVu Sans"/>
-                <a:ea typeface="DejaVu Sans"/>
-                <a:cs typeface="DejaVu Sans"/>
-              </a:defRPr>
-            </a:pPr>
-            <a:r>
-              <a:rPr sz="2175" b="1">
-                <a:solidFill>
-                  <a:srgbClr val="275F83"/>
-                </a:solidFill>
-                <a:latin typeface="DejaVu Sans"/>
-                <a:ea typeface="DejaVu Sans"/>
-                <a:cs typeface="DejaVu Sans"/>
-              </a:rPr>
-              <a:t>Música</a:t>
-            </a:r>
-          </a:p>
-          <a:p xmlns:a="http://schemas.openxmlformats.org/drawingml/2006/main">
-            <a:pPr>
-              <a:defRPr sz="2175" b="1">
-                <a:solidFill>
-                  <a:srgbClr val="275F83"/>
-                </a:solidFill>
-                <a:latin typeface="DejaVu Sans"/>
-                <a:ea typeface="DejaVu Sans"/>
-                <a:cs typeface="DejaVu Sans"/>
-              </a:defRPr>
-            </a:pPr>
-            <a:r>
-              <a:rPr sz="2175" b="1">
-                <a:solidFill>
-                  <a:srgbClr val="275F83"/>
-                </a:solidFill>
-                <a:latin typeface="DejaVu Sans"/>
-                <a:ea typeface="DejaVu Sans"/>
-                <a:cs typeface="DejaVu Sans"/>
-              </a:rPr>
-              <a:t>House In a Forest Loop, de HorrorPen</a:t>
-            </a:r>
-          </a:p>
-          <a:p xmlns:a="http://schemas.openxmlformats.org/drawingml/2006/main">
-            <a:pPr>
-              <a:defRPr sz="2175" b="1">
-                <a:solidFill>
-                  <a:srgbClr val="275F83"/>
-                </a:solidFill>
-                <a:latin typeface="DejaVu Sans"/>
-                <a:ea typeface="DejaVu Sans"/>
-                <a:cs typeface="DejaVu Sans"/>
-              </a:defRPr>
-            </a:pPr>
-            <a:r>
-              <a:rPr sz="2175" b="1">
-                <a:solidFill>
-                  <a:srgbClr val="275F83"/>
-                </a:solidFill>
-                <a:latin typeface="DejaVu Sans"/>
-                <a:ea typeface="DejaVu Sans"/>
-                <a:cs typeface="DejaVu Sans"/>
-              </a:rPr>
-              <a:t>Licença CC BY 3.0</a:t>
-            </a:r>
-          </a:p>
-        </p:txBody>
-      </p:sp>
-      <p:sp>
-        <p:nvSpPr>
-          <p:cNvPr id="5" name="text-4">
-            <a:extLst xmlns:a="http://schemas.openxmlformats.org/drawingml/2006/main">
-              <a:ext uri="{FF2B5EF4-FFF2-40B4-BE49-F238E27FC236}">
-                <a16:creationId xmlns:a16="http://schemas.microsoft.com/office/drawing/2014/main" id="{E3261EF3-714B-4CCE-AA4E-B0DF3F4864A5}"/>
-              </a:ext>
-            </a:extLst>
-          </p:cNvPr>
-          <p:cNvSpPr>
-            <a:spLocks xmlns:a="http://schemas.openxmlformats.org/drawingml/2006/main" noGrp="1"/>
-          </p:cNvSpPr>
-          <p:nvPr/>
-        </p:nvSpPr>
-        <p:spPr>
-          <a:xfrm xmlns:a="http://schemas.openxmlformats.org/drawingml/2006/main">
-            <a:off x="609600" y="5667375"/>
-            <a:ext cx="10858500" cy="714375"/>
-          </a:xfrm>
-          <a:prstGeom xmlns:a="http://schemas.openxmlformats.org/drawingml/2006/main" prst="rect">
-            <a:avLst/>
-          </a:prstGeom>
-          <a:noFill xmlns:a="http://schemas.openxmlformats.org/drawingml/2006/main"/>
-          <a:ln xmlns:a="http://schemas.openxmlformats.org/drawingml/2006/main" w="0">
-            <a:noFill/>
-            <a:prstDash val="solid"/>
-          </a:ln>
-        </p:spPr>
-        <p:txBody>
-          <a:bodyPr xmlns:a="http://schemas.openxmlformats.org/drawingml/2006/main">
-            <a:noAutofit/>
-          </a:bodyPr>
-          <a:lstStyle xmlns:a="http://schemas.openxmlformats.org/drawingml/2006/main">
-            <a:defPPr>
-              <a:defRPr sz="1875" b="0">
-                <a:solidFill>
-                  <a:srgbClr val="203149"/>
-                </a:solidFill>
-                <a:latin typeface="DejaVu Sans"/>
-                <a:ea typeface="DejaVu Sans"/>
-                <a:cs typeface="DejaVu Sans"/>
-              </a:defRPr>
-            </a:defPPr>
-          </a:lstStyle>
-          <a:p xmlns:a="http://schemas.openxmlformats.org/drawingml/2006/main">
-            <a:pPr>
-              <a:defRPr sz="1875" b="0">
-                <a:solidFill>
-                  <a:srgbClr val="203149"/>
-                </a:solidFill>
-                <a:latin typeface="DejaVu Sans"/>
-                <a:ea typeface="DejaVu Sans"/>
-                <a:cs typeface="DejaVu Sans"/>
-              </a:defRPr>
-            </a:pPr>
-            <a:r>
-              <a:rPr sz="1875" b="0">
-                <a:solidFill>
-                  <a:srgbClr val="203149"/>
-                </a:solidFill>
-                <a:latin typeface="DejaVu Sans"/>
-                <a:ea typeface="DejaVu Sans"/>
-                <a:cs typeface="DejaVu Sans"/>
-              </a:rPr>
-              <a:t>Fontes, licenças e uso de IA documentados no repositório.</a:t>
-            </a:r>
-          </a:p>
-          <a:p xmlns:a="http://schemas.openxmlformats.org/drawingml/2006/main">
-            <a:pPr>
-              <a:defRPr sz="1875" b="0">
-                <a:solidFill>
-                  <a:srgbClr val="203149"/>
-                </a:solidFill>
-                <a:latin typeface="DejaVu Sans"/>
-                <a:ea typeface="DejaVu Sans"/>
-                <a:cs typeface="DejaVu Sans"/>
-              </a:defRPr>
-            </a:pPr>
-            <a:r>
-              <a:rPr sz="1875" b="0">
-                <a:solidFill>
-                  <a:srgbClr val="203149"/>
-                </a:solidFill>
-                <a:latin typeface="DejaVu Sans"/>
-                <a:ea typeface="DejaVu Sans"/>
-                <a:cs typeface="DejaVu Sans"/>
-              </a:rPr>
-              <a:t>Sem código reutilizado dos três jogos indicados.</a:t>
-            </a:r>
-          </a:p>
-        </p:txBody>
-      </p:sp>
-    </p:spTree>
-    <p:extLst>
-      <p:ext uri="{BB962C8B-B14F-4D97-AF65-F5344CB8AC3E}">
-        <p14:creationId xmlns:p14="http://schemas.microsoft.com/office/powerpoint/2010/main" val="9691650"/>
-      </p:ext>
-    </p:extLst>
-  </p:cSld>
-</p:sld>
-</file>
-
-<file path=ppt/slides/slide14.xml><?xml version="1.0" encoding="utf-8"?>
-<p:sld xmlns:p="http://schemas.openxmlformats.org/presentationml/2006/main">
-  <p:cSld>
-    <p:bg>
-      <p:bgPr>
-        <a:solidFill xmlns:a="http://schemas.openxmlformats.org/drawingml/2006/main">
-          <a:srgbClr val="FFF8E7"/>
-        </a:solidFill>
-      </p:bgPr>
-    </p:bg>
-    <p:spTree>
-      <p:nvGrpSpPr>
-        <p:cNvPr id="1" name=""/>
-        <p:cNvGrpSpPr/>
-        <p:nvPr/>
-      </p:nvGrpSpPr>
-      <p:grpSpPr>
-        <a:xfrm xmlns:a="http://schemas.openxmlformats.org/drawingml/2006/main"/>
-      </p:grpSpPr>
-      <p:sp>
-        <p:nvSpPr>
-          <p:cNvPr id="6" name="text-0">
-            <a:extLst xmlns:a="http://schemas.openxmlformats.org/drawingml/2006/main">
-              <a:ext uri="{FF2B5EF4-FFF2-40B4-BE49-F238E27FC236}">
-                <a16:creationId xmlns:a16="http://schemas.microsoft.com/office/drawing/2014/main" id="{75CE753E-537F-4B4F-B787-E4FC9C7290E2}"/>
-              </a:ext>
-            </a:extLst>
-          </p:cNvPr>
-          <p:cNvSpPr>
-            <a:spLocks xmlns:a="http://schemas.openxmlformats.org/drawingml/2006/main" noGrp="1"/>
-          </p:cNvSpPr>
-          <p:nvPr/>
-        </p:nvSpPr>
-        <p:spPr>
-          <a:xfrm xmlns:a="http://schemas.openxmlformats.org/drawingml/2006/main">
-            <a:off x="609600" y="400050"/>
-            <a:ext cx="10972800" cy="876300"/>
-          </a:xfrm>
-          <a:prstGeom xmlns:a="http://schemas.openxmlformats.org/drawingml/2006/main" prst="rect">
-            <a:avLst/>
-          </a:prstGeom>
-          <a:noFill xmlns:a="http://schemas.openxmlformats.org/drawingml/2006/main"/>
-          <a:ln xmlns:a="http://schemas.openxmlformats.org/drawingml/2006/main" w="0">
-            <a:noFill/>
-            <a:prstDash val="solid"/>
-          </a:ln>
-        </p:spPr>
-        <p:txBody>
-          <a:bodyPr xmlns:a="http://schemas.openxmlformats.org/drawingml/2006/main">
-            <a:noAutofit/>
-          </a:bodyPr>
-          <a:lstStyle xmlns:a="http://schemas.openxmlformats.org/drawingml/2006/main">
-            <a:defPPr>
-              <a:defRPr sz="3300" b="1">
-                <a:solidFill>
-                  <a:srgbClr val="203149"/>
-                </a:solidFill>
-                <a:latin typeface="DejaVu Sans"/>
-                <a:ea typeface="DejaVu Sans"/>
-                <a:cs typeface="DejaVu Sans"/>
-              </a:defRPr>
-            </a:defPPr>
-          </a:lstStyle>
-          <a:p xmlns:a="http://schemas.openxmlformats.org/drawingml/2006/main">
-            <a:pPr>
-              <a:defRPr sz="3300" b="1">
-                <a:solidFill>
-                  <a:srgbClr val="203149"/>
-                </a:solidFill>
-                <a:latin typeface="DejaVu Sans"/>
-                <a:ea typeface="DejaVu Sans"/>
-                <a:cs typeface="DejaVu Sans"/>
-              </a:defRPr>
-            </a:pPr>
-            <a:r>
-              <a:rPr sz="3300" b="1">
-                <a:solidFill>
-                  <a:srgbClr val="203149"/>
-                </a:solidFill>
-                <a:latin typeface="DejaVu Sans"/>
-                <a:ea typeface="DejaVu Sans"/>
-                <a:cs typeface="DejaVu Sans"/>
-              </a:rPr>
-              <a:t>Demonstração do jogo</a:t>
-            </a:r>
-          </a:p>
-        </p:txBody>
-      </p:sp>
-      <p:sp>
-        <p:nvSpPr>
-          <p:cNvPr id="2" name="text-1">
-            <a:extLst xmlns:a="http://schemas.openxmlformats.org/drawingml/2006/main">
-              <a:ext uri="{FF2B5EF4-FFF2-40B4-BE49-F238E27FC236}">
-                <a16:creationId xmlns:a16="http://schemas.microsoft.com/office/drawing/2014/main" id="{37878A60-DE2B-48A4-9DA7-045452BCC90F}"/>
-              </a:ext>
-            </a:extLst>
-          </p:cNvPr>
-          <p:cNvSpPr>
-            <a:spLocks xmlns:a="http://schemas.openxmlformats.org/drawingml/2006/main" noGrp="1"/>
-          </p:cNvSpPr>
-          <p:nvPr/>
-        </p:nvSpPr>
-        <p:spPr>
-          <a:xfrm xmlns:a="http://schemas.openxmlformats.org/drawingml/2006/main">
-            <a:off x="11239500" y="6419850"/>
-            <a:ext cx="457200" cy="238125"/>
-          </a:xfrm>
-          <a:prstGeom xmlns:a="http://schemas.openxmlformats.org/drawingml/2006/main" prst="rect">
-            <a:avLst/>
-          </a:prstGeom>
-          <a:noFill xmlns:a="http://schemas.openxmlformats.org/drawingml/2006/main"/>
-          <a:ln xmlns:a="http://schemas.openxmlformats.org/drawingml/2006/main" w="0">
-            <a:noFill/>
-            <a:prstDash val="solid"/>
-          </a:ln>
-        </p:spPr>
-        <p:txBody>
-          <a:bodyPr xmlns:a="http://schemas.openxmlformats.org/drawingml/2006/main">
-            <a:noAutofit/>
-          </a:bodyPr>
-          <a:lstStyle xmlns:a="http://schemas.openxmlformats.org/drawingml/2006/main">
-            <a:defPPr>
-              <a:defRPr sz="1350" b="0">
-                <a:solidFill>
-                  <a:srgbClr val="526773"/>
-                </a:solidFill>
-                <a:latin typeface="DejaVu Sans"/>
-                <a:ea typeface="DejaVu Sans"/>
-                <a:cs typeface="DejaVu Sans"/>
-              </a:defRPr>
-            </a:defPPr>
-          </a:lstStyle>
-          <a:p xmlns:a="http://schemas.openxmlformats.org/drawingml/2006/main">
-            <a:pPr>
-              <a:defRPr sz="1350" b="0">
-                <a:solidFill>
-                  <a:srgbClr val="526773"/>
-                </a:solidFill>
-                <a:latin typeface="DejaVu Sans"/>
-                <a:ea typeface="DejaVu Sans"/>
-                <a:cs typeface="DejaVu Sans"/>
-              </a:defRPr>
-            </a:pPr>
-            <a:r>
-              <a:rPr sz="1350" b="0">
-                <a:solidFill>
-                  <a:srgbClr val="526773"/>
-                </a:solidFill>
-                <a:latin typeface="DejaVu Sans"/>
-                <a:ea typeface="DejaVu Sans"/>
-                <a:cs typeface="DejaVu Sans"/>
-              </a:rPr>
-              <a:t>14</a:t>
-            </a:r>
-          </a:p>
-        </p:txBody>
-      </p:sp>
-      <p:pic>
-        <p:nvPicPr>
-          <p:cNvPr id="3" name="">
-            <a:extLst xmlns:a="http://schemas.openxmlformats.org/drawingml/2006/main">
-              <a:ext uri="{FF2B5EF4-FFF2-40B4-BE49-F238E27FC236}">
-                <a16:creationId xmlns:a16="http://schemas.microsoft.com/office/drawing/2014/main" id="{57D8BFCC-7733-4031-88DD-295573B30770}"/>
-              </a:ext>
-            </a:extLst>
-          </p:cNvPr>
-          <p:cNvPicPr>
-            <a:picLocks xmlns:a="http://schemas.openxmlformats.org/drawingml/2006/main" noChangeAspect="1"/>
-          </p:cNvPicPr>
-          <p:nvPr/>
-        </p:nvPicPr>
-        <p:blipFill>
-          <a:blip xmlns:r="http://schemas.openxmlformats.org/officeDocument/2006/relationships" xmlns:a="http://schemas.openxmlformats.org/drawingml/2006/main" r:embed="R743928fad1194d77"/>
-          <a:stretch xmlns:a="http://schemas.openxmlformats.org/drawingml/2006/main"/>
-        </p:blipFill>
-        <p:spPr>
-          <a:xfrm xmlns:a="http://schemas.openxmlformats.org/drawingml/2006/main">
-            <a:off x="609600" y="1476375"/>
-            <a:ext cx="7620000" cy="4286250"/>
-          </a:xfrm>
-          <a:prstGeom xmlns:a="http://schemas.openxmlformats.org/drawingml/2006/main" prst="rect">
-            <a:avLst/>
-          </a:prstGeom>
-        </p:spPr>
-      </p:pic>
-      <p:sp>
-        <p:nvSpPr>
-          <p:cNvPr id="4" name="text-2">
-            <a:extLst xmlns:a="http://schemas.openxmlformats.org/drawingml/2006/main">
-              <a:ext uri="{FF2B5EF4-FFF2-40B4-BE49-F238E27FC236}">
-                <a16:creationId xmlns:a16="http://schemas.microsoft.com/office/drawing/2014/main" id="{E2C01F06-0388-44F2-A864-46D68B68CE70}"/>
-              </a:ext>
-            </a:extLst>
-          </p:cNvPr>
-          <p:cNvSpPr>
-            <a:spLocks xmlns:a="http://schemas.openxmlformats.org/drawingml/2006/main" noGrp="1"/>
-          </p:cNvSpPr>
-          <p:nvPr/>
-        </p:nvSpPr>
-        <p:spPr>
-          <a:xfrm xmlns:a="http://schemas.openxmlformats.org/drawingml/2006/main">
-            <a:off x="8677275" y="1724025"/>
-            <a:ext cx="2952750" cy="3714750"/>
-          </a:xfrm>
-          <a:prstGeom xmlns:a="http://schemas.openxmlformats.org/drawingml/2006/main" prst="rect">
-            <a:avLst/>
-          </a:prstGeom>
-          <a:noFill xmlns:a="http://schemas.openxmlformats.org/drawingml/2006/main"/>
-          <a:ln xmlns:a="http://schemas.openxmlformats.org/drawingml/2006/main" w="0">
-            <a:noFill/>
-            <a:prstDash val="solid"/>
-          </a:ln>
-        </p:spPr>
-        <p:txBody>
-          <a:bodyPr xmlns:a="http://schemas.openxmlformats.org/drawingml/2006/main">
-            <a:noAutofit/>
-          </a:bodyPr>
-          <a:lstStyle xmlns:a="http://schemas.openxmlformats.org/drawingml/2006/main">
-            <a:defPPr>
-              <a:defRPr sz="2025" b="0">
-                <a:solidFill>
-                  <a:srgbClr val="203149"/>
-                </a:solidFill>
-                <a:latin typeface="DejaVu Sans"/>
-                <a:ea typeface="DejaVu Sans"/>
-                <a:cs typeface="DejaVu Sans"/>
-              </a:defRPr>
-            </a:defPPr>
-          </a:lstStyle>
-          <a:p xmlns:a="http://schemas.openxmlformats.org/drawingml/2006/main">
-            <a:pPr>
-              <a:defRPr sz="2025" b="0">
-                <a:solidFill>
-                  <a:srgbClr val="203149"/>
-                </a:solidFill>
-                <a:latin typeface="DejaVu Sans"/>
-                <a:ea typeface="DejaVu Sans"/>
-                <a:cs typeface="DejaVu Sans"/>
-              </a:defRPr>
-            </a:pPr>
-            <a:r>
-              <a:rPr sz="2025" b="0">
-                <a:solidFill>
-                  <a:srgbClr val="203149"/>
-                </a:solidFill>
-                <a:latin typeface="DejaVu Sans"/>
-                <a:ea typeface="DejaVu Sans"/>
-                <a:cs typeface="DejaVu Sans"/>
-              </a:rPr>
-              <a:t>Menu e início</a:t>
-            </a:r>
-          </a:p>
-          <a:p xmlns:a="http://schemas.openxmlformats.org/drawingml/2006/main">
-            <a:r>
-              <a:t/>
-            </a:r>
-          </a:p>
-          <a:p xmlns:a="http://schemas.openxmlformats.org/drawingml/2006/main">
-            <a:pPr>
-              <a:defRPr sz="2025" b="0">
-                <a:solidFill>
-                  <a:srgbClr val="203149"/>
-                </a:solidFill>
-                <a:latin typeface="DejaVu Sans"/>
-                <a:ea typeface="DejaVu Sans"/>
-                <a:cs typeface="DejaVu Sans"/>
-              </a:defRPr>
-            </a:pPr>
-            <a:r>
-              <a:rPr sz="2025" b="0">
-                <a:solidFill>
-                  <a:srgbClr val="203149"/>
-                </a:solidFill>
-                <a:latin typeface="DejaVu Sans"/>
-                <a:ea typeface="DejaVu Sans"/>
-                <a:cs typeface="DejaVu Sans"/>
-              </a:rPr>
-              <a:t>Corrida e coleta</a:t>
-            </a:r>
-          </a:p>
-          <a:p xmlns:a="http://schemas.openxmlformats.org/drawingml/2006/main">
-            <a:r>
-              <a:t/>
-            </a:r>
-          </a:p>
-          <a:p xmlns:a="http://schemas.openxmlformats.org/drawingml/2006/main">
-            <a:pPr>
-              <a:defRPr sz="2025" b="0">
-                <a:solidFill>
-                  <a:srgbClr val="203149"/>
-                </a:solidFill>
-                <a:latin typeface="DejaVu Sans"/>
-                <a:ea typeface="DejaVu Sans"/>
-                <a:cs typeface="DejaVu Sans"/>
-              </a:defRPr>
-            </a:pPr>
-            <a:r>
-              <a:rPr sz="2025" b="0">
-                <a:solidFill>
-                  <a:srgbClr val="203149"/>
-                </a:solidFill>
-                <a:latin typeface="DejaVu Sans"/>
-                <a:ea typeface="DejaVu Sans"/>
-                <a:cs typeface="DejaVu Sans"/>
-              </a:rPr>
-              <a:t>Pausa e Áudio</a:t>
-            </a:r>
-          </a:p>
-          <a:p xmlns:a="http://schemas.openxmlformats.org/drawingml/2006/main">
-            <a:r>
-              <a:t/>
-            </a:r>
-          </a:p>
-          <a:p xmlns:a="http://schemas.openxmlformats.org/drawingml/2006/main">
-            <a:pPr>
-              <a:defRPr sz="2025" b="0">
-                <a:solidFill>
-                  <a:srgbClr val="203149"/>
-                </a:solidFill>
-                <a:latin typeface="DejaVu Sans"/>
-                <a:ea typeface="DejaVu Sans"/>
-                <a:cs typeface="DejaVu Sans"/>
-              </a:defRPr>
-            </a:pPr>
-            <a:r>
-              <a:rPr sz="2025" b="0">
-                <a:solidFill>
-                  <a:srgbClr val="203149"/>
-                </a:solidFill>
-                <a:latin typeface="DejaVu Sans"/>
-                <a:ea typeface="DejaVu Sans"/>
-                <a:cs typeface="DejaVu Sans"/>
-              </a:rPr>
-              <a:t>Resultado e reinício</a:t>
-            </a:r>
-          </a:p>
-        </p:txBody>
-      </p:sp>
-      <p:sp>
-        <p:nvSpPr>
-          <p:cNvPr id="5" name="text-3">
-            <a:extLst xmlns:a="http://schemas.openxmlformats.org/drawingml/2006/main">
-              <a:ext uri="{FF2B5EF4-FFF2-40B4-BE49-F238E27FC236}">
-                <a16:creationId xmlns:a16="http://schemas.microsoft.com/office/drawing/2014/main" id="{3FA15330-6335-4B3C-A93A-1B0C13AC7518}"/>
-              </a:ext>
-            </a:extLst>
-          </p:cNvPr>
-          <p:cNvSpPr>
-            <a:spLocks xmlns:a="http://schemas.openxmlformats.org/drawingml/2006/main" noGrp="1"/>
-          </p:cNvSpPr>
-          <p:nvPr/>
-        </p:nvSpPr>
-        <p:spPr>
-          <a:xfrm xmlns:a="http://schemas.openxmlformats.org/drawingml/2006/main">
-            <a:off x="609600" y="6019800"/>
-            <a:ext cx="10858500" cy="333375"/>
-          </a:xfrm>
-          <a:prstGeom xmlns:a="http://schemas.openxmlformats.org/drawingml/2006/main" prst="rect">
-            <a:avLst/>
-          </a:prstGeom>
-          <a:noFill xmlns:a="http://schemas.openxmlformats.org/drawingml/2006/main"/>
-          <a:ln xmlns:a="http://schemas.openxmlformats.org/drawingml/2006/main" w="0">
-            <a:noFill/>
-            <a:prstDash val="solid"/>
-          </a:ln>
-        </p:spPr>
-        <p:txBody>
-          <a:bodyPr xmlns:a="http://schemas.openxmlformats.org/drawingml/2006/main">
-            <a:noAutofit/>
-          </a:bodyPr>
-          <a:lstStyle xmlns:a="http://schemas.openxmlformats.org/drawingml/2006/main">
-            <a:defPPr>
-              <a:defRPr sz="1650" b="0">
-                <a:solidFill>
-                  <a:srgbClr val="526773"/>
-                </a:solidFill>
-                <a:latin typeface="DejaVu Sans"/>
-                <a:ea typeface="DejaVu Sans"/>
-                <a:cs typeface="DejaVu Sans"/>
-              </a:defRPr>
-            </a:defPPr>
-          </a:lstStyle>
-          <a:p xmlns:a="http://schemas.openxmlformats.org/drawingml/2006/main">
-            <a:pPr>
-              <a:defRPr sz="1650" b="0">
-                <a:solidFill>
-                  <a:srgbClr val="526773"/>
-                </a:solidFill>
-                <a:latin typeface="DejaVu Sans"/>
-                <a:ea typeface="DejaVu Sans"/>
-                <a:cs typeface="DejaVu Sans"/>
-              </a:defRPr>
-            </a:pPr>
-            <a:r>
-              <a:rPr sz="1650" b="0">
-                <a:solidFill>
-                  <a:srgbClr val="526773"/>
-                </a:solidFill>
-                <a:latin typeface="DejaVu Sans"/>
-                <a:ea typeface="DejaVu Sans"/>
-                <a:cs typeface="DejaVu Sans"/>
-              </a:rPr>
-              <a:t>A demonstração será ao vivo. A imagem ilustra a tela de resultado.</a:t>
-            </a:r>
-          </a:p>
-        </p:txBody>
-      </p:sp>
-    </p:spTree>
-    <p:extLst>
-      <p:ext uri="{BB962C8B-B14F-4D97-AF65-F5344CB8AC3E}">
-        <p14:creationId xmlns:p14="http://schemas.microsoft.com/office/powerpoint/2010/main" val="871935562"/>
+        <p14:creationId xmlns:p14="http://schemas.microsoft.com/office/powerpoint/2010/main" val="799466445"/>
       </p:ext>
     </p:extLst>
   </p:cSld>
@@ -7170,10 +3709,10 @@
       </p:grpSpPr>
       <p:sp>
         <p:nvSpPr>
-          <p:cNvPr id="6" name="text-0">
+          <p:cNvPr id="6" name="">
             <a:extLst xmlns:a="http://schemas.openxmlformats.org/drawingml/2006/main">
               <a:ext uri="{FF2B5EF4-FFF2-40B4-BE49-F238E27FC236}">
-                <a16:creationId xmlns:a16="http://schemas.microsoft.com/office/drawing/2014/main" id="{8E578D29-89C6-4110-B88F-657B231091DC}"/>
+                <a16:creationId xmlns:a16="http://schemas.microsoft.com/office/drawing/2014/main" id="{756DEEDB-2B1A-4823-859E-9B9B537A05DE}"/>
               </a:ext>
             </a:extLst>
           </p:cNvPr>
@@ -7239,10 +3778,10 @@
       </p:sp>
       <p:sp>
         <p:nvSpPr>
-          <p:cNvPr id="2" name="text-1">
+          <p:cNvPr id="2" name="">
             <a:extLst xmlns:a="http://schemas.openxmlformats.org/drawingml/2006/main">
               <a:ext uri="{FF2B5EF4-FFF2-40B4-BE49-F238E27FC236}">
-                <a16:creationId xmlns:a16="http://schemas.microsoft.com/office/drawing/2014/main" id="{E1B76CD7-CF8E-4AAC-ADC3-2568A13EAAB1}"/>
+                <a16:creationId xmlns:a16="http://schemas.microsoft.com/office/drawing/2014/main" id="{1B4FE1D3-1907-445C-A24D-C3E978856611}"/>
               </a:ext>
             </a:extLst>
           </p:cNvPr>
@@ -7253,7 +3792,7 @@
         </p:nvSpPr>
         <p:spPr>
           <a:xfrm xmlns:a="http://schemas.openxmlformats.org/drawingml/2006/main">
-            <a:off x="11239500" y="6419850"/>
+            <a:off x="11239500" y="6429375"/>
             <a:ext cx="457200" cy="238125"/>
           </a:xfrm>
           <a:prstGeom xmlns:a="http://schemas.openxmlformats.org/drawingml/2006/main" prst="rect">
@@ -7308,10 +3847,10 @@
       </p:sp>
       <p:sp>
         <p:nvSpPr>
-          <p:cNvPr id="3" name="text-2">
+          <p:cNvPr id="3" name="">
             <a:extLst xmlns:a="http://schemas.openxmlformats.org/drawingml/2006/main">
               <a:ext uri="{FF2B5EF4-FFF2-40B4-BE49-F238E27FC236}">
-                <a16:creationId xmlns:a16="http://schemas.microsoft.com/office/drawing/2014/main" id="{ACA6AA72-0F15-4F10-9B31-79C1FCB45682}"/>
+                <a16:creationId xmlns:a16="http://schemas.microsoft.com/office/drawing/2014/main" id="{33B5C079-12F4-4F46-A253-C8A89F0DD013}"/>
               </a:ext>
             </a:extLst>
           </p:cNvPr>
@@ -7451,10 +3990,10 @@
       </p:sp>
       <p:sp>
         <p:nvSpPr>
-          <p:cNvPr id="4" name="text-3">
+          <p:cNvPr id="4" name="">
             <a:extLst xmlns:a="http://schemas.openxmlformats.org/drawingml/2006/main">
               <a:ext uri="{FF2B5EF4-FFF2-40B4-BE49-F238E27FC236}">
-                <a16:creationId xmlns:a16="http://schemas.microsoft.com/office/drawing/2014/main" id="{B75E0993-3CCA-4C0D-A8D3-33A72FFB6422}"/>
+                <a16:creationId xmlns:a16="http://schemas.microsoft.com/office/drawing/2014/main" id="{8ED5CED6-7764-4294-A11C-A274842F9BCC}"/>
               </a:ext>
             </a:extLst>
           </p:cNvPr>
@@ -7569,7 +4108,7 @@
           <p:cNvPr id="5" name="">
             <a:extLst xmlns:a="http://schemas.openxmlformats.org/drawingml/2006/main">
               <a:ext uri="{FF2B5EF4-FFF2-40B4-BE49-F238E27FC236}">
-                <a16:creationId xmlns:a16="http://schemas.microsoft.com/office/drawing/2014/main" id="{F1194086-361E-4276-995C-A9624A02BD11}"/>
+                <a16:creationId xmlns:a16="http://schemas.microsoft.com/office/drawing/2014/main" id="{96329649-CB58-4C8D-A3F1-4905B9FC6046}"/>
               </a:ext>
             </a:extLst>
           </p:cNvPr>
@@ -7579,7 +4118,7 @@
           <p:nvPr/>
         </p:nvPicPr>
         <p:blipFill>
-          <a:blip xmlns:r="http://schemas.openxmlformats.org/officeDocument/2006/relationships" xmlns:a="http://schemas.openxmlformats.org/drawingml/2006/main" r:embed="Re8fee7d126a74e77"/>
+          <a:blip xmlns:r="http://schemas.openxmlformats.org/officeDocument/2006/relationships" xmlns:a="http://schemas.openxmlformats.org/drawingml/2006/main" r:embed="Raebd8e3ff6f94566"/>
           <a:stretch xmlns:a="http://schemas.openxmlformats.org/drawingml/2006/main"/>
         </p:blipFill>
         <p:spPr>
@@ -7595,7 +4134,7 @@
     </p:spTree>
     <p:extLst>
       <p:ext uri="{BB962C8B-B14F-4D97-AF65-F5344CB8AC3E}">
-        <p14:creationId xmlns:p14="http://schemas.microsoft.com/office/powerpoint/2010/main" val="686638940"/>
+        <p14:creationId xmlns:p14="http://schemas.microsoft.com/office/powerpoint/2010/main" val="2064444805"/>
       </p:ext>
     </p:extLst>
   </p:cSld>
@@ -7623,10 +4162,10 @@
       </p:grpSpPr>
       <p:sp>
         <p:nvSpPr>
-          <p:cNvPr id="7" name="text-0">
+          <p:cNvPr id="7" name="">
             <a:extLst xmlns:a="http://schemas.openxmlformats.org/drawingml/2006/main">
               <a:ext uri="{FF2B5EF4-FFF2-40B4-BE49-F238E27FC236}">
-                <a16:creationId xmlns:a16="http://schemas.microsoft.com/office/drawing/2014/main" id="{960833C8-8388-493C-8C8D-00832DE58172}"/>
+                <a16:creationId xmlns:a16="http://schemas.microsoft.com/office/drawing/2014/main" id="{724F66CC-1746-4DBF-83E8-6D49E7181566}"/>
               </a:ext>
             </a:extLst>
           </p:cNvPr>
@@ -7692,10 +4231,10 @@
       </p:sp>
       <p:sp>
         <p:nvSpPr>
-          <p:cNvPr id="2" name="text-1">
+          <p:cNvPr id="2" name="">
             <a:extLst xmlns:a="http://schemas.openxmlformats.org/drawingml/2006/main">
               <a:ext uri="{FF2B5EF4-FFF2-40B4-BE49-F238E27FC236}">
-                <a16:creationId xmlns:a16="http://schemas.microsoft.com/office/drawing/2014/main" id="{9D9BFDD4-20CD-4343-B457-6FFF86ECDAEB}"/>
+                <a16:creationId xmlns:a16="http://schemas.microsoft.com/office/drawing/2014/main" id="{38EAF7C9-0D0F-4705-8E21-B259F3638C48}"/>
               </a:ext>
             </a:extLst>
           </p:cNvPr>
@@ -7706,7 +4245,7 @@
         </p:nvSpPr>
         <p:spPr>
           <a:xfrm xmlns:a="http://schemas.openxmlformats.org/drawingml/2006/main">
-            <a:off x="11239500" y="6419850"/>
+            <a:off x="11239500" y="6429375"/>
             <a:ext cx="457200" cy="238125"/>
           </a:xfrm>
           <a:prstGeom xmlns:a="http://schemas.openxmlformats.org/drawingml/2006/main" prst="rect">
@@ -7761,10 +4300,10 @@
       </p:sp>
       <p:sp>
         <p:nvSpPr>
-          <p:cNvPr id="3" name="text-2">
+          <p:cNvPr id="3" name="">
             <a:extLst xmlns:a="http://schemas.openxmlformats.org/drawingml/2006/main">
               <a:ext uri="{FF2B5EF4-FFF2-40B4-BE49-F238E27FC236}">
-                <a16:creationId xmlns:a16="http://schemas.microsoft.com/office/drawing/2014/main" id="{B9D3ADAD-1CF1-469A-9B06-6F2979F775D1}"/>
+                <a16:creationId xmlns:a16="http://schemas.microsoft.com/office/drawing/2014/main" id="{A5ABDC22-C29E-48D2-B5F9-839219F36756}"/>
               </a:ext>
             </a:extLst>
           </p:cNvPr>
@@ -7899,10 +4438,10 @@
       </p:sp>
       <p:sp>
         <p:nvSpPr>
-          <p:cNvPr id="4" name="text-3">
+          <p:cNvPr id="4" name="">
             <a:extLst xmlns:a="http://schemas.openxmlformats.org/drawingml/2006/main">
               <a:ext uri="{FF2B5EF4-FFF2-40B4-BE49-F238E27FC236}">
-                <a16:creationId xmlns:a16="http://schemas.microsoft.com/office/drawing/2014/main" id="{B1AA027B-3AF9-4B39-9842-0B49D844CEB0}"/>
+                <a16:creationId xmlns:a16="http://schemas.microsoft.com/office/drawing/2014/main" id="{A6BB3AF7-E62D-4EE1-B6F7-B664F3B59810}"/>
               </a:ext>
             </a:extLst>
           </p:cNvPr>
@@ -8037,10 +4576,10 @@
       </p:sp>
       <p:sp>
         <p:nvSpPr>
-          <p:cNvPr id="5" name="text-4">
+          <p:cNvPr id="5" name="">
             <a:extLst xmlns:a="http://schemas.openxmlformats.org/drawingml/2006/main">
               <a:ext uri="{FF2B5EF4-FFF2-40B4-BE49-F238E27FC236}">
-                <a16:creationId xmlns:a16="http://schemas.microsoft.com/office/drawing/2014/main" id="{4BFE1074-B6C3-4866-AD90-B52FB90CD909}"/>
+                <a16:creationId xmlns:a16="http://schemas.microsoft.com/office/drawing/2014/main" id="{1C1F8629-ACCE-44D9-B3E4-8D7851F128C1}"/>
               </a:ext>
             </a:extLst>
           </p:cNvPr>
@@ -8129,10 +4668,10 @@
       </p:sp>
       <p:sp>
         <p:nvSpPr>
-          <p:cNvPr id="6" name="text-5">
+          <p:cNvPr id="6" name="">
             <a:extLst xmlns:a="http://schemas.openxmlformats.org/drawingml/2006/main">
               <a:ext uri="{FF2B5EF4-FFF2-40B4-BE49-F238E27FC236}">
-                <a16:creationId xmlns:a16="http://schemas.microsoft.com/office/drawing/2014/main" id="{1515B8A5-DC86-4D89-BC58-DAC4F2BB7FFA}"/>
+                <a16:creationId xmlns:a16="http://schemas.microsoft.com/office/drawing/2014/main" id="{993B8429-1F93-4BC5-B217-6D544A3D2C83}"/>
               </a:ext>
             </a:extLst>
           </p:cNvPr>
@@ -8222,7 +4761,7 @@
     </p:spTree>
     <p:extLst>
       <p:ext uri="{BB962C8B-B14F-4D97-AF65-F5344CB8AC3E}">
-        <p14:creationId xmlns:p14="http://schemas.microsoft.com/office/powerpoint/2010/main" val="1507352196"/>
+        <p14:creationId xmlns:p14="http://schemas.microsoft.com/office/powerpoint/2010/main" val="1691203680"/>
       </p:ext>
     </p:extLst>
   </p:cSld>
@@ -8250,23 +4789,23 @@
       </p:grpSpPr>
       <p:cxnSp>
         <p:nvCxnSpPr>
-          <p:cNvPr id="14" name="">
+          <p:cNvPr id="9" name="">
             <a:extLst xmlns:a="http://schemas.openxmlformats.org/drawingml/2006/main">
               <a:ext uri="{FF2B5EF4-FFF2-40B4-BE49-F238E27FC236}">
-                <a16:creationId xmlns:a16="http://schemas.microsoft.com/office/drawing/2014/main" id="{8A28F243-96C4-40BB-84A3-DEDFE25DF951}"/>
+                <a16:creationId xmlns:a16="http://schemas.microsoft.com/office/drawing/2014/main" id="{62A24E8A-E00A-4519-9695-255E80708C9F}"/>
               </a:ext>
             </a:extLst>
           </p:cNvPr>
           <p:cNvCxnSpPr>
             <a:stCxn xmlns:a="http://schemas.openxmlformats.org/drawingml/2006/main" id="4" idx="2"/>
-            <a:endCxn xmlns:a="http://schemas.openxmlformats.org/drawingml/2006/main" id="12" idx="0"/>
+            <a:endCxn xmlns:a="http://schemas.openxmlformats.org/drawingml/2006/main" id="6" idx="0"/>
           </p:cNvCxnSpPr>
           <p:nvPr/>
         </p:nvCxnSpPr>
         <p:spPr>
           <a:xfrm xmlns:a="http://schemas.openxmlformats.org/drawingml/2006/main">
-            <a:off x="6000750" y="2686050"/>
-            <a:ext cx="0" cy="1219200"/>
+            <a:off x="6076950" y="2181225"/>
+            <a:ext cx="0" cy="638175"/>
           </a:xfrm>
           <a:prstGeom xmlns:a="http://schemas.openxmlformats.org/drawingml/2006/main" prst="straightConnector1">
             <a:avLst/>
@@ -8283,23 +4822,23 @@
       </p:cxnSp>
       <p:cxnSp>
         <p:nvCxnSpPr>
-          <p:cNvPr id="13" name="">
+          <p:cNvPr id="8" name="">
             <a:extLst xmlns:a="http://schemas.openxmlformats.org/drawingml/2006/main">
               <a:ext uri="{FF2B5EF4-FFF2-40B4-BE49-F238E27FC236}">
-                <a16:creationId xmlns:a16="http://schemas.microsoft.com/office/drawing/2014/main" id="{007FA6FC-0393-44E3-8697-7B4A35068DEE}"/>
+                <a16:creationId xmlns:a16="http://schemas.microsoft.com/office/drawing/2014/main" id="{BBC8D208-B38A-4B93-82CC-01227DB8773A}"/>
               </a:ext>
             </a:extLst>
           </p:cNvPr>
           <p:cNvCxnSpPr>
-            <a:stCxn xmlns:a="http://schemas.openxmlformats.org/drawingml/2006/main" id="3" idx="2"/>
-            <a:endCxn xmlns:a="http://schemas.openxmlformats.org/drawingml/2006/main" id="11" idx="0"/>
+            <a:stCxn xmlns:a="http://schemas.openxmlformats.org/drawingml/2006/main" id="4" idx="3"/>
+            <a:endCxn xmlns:a="http://schemas.openxmlformats.org/drawingml/2006/main" id="5" idx="1"/>
           </p:cNvCxnSpPr>
           <p:nvPr/>
         </p:nvCxnSpPr>
         <p:spPr>
           <a:xfrm xmlns:a="http://schemas.openxmlformats.org/drawingml/2006/main">
-            <a:off x="1847850" y="2686050"/>
-            <a:ext cx="0" cy="1219200"/>
+            <a:off x="7458075" y="1871663"/>
+            <a:ext cx="1323975" cy="0"/>
           </a:xfrm>
           <a:prstGeom xmlns:a="http://schemas.openxmlformats.org/drawingml/2006/main" prst="straightConnector1">
             <a:avLst/>
@@ -8319,40 +4858,7 @@
           <p:cNvPr id="7" name="">
             <a:extLst xmlns:a="http://schemas.openxmlformats.org/drawingml/2006/main">
               <a:ext uri="{FF2B5EF4-FFF2-40B4-BE49-F238E27FC236}">
-                <a16:creationId xmlns:a16="http://schemas.microsoft.com/office/drawing/2014/main" id="{4634DA93-80CF-4BFB-B289-0E592D25F67F}"/>
-              </a:ext>
-            </a:extLst>
-          </p:cNvPr>
-          <p:cNvCxnSpPr>
-            <a:stCxn xmlns:a="http://schemas.openxmlformats.org/drawingml/2006/main" id="4" idx="3"/>
-            <a:endCxn xmlns:a="http://schemas.openxmlformats.org/drawingml/2006/main" id="5" idx="1"/>
-          </p:cNvCxnSpPr>
-          <p:nvPr/>
-        </p:nvCxnSpPr>
-        <p:spPr>
-          <a:xfrm xmlns:a="http://schemas.openxmlformats.org/drawingml/2006/main">
-            <a:off x="7239000" y="2343150"/>
-            <a:ext cx="1752600" cy="0"/>
-          </a:xfrm>
-          <a:prstGeom xmlns:a="http://schemas.openxmlformats.org/drawingml/2006/main" prst="straightConnector1">
-            <a:avLst/>
-          </a:prstGeom>
-          <a:ln xmlns:a="http://schemas.openxmlformats.org/drawingml/2006/main" w="19050">
-            <a:solidFill>
-              <a:srgbClr val="275F83"/>
-            </a:solidFill>
-            <a:prstDash val="solid"/>
-            <a:headEnd type="arrow" w="med" len="med"/>
-            <a:tailEnd type="arrow" w="med" len="med"/>
-          </a:ln>
-        </p:spPr>
-      </p:cxnSp>
-      <p:cxnSp>
-        <p:nvCxnSpPr>
-          <p:cNvPr id="6" name="">
-            <a:extLst xmlns:a="http://schemas.openxmlformats.org/drawingml/2006/main">
-              <a:ext uri="{FF2B5EF4-FFF2-40B4-BE49-F238E27FC236}">
-                <a16:creationId xmlns:a16="http://schemas.microsoft.com/office/drawing/2014/main" id="{8B01A148-0F95-4964-A1C4-8F120FB848F3}"/>
+                <a16:creationId xmlns:a16="http://schemas.microsoft.com/office/drawing/2014/main" id="{7026317C-05B8-4AFE-B385-C5C64091DA5C}"/>
               </a:ext>
             </a:extLst>
           </p:cNvPr>
@@ -8364,8 +4870,8 @@
         </p:nvCxnSpPr>
         <p:spPr>
           <a:xfrm xmlns:a="http://schemas.openxmlformats.org/drawingml/2006/main">
-            <a:off x="3086100" y="2343150"/>
-            <a:ext cx="1676400" cy="0"/>
+            <a:off x="3371850" y="1871663"/>
+            <a:ext cx="1323975" cy="0"/>
           </a:xfrm>
           <a:prstGeom xmlns:a="http://schemas.openxmlformats.org/drawingml/2006/main" prst="straightConnector1">
             <a:avLst/>
@@ -8381,10 +4887,10 @@
       </p:cxnSp>
       <p:sp>
         <p:nvSpPr>
-          <p:cNvPr id="19" name="text-0">
+          <p:cNvPr id="15" name="">
             <a:extLst xmlns:a="http://schemas.openxmlformats.org/drawingml/2006/main">
               <a:ext uri="{FF2B5EF4-FFF2-40B4-BE49-F238E27FC236}">
-                <a16:creationId xmlns:a16="http://schemas.microsoft.com/office/drawing/2014/main" id="{DC31179E-3258-41E6-BFCF-C33FC74F7D47}"/>
+                <a16:creationId xmlns:a16="http://schemas.microsoft.com/office/drawing/2014/main" id="{9C494F90-D2C6-429D-AAE9-961FFF8D911F}"/>
               </a:ext>
             </a:extLst>
           </p:cNvPr>
@@ -8443,17 +4949,17 @@
                 <a:ea typeface="DejaVu Sans"/>
                 <a:cs typeface="DejaVu Sans"/>
               </a:rPr>
-              <a:t>O caminho entre as telas</a:t>
+              <a:t>Como o jogo responde</a:t>
             </a:r>
           </a:p>
         </p:txBody>
       </p:sp>
       <p:sp>
         <p:nvSpPr>
-          <p:cNvPr id="2" name="text-1">
+          <p:cNvPr id="2" name="">
             <a:extLst xmlns:a="http://schemas.openxmlformats.org/drawingml/2006/main">
               <a:ext uri="{FF2B5EF4-FFF2-40B4-BE49-F238E27FC236}">
-                <a16:creationId xmlns:a16="http://schemas.microsoft.com/office/drawing/2014/main" id="{FFE6B417-D2C4-4ACD-A229-90DE908C231F}"/>
+                <a16:creationId xmlns:a16="http://schemas.microsoft.com/office/drawing/2014/main" id="{0490E405-5362-4963-8AAB-22AB812AACAA}"/>
               </a:ext>
             </a:extLst>
           </p:cNvPr>
@@ -8464,7 +4970,7 @@
         </p:nvSpPr>
         <p:spPr>
           <a:xfrm xmlns:a="http://schemas.openxmlformats.org/drawingml/2006/main">
-            <a:off x="11239500" y="6419850"/>
+            <a:off x="11239500" y="6429375"/>
             <a:ext cx="457200" cy="238125"/>
           </a:xfrm>
           <a:prstGeom xmlns:a="http://schemas.openxmlformats.org/drawingml/2006/main" prst="rect">
@@ -8522,7 +5028,7 @@
           <p:cNvPr id="3" name="">
             <a:extLst xmlns:a="http://schemas.openxmlformats.org/drawingml/2006/main">
               <a:ext uri="{FF2B5EF4-FFF2-40B4-BE49-F238E27FC236}">
-                <a16:creationId xmlns:a16="http://schemas.microsoft.com/office/drawing/2014/main" id="{0998BDE6-2E8B-48E3-9F64-3A7907083E5C}"/>
+                <a16:creationId xmlns:a16="http://schemas.microsoft.com/office/drawing/2014/main" id="{0DDC8B51-27F4-475C-BF97-58F34A9CFECF}"/>
               </a:ext>
             </a:extLst>
           </p:cNvPr>
@@ -8533,8 +5039,8 @@
         </p:nvSpPr>
         <p:spPr>
           <a:xfrm xmlns:a="http://schemas.openxmlformats.org/drawingml/2006/main">
-            <a:off x="609600" y="2000250"/>
-            <a:ext cx="2476500" cy="685800"/>
+            <a:off x="609600" y="1562100"/>
+            <a:ext cx="2762250" cy="619125"/>
           </a:xfrm>
           <a:prstGeom xmlns:a="http://schemas.openxmlformats.org/drawingml/2006/main" prst="rect">
             <a:avLst/>
@@ -8553,7 +5059,7 @@
           <a:bodyPr xmlns:a="http://schemas.openxmlformats.org/drawingml/2006/main" anchor="ctr"/>
           <a:lstStyle xmlns:a="http://schemas.openxmlformats.org/drawingml/2006/main">
             <a:defPPr algn="ctr">
-              <a:defRPr sz="1950" b="1">
+              <a:defRPr sz="2025" b="1">
                 <a:solidFill>
                   <a:srgbClr val="203149"/>
                 </a:solidFill>
@@ -8565,7 +5071,7 @@
           </a:lstStyle>
           <a:p xmlns:a="http://schemas.openxmlformats.org/drawingml/2006/main">
             <a:pPr algn="ctr">
-              <a:defRPr sz="1950" b="1">
+              <a:defRPr sz="2025" b="1">
                 <a:solidFill>
                   <a:srgbClr val="203149"/>
                 </a:solidFill>
@@ -8575,7 +5081,7 @@
               </a:defRPr>
             </a:pPr>
             <a:r>
-              <a:rPr sz="1950" b="1">
+              <a:rPr sz="2025" b="1">
                 <a:solidFill>
                   <a:srgbClr val="203149"/>
                 </a:solidFill>
@@ -8593,7 +5099,7 @@
           <p:cNvPr id="4" name="">
             <a:extLst xmlns:a="http://schemas.openxmlformats.org/drawingml/2006/main">
               <a:ext uri="{FF2B5EF4-FFF2-40B4-BE49-F238E27FC236}">
-                <a16:creationId xmlns:a16="http://schemas.microsoft.com/office/drawing/2014/main" id="{859EC696-9E26-45D6-B0C8-00E8B4887297}"/>
+                <a16:creationId xmlns:a16="http://schemas.microsoft.com/office/drawing/2014/main" id="{3918C05E-6B2C-45A0-BD06-E7C657BEB2D5}"/>
               </a:ext>
             </a:extLst>
           </p:cNvPr>
@@ -8604,8 +5110,8 @@
         </p:nvSpPr>
         <p:spPr>
           <a:xfrm xmlns:a="http://schemas.openxmlformats.org/drawingml/2006/main">
-            <a:off x="4762500" y="2000250"/>
-            <a:ext cx="2476500" cy="685800"/>
+            <a:off x="4695825" y="1562100"/>
+            <a:ext cx="2762250" cy="619125"/>
           </a:xfrm>
           <a:prstGeom xmlns:a="http://schemas.openxmlformats.org/drawingml/2006/main" prst="rect">
             <a:avLst/>
@@ -8624,7 +5130,7 @@
           <a:bodyPr xmlns:a="http://schemas.openxmlformats.org/drawingml/2006/main" anchor="ctr"/>
           <a:lstStyle xmlns:a="http://schemas.openxmlformats.org/drawingml/2006/main">
             <a:defPPr algn="ctr">
-              <a:defRPr sz="1950" b="1">
+              <a:defRPr sz="2025" b="1">
                 <a:solidFill>
                   <a:srgbClr val="203149"/>
                 </a:solidFill>
@@ -8636,7 +5142,7 @@
           </a:lstStyle>
           <a:p xmlns:a="http://schemas.openxmlformats.org/drawingml/2006/main">
             <a:pPr algn="ctr">
-              <a:defRPr sz="1950" b="1">
+              <a:defRPr sz="2025" b="1">
                 <a:solidFill>
                   <a:srgbClr val="203149"/>
                 </a:solidFill>
@@ -8646,7 +5152,7 @@
               </a:defRPr>
             </a:pPr>
             <a:r>
-              <a:rPr sz="1950" b="1">
+              <a:rPr sz="2025" b="1">
                 <a:solidFill>
                   <a:srgbClr val="203149"/>
                 </a:solidFill>
@@ -8664,7 +5170,7 @@
           <p:cNvPr id="5" name="">
             <a:extLst xmlns:a="http://schemas.openxmlformats.org/drawingml/2006/main">
               <a:ext uri="{FF2B5EF4-FFF2-40B4-BE49-F238E27FC236}">
-                <a16:creationId xmlns:a16="http://schemas.microsoft.com/office/drawing/2014/main" id="{D29EBCD6-8E93-47F3-B1F8-762695CA563F}"/>
+                <a16:creationId xmlns:a16="http://schemas.microsoft.com/office/drawing/2014/main" id="{BAA9C532-76FC-4A7B-A31F-6AEF6B8AA349}"/>
               </a:ext>
             </a:extLst>
           </p:cNvPr>
@@ -8675,8 +5181,8 @@
         </p:nvSpPr>
         <p:spPr>
           <a:xfrm xmlns:a="http://schemas.openxmlformats.org/drawingml/2006/main">
-            <a:off x="8991600" y="2000250"/>
-            <a:ext cx="2476500" cy="685800"/>
+            <a:off x="8782050" y="1562100"/>
+            <a:ext cx="2762250" cy="619125"/>
           </a:xfrm>
           <a:prstGeom xmlns:a="http://schemas.openxmlformats.org/drawingml/2006/main" prst="rect">
             <a:avLst/>
@@ -8695,7 +5201,7 @@
           <a:bodyPr xmlns:a="http://schemas.openxmlformats.org/drawingml/2006/main" anchor="ctr"/>
           <a:lstStyle xmlns:a="http://schemas.openxmlformats.org/drawingml/2006/main">
             <a:defPPr algn="ctr">
-              <a:defRPr sz="1950" b="1">
+              <a:defRPr sz="2025" b="1">
                 <a:solidFill>
                   <a:srgbClr val="203149"/>
                 </a:solidFill>
@@ -8707,7 +5213,7 @@
           </a:lstStyle>
           <a:p xmlns:a="http://schemas.openxmlformats.org/drawingml/2006/main">
             <a:pPr algn="ctr">
-              <a:defRPr sz="1950" b="1">
+              <a:defRPr sz="2025" b="1">
                 <a:solidFill>
                   <a:srgbClr val="203149"/>
                 </a:solidFill>
@@ -8717,7 +5223,7 @@
               </a:defRPr>
             </a:pPr>
             <a:r>
-              <a:rPr sz="1950" b="1">
+              <a:rPr sz="2025" b="1">
                 <a:solidFill>
                   <a:srgbClr val="203149"/>
                 </a:solidFill>
@@ -8732,10 +5238,10 @@
       </p:sp>
       <p:sp>
         <p:nvSpPr>
-          <p:cNvPr id="8" name="text-7">
+          <p:cNvPr id="6" name="">
             <a:extLst xmlns:a="http://schemas.openxmlformats.org/drawingml/2006/main">
               <a:ext uri="{FF2B5EF4-FFF2-40B4-BE49-F238E27FC236}">
-                <a16:creationId xmlns:a16="http://schemas.microsoft.com/office/drawing/2014/main" id="{96346E29-23D2-4490-9DF4-28B6AD8065CE}"/>
+                <a16:creationId xmlns:a16="http://schemas.microsoft.com/office/drawing/2014/main" id="{8E78D168-527B-4878-AE55-383415235705}"/>
               </a:ext>
             </a:extLst>
           </p:cNvPr>
@@ -8746,215 +5252,8 @@
         </p:nvSpPr>
         <p:spPr>
           <a:xfrm xmlns:a="http://schemas.openxmlformats.org/drawingml/2006/main">
-            <a:off x="3381375" y="1628775"/>
-            <a:ext cx="1238250" cy="342900"/>
-          </a:xfrm>
-          <a:prstGeom xmlns:a="http://schemas.openxmlformats.org/drawingml/2006/main" prst="rect">
-            <a:avLst/>
-          </a:prstGeom>
-          <a:noFill xmlns:a="http://schemas.openxmlformats.org/drawingml/2006/main"/>
-          <a:ln xmlns:a="http://schemas.openxmlformats.org/drawingml/2006/main" w="0">
-            <a:noFill/>
-            <a:prstDash val="solid"/>
-          </a:ln>
-        </p:spPr>
-        <p:txBody>
-          <a:bodyPr xmlns:a="http://schemas.openxmlformats.org/drawingml/2006/main">
-            <a:noAutofit/>
-          </a:bodyPr>
-          <a:lstStyle xmlns:a="http://schemas.openxmlformats.org/drawingml/2006/main">
-            <a:defPPr>
-              <a:defRPr sz="1650" b="0">
-                <a:solidFill>
-                  <a:srgbClr val="203149"/>
-                </a:solidFill>
-                <a:latin typeface="DejaVu Sans"/>
-                <a:ea typeface="DejaVu Sans"/>
-                <a:cs typeface="DejaVu Sans"/>
-              </a:defRPr>
-            </a:defPPr>
-          </a:lstStyle>
-          <a:p xmlns:a="http://schemas.openxmlformats.org/drawingml/2006/main">
-            <a:pPr>
-              <a:defRPr sz="1650" b="0">
-                <a:solidFill>
-                  <a:srgbClr val="203149"/>
-                </a:solidFill>
-                <a:latin typeface="DejaVu Sans"/>
-                <a:ea typeface="DejaVu Sans"/>
-                <a:cs typeface="DejaVu Sans"/>
-              </a:defRPr>
-            </a:pPr>
-            <a:r>
-              <a:rPr sz="1650" b="0">
-                <a:solidFill>
-                  <a:srgbClr val="203149"/>
-                </a:solidFill>
-                <a:latin typeface="DejaVu Sans"/>
-                <a:ea typeface="DejaVu Sans"/>
-                <a:cs typeface="DejaVu Sans"/>
-              </a:rPr>
-              <a:t>Iniciar</a:t>
-            </a:r>
-          </a:p>
-        </p:txBody>
-      </p:sp>
-      <p:sp>
-        <p:nvSpPr>
-          <p:cNvPr id="9" name="text-8">
-            <a:extLst xmlns:a="http://schemas.openxmlformats.org/drawingml/2006/main">
-              <a:ext uri="{FF2B5EF4-FFF2-40B4-BE49-F238E27FC236}">
-                <a16:creationId xmlns:a16="http://schemas.microsoft.com/office/drawing/2014/main" id="{70FB3751-2DD8-4896-9919-49FD786A8745}"/>
-              </a:ext>
-            </a:extLst>
-          </p:cNvPr>
-          <p:cNvSpPr>
-            <a:spLocks xmlns:a="http://schemas.openxmlformats.org/drawingml/2006/main" noGrp="1"/>
-          </p:cNvSpPr>
-          <p:nvPr/>
-        </p:nvSpPr>
-        <p:spPr>
-          <a:xfrm xmlns:a="http://schemas.openxmlformats.org/drawingml/2006/main">
-            <a:off x="7324725" y="1609725"/>
-            <a:ext cx="1762125" cy="323850"/>
-          </a:xfrm>
-          <a:prstGeom xmlns:a="http://schemas.openxmlformats.org/drawingml/2006/main" prst="rect">
-            <a:avLst/>
-          </a:prstGeom>
-          <a:noFill xmlns:a="http://schemas.openxmlformats.org/drawingml/2006/main"/>
-          <a:ln xmlns:a="http://schemas.openxmlformats.org/drawingml/2006/main" w="0">
-            <a:noFill/>
-            <a:prstDash val="solid"/>
-          </a:ln>
-        </p:spPr>
-        <p:txBody>
-          <a:bodyPr xmlns:a="http://schemas.openxmlformats.org/drawingml/2006/main">
-            <a:noAutofit/>
-          </a:bodyPr>
-          <a:lstStyle xmlns:a="http://schemas.openxmlformats.org/drawingml/2006/main">
-            <a:defPPr>
-              <a:defRPr sz="1575" b="0">
-                <a:solidFill>
-                  <a:srgbClr val="203149"/>
-                </a:solidFill>
-                <a:latin typeface="DejaVu Sans"/>
-                <a:ea typeface="DejaVu Sans"/>
-                <a:cs typeface="DejaVu Sans"/>
-              </a:defRPr>
-            </a:defPPr>
-          </a:lstStyle>
-          <a:p xmlns:a="http://schemas.openxmlformats.org/drawingml/2006/main">
-            <a:pPr>
-              <a:defRPr sz="1575" b="0">
-                <a:solidFill>
-                  <a:srgbClr val="203149"/>
-                </a:solidFill>
-                <a:latin typeface="DejaVu Sans"/>
-                <a:ea typeface="DejaVu Sans"/>
-                <a:cs typeface="DejaVu Sans"/>
-              </a:defRPr>
-            </a:pPr>
-            <a:r>
-              <a:rPr sz="1575" b="0">
-                <a:solidFill>
-                  <a:srgbClr val="203149"/>
-                </a:solidFill>
-                <a:latin typeface="DejaVu Sans"/>
-                <a:ea typeface="DejaVu Sans"/>
-                <a:cs typeface="DejaVu Sans"/>
-              </a:rPr>
-              <a:t>Vitória / derrota</a:t>
-            </a:r>
-          </a:p>
-        </p:txBody>
-      </p:sp>
-      <p:sp>
-        <p:nvSpPr>
-          <p:cNvPr id="10" name="text-9">
-            <a:extLst xmlns:a="http://schemas.openxmlformats.org/drawingml/2006/main">
-              <a:ext uri="{FF2B5EF4-FFF2-40B4-BE49-F238E27FC236}">
-                <a16:creationId xmlns:a16="http://schemas.microsoft.com/office/drawing/2014/main" id="{CE33E5E2-D70B-4A34-81E5-D23B8724EB38}"/>
-              </a:ext>
-            </a:extLst>
-          </p:cNvPr>
-          <p:cNvSpPr>
-            <a:spLocks xmlns:a="http://schemas.openxmlformats.org/drawingml/2006/main" noGrp="1"/>
-          </p:cNvSpPr>
-          <p:nvPr/>
-        </p:nvSpPr>
-        <p:spPr>
-          <a:xfrm xmlns:a="http://schemas.openxmlformats.org/drawingml/2006/main">
-            <a:off x="7524750" y="2724150"/>
-            <a:ext cx="1476375" cy="323850"/>
-          </a:xfrm>
-          <a:prstGeom xmlns:a="http://schemas.openxmlformats.org/drawingml/2006/main" prst="rect">
-            <a:avLst/>
-          </a:prstGeom>
-          <a:noFill xmlns:a="http://schemas.openxmlformats.org/drawingml/2006/main"/>
-          <a:ln xmlns:a="http://schemas.openxmlformats.org/drawingml/2006/main" w="0">
-            <a:noFill/>
-            <a:prstDash val="solid"/>
-          </a:ln>
-        </p:spPr>
-        <p:txBody>
-          <a:bodyPr xmlns:a="http://schemas.openxmlformats.org/drawingml/2006/main">
-            <a:noAutofit/>
-          </a:bodyPr>
-          <a:lstStyle xmlns:a="http://schemas.openxmlformats.org/drawingml/2006/main">
-            <a:defPPr>
-              <a:defRPr sz="1575" b="0">
-                <a:solidFill>
-                  <a:srgbClr val="203149"/>
-                </a:solidFill>
-                <a:latin typeface="DejaVu Sans"/>
-                <a:ea typeface="DejaVu Sans"/>
-                <a:cs typeface="DejaVu Sans"/>
-              </a:defRPr>
-            </a:defPPr>
-          </a:lstStyle>
-          <a:p xmlns:a="http://schemas.openxmlformats.org/drawingml/2006/main">
-            <a:pPr>
-              <a:defRPr sz="1575" b="0">
-                <a:solidFill>
-                  <a:srgbClr val="203149"/>
-                </a:solidFill>
-                <a:latin typeface="DejaVu Sans"/>
-                <a:ea typeface="DejaVu Sans"/>
-                <a:cs typeface="DejaVu Sans"/>
-              </a:defRPr>
-            </a:pPr>
-            <a:r>
-              <a:rPr sz="1575" b="0">
-                <a:solidFill>
-                  <a:srgbClr val="203149"/>
-                </a:solidFill>
-                <a:latin typeface="DejaVu Sans"/>
-                <a:ea typeface="DejaVu Sans"/>
-                <a:cs typeface="DejaVu Sans"/>
-              </a:rPr>
-              <a:t>Reiniciar</a:t>
-            </a:r>
-          </a:p>
-        </p:txBody>
-      </p:sp>
-      <p:sp>
-        <p:nvSpPr>
-          <p:cNvPr id="11" name="">
-            <a:extLst xmlns:a="http://schemas.openxmlformats.org/drawingml/2006/main">
-              <a:ext uri="{FF2B5EF4-FFF2-40B4-BE49-F238E27FC236}">
-                <a16:creationId xmlns:a16="http://schemas.microsoft.com/office/drawing/2014/main" id="{C4221F11-8C86-4DCF-BB4E-CDAB5741CB60}"/>
-              </a:ext>
-            </a:extLst>
-          </p:cNvPr>
-          <p:cNvSpPr>
-            <a:spLocks xmlns:a="http://schemas.openxmlformats.org/drawingml/2006/main" noGrp="1"/>
-          </p:cNvSpPr>
-          <p:nvPr/>
-        </p:nvSpPr>
-        <p:spPr>
-          <a:xfrm xmlns:a="http://schemas.openxmlformats.org/drawingml/2006/main">
-            <a:off x="609600" y="3905250"/>
-            <a:ext cx="2476500" cy="685800"/>
+            <a:off x="4695825" y="2819400"/>
+            <a:ext cx="2762250" cy="619125"/>
           </a:xfrm>
           <a:prstGeom xmlns:a="http://schemas.openxmlformats.org/drawingml/2006/main" prst="rect">
             <a:avLst/>
@@ -8973,7 +5272,7 @@
           <a:bodyPr xmlns:a="http://schemas.openxmlformats.org/drawingml/2006/main" anchor="ctr"/>
           <a:lstStyle xmlns:a="http://schemas.openxmlformats.org/drawingml/2006/main">
             <a:defPPr algn="ctr">
-              <a:defRPr sz="1950" b="1">
+              <a:defRPr sz="2025" b="1">
                 <a:solidFill>
                   <a:srgbClr val="203149"/>
                 </a:solidFill>
@@ -8985,7 +5284,7 @@
           </a:lstStyle>
           <a:p xmlns:a="http://schemas.openxmlformats.org/drawingml/2006/main">
             <a:pPr algn="ctr">
-              <a:defRPr sz="1950" b="1">
+              <a:defRPr sz="2025" b="1">
                 <a:solidFill>
                   <a:srgbClr val="203149"/>
                 </a:solidFill>
@@ -8995,7 +5294,7 @@
               </a:defRPr>
             </a:pPr>
             <a:r>
-              <a:rPr sz="1950" b="1">
+              <a:rPr sz="2025" b="1">
                 <a:solidFill>
                   <a:srgbClr val="203149"/>
                 </a:solidFill>
@@ -9003,17 +5302,17 @@
                 <a:ea typeface="DejaVu Sans"/>
                 <a:cs typeface="DejaVu Sans"/>
               </a:rPr>
-              <a:t>Instruções</a:t>
+              <a:t>Pausa</a:t>
             </a:r>
           </a:p>
         </p:txBody>
       </p:sp>
       <p:sp>
         <p:nvSpPr>
-          <p:cNvPr id="12" name="">
+          <p:cNvPr id="10" name="">
             <a:extLst xmlns:a="http://schemas.openxmlformats.org/drawingml/2006/main">
               <a:ext uri="{FF2B5EF4-FFF2-40B4-BE49-F238E27FC236}">
-                <a16:creationId xmlns:a16="http://schemas.microsoft.com/office/drawing/2014/main" id="{6793CFEC-24C6-49E9-A954-752513D402B3}"/>
+                <a16:creationId xmlns:a16="http://schemas.microsoft.com/office/drawing/2014/main" id="{991D803E-C909-46A8-A99B-E328CCF8B6ED}"/>
               </a:ext>
             </a:extLst>
           </p:cNvPr>
@@ -9024,79 +5323,8 @@
         </p:nvSpPr>
         <p:spPr>
           <a:xfrm xmlns:a="http://schemas.openxmlformats.org/drawingml/2006/main">
-            <a:off x="4762500" y="3905250"/>
-            <a:ext cx="2476500" cy="685800"/>
-          </a:xfrm>
-          <a:prstGeom xmlns:a="http://schemas.openxmlformats.org/drawingml/2006/main" prst="rect">
-            <a:avLst/>
-          </a:prstGeom>
-          <a:solidFill xmlns:a="http://schemas.openxmlformats.org/drawingml/2006/main">
-            <a:srgbClr val="E1ECE9"/>
-          </a:solidFill>
-          <a:ln xmlns:a="http://schemas.openxmlformats.org/drawingml/2006/main" w="19050">
-            <a:solidFill>
-              <a:srgbClr val="275F83"/>
-            </a:solidFill>
-            <a:prstDash val="solid"/>
-          </a:ln>
-        </p:spPr>
-        <p:txBody>
-          <a:bodyPr xmlns:a="http://schemas.openxmlformats.org/drawingml/2006/main" anchor="ctr"/>
-          <a:lstStyle xmlns:a="http://schemas.openxmlformats.org/drawingml/2006/main">
-            <a:defPPr algn="ctr">
-              <a:defRPr sz="1950" b="1">
-                <a:solidFill>
-                  <a:srgbClr val="203149"/>
-                </a:solidFill>
-                <a:latin typeface="DejaVu Sans"/>
-                <a:ea typeface="DejaVu Sans"/>
-                <a:cs typeface="DejaVu Sans"/>
-              </a:defRPr>
-            </a:defPPr>
-          </a:lstStyle>
-          <a:p xmlns:a="http://schemas.openxmlformats.org/drawingml/2006/main">
-            <a:pPr algn="ctr">
-              <a:defRPr sz="1950" b="1">
-                <a:solidFill>
-                  <a:srgbClr val="203149"/>
-                </a:solidFill>
-                <a:latin typeface="DejaVu Sans"/>
-                <a:ea typeface="DejaVu Sans"/>
-                <a:cs typeface="DejaVu Sans"/>
-              </a:defRPr>
-            </a:pPr>
-            <a:r>
-              <a:rPr sz="1950" b="1">
-                <a:solidFill>
-                  <a:srgbClr val="203149"/>
-                </a:solidFill>
-                <a:latin typeface="DejaVu Sans"/>
-                <a:ea typeface="DejaVu Sans"/>
-                <a:cs typeface="DejaVu Sans"/>
-              </a:rPr>
-              <a:t>Pausa</a:t>
-            </a:r>
-          </a:p>
-        </p:txBody>
-      </p:sp>
-      <p:sp>
-        <p:nvSpPr>
-          <p:cNvPr id="15" name="text-14">
-            <a:extLst xmlns:a="http://schemas.openxmlformats.org/drawingml/2006/main">
-              <a:ext uri="{FF2B5EF4-FFF2-40B4-BE49-F238E27FC236}">
-                <a16:creationId xmlns:a16="http://schemas.microsoft.com/office/drawing/2014/main" id="{F10951E1-9094-43AB-A92E-61A5385B9A18}"/>
-              </a:ext>
-            </a:extLst>
-          </p:cNvPr>
-          <p:cNvSpPr>
-            <a:spLocks xmlns:a="http://schemas.openxmlformats.org/drawingml/2006/main" noGrp="1"/>
-          </p:cNvSpPr>
-          <p:nvPr/>
-        </p:nvSpPr>
-        <p:spPr>
-          <a:xfrm xmlns:a="http://schemas.openxmlformats.org/drawingml/2006/main">
-            <a:off x="609600" y="4819650"/>
-            <a:ext cx="2857500" cy="333375"/>
+            <a:off x="3619500" y="1200150"/>
+            <a:ext cx="1143000" cy="304800"/>
           </a:xfrm>
           <a:prstGeom xmlns:a="http://schemas.openxmlformats.org/drawingml/2006/main" prst="rect">
             <a:avLst/>
@@ -9113,7 +5341,7 @@
           </a:bodyPr>
           <a:lstStyle xmlns:a="http://schemas.openxmlformats.org/drawingml/2006/main">
             <a:defPPr>
-              <a:defRPr sz="1800" b="0">
+              <a:defRPr sz="1575" b="0">
                 <a:solidFill>
                   <a:srgbClr val="203149"/>
                 </a:solidFill>
@@ -9125,7 +5353,7 @@
           </a:lstStyle>
           <a:p xmlns:a="http://schemas.openxmlformats.org/drawingml/2006/main">
             <a:pPr>
-              <a:defRPr sz="1800" b="0">
+              <a:defRPr sz="1575" b="0">
                 <a:solidFill>
                   <a:srgbClr val="203149"/>
                 </a:solidFill>
@@ -9135,7 +5363,7 @@
               </a:defRPr>
             </a:pPr>
             <a:r>
-              <a:rPr sz="1800" b="0">
+              <a:rPr sz="1575" b="0">
                 <a:solidFill>
                   <a:srgbClr val="203149"/>
                 </a:solidFill>
@@ -9143,17 +5371,17 @@
                 <a:ea typeface="DejaVu Sans"/>
                 <a:cs typeface="DejaVu Sans"/>
               </a:rPr>
-              <a:t>Voltar ao menu</a:t>
+              <a:t>Iniciar</a:t>
             </a:r>
           </a:p>
         </p:txBody>
       </p:sp>
       <p:sp>
         <p:nvSpPr>
-          <p:cNvPr id="16" name="text-15">
+          <p:cNvPr id="11" name="">
             <a:extLst xmlns:a="http://schemas.openxmlformats.org/drawingml/2006/main">
               <a:ext uri="{FF2B5EF4-FFF2-40B4-BE49-F238E27FC236}">
-                <a16:creationId xmlns:a16="http://schemas.microsoft.com/office/drawing/2014/main" id="{832E9322-E33E-4B18-9245-326863BD9A3A}"/>
+                <a16:creationId xmlns:a16="http://schemas.microsoft.com/office/drawing/2014/main" id="{FBFA46FB-3387-49BD-B4DA-1009F74564CC}"/>
               </a:ext>
             </a:extLst>
           </p:cNvPr>
@@ -9164,8 +5392,8 @@
         </p:nvSpPr>
         <p:spPr>
           <a:xfrm xmlns:a="http://schemas.openxmlformats.org/drawingml/2006/main">
-            <a:off x="4562475" y="4819650"/>
-            <a:ext cx="3333750" cy="333375"/>
+            <a:off x="7629525" y="1200150"/>
+            <a:ext cx="1381125" cy="304800"/>
           </a:xfrm>
           <a:prstGeom xmlns:a="http://schemas.openxmlformats.org/drawingml/2006/main" prst="rect">
             <a:avLst/>
@@ -9182,7 +5410,7 @@
           </a:bodyPr>
           <a:lstStyle xmlns:a="http://schemas.openxmlformats.org/drawingml/2006/main">
             <a:defPPr>
-              <a:defRPr sz="1800" b="0">
+              <a:defRPr sz="1575" b="0">
                 <a:solidFill>
                   <a:srgbClr val="203149"/>
                 </a:solidFill>
@@ -9194,7 +5422,7 @@
           </a:lstStyle>
           <a:p xmlns:a="http://schemas.openxmlformats.org/drawingml/2006/main">
             <a:pPr>
-              <a:defRPr sz="1800" b="0">
+              <a:defRPr sz="1575" b="0">
                 <a:solidFill>
                   <a:srgbClr val="203149"/>
                 </a:solidFill>
@@ -9204,7 +5432,7 @@
               </a:defRPr>
             </a:pPr>
             <a:r>
-              <a:rPr sz="1800" b="0">
+              <a:rPr sz="1575" b="0">
                 <a:solidFill>
                   <a:srgbClr val="203149"/>
                 </a:solidFill>
@@ -9212,17 +5440,17 @@
                 <a:ea typeface="DejaVu Sans"/>
                 <a:cs typeface="DejaVu Sans"/>
               </a:rPr>
-              <a:t>Retomar ou abrir Áudio</a:t>
+              <a:t>Fim / reinício</a:t>
             </a:r>
           </a:p>
         </p:txBody>
       </p:sp>
       <p:sp>
         <p:nvSpPr>
-          <p:cNvPr id="17" name="text-16">
+          <p:cNvPr id="12" name="">
             <a:extLst xmlns:a="http://schemas.openxmlformats.org/drawingml/2006/main">
               <a:ext uri="{FF2B5EF4-FFF2-40B4-BE49-F238E27FC236}">
-                <a16:creationId xmlns:a16="http://schemas.microsoft.com/office/drawing/2014/main" id="{90F459CF-36CC-414E-835F-9C07F496F216}"/>
+                <a16:creationId xmlns:a16="http://schemas.microsoft.com/office/drawing/2014/main" id="{BE9D946A-0E89-42CC-B166-5DA9F68B6469}"/>
               </a:ext>
             </a:extLst>
           </p:cNvPr>
@@ -9233,8 +5461,192 @@
         </p:nvSpPr>
         <p:spPr>
           <a:xfrm xmlns:a="http://schemas.openxmlformats.org/drawingml/2006/main">
-            <a:off x="8991600" y="3962400"/>
-            <a:ext cx="2714625" cy="1047750"/>
+            <a:off x="7667625" y="2695575"/>
+            <a:ext cx="1809750" cy="333375"/>
+          </a:xfrm>
+          <a:prstGeom xmlns:a="http://schemas.openxmlformats.org/drawingml/2006/main" prst="rect">
+            <a:avLst/>
+          </a:prstGeom>
+          <a:noFill xmlns:a="http://schemas.openxmlformats.org/drawingml/2006/main"/>
+          <a:ln xmlns:a="http://schemas.openxmlformats.org/drawingml/2006/main" w="0">
+            <a:noFill/>
+            <a:prstDash val="solid"/>
+          </a:ln>
+        </p:spPr>
+        <p:txBody>
+          <a:bodyPr xmlns:a="http://schemas.openxmlformats.org/drawingml/2006/main">
+            <a:noAutofit/>
+          </a:bodyPr>
+          <a:lstStyle xmlns:a="http://schemas.openxmlformats.org/drawingml/2006/main">
+            <a:defPPr>
+              <a:defRPr sz="1650" b="0">
+                <a:solidFill>
+                  <a:srgbClr val="203149"/>
+                </a:solidFill>
+                <a:latin typeface="DejaVu Sans"/>
+                <a:ea typeface="DejaVu Sans"/>
+                <a:cs typeface="DejaVu Sans"/>
+              </a:defRPr>
+            </a:defPPr>
+          </a:lstStyle>
+          <a:p xmlns:a="http://schemas.openxmlformats.org/drawingml/2006/main">
+            <a:pPr>
+              <a:defRPr sz="1650" b="0">
+                <a:solidFill>
+                  <a:srgbClr val="203149"/>
+                </a:solidFill>
+                <a:latin typeface="DejaVu Sans"/>
+                <a:ea typeface="DejaVu Sans"/>
+                <a:cs typeface="DejaVu Sans"/>
+              </a:defRPr>
+            </a:pPr>
+            <a:r>
+              <a:rPr sz="1650" b="0">
+                <a:solidFill>
+                  <a:srgbClr val="203149"/>
+                </a:solidFill>
+                <a:latin typeface="DejaVu Sans"/>
+                <a:ea typeface="DejaVu Sans"/>
+                <a:cs typeface="DejaVu Sans"/>
+              </a:rPr>
+              <a:t>P ou Esc</a:t>
+            </a:r>
+          </a:p>
+        </p:txBody>
+      </p:sp>
+      <p:sp>
+        <p:nvSpPr>
+          <p:cNvPr id="13" name="">
+            <a:extLst xmlns:a="http://schemas.openxmlformats.org/drawingml/2006/main">
+              <a:ext uri="{FF2B5EF4-FFF2-40B4-BE49-F238E27FC236}">
+                <a16:creationId xmlns:a16="http://schemas.microsoft.com/office/drawing/2014/main" id="{66954529-2396-4595-8C7E-7CA07B527580}"/>
+              </a:ext>
+            </a:extLst>
+          </p:cNvPr>
+          <p:cNvSpPr>
+            <a:spLocks xmlns:a="http://schemas.openxmlformats.org/drawingml/2006/main" noGrp="1"/>
+          </p:cNvSpPr>
+          <p:nvPr/>
+        </p:nvSpPr>
+        <p:spPr>
+          <a:xfrm xmlns:a="http://schemas.openxmlformats.org/drawingml/2006/main">
+            <a:off x="609600" y="3962400"/>
+            <a:ext cx="10972800" cy="1524000"/>
+          </a:xfrm>
+          <a:prstGeom xmlns:a="http://schemas.openxmlformats.org/drawingml/2006/main" prst="rect">
+            <a:avLst/>
+          </a:prstGeom>
+          <a:noFill xmlns:a="http://schemas.openxmlformats.org/drawingml/2006/main"/>
+          <a:ln xmlns:a="http://schemas.openxmlformats.org/drawingml/2006/main" w="0">
+            <a:noFill/>
+            <a:prstDash val="solid"/>
+          </a:ln>
+        </p:spPr>
+        <p:txBody>
+          <a:bodyPr xmlns:a="http://schemas.openxmlformats.org/drawingml/2006/main">
+            <a:noAutofit/>
+          </a:bodyPr>
+          <a:lstStyle xmlns:a="http://schemas.openxmlformats.org/drawingml/2006/main">
+            <a:defPPr>
+              <a:defRPr sz="2025" b="0">
+                <a:solidFill>
+                  <a:srgbClr val="203149"/>
+                </a:solidFill>
+                <a:latin typeface="DejaVu Sans"/>
+                <a:ea typeface="DejaVu Sans"/>
+                <a:cs typeface="DejaVu Sans"/>
+              </a:defRPr>
+            </a:defPPr>
+          </a:lstStyle>
+          <a:p xmlns:a="http://schemas.openxmlformats.org/drawingml/2006/main">
+            <a:pPr>
+              <a:defRPr sz="2025" b="0">
+                <a:solidFill>
+                  <a:srgbClr val="203149"/>
+                </a:solidFill>
+                <a:latin typeface="DejaVu Sans"/>
+                <a:ea typeface="DejaVu Sans"/>
+                <a:cs typeface="DejaVu Sans"/>
+              </a:defRPr>
+            </a:pPr>
+            <a:r>
+              <a:rPr sz="2025" b="0">
+                <a:solidFill>
+                  <a:srgbClr val="203149"/>
+                </a:solidFill>
+                <a:latin typeface="DejaVu Sans"/>
+                <a:ea typeface="DejaVu Sans"/>
+                <a:cs typeface="DejaVu Sans"/>
+              </a:rPr>
+              <a:t>1. Lê as teclas (app.py)</a:t>
+            </a:r>
+          </a:p>
+          <a:p xmlns:a="http://schemas.openxmlformats.org/drawingml/2006/main">
+            <a:pPr>
+              <a:defRPr sz="2025" b="0">
+                <a:solidFill>
+                  <a:srgbClr val="203149"/>
+                </a:solidFill>
+                <a:latin typeface="DejaVu Sans"/>
+                <a:ea typeface="DejaVu Sans"/>
+                <a:cs typeface="DejaVu Sans"/>
+              </a:defRPr>
+            </a:pPr>
+            <a:r>
+              <a:rPr sz="2025" b="0">
+                <a:solidFill>
+                  <a:srgbClr val="203149"/>
+                </a:solidFill>
+                <a:latin typeface="DejaVu Sans"/>
+                <a:ea typeface="DejaVu Sans"/>
+                <a:cs typeface="DejaVu Sans"/>
+              </a:rPr>
+              <a:t>2. Calcula movimento, colisões e pontos (run.py e entities.py)</a:t>
+            </a:r>
+          </a:p>
+          <a:p xmlns:a="http://schemas.openxmlformats.org/drawingml/2006/main">
+            <a:pPr>
+              <a:defRPr sz="2025" b="0">
+                <a:solidFill>
+                  <a:srgbClr val="203149"/>
+                </a:solidFill>
+                <a:latin typeface="DejaVu Sans"/>
+                <a:ea typeface="DejaVu Sans"/>
+                <a:cs typeface="DejaVu Sans"/>
+              </a:defRPr>
+            </a:pPr>
+            <a:r>
+              <a:rPr sz="2025" b="0">
+                <a:solidFill>
+                  <a:srgbClr val="203149"/>
+                </a:solidFill>
+                <a:latin typeface="DejaVu Sans"/>
+                <a:ea typeface="DejaVu Sans"/>
+                <a:cs typeface="DejaVu Sans"/>
+              </a:rPr>
+              <a:t>3. Desenha a tela de novo (graphics.py)</a:t>
+            </a:r>
+          </a:p>
+        </p:txBody>
+      </p:sp>
+      <p:sp>
+        <p:nvSpPr>
+          <p:cNvPr id="14" name="">
+            <a:extLst xmlns:a="http://schemas.openxmlformats.org/drawingml/2006/main">
+              <a:ext uri="{FF2B5EF4-FFF2-40B4-BE49-F238E27FC236}">
+                <a16:creationId xmlns:a16="http://schemas.microsoft.com/office/drawing/2014/main" id="{BFF32FFC-C977-4170-9148-D87FD7450771}"/>
+              </a:ext>
+            </a:extLst>
+          </p:cNvPr>
+          <p:cNvSpPr>
+            <a:spLocks xmlns:a="http://schemas.openxmlformats.org/drawingml/2006/main" noGrp="1"/>
+          </p:cNvSpPr>
+          <p:nvPr/>
+        </p:nvSpPr>
+        <p:spPr>
+          <a:xfrm xmlns:a="http://schemas.openxmlformats.org/drawingml/2006/main">
+            <a:off x="609600" y="5829300"/>
+            <a:ext cx="10953750" cy="419100"/>
           </a:xfrm>
           <a:prstGeom xmlns:a="http://schemas.openxmlformats.org/drawingml/2006/main" prst="rect">
             <a:avLst/>
@@ -9253,7 +5665,7 @@
             <a:defPPr>
               <a:defRPr sz="1950" b="0">
                 <a:solidFill>
-                  <a:srgbClr val="203149"/>
+                  <a:srgbClr val="275F83"/>
                 </a:solidFill>
                 <a:latin typeface="DejaVu Sans"/>
                 <a:ea typeface="DejaVu Sans"/>
@@ -9265,7 +5677,7 @@
             <a:pPr>
               <a:defRPr sz="1950" b="0">
                 <a:solidFill>
-                  <a:srgbClr val="203149"/>
+                  <a:srgbClr val="275F83"/>
                 </a:solidFill>
                 <a:latin typeface="DejaVu Sans"/>
                 <a:ea typeface="DejaVu Sans"/>
@@ -9275,105 +5687,13 @@
             <a:r>
               <a:rPr sz="1950" b="0">
                 <a:solidFill>
-                  <a:srgbClr val="203149"/>
+                  <a:srgbClr val="275F83"/>
                 </a:solidFill>
                 <a:latin typeface="DejaVu Sans"/>
                 <a:ea typeface="DejaVu Sans"/>
                 <a:cs typeface="DejaVu Sans"/>
               </a:rPr>
-              <a:t>No resultado</a:t>
-            </a:r>
-          </a:p>
-          <a:p xmlns:a="http://schemas.openxmlformats.org/drawingml/2006/main">
-            <a:pPr>
-              <a:defRPr sz="1950" b="0">
-                <a:solidFill>
-                  <a:srgbClr val="203149"/>
-                </a:solidFill>
-                <a:latin typeface="DejaVu Sans"/>
-                <a:ea typeface="DejaVu Sans"/>
-                <a:cs typeface="DejaVu Sans"/>
-              </a:defRPr>
-            </a:pPr>
-            <a:r>
-              <a:rPr sz="1950" b="0">
-                <a:solidFill>
-                  <a:srgbClr val="203149"/>
-                </a:solidFill>
-                <a:latin typeface="DejaVu Sans"/>
-                <a:ea typeface="DejaVu Sans"/>
-                <a:cs typeface="DejaVu Sans"/>
-              </a:rPr>
-              <a:t>Reiniciar, menu ou sair</a:t>
-            </a:r>
-          </a:p>
-        </p:txBody>
-      </p:sp>
-      <p:sp>
-        <p:nvSpPr>
-          <p:cNvPr id="18" name="text-17">
-            <a:extLst xmlns:a="http://schemas.openxmlformats.org/drawingml/2006/main">
-              <a:ext uri="{FF2B5EF4-FFF2-40B4-BE49-F238E27FC236}">
-                <a16:creationId xmlns:a16="http://schemas.microsoft.com/office/drawing/2014/main" id="{361BF6A6-EC9F-48FD-B842-79FFCFE1A739}"/>
-              </a:ext>
-            </a:extLst>
-          </p:cNvPr>
-          <p:cNvSpPr>
-            <a:spLocks xmlns:a="http://schemas.openxmlformats.org/drawingml/2006/main" noGrp="1"/>
-          </p:cNvSpPr>
-          <p:nvPr/>
-        </p:nvSpPr>
-        <p:spPr>
-          <a:xfrm xmlns:a="http://schemas.openxmlformats.org/drawingml/2006/main">
-            <a:off x="609600" y="5772150"/>
-            <a:ext cx="10858500" cy="381000"/>
-          </a:xfrm>
-          <a:prstGeom xmlns:a="http://schemas.openxmlformats.org/drawingml/2006/main" prst="rect">
-            <a:avLst/>
-          </a:prstGeom>
-          <a:noFill xmlns:a="http://schemas.openxmlformats.org/drawingml/2006/main"/>
-          <a:ln xmlns:a="http://schemas.openxmlformats.org/drawingml/2006/main" w="0">
-            <a:noFill/>
-            <a:prstDash val="solid"/>
-          </a:ln>
-        </p:spPr>
-        <p:txBody>
-          <a:bodyPr xmlns:a="http://schemas.openxmlformats.org/drawingml/2006/main">
-            <a:noAutofit/>
-          </a:bodyPr>
-          <a:lstStyle xmlns:a="http://schemas.openxmlformats.org/drawingml/2006/main">
-            <a:defPPr>
-              <a:defRPr sz="2025" b="0">
-                <a:solidFill>
-                  <a:srgbClr val="203149"/>
-                </a:solidFill>
-                <a:latin typeface="DejaVu Sans"/>
-                <a:ea typeface="DejaVu Sans"/>
-                <a:cs typeface="DejaVu Sans"/>
-              </a:defRPr>
-            </a:defPPr>
-          </a:lstStyle>
-          <a:p xmlns:a="http://schemas.openxmlformats.org/drawingml/2006/main">
-            <a:pPr>
-              <a:defRPr sz="2025" b="0">
-                <a:solidFill>
-                  <a:srgbClr val="203149"/>
-                </a:solidFill>
-                <a:latin typeface="DejaVu Sans"/>
-                <a:ea typeface="DejaVu Sans"/>
-                <a:cs typeface="DejaVu Sans"/>
-              </a:defRPr>
-            </a:pPr>
-            <a:r>
-              <a:rPr sz="2025" b="0">
-                <a:solidFill>
-                  <a:srgbClr val="203149"/>
-                </a:solidFill>
-                <a:latin typeface="DejaVu Sans"/>
-                <a:ea typeface="DejaVu Sans"/>
-                <a:cs typeface="DejaVu Sans"/>
-              </a:rPr>
-              <a:t>Áudio pode ser aberto pelo menu e pela pausa.</a:t>
+              <a:t>Colisão: compara caixas invisíveis ao redor dos objetos.</a:t>
             </a:r>
           </a:p>
         </p:txBody>
@@ -9381,7 +5701,7 @@
     </p:spTree>
     <p:extLst>
       <p:ext uri="{BB962C8B-B14F-4D97-AF65-F5344CB8AC3E}">
-        <p14:creationId xmlns:p14="http://schemas.microsoft.com/office/powerpoint/2010/main" val="715348918"/>
+        <p14:creationId xmlns:p14="http://schemas.microsoft.com/office/powerpoint/2010/main" val="187808041"/>
       </p:ext>
     </p:extLst>
   </p:cSld>
@@ -9409,10 +5729,10 @@
       </p:grpSpPr>
       <p:sp>
         <p:nvSpPr>
-          <p:cNvPr id="6" name="text-0">
+          <p:cNvPr id="15" name="">
             <a:extLst xmlns:a="http://schemas.openxmlformats.org/drawingml/2006/main">
               <a:ext uri="{FF2B5EF4-FFF2-40B4-BE49-F238E27FC236}">
-                <a16:creationId xmlns:a16="http://schemas.microsoft.com/office/drawing/2014/main" id="{66574C61-44F4-43FC-A8B0-C74124F5BA93}"/>
+                <a16:creationId xmlns:a16="http://schemas.microsoft.com/office/drawing/2014/main" id="{5C7AADA1-D973-4E16-9A4D-A21780F17743}"/>
               </a:ext>
             </a:extLst>
           </p:cNvPr>
@@ -9471,17 +5791,17 @@
                 <a:ea typeface="DejaVu Sans"/>
                 <a:cs typeface="DejaVu Sans"/>
               </a:rPr>
-              <a:t>Como o código se organiza</a:t>
+              <a:t>Três efeitos que aparecem no jogo</a:t>
             </a:r>
           </a:p>
         </p:txBody>
       </p:sp>
       <p:sp>
         <p:nvSpPr>
-          <p:cNvPr id="2" name="text-1">
+          <p:cNvPr id="2" name="">
             <a:extLst xmlns:a="http://schemas.openxmlformats.org/drawingml/2006/main">
               <a:ext uri="{FF2B5EF4-FFF2-40B4-BE49-F238E27FC236}">
-                <a16:creationId xmlns:a16="http://schemas.microsoft.com/office/drawing/2014/main" id="{A22AE565-34A8-483F-B30A-CFB7382D7A52}"/>
+                <a16:creationId xmlns:a16="http://schemas.microsoft.com/office/drawing/2014/main" id="{EF94554A-8615-4CA6-9BB5-638D559A03FD}"/>
               </a:ext>
             </a:extLst>
           </p:cNvPr>
@@ -9492,7 +5812,7 @@
         </p:nvSpPr>
         <p:spPr>
           <a:xfrm xmlns:a="http://schemas.openxmlformats.org/drawingml/2006/main">
-            <a:off x="11239500" y="6419850"/>
+            <a:off x="11239500" y="6429375"/>
             <a:ext cx="457200" cy="238125"/>
           </a:xfrm>
           <a:prstGeom xmlns:a="http://schemas.openxmlformats.org/drawingml/2006/main" prst="rect">
@@ -9547,10 +5867,10 @@
       </p:sp>
       <p:sp>
         <p:nvSpPr>
-          <p:cNvPr id="3" name="text-2">
+          <p:cNvPr id="3" name="">
             <a:extLst xmlns:a="http://schemas.openxmlformats.org/drawingml/2006/main">
               <a:ext uri="{FF2B5EF4-FFF2-40B4-BE49-F238E27FC236}">
-                <a16:creationId xmlns:a16="http://schemas.microsoft.com/office/drawing/2014/main" id="{F8958ADB-5215-41BB-B43B-01E205DCCFE5}"/>
+                <a16:creationId xmlns:a16="http://schemas.microsoft.com/office/drawing/2014/main" id="{B5475A9A-6FE9-456E-BBCF-442D2B8ACFEB}"/>
               </a:ext>
             </a:extLst>
           </p:cNvPr>
@@ -9561,8 +5881,8 @@
         </p:nvSpPr>
         <p:spPr>
           <a:xfrm xmlns:a="http://schemas.openxmlformats.org/drawingml/2006/main">
-            <a:off x="609600" y="1552575"/>
-            <a:ext cx="5095875" cy="4286250"/>
+            <a:off x="609600" y="1514475"/>
+            <a:ext cx="3429000" cy="619125"/>
           </a:xfrm>
           <a:prstGeom xmlns:a="http://schemas.openxmlformats.org/drawingml/2006/main" prst="rect">
             <a:avLst/>
@@ -9579,7 +5899,7 @@
           </a:bodyPr>
           <a:lstStyle xmlns:a="http://schemas.openxmlformats.org/drawingml/2006/main">
             <a:defPPr>
-              <a:defRPr sz="2250" b="1">
+              <a:defRPr sz="2025" b="1">
                 <a:solidFill>
                   <a:srgbClr val="203149"/>
                 </a:solidFill>
@@ -9591,7 +5911,7 @@
           </a:lstStyle>
           <a:p xmlns:a="http://schemas.openxmlformats.org/drawingml/2006/main">
             <a:pPr>
-              <a:defRPr sz="2250" b="1">
+              <a:defRPr sz="2025" b="1">
                 <a:solidFill>
                   <a:srgbClr val="203149"/>
                 </a:solidFill>
@@ -9601,7 +5921,7 @@
               </a:defRPr>
             </a:pPr>
             <a:r>
-              <a:rPr sz="2250" b="1">
+              <a:rPr sz="2025" b="1">
                 <a:solidFill>
                   <a:srgbClr val="203149"/>
                 </a:solidFill>
@@ -9609,142 +5929,17 @@
                 <a:ea typeface="DejaVu Sans"/>
                 <a:cs typeface="DejaVu Sans"/>
               </a:rPr>
-              <a:t>App</a:t>
-            </a:r>
-          </a:p>
-          <a:p xmlns:a="http://schemas.openxmlformats.org/drawingml/2006/main">
-            <a:pPr>
-              <a:defRPr sz="2250" b="1">
-                <a:solidFill>
-                  <a:srgbClr val="203149"/>
-                </a:solidFill>
-                <a:latin typeface="DejaVu Sans"/>
-                <a:ea typeface="DejaVu Sans"/>
-                <a:cs typeface="DejaVu Sans"/>
-              </a:defRPr>
-            </a:pPr>
-            <a:r>
-              <a:rPr sz="2250" b="1">
-                <a:solidFill>
-                  <a:srgbClr val="203149"/>
-                </a:solidFill>
-                <a:latin typeface="DejaVu Sans"/>
-                <a:ea typeface="DejaVu Sans"/>
-                <a:cs typeface="DejaVu Sans"/>
-              </a:rPr>
-              <a:t>Comandos e telas</a:t>
-            </a:r>
-          </a:p>
-          <a:p xmlns:a="http://schemas.openxmlformats.org/drawingml/2006/main">
-            <a:r>
-              <a:t/>
-            </a:r>
-          </a:p>
-          <a:p xmlns:a="http://schemas.openxmlformats.org/drawingml/2006/main">
-            <a:pPr>
-              <a:defRPr sz="2250" b="1">
-                <a:solidFill>
-                  <a:srgbClr val="203149"/>
-                </a:solidFill>
-                <a:latin typeface="DejaVu Sans"/>
-                <a:ea typeface="DejaVu Sans"/>
-                <a:cs typeface="DejaVu Sans"/>
-              </a:defRPr>
-            </a:pPr>
-            <a:r>
-              <a:rPr sz="2250" b="1">
-                <a:solidFill>
-                  <a:srgbClr val="203149"/>
-                </a:solidFill>
-                <a:latin typeface="DejaVu Sans"/>
-                <a:ea typeface="DejaVu Sans"/>
-                <a:cs typeface="DejaVu Sans"/>
-              </a:rPr>
-              <a:t>Run</a:t>
-            </a:r>
-          </a:p>
-          <a:p xmlns:a="http://schemas.openxmlformats.org/drawingml/2006/main">
-            <a:pPr>
-              <a:defRPr sz="2250" b="1">
-                <a:solidFill>
-                  <a:srgbClr val="203149"/>
-                </a:solidFill>
-                <a:latin typeface="DejaVu Sans"/>
-                <a:ea typeface="DejaVu Sans"/>
-                <a:cs typeface="DejaVu Sans"/>
-              </a:defRPr>
-            </a:pPr>
-            <a:r>
-              <a:rPr sz="2250" b="1">
-                <a:solidFill>
-                  <a:srgbClr val="203149"/>
-                </a:solidFill>
-                <a:latin typeface="DejaVu Sans"/>
-                <a:ea typeface="DejaVu Sans"/>
-                <a:cs typeface="DejaVu Sans"/>
-              </a:rPr>
-              <a:t>Regras da corrida</a:t>
-            </a:r>
-          </a:p>
-          <a:p xmlns:a="http://schemas.openxmlformats.org/drawingml/2006/main">
-            <a:r>
-              <a:t/>
-            </a:r>
-          </a:p>
-          <a:p xmlns:a="http://schemas.openxmlformats.org/drawingml/2006/main">
-            <a:pPr>
-              <a:defRPr sz="2250" b="1">
-                <a:solidFill>
-                  <a:srgbClr val="203149"/>
-                </a:solidFill>
-                <a:latin typeface="DejaVu Sans"/>
-                <a:ea typeface="DejaVu Sans"/>
-                <a:cs typeface="DejaVu Sans"/>
-              </a:defRPr>
-            </a:pPr>
-            <a:r>
-              <a:rPr sz="2250" b="1">
-                <a:solidFill>
-                  <a:srgbClr val="203149"/>
-                </a:solidFill>
-                <a:latin typeface="DejaVu Sans"/>
-                <a:ea typeface="DejaVu Sans"/>
-                <a:cs typeface="DejaVu Sans"/>
-              </a:rPr>
-              <a:t>Renderer e Window</a:t>
-            </a:r>
-          </a:p>
-          <a:p xmlns:a="http://schemas.openxmlformats.org/drawingml/2006/main">
-            <a:pPr>
-              <a:defRPr sz="2250" b="1">
-                <a:solidFill>
-                  <a:srgbClr val="203149"/>
-                </a:solidFill>
-                <a:latin typeface="DejaVu Sans"/>
-                <a:ea typeface="DejaVu Sans"/>
-                <a:cs typeface="DejaVu Sans"/>
-              </a:defRPr>
-            </a:pPr>
-            <a:r>
-              <a:rPr sz="2250" b="1">
-                <a:solidFill>
-                  <a:srgbClr val="203149"/>
-                </a:solidFill>
-                <a:latin typeface="DejaVu Sans"/>
-                <a:ea typeface="DejaVu Sans"/>
-                <a:cs typeface="DejaVu Sans"/>
-              </a:rPr>
-              <a:t>Desenho e janela</a:t>
+              <a:t>Fundo com profundidade</a:t>
             </a:r>
           </a:p>
         </p:txBody>
       </p:sp>
       <p:sp>
         <p:nvSpPr>
-          <p:cNvPr id="4" name="text-3">
+          <p:cNvPr id="4" name="">
             <a:extLst xmlns:a="http://schemas.openxmlformats.org/drawingml/2006/main">
               <a:ext uri="{FF2B5EF4-FFF2-40B4-BE49-F238E27FC236}">
-                <a16:creationId xmlns:a16="http://schemas.microsoft.com/office/drawing/2014/main" id="{22313B11-92B3-494C-BEAB-352C2D8408DB}"/>
+                <a16:creationId xmlns:a16="http://schemas.microsoft.com/office/drawing/2014/main" id="{8577D3CC-E4AA-4D58-94FE-77A99F92BF17}"/>
               </a:ext>
             </a:extLst>
           </p:cNvPr>
@@ -9755,8 +5950,8 @@
         </p:nvSpPr>
         <p:spPr>
           <a:xfrm xmlns:a="http://schemas.openxmlformats.org/drawingml/2006/main">
-            <a:off x="6429375" y="1600200"/>
-            <a:ext cx="5143500" cy="3905250"/>
+            <a:off x="609600" y="2057400"/>
+            <a:ext cx="3429000" cy="381000"/>
           </a:xfrm>
           <a:prstGeom xmlns:a="http://schemas.openxmlformats.org/drawingml/2006/main" prst="rect">
             <a:avLst/>
@@ -9773,9 +5968,9 @@
           </a:bodyPr>
           <a:lstStyle xmlns:a="http://schemas.openxmlformats.org/drawingml/2006/main">
             <a:defPPr>
-              <a:defRPr sz="2175" b="0">
-                <a:solidFill>
-                  <a:srgbClr val="203149"/>
+              <a:defRPr sz="1725" b="0">
+                <a:solidFill>
+                  <a:srgbClr val="275F83"/>
                 </a:solidFill>
                 <a:latin typeface="DejaVu Sans"/>
                 <a:ea typeface="DejaVu Sans"/>
@@ -9785,9 +5980,9 @@
           </a:lstStyle>
           <a:p xmlns:a="http://schemas.openxmlformats.org/drawingml/2006/main">
             <a:pPr>
-              <a:defRPr sz="2175" b="0">
-                <a:solidFill>
-                  <a:srgbClr val="203149"/>
+              <a:defRPr sz="1725" b="0">
+                <a:solidFill>
+                  <a:srgbClr val="275F83"/>
                 </a:solidFill>
                 <a:latin typeface="DejaVu Sans"/>
                 <a:ea typeface="DejaVu Sans"/>
@@ -9795,109 +5990,25 @@
               </a:defRPr>
             </a:pPr>
             <a:r>
-              <a:rPr sz="2175" b="0">
-                <a:solidFill>
-                  <a:srgbClr val="203149"/>
+              <a:rPr sz="1725" b="0">
+                <a:solidFill>
+                  <a:srgbClr val="275F83"/>
                 </a:solidFill>
                 <a:latin typeface="DejaVu Sans"/>
                 <a:ea typeface="DejaVu Sans"/>
                 <a:cs typeface="DejaVu Sans"/>
               </a:rPr>
-              <a:t>O loop repete</a:t>
-            </a:r>
-          </a:p>
-          <a:p xmlns:a="http://schemas.openxmlformats.org/drawingml/2006/main">
-            <a:r>
-              <a:t/>
-            </a:r>
-          </a:p>
-          <a:p xmlns:a="http://schemas.openxmlformats.org/drawingml/2006/main">
-            <a:pPr>
-              <a:defRPr sz="2175" b="0">
-                <a:solidFill>
-                  <a:srgbClr val="203149"/>
-                </a:solidFill>
-                <a:latin typeface="DejaVu Sans"/>
-                <a:ea typeface="DejaVu Sans"/>
-                <a:cs typeface="DejaVu Sans"/>
-              </a:defRPr>
-            </a:pPr>
-            <a:r>
-              <a:rPr sz="2175" b="0">
-                <a:solidFill>
-                  <a:srgbClr val="203149"/>
-                </a:solidFill>
-                <a:latin typeface="DejaVu Sans"/>
-                <a:ea typeface="DejaVu Sans"/>
-                <a:cs typeface="DejaVu Sans"/>
-              </a:rPr>
-              <a:t>1. Ler os comandos</a:t>
-            </a:r>
-          </a:p>
-          <a:p xmlns:a="http://schemas.openxmlformats.org/drawingml/2006/main">
-            <a:r>
-              <a:t/>
-            </a:r>
-          </a:p>
-          <a:p xmlns:a="http://schemas.openxmlformats.org/drawingml/2006/main">
-            <a:pPr>
-              <a:defRPr sz="2175" b="0">
-                <a:solidFill>
-                  <a:srgbClr val="203149"/>
-                </a:solidFill>
-                <a:latin typeface="DejaVu Sans"/>
-                <a:ea typeface="DejaVu Sans"/>
-                <a:cs typeface="DejaVu Sans"/>
-              </a:defRPr>
-            </a:pPr>
-            <a:r>
-              <a:rPr sz="2175" b="0">
-                <a:solidFill>
-                  <a:srgbClr val="203149"/>
-                </a:solidFill>
-                <a:latin typeface="DejaVu Sans"/>
-                <a:ea typeface="DejaVu Sans"/>
-                <a:cs typeface="DejaVu Sans"/>
-              </a:rPr>
-              <a:t>2. Atualizar a partida</a:t>
-            </a:r>
-          </a:p>
-          <a:p xmlns:a="http://schemas.openxmlformats.org/drawingml/2006/main">
-            <a:r>
-              <a:t/>
-            </a:r>
-          </a:p>
-          <a:p xmlns:a="http://schemas.openxmlformats.org/drawingml/2006/main">
-            <a:pPr>
-              <a:defRPr sz="2175" b="0">
-                <a:solidFill>
-                  <a:srgbClr val="203149"/>
-                </a:solidFill>
-                <a:latin typeface="DejaVu Sans"/>
-                <a:ea typeface="DejaVu Sans"/>
-                <a:cs typeface="DejaVu Sans"/>
-              </a:defRPr>
-            </a:pPr>
-            <a:r>
-              <a:rPr sz="2175" b="0">
-                <a:solidFill>
-                  <a:srgbClr val="203149"/>
-                </a:solidFill>
-                <a:latin typeface="DejaVu Sans"/>
-                <a:ea typeface="DejaVu Sans"/>
-                <a:cs typeface="DejaVu Sans"/>
-              </a:rPr>
-              <a:t>3. Desenhar a tela</a:t>
+              <a:t>Parallax</a:t>
             </a:r>
           </a:p>
         </p:txBody>
       </p:sp>
       <p:sp>
         <p:nvSpPr>
-          <p:cNvPr id="5" name="text-4">
+          <p:cNvPr id="5" name="">
             <a:extLst xmlns:a="http://schemas.openxmlformats.org/drawingml/2006/main">
               <a:ext uri="{FF2B5EF4-FFF2-40B4-BE49-F238E27FC236}">
-                <a16:creationId xmlns:a16="http://schemas.microsoft.com/office/drawing/2014/main" id="{D95CB2DB-64EE-4339-9529-B7C99783A0EB}"/>
+                <a16:creationId xmlns:a16="http://schemas.microsoft.com/office/drawing/2014/main" id="{D16D6BE5-A23A-44EF-B3AC-777F87C458F1}"/>
               </a:ext>
             </a:extLst>
           </p:cNvPr>
@@ -9908,8 +6019,368 @@
         </p:nvSpPr>
         <p:spPr>
           <a:xfrm xmlns:a="http://schemas.openxmlformats.org/drawingml/2006/main">
-            <a:off x="6429375" y="5667375"/>
-            <a:ext cx="5143500" cy="666750"/>
+            <a:off x="4381500" y="1514475"/>
+            <a:ext cx="3429000" cy="619125"/>
+          </a:xfrm>
+          <a:prstGeom xmlns:a="http://schemas.openxmlformats.org/drawingml/2006/main" prst="rect">
+            <a:avLst/>
+          </a:prstGeom>
+          <a:noFill xmlns:a="http://schemas.openxmlformats.org/drawingml/2006/main"/>
+          <a:ln xmlns:a="http://schemas.openxmlformats.org/drawingml/2006/main" w="0">
+            <a:noFill/>
+            <a:prstDash val="solid"/>
+          </a:ln>
+        </p:spPr>
+        <p:txBody>
+          <a:bodyPr xmlns:a="http://schemas.openxmlformats.org/drawingml/2006/main">
+            <a:noAutofit/>
+          </a:bodyPr>
+          <a:lstStyle xmlns:a="http://schemas.openxmlformats.org/drawingml/2006/main">
+            <a:defPPr>
+              <a:defRPr sz="2025" b="1">
+                <a:solidFill>
+                  <a:srgbClr val="203149"/>
+                </a:solidFill>
+                <a:latin typeface="DejaVu Sans"/>
+                <a:ea typeface="DejaVu Sans"/>
+                <a:cs typeface="DejaVu Sans"/>
+              </a:defRPr>
+            </a:defPPr>
+          </a:lstStyle>
+          <a:p xmlns:a="http://schemas.openxmlformats.org/drawingml/2006/main">
+            <a:pPr>
+              <a:defRPr sz="2025" b="1">
+                <a:solidFill>
+                  <a:srgbClr val="203149"/>
+                </a:solidFill>
+                <a:latin typeface="DejaVu Sans"/>
+                <a:ea typeface="DejaVu Sans"/>
+                <a:cs typeface="DejaVu Sans"/>
+              </a:defRPr>
+            </a:pPr>
+            <a:r>
+              <a:rPr sz="2025" b="1">
+                <a:solidFill>
+                  <a:srgbClr val="203149"/>
+                </a:solidFill>
+                <a:latin typeface="DejaVu Sans"/>
+                <a:ea typeface="DejaVu Sans"/>
+                <a:cs typeface="DejaVu Sans"/>
+              </a:rPr>
+              <a:t>Desenhos em sequência</a:t>
+            </a:r>
+          </a:p>
+        </p:txBody>
+      </p:sp>
+      <p:sp>
+        <p:nvSpPr>
+          <p:cNvPr id="6" name="">
+            <a:extLst xmlns:a="http://schemas.openxmlformats.org/drawingml/2006/main">
+              <a:ext uri="{FF2B5EF4-FFF2-40B4-BE49-F238E27FC236}">
+                <a16:creationId xmlns:a16="http://schemas.microsoft.com/office/drawing/2014/main" id="{20B00DBC-6CAA-4404-9E98-423085D90710}"/>
+              </a:ext>
+            </a:extLst>
+          </p:cNvPr>
+          <p:cNvSpPr>
+            <a:spLocks xmlns:a="http://schemas.openxmlformats.org/drawingml/2006/main" noGrp="1"/>
+          </p:cNvSpPr>
+          <p:nvPr/>
+        </p:nvSpPr>
+        <p:spPr>
+          <a:xfrm xmlns:a="http://schemas.openxmlformats.org/drawingml/2006/main">
+            <a:off x="4381500" y="2057400"/>
+            <a:ext cx="3429000" cy="381000"/>
+          </a:xfrm>
+          <a:prstGeom xmlns:a="http://schemas.openxmlformats.org/drawingml/2006/main" prst="rect">
+            <a:avLst/>
+          </a:prstGeom>
+          <a:noFill xmlns:a="http://schemas.openxmlformats.org/drawingml/2006/main"/>
+          <a:ln xmlns:a="http://schemas.openxmlformats.org/drawingml/2006/main" w="0">
+            <a:noFill/>
+            <a:prstDash val="solid"/>
+          </a:ln>
+        </p:spPr>
+        <p:txBody>
+          <a:bodyPr xmlns:a="http://schemas.openxmlformats.org/drawingml/2006/main">
+            <a:noAutofit/>
+          </a:bodyPr>
+          <a:lstStyle xmlns:a="http://schemas.openxmlformats.org/drawingml/2006/main">
+            <a:defPPr>
+              <a:defRPr sz="1725" b="0">
+                <a:solidFill>
+                  <a:srgbClr val="275F83"/>
+                </a:solidFill>
+                <a:latin typeface="DejaVu Sans"/>
+                <a:ea typeface="DejaVu Sans"/>
+                <a:cs typeface="DejaVu Sans"/>
+              </a:defRPr>
+            </a:defPPr>
+          </a:lstStyle>
+          <a:p xmlns:a="http://schemas.openxmlformats.org/drawingml/2006/main">
+            <a:pPr>
+              <a:defRPr sz="1725" b="0">
+                <a:solidFill>
+                  <a:srgbClr val="275F83"/>
+                </a:solidFill>
+                <a:latin typeface="DejaVu Sans"/>
+                <a:ea typeface="DejaVu Sans"/>
+                <a:cs typeface="DejaVu Sans"/>
+              </a:defRPr>
+            </a:pPr>
+            <a:r>
+              <a:rPr sz="1725" b="0">
+                <a:solidFill>
+                  <a:srgbClr val="275F83"/>
+                </a:solidFill>
+                <a:latin typeface="DejaVu Sans"/>
+                <a:ea typeface="DejaVu Sans"/>
+                <a:cs typeface="DejaVu Sans"/>
+              </a:rPr>
+              <a:t>Animação por quadros</a:t>
+            </a:r>
+          </a:p>
+        </p:txBody>
+      </p:sp>
+      <p:sp>
+        <p:nvSpPr>
+          <p:cNvPr id="7" name="">
+            <a:extLst xmlns:a="http://schemas.openxmlformats.org/drawingml/2006/main">
+              <a:ext uri="{FF2B5EF4-FFF2-40B4-BE49-F238E27FC236}">
+                <a16:creationId xmlns:a16="http://schemas.microsoft.com/office/drawing/2014/main" id="{1AEE100D-6E65-48D4-8B0A-7D7F88295642}"/>
+              </a:ext>
+            </a:extLst>
+          </p:cNvPr>
+          <p:cNvSpPr>
+            <a:spLocks xmlns:a="http://schemas.openxmlformats.org/drawingml/2006/main" noGrp="1"/>
+          </p:cNvSpPr>
+          <p:nvPr/>
+        </p:nvSpPr>
+        <p:spPr>
+          <a:xfrm xmlns:a="http://schemas.openxmlformats.org/drawingml/2006/main">
+            <a:off x="8153400" y="1514475"/>
+            <a:ext cx="3429000" cy="619125"/>
+          </a:xfrm>
+          <a:prstGeom xmlns:a="http://schemas.openxmlformats.org/drawingml/2006/main" prst="rect">
+            <a:avLst/>
+          </a:prstGeom>
+          <a:noFill xmlns:a="http://schemas.openxmlformats.org/drawingml/2006/main"/>
+          <a:ln xmlns:a="http://schemas.openxmlformats.org/drawingml/2006/main" w="0">
+            <a:noFill/>
+            <a:prstDash val="solid"/>
+          </a:ln>
+        </p:spPr>
+        <p:txBody>
+          <a:bodyPr xmlns:a="http://schemas.openxmlformats.org/drawingml/2006/main">
+            <a:noAutofit/>
+          </a:bodyPr>
+          <a:lstStyle xmlns:a="http://schemas.openxmlformats.org/drawingml/2006/main">
+            <a:defPPr>
+              <a:defRPr sz="2025" b="1">
+                <a:solidFill>
+                  <a:srgbClr val="203149"/>
+                </a:solidFill>
+                <a:latin typeface="DejaVu Sans"/>
+                <a:ea typeface="DejaVu Sans"/>
+                <a:cs typeface="DejaVu Sans"/>
+              </a:defRPr>
+            </a:defPPr>
+          </a:lstStyle>
+          <a:p xmlns:a="http://schemas.openxmlformats.org/drawingml/2006/main">
+            <a:pPr>
+              <a:defRPr sz="2025" b="1">
+                <a:solidFill>
+                  <a:srgbClr val="203149"/>
+                </a:solidFill>
+                <a:latin typeface="DejaVu Sans"/>
+                <a:ea typeface="DejaVu Sans"/>
+                <a:cs typeface="DejaVu Sans"/>
+              </a:defRPr>
+            </a:pPr>
+            <a:r>
+              <a:rPr sz="2025" b="1">
+                <a:solidFill>
+                  <a:srgbClr val="203149"/>
+                </a:solidFill>
+                <a:latin typeface="DejaVu Sans"/>
+                <a:ea typeface="DejaVu Sans"/>
+                <a:cs typeface="DejaVu Sans"/>
+              </a:rPr>
+              <a:t>Efeitos que aparecem</a:t>
+            </a:r>
+          </a:p>
+        </p:txBody>
+      </p:sp>
+      <p:sp>
+        <p:nvSpPr>
+          <p:cNvPr id="8" name="">
+            <a:extLst xmlns:a="http://schemas.openxmlformats.org/drawingml/2006/main">
+              <a:ext uri="{FF2B5EF4-FFF2-40B4-BE49-F238E27FC236}">
+                <a16:creationId xmlns:a16="http://schemas.microsoft.com/office/drawing/2014/main" id="{A5364BB1-984D-4254-8E97-5D6F30C1A4B4}"/>
+              </a:ext>
+            </a:extLst>
+          </p:cNvPr>
+          <p:cNvSpPr>
+            <a:spLocks xmlns:a="http://schemas.openxmlformats.org/drawingml/2006/main" noGrp="1"/>
+          </p:cNvSpPr>
+          <p:nvPr/>
+        </p:nvSpPr>
+        <p:spPr>
+          <a:xfrm xmlns:a="http://schemas.openxmlformats.org/drawingml/2006/main">
+            <a:off x="8153400" y="2057400"/>
+            <a:ext cx="3429000" cy="381000"/>
+          </a:xfrm>
+          <a:prstGeom xmlns:a="http://schemas.openxmlformats.org/drawingml/2006/main" prst="rect">
+            <a:avLst/>
+          </a:prstGeom>
+          <a:noFill xmlns:a="http://schemas.openxmlformats.org/drawingml/2006/main"/>
+          <a:ln xmlns:a="http://schemas.openxmlformats.org/drawingml/2006/main" w="0">
+            <a:noFill/>
+            <a:prstDash val="solid"/>
+          </a:ln>
+        </p:spPr>
+        <p:txBody>
+          <a:bodyPr xmlns:a="http://schemas.openxmlformats.org/drawingml/2006/main">
+            <a:noAutofit/>
+          </a:bodyPr>
+          <a:lstStyle xmlns:a="http://schemas.openxmlformats.org/drawingml/2006/main">
+            <a:defPPr>
+              <a:defRPr sz="1725" b="0">
+                <a:solidFill>
+                  <a:srgbClr val="275F83"/>
+                </a:solidFill>
+                <a:latin typeface="DejaVu Sans"/>
+                <a:ea typeface="DejaVu Sans"/>
+                <a:cs typeface="DejaVu Sans"/>
+              </a:defRPr>
+            </a:defPPr>
+          </a:lstStyle>
+          <a:p xmlns:a="http://schemas.openxmlformats.org/drawingml/2006/main">
+            <a:pPr>
+              <a:defRPr sz="1725" b="0">
+                <a:solidFill>
+                  <a:srgbClr val="275F83"/>
+                </a:solidFill>
+                <a:latin typeface="DejaVu Sans"/>
+                <a:ea typeface="DejaVu Sans"/>
+                <a:cs typeface="DejaVu Sans"/>
+              </a:defRPr>
+            </a:pPr>
+            <a:r>
+              <a:rPr sz="1725" b="0">
+                <a:solidFill>
+                  <a:srgbClr val="275F83"/>
+                </a:solidFill>
+                <a:latin typeface="DejaVu Sans"/>
+                <a:ea typeface="DejaVu Sans"/>
+                <a:cs typeface="DejaVu Sans"/>
+              </a:rPr>
+              <a:t>Partículas</a:t>
+            </a:r>
+          </a:p>
+        </p:txBody>
+      </p:sp>
+      <p:pic>
+        <p:nvPicPr>
+          <p:cNvPr id="9" name="">
+            <a:extLst xmlns:a="http://schemas.openxmlformats.org/drawingml/2006/main">
+              <a:ext uri="{FF2B5EF4-FFF2-40B4-BE49-F238E27FC236}">
+                <a16:creationId xmlns:a16="http://schemas.microsoft.com/office/drawing/2014/main" id="{E2CF1473-E87D-4A63-B863-AB503E213556}"/>
+              </a:ext>
+            </a:extLst>
+          </p:cNvPr>
+          <p:cNvPicPr>
+            <a:picLocks xmlns:a="http://schemas.openxmlformats.org/drawingml/2006/main" noChangeAspect="1"/>
+          </p:cNvPicPr>
+          <p:nvPr/>
+        </p:nvPicPr>
+        <p:blipFill>
+          <a:blip xmlns:r="http://schemas.openxmlformats.org/officeDocument/2006/relationships" xmlns:a="http://schemas.openxmlformats.org/drawingml/2006/main" r:embed="R0fe1545247164721"/>
+          <a:stretch xmlns:a="http://schemas.openxmlformats.org/drawingml/2006/main"/>
+        </p:blipFill>
+        <p:spPr>
+          <a:xfrm xmlns:a="http://schemas.openxmlformats.org/drawingml/2006/main">
+            <a:off x="613833" y="2638425"/>
+            <a:ext cx="3420533" cy="1924050"/>
+          </a:xfrm>
+          <a:prstGeom xmlns:a="http://schemas.openxmlformats.org/drawingml/2006/main" prst="rect">
+            <a:avLst/>
+          </a:prstGeom>
+        </p:spPr>
+      </p:pic>
+      <p:pic>
+        <p:nvPicPr>
+          <p:cNvPr id="10" name="">
+            <a:extLst xmlns:a="http://schemas.openxmlformats.org/drawingml/2006/main">
+              <a:ext uri="{FF2B5EF4-FFF2-40B4-BE49-F238E27FC236}">
+                <a16:creationId xmlns:a16="http://schemas.microsoft.com/office/drawing/2014/main" id="{8F2F17D3-2080-455A-A45D-15D1F6E12417}"/>
+              </a:ext>
+            </a:extLst>
+          </p:cNvPr>
+          <p:cNvPicPr>
+            <a:picLocks xmlns:a="http://schemas.openxmlformats.org/drawingml/2006/main" noChangeAspect="1"/>
+          </p:cNvPicPr>
+          <p:nvPr/>
+        </p:nvPicPr>
+        <p:blipFill>
+          <a:blip xmlns:r="http://schemas.openxmlformats.org/officeDocument/2006/relationships" xmlns:a="http://schemas.openxmlformats.org/drawingml/2006/main" r:embed="Rb141184480854829"/>
+          <a:stretch xmlns:a="http://schemas.openxmlformats.org/drawingml/2006/main"/>
+        </p:blipFill>
+        <p:spPr>
+          <a:xfrm xmlns:a="http://schemas.openxmlformats.org/drawingml/2006/main">
+            <a:off x="4381500" y="3243263"/>
+            <a:ext cx="3429000" cy="714375"/>
+          </a:xfrm>
+          <a:prstGeom xmlns:a="http://schemas.openxmlformats.org/drawingml/2006/main" prst="rect">
+            <a:avLst/>
+          </a:prstGeom>
+        </p:spPr>
+      </p:pic>
+      <p:pic>
+        <p:nvPicPr>
+          <p:cNvPr id="11" name="">
+            <a:extLst xmlns:a="http://schemas.openxmlformats.org/drawingml/2006/main">
+              <a:ext uri="{FF2B5EF4-FFF2-40B4-BE49-F238E27FC236}">
+                <a16:creationId xmlns:a16="http://schemas.microsoft.com/office/drawing/2014/main" id="{585A2D38-126F-4D75-930D-0D6CA991BE12}"/>
+              </a:ext>
+            </a:extLst>
+          </p:cNvPr>
+          <p:cNvPicPr>
+            <a:picLocks xmlns:a="http://schemas.openxmlformats.org/drawingml/2006/main" noChangeAspect="1"/>
+          </p:cNvPicPr>
+          <p:nvPr/>
+        </p:nvPicPr>
+        <p:blipFill>
+          <a:blip xmlns:r="http://schemas.openxmlformats.org/officeDocument/2006/relationships" xmlns:a="http://schemas.openxmlformats.org/drawingml/2006/main" r:embed="Rfd71726878194350"/>
+          <a:stretch xmlns:a="http://schemas.openxmlformats.org/drawingml/2006/main"/>
+        </p:blipFill>
+        <p:spPr>
+          <a:xfrm xmlns:a="http://schemas.openxmlformats.org/drawingml/2006/main">
+            <a:off x="8157633" y="2638425"/>
+            <a:ext cx="3420533" cy="1924050"/>
+          </a:xfrm>
+          <a:prstGeom xmlns:a="http://schemas.openxmlformats.org/drawingml/2006/main" prst="rect">
+            <a:avLst/>
+          </a:prstGeom>
+        </p:spPr>
+      </p:pic>
+      <p:sp>
+        <p:nvSpPr>
+          <p:cNvPr id="12" name="">
+            <a:extLst xmlns:a="http://schemas.openxmlformats.org/drawingml/2006/main">
+              <a:ext uri="{FF2B5EF4-FFF2-40B4-BE49-F238E27FC236}">
+                <a16:creationId xmlns:a16="http://schemas.microsoft.com/office/drawing/2014/main" id="{2F8A748D-5E22-4AE0-BEDB-27D104457E52}"/>
+              </a:ext>
+            </a:extLst>
+          </p:cNvPr>
+          <p:cNvSpPr>
+            <a:spLocks xmlns:a="http://schemas.openxmlformats.org/drawingml/2006/main" noGrp="1"/>
+          </p:cNvSpPr>
+          <p:nvPr/>
+        </p:nvSpPr>
+        <p:spPr>
+          <a:xfrm xmlns:a="http://schemas.openxmlformats.org/drawingml/2006/main">
+            <a:off x="609600" y="4886325"/>
+            <a:ext cx="3429000" cy="1238250"/>
           </a:xfrm>
           <a:prstGeom xmlns:a="http://schemas.openxmlformats.org/drawingml/2006/main" prst="rect">
             <a:avLst/>
@@ -9928,7 +6399,7 @@
             <a:defPPr>
               <a:defRPr sz="1800" b="0">
                 <a:solidFill>
-                  <a:srgbClr val="275F83"/>
+                  <a:srgbClr val="203149"/>
                 </a:solidFill>
                 <a:latin typeface="DejaVu Sans"/>
                 <a:ea typeface="DejaVu Sans"/>
@@ -9940,7 +6411,7 @@
             <a:pPr>
               <a:defRPr sz="1800" b="0">
                 <a:solidFill>
-                  <a:srgbClr val="275F83"/>
+                  <a:srgbClr val="203149"/>
                 </a:solidFill>
                 <a:latin typeface="DejaVu Sans"/>
                 <a:ea typeface="DejaVu Sans"/>
@@ -9950,20 +6421,20 @@
             <a:r>
               <a:rPr sz="1800" b="0">
                 <a:solidFill>
-                  <a:srgbClr val="275F83"/>
+                  <a:srgbClr val="203149"/>
                 </a:solidFill>
                 <a:latin typeface="DejaVu Sans"/>
                 <a:ea typeface="DejaVu Sans"/>
                 <a:cs typeface="DejaVu Sans"/>
               </a:rPr>
-              <a:t>O tempo controla o movimento.</a:t>
+              <a:t>Nuvens andam devagar.</a:t>
             </a:r>
           </a:p>
           <a:p xmlns:a="http://schemas.openxmlformats.org/drawingml/2006/main">
             <a:pPr>
               <a:defRPr sz="1800" b="0">
                 <a:solidFill>
-                  <a:srgbClr val="275F83"/>
+                  <a:srgbClr val="203149"/>
                 </a:solidFill>
                 <a:latin typeface="DejaVu Sans"/>
                 <a:ea typeface="DejaVu Sans"/>
@@ -9973,13 +6444,266 @@
             <a:r>
               <a:rPr sz="1800" b="0">
                 <a:solidFill>
-                  <a:srgbClr val="275F83"/>
+                  <a:srgbClr val="203149"/>
                 </a:solidFill>
                 <a:latin typeface="DejaVu Sans"/>
                 <a:ea typeface="DejaVu Sans"/>
                 <a:cs typeface="DejaVu Sans"/>
               </a:rPr>
-              <a:t>A pausa congela a corrida.</a:t>
+              <a:t>Lojas andam mais rápido.</a:t>
+            </a:r>
+          </a:p>
+          <a:p xmlns:a="http://schemas.openxmlformats.org/drawingml/2006/main">
+            <a:pPr>
+              <a:defRPr sz="1800" b="0">
+                <a:solidFill>
+                  <a:srgbClr val="203149"/>
+                </a:solidFill>
+                <a:latin typeface="DejaVu Sans"/>
+                <a:ea typeface="DejaVu Sans"/>
+                <a:cs typeface="DejaVu Sans"/>
+              </a:defRPr>
+            </a:pPr>
+            <a:r>
+              <a:rPr sz="1800" b="0">
+                <a:solidFill>
+                  <a:srgbClr val="203149"/>
+                </a:solidFill>
+                <a:latin typeface="DejaVu Sans"/>
+                <a:ea typeface="DejaVu Sans"/>
+                <a:cs typeface="DejaVu Sans"/>
+              </a:rPr>
+              <a:t>Isso dá profundidade.</a:t>
+            </a:r>
+          </a:p>
+        </p:txBody>
+      </p:sp>
+      <p:sp>
+        <p:nvSpPr>
+          <p:cNvPr id="13" name="">
+            <a:extLst xmlns:a="http://schemas.openxmlformats.org/drawingml/2006/main">
+              <a:ext uri="{FF2B5EF4-FFF2-40B4-BE49-F238E27FC236}">
+                <a16:creationId xmlns:a16="http://schemas.microsoft.com/office/drawing/2014/main" id="{0C0230B7-2D2B-4372-B7A1-43D2200E7B3E}"/>
+              </a:ext>
+            </a:extLst>
+          </p:cNvPr>
+          <p:cNvSpPr>
+            <a:spLocks xmlns:a="http://schemas.openxmlformats.org/drawingml/2006/main" noGrp="1"/>
+          </p:cNvSpPr>
+          <p:nvPr/>
+        </p:nvSpPr>
+        <p:spPr>
+          <a:xfrm xmlns:a="http://schemas.openxmlformats.org/drawingml/2006/main">
+            <a:off x="4381500" y="4886325"/>
+            <a:ext cx="3429000" cy="1238250"/>
+          </a:xfrm>
+          <a:prstGeom xmlns:a="http://schemas.openxmlformats.org/drawingml/2006/main" prst="rect">
+            <a:avLst/>
+          </a:prstGeom>
+          <a:noFill xmlns:a="http://schemas.openxmlformats.org/drawingml/2006/main"/>
+          <a:ln xmlns:a="http://schemas.openxmlformats.org/drawingml/2006/main" w="0">
+            <a:noFill/>
+            <a:prstDash val="solid"/>
+          </a:ln>
+        </p:spPr>
+        <p:txBody>
+          <a:bodyPr xmlns:a="http://schemas.openxmlformats.org/drawingml/2006/main">
+            <a:noAutofit/>
+          </a:bodyPr>
+          <a:lstStyle xmlns:a="http://schemas.openxmlformats.org/drawingml/2006/main">
+            <a:defPPr>
+              <a:defRPr sz="1800" b="0">
+                <a:solidFill>
+                  <a:srgbClr val="203149"/>
+                </a:solidFill>
+                <a:latin typeface="DejaVu Sans"/>
+                <a:ea typeface="DejaVu Sans"/>
+                <a:cs typeface="DejaVu Sans"/>
+              </a:defRPr>
+            </a:defPPr>
+          </a:lstStyle>
+          <a:p xmlns:a="http://schemas.openxmlformats.org/drawingml/2006/main">
+            <a:pPr>
+              <a:defRPr sz="1800" b="0">
+                <a:solidFill>
+                  <a:srgbClr val="203149"/>
+                </a:solidFill>
+                <a:latin typeface="DejaVu Sans"/>
+                <a:ea typeface="DejaVu Sans"/>
+                <a:cs typeface="DejaVu Sans"/>
+              </a:defRPr>
+            </a:pPr>
+            <a:r>
+              <a:rPr sz="1800" b="0">
+                <a:solidFill>
+                  <a:srgbClr val="203149"/>
+                </a:solidFill>
+                <a:latin typeface="DejaVu Sans"/>
+                <a:ea typeface="DejaVu Sans"/>
+                <a:cs typeface="DejaVu Sans"/>
+              </a:rPr>
+              <a:t>A troca de poses faz</a:t>
+            </a:r>
+          </a:p>
+          <a:p xmlns:a="http://schemas.openxmlformats.org/drawingml/2006/main">
+            <a:pPr>
+              <a:defRPr sz="1800" b="0">
+                <a:solidFill>
+                  <a:srgbClr val="203149"/>
+                </a:solidFill>
+                <a:latin typeface="DejaVu Sans"/>
+                <a:ea typeface="DejaVu Sans"/>
+                <a:cs typeface="DejaVu Sans"/>
+              </a:defRPr>
+            </a:pPr>
+            <a:r>
+              <a:rPr sz="1800" b="0">
+                <a:solidFill>
+                  <a:srgbClr val="203149"/>
+                </a:solidFill>
+                <a:latin typeface="DejaVu Sans"/>
+                <a:ea typeface="DejaVu Sans"/>
+                <a:cs typeface="DejaVu Sans"/>
+              </a:rPr>
+              <a:t>o personagem parecer</a:t>
+            </a:r>
+          </a:p>
+          <a:p xmlns:a="http://schemas.openxmlformats.org/drawingml/2006/main">
+            <a:pPr>
+              <a:defRPr sz="1800" b="0">
+                <a:solidFill>
+                  <a:srgbClr val="203149"/>
+                </a:solidFill>
+                <a:latin typeface="DejaVu Sans"/>
+                <a:ea typeface="DejaVu Sans"/>
+                <a:cs typeface="DejaVu Sans"/>
+              </a:defRPr>
+            </a:pPr>
+            <a:r>
+              <a:rPr sz="1800" b="0">
+                <a:solidFill>
+                  <a:srgbClr val="203149"/>
+                </a:solidFill>
+                <a:latin typeface="DejaVu Sans"/>
+                <a:ea typeface="DejaVu Sans"/>
+                <a:cs typeface="DejaVu Sans"/>
+              </a:rPr>
+              <a:t>que está correndo.</a:t>
+            </a:r>
+          </a:p>
+        </p:txBody>
+      </p:sp>
+      <p:sp>
+        <p:nvSpPr>
+          <p:cNvPr id="14" name="">
+            <a:extLst xmlns:a="http://schemas.openxmlformats.org/drawingml/2006/main">
+              <a:ext uri="{FF2B5EF4-FFF2-40B4-BE49-F238E27FC236}">
+                <a16:creationId xmlns:a16="http://schemas.microsoft.com/office/drawing/2014/main" id="{62176768-9869-46BF-8194-468AF677CD0A}"/>
+              </a:ext>
+            </a:extLst>
+          </p:cNvPr>
+          <p:cNvSpPr>
+            <a:spLocks xmlns:a="http://schemas.openxmlformats.org/drawingml/2006/main" noGrp="1"/>
+          </p:cNvSpPr>
+          <p:nvPr/>
+        </p:nvSpPr>
+        <p:spPr>
+          <a:xfrm xmlns:a="http://schemas.openxmlformats.org/drawingml/2006/main">
+            <a:off x="8153400" y="4886325"/>
+            <a:ext cx="3429000" cy="1238250"/>
+          </a:xfrm>
+          <a:prstGeom xmlns:a="http://schemas.openxmlformats.org/drawingml/2006/main" prst="rect">
+            <a:avLst/>
+          </a:prstGeom>
+          <a:noFill xmlns:a="http://schemas.openxmlformats.org/drawingml/2006/main"/>
+          <a:ln xmlns:a="http://schemas.openxmlformats.org/drawingml/2006/main" w="0">
+            <a:noFill/>
+            <a:prstDash val="solid"/>
+          </a:ln>
+        </p:spPr>
+        <p:txBody>
+          <a:bodyPr xmlns:a="http://schemas.openxmlformats.org/drawingml/2006/main">
+            <a:noAutofit/>
+          </a:bodyPr>
+          <a:lstStyle xmlns:a="http://schemas.openxmlformats.org/drawingml/2006/main">
+            <a:defPPr>
+              <a:defRPr sz="1800" b="0">
+                <a:solidFill>
+                  <a:srgbClr val="203149"/>
+                </a:solidFill>
+                <a:latin typeface="DejaVu Sans"/>
+                <a:ea typeface="DejaVu Sans"/>
+                <a:cs typeface="DejaVu Sans"/>
+              </a:defRPr>
+            </a:defPPr>
+          </a:lstStyle>
+          <a:p xmlns:a="http://schemas.openxmlformats.org/drawingml/2006/main">
+            <a:pPr>
+              <a:defRPr sz="1800" b="0">
+                <a:solidFill>
+                  <a:srgbClr val="203149"/>
+                </a:solidFill>
+                <a:latin typeface="DejaVu Sans"/>
+                <a:ea typeface="DejaVu Sans"/>
+                <a:cs typeface="DejaVu Sans"/>
+              </a:defRPr>
+            </a:pPr>
+            <a:r>
+              <a:rPr sz="1800" b="0">
+                <a:solidFill>
+                  <a:srgbClr val="203149"/>
+                </a:solidFill>
+                <a:latin typeface="DejaVu Sans"/>
+                <a:ea typeface="DejaVu Sans"/>
+                <a:cs typeface="DejaVu Sans"/>
+              </a:rPr>
+              <a:t>Cristais, faíscas e gotas</a:t>
+            </a:r>
+          </a:p>
+          <a:p xmlns:a="http://schemas.openxmlformats.org/drawingml/2006/main">
+            <a:pPr>
+              <a:defRPr sz="1800" b="0">
+                <a:solidFill>
+                  <a:srgbClr val="203149"/>
+                </a:solidFill>
+                <a:latin typeface="DejaVu Sans"/>
+                <a:ea typeface="DejaVu Sans"/>
+                <a:cs typeface="DejaVu Sans"/>
+              </a:defRPr>
+            </a:pPr>
+            <a:r>
+              <a:rPr sz="1800" b="0">
+                <a:solidFill>
+                  <a:srgbClr val="203149"/>
+                </a:solidFill>
+                <a:latin typeface="DejaVu Sans"/>
+                <a:ea typeface="DejaVu Sans"/>
+                <a:cs typeface="DejaVu Sans"/>
+              </a:rPr>
+              <a:t>aparecem por um instante</a:t>
+            </a:r>
+          </a:p>
+          <a:p xmlns:a="http://schemas.openxmlformats.org/drawingml/2006/main">
+            <a:pPr>
+              <a:defRPr sz="1800" b="0">
+                <a:solidFill>
+                  <a:srgbClr val="203149"/>
+                </a:solidFill>
+                <a:latin typeface="DejaVu Sans"/>
+                <a:ea typeface="DejaVu Sans"/>
+                <a:cs typeface="DejaVu Sans"/>
+              </a:defRPr>
+            </a:pPr>
+            <a:r>
+              <a:rPr sz="1800" b="0">
+                <a:solidFill>
+                  <a:srgbClr val="203149"/>
+                </a:solidFill>
+                <a:latin typeface="DejaVu Sans"/>
+                <a:ea typeface="DejaVu Sans"/>
+                <a:cs typeface="DejaVu Sans"/>
+              </a:rPr>
+              <a:t>e depois somem.</a:t>
             </a:r>
           </a:p>
         </p:txBody>
@@ -9987,7 +6711,7 @@
     </p:spTree>
     <p:extLst>
       <p:ext uri="{BB962C8B-B14F-4D97-AF65-F5344CB8AC3E}">
-        <p14:creationId xmlns:p14="http://schemas.microsoft.com/office/powerpoint/2010/main" val="829252995"/>
+        <p14:creationId xmlns:p14="http://schemas.microsoft.com/office/powerpoint/2010/main" val="865186744"/>
       </p:ext>
     </p:extLst>
   </p:cSld>
@@ -10015,10 +6739,10 @@
       </p:grpSpPr>
       <p:sp>
         <p:nvSpPr>
-          <p:cNvPr id="6" name="text-0">
+          <p:cNvPr id="10" name="">
             <a:extLst xmlns:a="http://schemas.openxmlformats.org/drawingml/2006/main">
               <a:ext uri="{FF2B5EF4-FFF2-40B4-BE49-F238E27FC236}">
-                <a16:creationId xmlns:a16="http://schemas.microsoft.com/office/drawing/2014/main" id="{ED55E911-D5EB-47D5-8E26-486C8EA39392}"/>
+                <a16:creationId xmlns:a16="http://schemas.microsoft.com/office/drawing/2014/main" id="{1031C314-E538-4C03-BA49-A241848F64F0}"/>
               </a:ext>
             </a:extLst>
           </p:cNvPr>
@@ -10077,17 +6801,17 @@
                 <a:ea typeface="DejaVu Sans"/>
                 <a:cs typeface="DejaVu Sans"/>
               </a:rPr>
-              <a:t>Salto, câmera e colisão</a:t>
+              <a:t>Evolução do projeto</a:t>
             </a:r>
           </a:p>
         </p:txBody>
       </p:sp>
       <p:sp>
         <p:nvSpPr>
-          <p:cNvPr id="2" name="text-1">
+          <p:cNvPr id="2" name="">
             <a:extLst xmlns:a="http://schemas.openxmlformats.org/drawingml/2006/main">
               <a:ext uri="{FF2B5EF4-FFF2-40B4-BE49-F238E27FC236}">
-                <a16:creationId xmlns:a16="http://schemas.microsoft.com/office/drawing/2014/main" id="{1EF0CC67-3C4E-4ED7-ADC9-43F8F38D1992}"/>
+                <a16:creationId xmlns:a16="http://schemas.microsoft.com/office/drawing/2014/main" id="{E49CADE9-CC8A-4FB4-840A-111C27A26411}"/>
               </a:ext>
             </a:extLst>
           </p:cNvPr>
@@ -10098,7 +6822,7 @@
         </p:nvSpPr>
         <p:spPr>
           <a:xfrm xmlns:a="http://schemas.openxmlformats.org/drawingml/2006/main">
-            <a:off x="11239500" y="6419850"/>
+            <a:off x="11239500" y="6429375"/>
             <a:ext cx="457200" cy="238125"/>
           </a:xfrm>
           <a:prstGeom xmlns:a="http://schemas.openxmlformats.org/drawingml/2006/main" prst="rect">
@@ -10156,7 +6880,7 @@
           <p:cNvPr id="3" name="">
             <a:extLst xmlns:a="http://schemas.openxmlformats.org/drawingml/2006/main">
               <a:ext uri="{FF2B5EF4-FFF2-40B4-BE49-F238E27FC236}">
-                <a16:creationId xmlns:a16="http://schemas.microsoft.com/office/drawing/2014/main" id="{BB761C2D-1813-47BE-B8E4-DB1CC1A7A49C}"/>
+                <a16:creationId xmlns:a16="http://schemas.microsoft.com/office/drawing/2014/main" id="{16E74437-69EA-4E4F-B37E-2CD432C8033D}"/>
               </a:ext>
             </a:extLst>
           </p:cNvPr>
@@ -10166,25 +6890,81 @@
           <p:nvPr/>
         </p:nvPicPr>
         <p:blipFill>
-          <a:blip xmlns:r="http://schemas.openxmlformats.org/officeDocument/2006/relationships" xmlns:a="http://schemas.openxmlformats.org/drawingml/2006/main" r:embed="R93bfbc94280b4705"/>
+          <a:blip xmlns:r="http://schemas.openxmlformats.org/officeDocument/2006/relationships" xmlns:a="http://schemas.openxmlformats.org/drawingml/2006/main" r:embed="R631de31c43564de3"/>
           <a:stretch xmlns:a="http://schemas.openxmlformats.org/drawingml/2006/main"/>
         </p:blipFill>
         <p:spPr>
           <a:xfrm xmlns:a="http://schemas.openxmlformats.org/drawingml/2006/main">
-            <a:off x="609600" y="1516856"/>
-            <a:ext cx="7239000" cy="4071938"/>
+            <a:off x="609600" y="1897261"/>
+            <a:ext cx="3429000" cy="2025253"/>
           </a:xfrm>
           <a:prstGeom xmlns:a="http://schemas.openxmlformats.org/drawingml/2006/main" prst="rect">
             <a:avLst/>
           </a:prstGeom>
         </p:spPr>
       </p:pic>
-      <p:sp>
-        <p:nvSpPr>
-          <p:cNvPr id="4" name="text-2">
+      <p:pic>
+        <p:nvPicPr>
+          <p:cNvPr id="4" name="">
             <a:extLst xmlns:a="http://schemas.openxmlformats.org/drawingml/2006/main">
               <a:ext uri="{FF2B5EF4-FFF2-40B4-BE49-F238E27FC236}">
-                <a16:creationId xmlns:a16="http://schemas.microsoft.com/office/drawing/2014/main" id="{8C14C79C-62C9-4861-AA3C-F2428E6F298C}"/>
+                <a16:creationId xmlns:a16="http://schemas.microsoft.com/office/drawing/2014/main" id="{FCE16820-E36A-4AD8-80B5-3502F3C7283F}"/>
+              </a:ext>
+            </a:extLst>
+          </p:cNvPr>
+          <p:cNvPicPr>
+            <a:picLocks xmlns:a="http://schemas.openxmlformats.org/drawingml/2006/main" noChangeAspect="1"/>
+          </p:cNvPicPr>
+          <p:nvPr/>
+        </p:nvPicPr>
+        <p:blipFill>
+          <a:blip xmlns:r="http://schemas.openxmlformats.org/officeDocument/2006/relationships" xmlns:a="http://schemas.openxmlformats.org/drawingml/2006/main" r:embed="R49e0596575b1497b"/>
+          <a:stretch xmlns:a="http://schemas.openxmlformats.org/drawingml/2006/main"/>
+        </p:blipFill>
+        <p:spPr>
+          <a:xfrm xmlns:a="http://schemas.openxmlformats.org/drawingml/2006/main">
+            <a:off x="4381500" y="2009977"/>
+            <a:ext cx="3429000" cy="1799821"/>
+          </a:xfrm>
+          <a:prstGeom xmlns:a="http://schemas.openxmlformats.org/drawingml/2006/main" prst="rect">
+            <a:avLst/>
+          </a:prstGeom>
+        </p:spPr>
+      </p:pic>
+      <p:pic>
+        <p:nvPicPr>
+          <p:cNvPr id="5" name="">
+            <a:extLst xmlns:a="http://schemas.openxmlformats.org/drawingml/2006/main">
+              <a:ext uri="{FF2B5EF4-FFF2-40B4-BE49-F238E27FC236}">
+                <a16:creationId xmlns:a16="http://schemas.microsoft.com/office/drawing/2014/main" id="{70521CF4-2324-4263-B202-F3F41DB2B7CB}"/>
+              </a:ext>
+            </a:extLst>
+          </p:cNvPr>
+          <p:cNvPicPr>
+            <a:picLocks xmlns:a="http://schemas.openxmlformats.org/drawingml/2006/main" noChangeAspect="1"/>
+          </p:cNvPicPr>
+          <p:nvPr/>
+        </p:nvPicPr>
+        <p:blipFill>
+          <a:blip xmlns:r="http://schemas.openxmlformats.org/officeDocument/2006/relationships" xmlns:a="http://schemas.openxmlformats.org/drawingml/2006/main" r:embed="R6c2b527a09864f83"/>
+          <a:stretch xmlns:a="http://schemas.openxmlformats.org/drawingml/2006/main"/>
+        </p:blipFill>
+        <p:spPr>
+          <a:xfrm xmlns:a="http://schemas.openxmlformats.org/drawingml/2006/main">
+            <a:off x="8153400" y="1945481"/>
+            <a:ext cx="3429000" cy="1928813"/>
+          </a:xfrm>
+          <a:prstGeom xmlns:a="http://schemas.openxmlformats.org/drawingml/2006/main" prst="rect">
+            <a:avLst/>
+          </a:prstGeom>
+        </p:spPr>
+      </p:pic>
+      <p:sp>
+        <p:nvSpPr>
+          <p:cNvPr id="6" name="">
+            <a:extLst xmlns:a="http://schemas.openxmlformats.org/drawingml/2006/main">
+              <a:ext uri="{FF2B5EF4-FFF2-40B4-BE49-F238E27FC236}">
+                <a16:creationId xmlns:a16="http://schemas.microsoft.com/office/drawing/2014/main" id="{F18DDF4D-5523-4F9B-BE5A-7437EC784D41}"/>
               </a:ext>
             </a:extLst>
           </p:cNvPr>
@@ -10195,8 +6975,8 @@
         </p:nvSpPr>
         <p:spPr>
           <a:xfrm xmlns:a="http://schemas.openxmlformats.org/drawingml/2006/main">
-            <a:off x="8239125" y="1609725"/>
-            <a:ext cx="3429000" cy="3667125"/>
+            <a:off x="609600" y="4219575"/>
+            <a:ext cx="3429000" cy="857250"/>
           </a:xfrm>
           <a:prstGeom xmlns:a="http://schemas.openxmlformats.org/drawingml/2006/main" prst="rect">
             <a:avLst/>
@@ -10213,7 +6993,7 @@
           </a:bodyPr>
           <a:lstStyle xmlns:a="http://schemas.openxmlformats.org/drawingml/2006/main">
             <a:defPPr>
-              <a:defRPr sz="1875" b="0">
+              <a:defRPr sz="1875" b="1">
                 <a:solidFill>
                   <a:srgbClr val="203149"/>
                 </a:solidFill>
@@ -10225,7 +7005,7 @@
           </a:lstStyle>
           <a:p xmlns:a="http://schemas.openxmlformats.org/drawingml/2006/main">
             <a:pPr>
-              <a:defRPr sz="1875" b="0">
+              <a:defRPr sz="1875" b="1">
                 <a:solidFill>
                   <a:srgbClr val="203149"/>
                 </a:solidFill>
@@ -10235,7 +7015,7 @@
               </a:defRPr>
             </a:pPr>
             <a:r>
-              <a:rPr sz="1875" b="0">
+              <a:rPr sz="1875" b="1">
                 <a:solidFill>
                   <a:srgbClr val="203149"/>
                 </a:solidFill>
@@ -10243,12 +7023,12 @@
                 <a:ea typeface="DejaVu Sans"/>
                 <a:cs typeface="DejaVu Sans"/>
               </a:rPr>
-              <a:t>Salto</a:t>
+              <a:t>Protótipo</a:t>
             </a:r>
           </a:p>
           <a:p xmlns:a="http://schemas.openxmlformats.org/drawingml/2006/main">
             <a:pPr>
-              <a:defRPr sz="1875" b="0">
+              <a:defRPr sz="1875" b="1">
                 <a:solidFill>
                   <a:srgbClr val="203149"/>
                 </a:solidFill>
@@ -10258,7 +7038,7 @@
               </a:defRPr>
             </a:pPr>
             <a:r>
-              <a:rPr sz="1875" b="0">
+              <a:rPr sz="1875" b="1">
                 <a:solidFill>
                   <a:srgbClr val="203149"/>
                 </a:solidFill>
@@ -10266,119 +7046,17 @@
                 <a:ea typeface="DejaVu Sans"/>
                 <a:cs typeface="DejaVu Sans"/>
               </a:rPr>
-              <a:t>Velocidade e gravidade</a:t>
-            </a:r>
-          </a:p>
-          <a:p xmlns:a="http://schemas.openxmlformats.org/drawingml/2006/main">
-            <a:r>
-              <a:t/>
-            </a:r>
-          </a:p>
-          <a:p xmlns:a="http://schemas.openxmlformats.org/drawingml/2006/main">
-            <a:pPr>
-              <a:defRPr sz="1875" b="0">
-                <a:solidFill>
-                  <a:srgbClr val="203149"/>
-                </a:solidFill>
-                <a:latin typeface="DejaVu Sans"/>
-                <a:ea typeface="DejaVu Sans"/>
-                <a:cs typeface="DejaVu Sans"/>
-              </a:defRPr>
-            </a:pPr>
-            <a:r>
-              <a:rPr sz="1875" b="0">
-                <a:solidFill>
-                  <a:srgbClr val="203149"/>
-                </a:solidFill>
-                <a:latin typeface="DejaVu Sans"/>
-                <a:ea typeface="DejaVu Sans"/>
-                <a:cs typeface="DejaVu Sans"/>
-              </a:rPr>
-              <a:t>Câmera</a:t>
-            </a:r>
-          </a:p>
-          <a:p xmlns:a="http://schemas.openxmlformats.org/drawingml/2006/main">
-            <a:pPr>
-              <a:defRPr sz="1875" b="0">
-                <a:solidFill>
-                  <a:srgbClr val="203149"/>
-                </a:solidFill>
-                <a:latin typeface="DejaVu Sans"/>
-                <a:ea typeface="DejaVu Sans"/>
-                <a:cs typeface="DejaVu Sans"/>
-              </a:defRPr>
-            </a:pPr>
-            <a:r>
-              <a:rPr sz="1875" b="0">
-                <a:solidFill>
-                  <a:srgbClr val="203149"/>
-                </a:solidFill>
-                <a:latin typeface="DejaVu Sans"/>
-                <a:ea typeface="DejaVu Sans"/>
-                <a:cs typeface="DejaVu Sans"/>
-              </a:rPr>
-              <a:t>Cenário anda, HUD fica fixo</a:t>
-            </a:r>
-          </a:p>
-          <a:p xmlns:a="http://schemas.openxmlformats.org/drawingml/2006/main">
-            <a:r>
-              <a:t/>
-            </a:r>
-          </a:p>
-          <a:p xmlns:a="http://schemas.openxmlformats.org/drawingml/2006/main">
-            <a:pPr>
-              <a:defRPr sz="1875" b="0">
-                <a:solidFill>
-                  <a:srgbClr val="203149"/>
-                </a:solidFill>
-                <a:latin typeface="DejaVu Sans"/>
-                <a:ea typeface="DejaVu Sans"/>
-                <a:cs typeface="DejaVu Sans"/>
-              </a:defRPr>
-            </a:pPr>
-            <a:r>
-              <a:rPr sz="1875" b="0">
-                <a:solidFill>
-                  <a:srgbClr val="203149"/>
-                </a:solidFill>
-                <a:latin typeface="DejaVu Sans"/>
-                <a:ea typeface="DejaVu Sans"/>
-                <a:cs typeface="DejaVu Sans"/>
-              </a:rPr>
-              <a:t>Colisão</a:t>
-            </a:r>
-          </a:p>
-          <a:p xmlns:a="http://schemas.openxmlformats.org/drawingml/2006/main">
-            <a:pPr>
-              <a:defRPr sz="1875" b="0">
-                <a:solidFill>
-                  <a:srgbClr val="203149"/>
-                </a:solidFill>
-                <a:latin typeface="DejaVu Sans"/>
-                <a:ea typeface="DejaVu Sans"/>
-                <a:cs typeface="DejaVu Sans"/>
-              </a:defRPr>
-            </a:pPr>
-            <a:r>
-              <a:rPr sz="1875" b="0">
-                <a:solidFill>
-                  <a:srgbClr val="203149"/>
-                </a:solidFill>
-                <a:latin typeface="DejaVu Sans"/>
-                <a:ea typeface="DejaVu Sans"/>
-                <a:cs typeface="DejaVu Sans"/>
-              </a:rPr>
-              <a:t>Retângulos se sobrepõem</a:t>
+              <a:t>Captura no Windows</a:t>
             </a:r>
           </a:p>
         </p:txBody>
       </p:sp>
       <p:sp>
         <p:nvSpPr>
-          <p:cNvPr id="5" name="text-3">
+          <p:cNvPr id="7" name="">
             <a:extLst xmlns:a="http://schemas.openxmlformats.org/drawingml/2006/main">
               <a:ext uri="{FF2B5EF4-FFF2-40B4-BE49-F238E27FC236}">
-                <a16:creationId xmlns:a16="http://schemas.microsoft.com/office/drawing/2014/main" id="{A81AA03A-0C80-4C79-92D9-387BA0021C56}"/>
+                <a16:creationId xmlns:a16="http://schemas.microsoft.com/office/drawing/2014/main" id="{541CABC3-3270-467D-8030-A7A558D835F8}"/>
               </a:ext>
             </a:extLst>
           </p:cNvPr>
@@ -10389,8 +7067,8 @@
         </p:nvSpPr>
         <p:spPr>
           <a:xfrm xmlns:a="http://schemas.openxmlformats.org/drawingml/2006/main">
-            <a:off x="609600" y="5857875"/>
-            <a:ext cx="10858500" cy="400050"/>
+            <a:off x="4381500" y="4219575"/>
+            <a:ext cx="3429000" cy="857250"/>
           </a:xfrm>
           <a:prstGeom xmlns:a="http://schemas.openxmlformats.org/drawingml/2006/main" prst="rect">
             <a:avLst/>
@@ -10407,9 +7085,9 @@
           </a:bodyPr>
           <a:lstStyle xmlns:a="http://schemas.openxmlformats.org/drawingml/2006/main">
             <a:defPPr>
-              <a:defRPr sz="2175" b="0">
-                <a:solidFill>
-                  <a:srgbClr val="275F83"/>
+              <a:defRPr sz="1875" b="1">
+                <a:solidFill>
+                  <a:srgbClr val="203149"/>
                 </a:solidFill>
                 <a:latin typeface="DejaVu Sans"/>
                 <a:ea typeface="DejaVu Sans"/>
@@ -10419,9 +7097,9 @@
           </a:lstStyle>
           <a:p xmlns:a="http://schemas.openxmlformats.org/drawingml/2006/main">
             <a:pPr>
-              <a:defRPr sz="2175" b="0">
-                <a:solidFill>
-                  <a:srgbClr val="275F83"/>
+              <a:defRPr sz="1875" b="1">
+                <a:solidFill>
+                  <a:srgbClr val="203149"/>
                 </a:solidFill>
                 <a:latin typeface="DejaVu Sans"/>
                 <a:ea typeface="DejaVu Sans"/>
@@ -10429,15 +7107,199 @@
               </a:defRPr>
             </a:pPr>
             <a:r>
-              <a:rPr sz="2175" b="0">
-                <a:solidFill>
-                  <a:srgbClr val="275F83"/>
+              <a:rPr sz="1875" b="1">
+                <a:solidFill>
+                  <a:srgbClr val="203149"/>
                 </a:solidFill>
                 <a:latin typeface="DejaVu Sans"/>
                 <a:ea typeface="DejaVu Sans"/>
                 <a:cs typeface="DejaVu Sans"/>
               </a:rPr>
-              <a:t>AABB com pygame.Rect.colliderect</a:t>
+              <a:t>Revisão visual</a:t>
+            </a:r>
+          </a:p>
+          <a:p xmlns:a="http://schemas.openxmlformats.org/drawingml/2006/main">
+            <a:pPr>
+              <a:defRPr sz="1875" b="1">
+                <a:solidFill>
+                  <a:srgbClr val="203149"/>
+                </a:solidFill>
+                <a:latin typeface="DejaVu Sans"/>
+                <a:ea typeface="DejaVu Sans"/>
+                <a:cs typeface="DejaVu Sans"/>
+              </a:defRPr>
+            </a:pPr>
+            <a:r>
+              <a:rPr sz="1875" b="1">
+                <a:solidFill>
+                  <a:srgbClr val="203149"/>
+                </a:solidFill>
+                <a:latin typeface="DejaVu Sans"/>
+                <a:ea typeface="DejaVu Sans"/>
+                <a:cs typeface="DejaVu Sans"/>
+              </a:rPr>
+              <a:t>Captura no Windows</a:t>
+            </a:r>
+          </a:p>
+        </p:txBody>
+      </p:sp>
+      <p:sp>
+        <p:nvSpPr>
+          <p:cNvPr id="8" name="">
+            <a:extLst xmlns:a="http://schemas.openxmlformats.org/drawingml/2006/main">
+              <a:ext uri="{FF2B5EF4-FFF2-40B4-BE49-F238E27FC236}">
+                <a16:creationId xmlns:a16="http://schemas.microsoft.com/office/drawing/2014/main" id="{E93BB553-6A0E-4CF8-BE97-F1A24918F690}"/>
+              </a:ext>
+            </a:extLst>
+          </p:cNvPr>
+          <p:cNvSpPr>
+            <a:spLocks xmlns:a="http://schemas.openxmlformats.org/drawingml/2006/main" noGrp="1"/>
+          </p:cNvSpPr>
+          <p:nvPr/>
+        </p:nvSpPr>
+        <p:spPr>
+          <a:xfrm xmlns:a="http://schemas.openxmlformats.org/drawingml/2006/main">
+            <a:off x="8153400" y="4219575"/>
+            <a:ext cx="3429000" cy="857250"/>
+          </a:xfrm>
+          <a:prstGeom xmlns:a="http://schemas.openxmlformats.org/drawingml/2006/main" prst="rect">
+            <a:avLst/>
+          </a:prstGeom>
+          <a:noFill xmlns:a="http://schemas.openxmlformats.org/drawingml/2006/main"/>
+          <a:ln xmlns:a="http://schemas.openxmlformats.org/drawingml/2006/main" w="0">
+            <a:noFill/>
+            <a:prstDash val="solid"/>
+          </a:ln>
+        </p:spPr>
+        <p:txBody>
+          <a:bodyPr xmlns:a="http://schemas.openxmlformats.org/drawingml/2006/main">
+            <a:noAutofit/>
+          </a:bodyPr>
+          <a:lstStyle xmlns:a="http://schemas.openxmlformats.org/drawingml/2006/main">
+            <a:defPPr>
+              <a:defRPr sz="1875" b="1">
+                <a:solidFill>
+                  <a:srgbClr val="203149"/>
+                </a:solidFill>
+                <a:latin typeface="DejaVu Sans"/>
+                <a:ea typeface="DejaVu Sans"/>
+                <a:cs typeface="DejaVu Sans"/>
+              </a:defRPr>
+            </a:defPPr>
+          </a:lstStyle>
+          <a:p xmlns:a="http://schemas.openxmlformats.org/drawingml/2006/main">
+            <a:pPr>
+              <a:defRPr sz="1875" b="1">
+                <a:solidFill>
+                  <a:srgbClr val="203149"/>
+                </a:solidFill>
+                <a:latin typeface="DejaVu Sans"/>
+                <a:ea typeface="DejaVu Sans"/>
+                <a:cs typeface="DejaVu Sans"/>
+              </a:defRPr>
+            </a:pPr>
+            <a:r>
+              <a:rPr sz="1875" b="1">
+                <a:solidFill>
+                  <a:srgbClr val="203149"/>
+                </a:solidFill>
+                <a:latin typeface="DejaVu Sans"/>
+                <a:ea typeface="DejaVu Sans"/>
+                <a:cs typeface="DejaVu Sans"/>
+              </a:rPr>
+              <a:t>Versão atual</a:t>
+            </a:r>
+          </a:p>
+          <a:p xmlns:a="http://schemas.openxmlformats.org/drawingml/2006/main">
+            <a:pPr>
+              <a:defRPr sz="1875" b="1">
+                <a:solidFill>
+                  <a:srgbClr val="203149"/>
+                </a:solidFill>
+                <a:latin typeface="DejaVu Sans"/>
+                <a:ea typeface="DejaVu Sans"/>
+                <a:cs typeface="DejaVu Sans"/>
+              </a:defRPr>
+            </a:pPr>
+            <a:r>
+              <a:rPr sz="1875" b="1">
+                <a:solidFill>
+                  <a:srgbClr val="203149"/>
+                </a:solidFill>
+                <a:latin typeface="DejaVu Sans"/>
+                <a:ea typeface="DejaVu Sans"/>
+                <a:cs typeface="DejaVu Sans"/>
+              </a:rPr>
+              <a:t>Cena do renderizador</a:t>
+            </a:r>
+          </a:p>
+        </p:txBody>
+      </p:sp>
+      <p:sp>
+        <p:nvSpPr>
+          <p:cNvPr id="9" name="">
+            <a:extLst xmlns:a="http://schemas.openxmlformats.org/drawingml/2006/main">
+              <a:ext uri="{FF2B5EF4-FFF2-40B4-BE49-F238E27FC236}">
+                <a16:creationId xmlns:a16="http://schemas.microsoft.com/office/drawing/2014/main" id="{182D930A-D170-4A3D-9B23-3CECC8CC8F1B}"/>
+              </a:ext>
+            </a:extLst>
+          </p:cNvPr>
+          <p:cNvSpPr>
+            <a:spLocks xmlns:a="http://schemas.openxmlformats.org/drawingml/2006/main" noGrp="1"/>
+          </p:cNvSpPr>
+          <p:nvPr/>
+        </p:nvSpPr>
+        <p:spPr>
+          <a:xfrm xmlns:a="http://schemas.openxmlformats.org/drawingml/2006/main">
+            <a:off x="609600" y="5743575"/>
+            <a:ext cx="10953750" cy="523875"/>
+          </a:xfrm>
+          <a:prstGeom xmlns:a="http://schemas.openxmlformats.org/drawingml/2006/main" prst="rect">
+            <a:avLst/>
+          </a:prstGeom>
+          <a:noFill xmlns:a="http://schemas.openxmlformats.org/drawingml/2006/main"/>
+          <a:ln xmlns:a="http://schemas.openxmlformats.org/drawingml/2006/main" w="0">
+            <a:noFill/>
+            <a:prstDash val="solid"/>
+          </a:ln>
+        </p:spPr>
+        <p:txBody>
+          <a:bodyPr xmlns:a="http://schemas.openxmlformats.org/drawingml/2006/main">
+            <a:noAutofit/>
+          </a:bodyPr>
+          <a:lstStyle xmlns:a="http://schemas.openxmlformats.org/drawingml/2006/main">
+            <a:defPPr>
+              <a:defRPr sz="2025" b="0">
+                <a:solidFill>
+                  <a:srgbClr val="203149"/>
+                </a:solidFill>
+                <a:latin typeface="DejaVu Sans"/>
+                <a:ea typeface="DejaVu Sans"/>
+                <a:cs typeface="DejaVu Sans"/>
+              </a:defRPr>
+            </a:defPPr>
+          </a:lstStyle>
+          <a:p xmlns:a="http://schemas.openxmlformats.org/drawingml/2006/main">
+            <a:pPr>
+              <a:defRPr sz="2025" b="0">
+                <a:solidFill>
+                  <a:srgbClr val="203149"/>
+                </a:solidFill>
+                <a:latin typeface="DejaVu Sans"/>
+                <a:ea typeface="DejaVu Sans"/>
+                <a:cs typeface="DejaVu Sans"/>
+              </a:defRPr>
+            </a:pPr>
+            <a:r>
+              <a:rPr sz="2025" b="0">
+                <a:solidFill>
+                  <a:srgbClr val="203149"/>
+                </a:solidFill>
+                <a:latin typeface="DejaVu Sans"/>
+                <a:ea typeface="DejaVu Sans"/>
+                <a:cs typeface="DejaVu Sans"/>
+              </a:rPr>
+              <a:t>Melhorias: nitidez, instruções, rosto do cliente e música.</a:t>
             </a:r>
           </a:p>
         </p:txBody>
@@ -10445,7 +7307,7 @@
     </p:spTree>
     <p:extLst>
       <p:ext uri="{BB962C8B-B14F-4D97-AF65-F5344CB8AC3E}">
-        <p14:creationId xmlns:p14="http://schemas.microsoft.com/office/powerpoint/2010/main" val="1446087323"/>
+        <p14:creationId xmlns:p14="http://schemas.microsoft.com/office/powerpoint/2010/main" val="1123907060"/>
       </p:ext>
     </p:extLst>
   </p:cSld>
@@ -10473,10 +7335,10 @@
       </p:grpSpPr>
       <p:sp>
         <p:nvSpPr>
-          <p:cNvPr id="5" name="text-0">
+          <p:cNvPr id="6" name="">
             <a:extLst xmlns:a="http://schemas.openxmlformats.org/drawingml/2006/main">
               <a:ext uri="{FF2B5EF4-FFF2-40B4-BE49-F238E27FC236}">
-                <a16:creationId xmlns:a16="http://schemas.microsoft.com/office/drawing/2014/main" id="{EFAE494A-0A27-471B-B676-2C2189F046AB}"/>
+                <a16:creationId xmlns:a16="http://schemas.microsoft.com/office/drawing/2014/main" id="{B81C7A6A-AC6A-4720-AAF0-5EA402C25151}"/>
               </a:ext>
             </a:extLst>
           </p:cNvPr>
@@ -10535,17 +7397,17 @@
                 <a:ea typeface="DejaVu Sans"/>
                 <a:cs typeface="DejaVu Sans"/>
               </a:rPr>
-              <a:t>Parallax no cenário</a:t>
+              <a:t>Demonstração do jogo</a:t>
             </a:r>
           </a:p>
         </p:txBody>
       </p:sp>
       <p:sp>
         <p:nvSpPr>
-          <p:cNvPr id="2" name="text-1">
+          <p:cNvPr id="2" name="">
             <a:extLst xmlns:a="http://schemas.openxmlformats.org/drawingml/2006/main">
               <a:ext uri="{FF2B5EF4-FFF2-40B4-BE49-F238E27FC236}">
-                <a16:creationId xmlns:a16="http://schemas.microsoft.com/office/drawing/2014/main" id="{9DBE2CC4-90FE-46B1-991C-119F45D76ED4}"/>
+                <a16:creationId xmlns:a16="http://schemas.microsoft.com/office/drawing/2014/main" id="{474C6F3D-F74D-4C91-9EFC-73614E397CAD}"/>
               </a:ext>
             </a:extLst>
           </p:cNvPr>
@@ -10556,7 +7418,7 @@
         </p:nvSpPr>
         <p:spPr>
           <a:xfrm xmlns:a="http://schemas.openxmlformats.org/drawingml/2006/main">
-            <a:off x="11239500" y="6419850"/>
+            <a:off x="11239500" y="6429375"/>
             <a:ext cx="457200" cy="238125"/>
           </a:xfrm>
           <a:prstGeom xmlns:a="http://schemas.openxmlformats.org/drawingml/2006/main" prst="rect">
@@ -10614,7 +7476,7 @@
           <p:cNvPr id="3" name="">
             <a:extLst xmlns:a="http://schemas.openxmlformats.org/drawingml/2006/main">
               <a:ext uri="{FF2B5EF4-FFF2-40B4-BE49-F238E27FC236}">
-                <a16:creationId xmlns:a16="http://schemas.microsoft.com/office/drawing/2014/main" id="{1DDD0FB2-C547-4430-B51A-F55DADC537DE}"/>
+                <a16:creationId xmlns:a16="http://schemas.microsoft.com/office/drawing/2014/main" id="{D38A732A-DDEA-4916-809A-5F000B89F9FB}"/>
               </a:ext>
             </a:extLst>
           </p:cNvPr>
@@ -10624,13 +7486,13 @@
           <p:nvPr/>
         </p:nvPicPr>
         <p:blipFill>
-          <a:blip xmlns:r="http://schemas.openxmlformats.org/officeDocument/2006/relationships" xmlns:a="http://schemas.openxmlformats.org/drawingml/2006/main" r:embed="R934831ecb1ff48af"/>
+          <a:blip xmlns:r="http://schemas.openxmlformats.org/officeDocument/2006/relationships" xmlns:a="http://schemas.openxmlformats.org/drawingml/2006/main" r:embed="R9f05c02cc84f486c"/>
           <a:stretch xmlns:a="http://schemas.openxmlformats.org/drawingml/2006/main"/>
         </p:blipFill>
         <p:spPr>
           <a:xfrm xmlns:a="http://schemas.openxmlformats.org/drawingml/2006/main">
-            <a:off x="609600" y="1515070"/>
-            <a:ext cx="8362950" cy="4704159"/>
+            <a:off x="609600" y="1382316"/>
+            <a:ext cx="6667500" cy="3750469"/>
           </a:xfrm>
           <a:prstGeom xmlns:a="http://schemas.openxmlformats.org/drawingml/2006/main" prst="rect">
             <a:avLst/>
@@ -10639,10 +7501,10 @@
       </p:pic>
       <p:sp>
         <p:nvSpPr>
-          <p:cNvPr id="4" name="text-2">
+          <p:cNvPr id="4" name="">
             <a:extLst xmlns:a="http://schemas.openxmlformats.org/drawingml/2006/main">
               <a:ext uri="{FF2B5EF4-FFF2-40B4-BE49-F238E27FC236}">
-                <a16:creationId xmlns:a16="http://schemas.microsoft.com/office/drawing/2014/main" id="{3826F593-5A3E-49E5-A75A-32A098143A91}"/>
+                <a16:creationId xmlns:a16="http://schemas.microsoft.com/office/drawing/2014/main" id="{ABC5C081-AD52-4535-9B75-18BE9F7D10D3}"/>
               </a:ext>
             </a:extLst>
           </p:cNvPr>
@@ -10653,8 +7515,8 @@
         </p:nvSpPr>
         <p:spPr>
           <a:xfrm xmlns:a="http://schemas.openxmlformats.org/drawingml/2006/main">
-            <a:off x="9344025" y="1638300"/>
-            <a:ext cx="2524125" cy="3810000"/>
+            <a:off x="7715250" y="1752600"/>
+            <a:ext cx="3857625" cy="3000375"/>
           </a:xfrm>
           <a:prstGeom xmlns:a="http://schemas.openxmlformats.org/drawingml/2006/main" prst="rect">
             <a:avLst/>
@@ -10671,7 +7533,7 @@
           </a:bodyPr>
           <a:lstStyle xmlns:a="http://schemas.openxmlformats.org/drawingml/2006/main">
             <a:defPPr>
-              <a:defRPr sz="1875" b="0">
+              <a:defRPr sz="1950" b="0">
                 <a:solidFill>
                   <a:srgbClr val="203149"/>
                 </a:solidFill>
@@ -10683,7 +7545,7 @@
           </a:lstStyle>
           <a:p xmlns:a="http://schemas.openxmlformats.org/drawingml/2006/main">
             <a:pPr>
-              <a:defRPr sz="1875" b="0">
+              <a:defRPr sz="1950" b="0">
                 <a:solidFill>
                   <a:srgbClr val="203149"/>
                 </a:solidFill>
@@ -10693,7 +7555,7 @@
               </a:defRPr>
             </a:pPr>
             <a:r>
-              <a:rPr sz="1875" b="0">
+              <a:rPr sz="1950" b="0">
                 <a:solidFill>
                   <a:srgbClr val="203149"/>
                 </a:solidFill>
@@ -10701,12 +7563,17 @@
                 <a:ea typeface="DejaVu Sans"/>
                 <a:cs typeface="DejaVu Sans"/>
               </a:rPr>
-              <a:t>Mais distante</a:t>
+              <a:t>Corrida, coleta e impacto</a:t>
+            </a:r>
+          </a:p>
+          <a:p xmlns:a="http://schemas.openxmlformats.org/drawingml/2006/main">
+            <a:r>
+              <a:t/>
             </a:r>
           </a:p>
           <a:p xmlns:a="http://schemas.openxmlformats.org/drawingml/2006/main">
             <a:pPr>
-              <a:defRPr sz="1875" b="0">
+              <a:defRPr sz="1950" b="0">
                 <a:solidFill>
                   <a:srgbClr val="203149"/>
                 </a:solidFill>
@@ -10716,7 +7583,7 @@
               </a:defRPr>
             </a:pPr>
             <a:r>
-              <a:rPr sz="1875" b="0">
+              <a:rPr sz="1950" b="0">
                 <a:solidFill>
                   <a:srgbClr val="203149"/>
                 </a:solidFill>
@@ -10724,7 +7591,7 @@
                 <a:ea typeface="DejaVu Sans"/>
                 <a:cs typeface="DejaVu Sans"/>
               </a:rPr>
-              <a:t>Nuvens mais lentas</a:t>
+              <a:t>Fundo, personagem e efeitos</a:t>
             </a:r>
           </a:p>
           <a:p xmlns:a="http://schemas.openxmlformats.org/drawingml/2006/main">
@@ -10734,7 +7601,7 @@
           </a:p>
           <a:p xmlns:a="http://schemas.openxmlformats.org/drawingml/2006/main">
             <a:pPr>
-              <a:defRPr sz="1875" b="0">
+              <a:defRPr sz="1950" b="0">
                 <a:solidFill>
                   <a:srgbClr val="203149"/>
                 </a:solidFill>
@@ -10744,7 +7611,7 @@
               </a:defRPr>
             </a:pPr>
             <a:r>
-              <a:rPr sz="1875" b="0">
+              <a:rPr sz="1950" b="0">
                 <a:solidFill>
                   <a:srgbClr val="203149"/>
                 </a:solidFill>
@@ -10752,120 +7619,17 @@
                 <a:ea typeface="DejaVu Sans"/>
                 <a:cs typeface="DejaVu Sans"/>
               </a:rPr>
-              <a:t>Intermediário</a:t>
-            </a:r>
-          </a:p>
-          <a:p xmlns:a="http://schemas.openxmlformats.org/drawingml/2006/main">
-            <a:pPr>
-              <a:defRPr sz="1875" b="0">
-                <a:solidFill>
-                  <a:srgbClr val="203149"/>
-                </a:solidFill>
-                <a:latin typeface="DejaVu Sans"/>
-                <a:ea typeface="DejaVu Sans"/>
-                <a:cs typeface="DejaVu Sans"/>
-              </a:defRPr>
-            </a:pPr>
-            <a:r>
-              <a:rPr sz="1875" b="0">
-                <a:solidFill>
-                  <a:srgbClr val="203149"/>
-                </a:solidFill>
-                <a:latin typeface="DejaVu Sans"/>
-                <a:ea typeface="DejaVu Sans"/>
-                <a:cs typeface="DejaVu Sans"/>
-              </a:rPr>
-              <a:t>Prédios</a:t>
-            </a:r>
-          </a:p>
-          <a:p xmlns:a="http://schemas.openxmlformats.org/drawingml/2006/main">
-            <a:r>
-              <a:t/>
-            </a:r>
-          </a:p>
-          <a:p xmlns:a="http://schemas.openxmlformats.org/drawingml/2006/main">
-            <a:pPr>
-              <a:defRPr sz="1875" b="0">
-                <a:solidFill>
-                  <a:srgbClr val="203149"/>
-                </a:solidFill>
-                <a:latin typeface="DejaVu Sans"/>
-                <a:ea typeface="DejaVu Sans"/>
-                <a:cs typeface="DejaVu Sans"/>
-              </a:defRPr>
-            </a:pPr>
-            <a:r>
-              <a:rPr sz="1875" b="0">
-                <a:solidFill>
-                  <a:srgbClr val="203149"/>
-                </a:solidFill>
-                <a:latin typeface="DejaVu Sans"/>
-                <a:ea typeface="DejaVu Sans"/>
-                <a:cs typeface="DejaVu Sans"/>
-              </a:rPr>
-              <a:t>Mais próximo</a:t>
-            </a:r>
-          </a:p>
-          <a:p xmlns:a="http://schemas.openxmlformats.org/drawingml/2006/main">
-            <a:pPr>
-              <a:defRPr sz="1875" b="0">
-                <a:solidFill>
-                  <a:srgbClr val="203149"/>
-                </a:solidFill>
-                <a:latin typeface="DejaVu Sans"/>
-                <a:ea typeface="DejaVu Sans"/>
-                <a:cs typeface="DejaVu Sans"/>
-              </a:defRPr>
-            </a:pPr>
-            <a:r>
-              <a:rPr sz="1875" b="0">
-                <a:solidFill>
-                  <a:srgbClr val="203149"/>
-                </a:solidFill>
-                <a:latin typeface="DejaVu Sans"/>
-                <a:ea typeface="DejaVu Sans"/>
-                <a:cs typeface="DejaVu Sans"/>
-              </a:rPr>
-              <a:t>Fachadas mais rápidas</a:t>
+              <a:t>Pausa, Áudio e reinício</a:t>
             </a:r>
           </a:p>
         </p:txBody>
       </p:sp>
-    </p:spTree>
-    <p:extLst>
-      <p:ext uri="{BB962C8B-B14F-4D97-AF65-F5344CB8AC3E}">
-        <p14:creationId xmlns:p14="http://schemas.microsoft.com/office/powerpoint/2010/main" val="1003373752"/>
-      </p:ext>
-    </p:extLst>
-  </p:cSld>
-</p:sld>
-</file>
-
-<file path=ppt/slides/slide8.xml><?xml version="1.0" encoding="utf-8"?>
-<p:sld xmlns:p="http://schemas.openxmlformats.org/presentationml/2006/main">
-  <p:cSld>
-    <p:bg>
-      <p:bgPr>
-        <a:solidFill xmlns:a="http://schemas.openxmlformats.org/drawingml/2006/main">
-          <a:srgbClr val="FFF8E7"/>
-        </a:solidFill>
-      </p:bgPr>
-    </p:bg>
-    <p:spTree>
-      <p:nvGrpSpPr>
-        <p:cNvPr id="1" name=""/>
-        <p:cNvGrpSpPr/>
-        <p:nvPr/>
-      </p:nvGrpSpPr>
-      <p:grpSpPr>
-        <a:xfrm xmlns:a="http://schemas.openxmlformats.org/drawingml/2006/main"/>
-      </p:grpSpPr>
-      <p:sp>
-        <p:nvSpPr>
-          <p:cNvPr id="6" name="text-0">
+      <p:sp>
+        <p:nvSpPr>
+          <p:cNvPr id="5" name="">
             <a:extLst xmlns:a="http://schemas.openxmlformats.org/drawingml/2006/main">
               <a:ext uri="{FF2B5EF4-FFF2-40B4-BE49-F238E27FC236}">
-                <a16:creationId xmlns:a16="http://schemas.microsoft.com/office/drawing/2014/main" id="{6736AF57-9779-490E-8DF3-0F83D04AAC6C}"/>
+                <a16:creationId xmlns:a16="http://schemas.microsoft.com/office/drawing/2014/main" id="{4731660C-C43C-4A7C-B9B0-C7D5C0D0C055}"/>
               </a:ext>
             </a:extLst>
           </p:cNvPr>
@@ -10876,8 +7640,8 @@
         </p:nvSpPr>
         <p:spPr>
           <a:xfrm xmlns:a="http://schemas.openxmlformats.org/drawingml/2006/main">
-            <a:off x="609600" y="400050"/>
-            <a:ext cx="10972800" cy="876300"/>
+            <a:off x="609600" y="5457825"/>
+            <a:ext cx="10972800" cy="866775"/>
           </a:xfrm>
           <a:prstGeom xmlns:a="http://schemas.openxmlformats.org/drawingml/2006/main" prst="rect">
             <a:avLst/>
@@ -10894,7 +7658,7 @@
           </a:bodyPr>
           <a:lstStyle xmlns:a="http://schemas.openxmlformats.org/drawingml/2006/main">
             <a:defPPr>
-              <a:defRPr sz="3300" b="1">
+              <a:defRPr sz="1575" b="0">
                 <a:solidFill>
                   <a:srgbClr val="203149"/>
                 </a:solidFill>
@@ -10906,7 +7670,7 @@
           </a:lstStyle>
           <a:p xmlns:a="http://schemas.openxmlformats.org/drawingml/2006/main">
             <a:pPr>
-              <a:defRPr sz="3300" b="1">
+              <a:defRPr sz="1575" b="0">
                 <a:solidFill>
                   <a:srgbClr val="203149"/>
                 </a:solidFill>
@@ -10916,7 +7680,7 @@
               </a:defRPr>
             </a:pPr>
             <a:r>
-              <a:rPr sz="3300" b="1">
+              <a:rPr sz="1575" b="0">
                 <a:solidFill>
                   <a:srgbClr val="203149"/>
                 </a:solidFill>
@@ -10924,60 +7688,14 @@
                 <a:ea typeface="DejaVu Sans"/>
                 <a:cs typeface="DejaVu Sans"/>
               </a:rPr>
-              <a:t>O movimento do personagem</a:t>
-            </a:r>
-          </a:p>
-        </p:txBody>
-      </p:sp>
-      <p:sp>
-        <p:nvSpPr>
-          <p:cNvPr id="2" name="text-1">
-            <a:extLst xmlns:a="http://schemas.openxmlformats.org/drawingml/2006/main">
-              <a:ext uri="{FF2B5EF4-FFF2-40B4-BE49-F238E27FC236}">
-                <a16:creationId xmlns:a16="http://schemas.microsoft.com/office/drawing/2014/main" id="{6290FBD1-57F5-44B0-B5CC-16487267D42A}"/>
-              </a:ext>
-            </a:extLst>
-          </p:cNvPr>
-          <p:cNvSpPr>
-            <a:spLocks xmlns:a="http://schemas.openxmlformats.org/drawingml/2006/main" noGrp="1"/>
-          </p:cNvSpPr>
-          <p:nvPr/>
-        </p:nvSpPr>
-        <p:spPr>
-          <a:xfrm xmlns:a="http://schemas.openxmlformats.org/drawingml/2006/main">
-            <a:off x="11239500" y="6419850"/>
-            <a:ext cx="457200" cy="238125"/>
-          </a:xfrm>
-          <a:prstGeom xmlns:a="http://schemas.openxmlformats.org/drawingml/2006/main" prst="rect">
-            <a:avLst/>
-          </a:prstGeom>
-          <a:noFill xmlns:a="http://schemas.openxmlformats.org/drawingml/2006/main"/>
-          <a:ln xmlns:a="http://schemas.openxmlformats.org/drawingml/2006/main" w="0">
-            <a:noFill/>
-            <a:prstDash val="solid"/>
-          </a:ln>
-        </p:spPr>
-        <p:txBody>
-          <a:bodyPr xmlns:a="http://schemas.openxmlformats.org/drawingml/2006/main">
-            <a:noAutofit/>
-          </a:bodyPr>
-          <a:lstStyle xmlns:a="http://schemas.openxmlformats.org/drawingml/2006/main">
-            <a:defPPr>
-              <a:defRPr sz="1350" b="0">
-                <a:solidFill>
-                  <a:srgbClr val="526773"/>
-                </a:solidFill>
-                <a:latin typeface="DejaVu Sans"/>
-                <a:ea typeface="DejaVu Sans"/>
-                <a:cs typeface="DejaVu Sans"/>
-              </a:defRPr>
-            </a:defPPr>
-          </a:lstStyle>
+              <a:t>Concepção: Daniel, John e Lucas. Testes no Windows: Daniel.</a:t>
+            </a:r>
+          </a:p>
           <a:p xmlns:a="http://schemas.openxmlformats.org/drawingml/2006/main">
             <a:pPr>
-              <a:defRPr sz="1350" b="0">
-                <a:solidFill>
-                  <a:srgbClr val="526773"/>
+              <a:defRPr sz="1575" b="0">
+                <a:solidFill>
+                  <a:srgbClr val="203149"/>
                 </a:solidFill>
                 <a:latin typeface="DejaVu Sans"/>
                 <a:ea typeface="DejaVu Sans"/>
@@ -10985,66 +7703,20 @@
               </a:defRPr>
             </a:pPr>
             <a:r>
-              <a:rPr sz="1350" b="0">
-                <a:solidFill>
-                  <a:srgbClr val="526773"/>
+              <a:rPr sz="1575" b="0">
+                <a:solidFill>
+                  <a:srgbClr val="203149"/>
                 </a:solidFill>
                 <a:latin typeface="DejaVu Sans"/>
                 <a:ea typeface="DejaVu Sans"/>
                 <a:cs typeface="DejaVu Sans"/>
               </a:rPr>
-              <a:t>08</a:t>
-            </a:r>
-          </a:p>
-        </p:txBody>
-      </p:sp>
-      <p:sp>
-        <p:nvSpPr>
-          <p:cNvPr id="3" name="text-2">
-            <a:extLst xmlns:a="http://schemas.openxmlformats.org/drawingml/2006/main">
-              <a:ext uri="{FF2B5EF4-FFF2-40B4-BE49-F238E27FC236}">
-                <a16:creationId xmlns:a16="http://schemas.microsoft.com/office/drawing/2014/main" id="{8A8B14A3-E77C-4734-BC76-F50C21FE7337}"/>
-              </a:ext>
-            </a:extLst>
-          </p:cNvPr>
-          <p:cNvSpPr>
-            <a:spLocks xmlns:a="http://schemas.openxmlformats.org/drawingml/2006/main" noGrp="1"/>
-          </p:cNvSpPr>
-          <p:nvPr/>
-        </p:nvSpPr>
-        <p:spPr>
-          <a:xfrm xmlns:a="http://schemas.openxmlformats.org/drawingml/2006/main">
-            <a:off x="609600" y="1543050"/>
-            <a:ext cx="10858500" cy="523875"/>
-          </a:xfrm>
-          <a:prstGeom xmlns:a="http://schemas.openxmlformats.org/drawingml/2006/main" prst="rect">
-            <a:avLst/>
-          </a:prstGeom>
-          <a:noFill xmlns:a="http://schemas.openxmlformats.org/drawingml/2006/main"/>
-          <a:ln xmlns:a="http://schemas.openxmlformats.org/drawingml/2006/main" w="0">
-            <a:noFill/>
-            <a:prstDash val="solid"/>
-          </a:ln>
-        </p:spPr>
-        <p:txBody>
-          <a:bodyPr xmlns:a="http://schemas.openxmlformats.org/drawingml/2006/main">
-            <a:noAutofit/>
-          </a:bodyPr>
-          <a:lstStyle xmlns:a="http://schemas.openxmlformats.org/drawingml/2006/main">
-            <a:defPPr>
-              <a:defRPr sz="2400" b="0">
-                <a:solidFill>
-                  <a:srgbClr val="203149"/>
-                </a:solidFill>
-                <a:latin typeface="DejaVu Sans"/>
-                <a:ea typeface="DejaVu Sans"/>
-                <a:cs typeface="DejaVu Sans"/>
-              </a:defRPr>
-            </a:defPPr>
-          </a:lstStyle>
+              <a:t>IA: geração de grande parte do código e apoio aos materiais (ChatGPT/Codex).</a:t>
+            </a:r>
+          </a:p>
           <a:p xmlns:a="http://schemas.openxmlformats.org/drawingml/2006/main">
             <a:pPr>
-              <a:defRPr sz="2400" b="0">
+              <a:defRPr sz="1575" b="0">
                 <a:solidFill>
                   <a:srgbClr val="203149"/>
                 </a:solidFill>
@@ -11054,7 +7726,7 @@
               </a:defRPr>
             </a:pPr>
             <a:r>
-              <a:rPr sz="2400" b="0">
+              <a:rPr sz="1575" b="0">
                 <a:solidFill>
                   <a:srgbClr val="203149"/>
                 </a:solidFill>
@@ -11062,127 +7734,7 @@
                 <a:ea typeface="DejaVu Sans"/>
                 <a:cs typeface="DejaVu Sans"/>
               </a:rPr>
-              <a:t>Seis quadros formam a corrida</a:t>
-            </a:r>
-          </a:p>
-        </p:txBody>
-      </p:sp>
-      <p:pic>
-        <p:nvPicPr>
-          <p:cNvPr id="4" name="">
-            <a:extLst xmlns:a="http://schemas.openxmlformats.org/drawingml/2006/main">
-              <a:ext uri="{FF2B5EF4-FFF2-40B4-BE49-F238E27FC236}">
-                <a16:creationId xmlns:a16="http://schemas.microsoft.com/office/drawing/2014/main" id="{CB72361B-E2BF-4980-A4E4-65CC51B03C34}"/>
-              </a:ext>
-            </a:extLst>
-          </p:cNvPr>
-          <p:cNvPicPr>
-            <a:picLocks xmlns:a="http://schemas.openxmlformats.org/drawingml/2006/main" noChangeAspect="1"/>
-          </p:cNvPicPr>
-          <p:nvPr/>
-        </p:nvPicPr>
-        <p:blipFill>
-          <a:blip xmlns:r="http://schemas.openxmlformats.org/officeDocument/2006/relationships" xmlns:a="http://schemas.openxmlformats.org/drawingml/2006/main" r:embed="R7e46a242877f4d34"/>
-          <a:stretch xmlns:a="http://schemas.openxmlformats.org/drawingml/2006/main"/>
-        </p:blipFill>
-        <p:spPr>
-          <a:xfrm xmlns:a="http://schemas.openxmlformats.org/drawingml/2006/main">
-            <a:off x="609600" y="2343150"/>
-            <a:ext cx="10972800" cy="2286000"/>
-          </a:xfrm>
-          <a:prstGeom xmlns:a="http://schemas.openxmlformats.org/drawingml/2006/main" prst="rect">
-            <a:avLst/>
-          </a:prstGeom>
-        </p:spPr>
-      </p:pic>
-      <p:sp>
-        <p:nvSpPr>
-          <p:cNvPr id="5" name="text-3">
-            <a:extLst xmlns:a="http://schemas.openxmlformats.org/drawingml/2006/main">
-              <a:ext uri="{FF2B5EF4-FFF2-40B4-BE49-F238E27FC236}">
-                <a16:creationId xmlns:a16="http://schemas.microsoft.com/office/drawing/2014/main" id="{5DC85BA9-A3AC-4F9C-89DE-873DB4807E37}"/>
-              </a:ext>
-            </a:extLst>
-          </p:cNvPr>
-          <p:cNvSpPr>
-            <a:spLocks xmlns:a="http://schemas.openxmlformats.org/drawingml/2006/main" noGrp="1"/>
-          </p:cNvSpPr>
-          <p:nvPr/>
-        </p:nvSpPr>
-        <p:spPr>
-          <a:xfrm xmlns:a="http://schemas.openxmlformats.org/drawingml/2006/main">
-            <a:off x="609600" y="5238750"/>
-            <a:ext cx="10858500" cy="952500"/>
-          </a:xfrm>
-          <a:prstGeom xmlns:a="http://schemas.openxmlformats.org/drawingml/2006/main" prst="rect">
-            <a:avLst/>
-          </a:prstGeom>
-          <a:noFill xmlns:a="http://schemas.openxmlformats.org/drawingml/2006/main"/>
-          <a:ln xmlns:a="http://schemas.openxmlformats.org/drawingml/2006/main" w="0">
-            <a:noFill/>
-            <a:prstDash val="solid"/>
-          </a:ln>
-        </p:spPr>
-        <p:txBody>
-          <a:bodyPr xmlns:a="http://schemas.openxmlformats.org/drawingml/2006/main">
-            <a:noAutofit/>
-          </a:bodyPr>
-          <a:lstStyle xmlns:a="http://schemas.openxmlformats.org/drawingml/2006/main">
-            <a:defPPr>
-              <a:defRPr sz="2175" b="0">
-                <a:solidFill>
-                  <a:srgbClr val="203149"/>
-                </a:solidFill>
-                <a:latin typeface="DejaVu Sans"/>
-                <a:ea typeface="DejaVu Sans"/>
-                <a:cs typeface="DejaVu Sans"/>
-              </a:defRPr>
-            </a:defPPr>
-          </a:lstStyle>
-          <a:p xmlns:a="http://schemas.openxmlformats.org/drawingml/2006/main">
-            <a:pPr>
-              <a:defRPr sz="2175" b="0">
-                <a:solidFill>
-                  <a:srgbClr val="203149"/>
-                </a:solidFill>
-                <a:latin typeface="DejaVu Sans"/>
-                <a:ea typeface="DejaVu Sans"/>
-                <a:cs typeface="DejaVu Sans"/>
-              </a:defRPr>
-            </a:pPr>
-            <a:r>
-              <a:rPr sz="2175" b="0">
-                <a:solidFill>
-                  <a:srgbClr val="203149"/>
-                </a:solidFill>
-                <a:latin typeface="DejaVu Sans"/>
-                <a:ea typeface="DejaVu Sans"/>
-                <a:cs typeface="DejaVu Sans"/>
-              </a:rPr>
-              <a:t>Troca de quadros a 10 por segundo</a:t>
-            </a:r>
-          </a:p>
-          <a:p xmlns:a="http://schemas.openxmlformats.org/drawingml/2006/main">
-            <a:pPr>
-              <a:defRPr sz="2175" b="0">
-                <a:solidFill>
-                  <a:srgbClr val="203149"/>
-                </a:solidFill>
-                <a:latin typeface="DejaVu Sans"/>
-                <a:ea typeface="DejaVu Sans"/>
-                <a:cs typeface="DejaVu Sans"/>
-              </a:defRPr>
-            </a:pPr>
-            <a:r>
-              <a:rPr sz="2175" b="0">
-                <a:solidFill>
-                  <a:srgbClr val="203149"/>
-                </a:solidFill>
-                <a:latin typeface="DejaVu Sans"/>
-                <a:ea typeface="DejaVu Sans"/>
-                <a:cs typeface="DejaVu Sans"/>
-              </a:rPr>
-              <a:t>Poses diferentes para subir e descer no salto</a:t>
+              <a:t>Música: House In a Forest Loop, HorrorPen, CC BY 3.0.</a:t>
             </a:r>
           </a:p>
         </p:txBody>
@@ -11190,465 +7742,7 @@
     </p:spTree>
     <p:extLst>
       <p:ext uri="{BB962C8B-B14F-4D97-AF65-F5344CB8AC3E}">
-        <p14:creationId xmlns:p14="http://schemas.microsoft.com/office/powerpoint/2010/main" val="442795503"/>
-      </p:ext>
-    </p:extLst>
-  </p:cSld>
-</p:sld>
-</file>
-
-<file path=ppt/slides/slide9.xml><?xml version="1.0" encoding="utf-8"?>
-<p:sld xmlns:p="http://schemas.openxmlformats.org/presentationml/2006/main">
-  <p:cSld>
-    <p:bg>
-      <p:bgPr>
-        <a:solidFill xmlns:a="http://schemas.openxmlformats.org/drawingml/2006/main">
-          <a:srgbClr val="FFF8E7"/>
-        </a:solidFill>
-      </p:bgPr>
-    </p:bg>
-    <p:spTree>
-      <p:nvGrpSpPr>
-        <p:cNvPr id="1" name=""/>
-        <p:cNvGrpSpPr/>
-        <p:nvPr/>
-      </p:nvGrpSpPr>
-      <p:grpSpPr>
-        <a:xfrm xmlns:a="http://schemas.openxmlformats.org/drawingml/2006/main"/>
-      </p:grpSpPr>
-      <p:sp>
-        <p:nvSpPr>
-          <p:cNvPr id="6" name="text-0">
-            <a:extLst xmlns:a="http://schemas.openxmlformats.org/drawingml/2006/main">
-              <a:ext uri="{FF2B5EF4-FFF2-40B4-BE49-F238E27FC236}">
-                <a16:creationId xmlns:a16="http://schemas.microsoft.com/office/drawing/2014/main" id="{C9B80A39-0D7F-49DB-91B8-ED48941A7AE6}"/>
-              </a:ext>
-            </a:extLst>
-          </p:cNvPr>
-          <p:cNvSpPr>
-            <a:spLocks xmlns:a="http://schemas.openxmlformats.org/drawingml/2006/main" noGrp="1"/>
-          </p:cNvSpPr>
-          <p:nvPr/>
-        </p:nvSpPr>
-        <p:spPr>
-          <a:xfrm xmlns:a="http://schemas.openxmlformats.org/drawingml/2006/main">
-            <a:off x="609600" y="400050"/>
-            <a:ext cx="10972800" cy="876300"/>
-          </a:xfrm>
-          <a:prstGeom xmlns:a="http://schemas.openxmlformats.org/drawingml/2006/main" prst="rect">
-            <a:avLst/>
-          </a:prstGeom>
-          <a:noFill xmlns:a="http://schemas.openxmlformats.org/drawingml/2006/main"/>
-          <a:ln xmlns:a="http://schemas.openxmlformats.org/drawingml/2006/main" w="0">
-            <a:noFill/>
-            <a:prstDash val="solid"/>
-          </a:ln>
-        </p:spPr>
-        <p:txBody>
-          <a:bodyPr xmlns:a="http://schemas.openxmlformats.org/drawingml/2006/main">
-            <a:noAutofit/>
-          </a:bodyPr>
-          <a:lstStyle xmlns:a="http://schemas.openxmlformats.org/drawingml/2006/main">
-            <a:defPPr>
-              <a:defRPr sz="3300" b="1">
-                <a:solidFill>
-                  <a:srgbClr val="203149"/>
-                </a:solidFill>
-                <a:latin typeface="DejaVu Sans"/>
-                <a:ea typeface="DejaVu Sans"/>
-                <a:cs typeface="DejaVu Sans"/>
-              </a:defRPr>
-            </a:defPPr>
-          </a:lstStyle>
-          <a:p xmlns:a="http://schemas.openxmlformats.org/drawingml/2006/main">
-            <a:pPr>
-              <a:defRPr sz="3300" b="1">
-                <a:solidFill>
-                  <a:srgbClr val="203149"/>
-                </a:solidFill>
-                <a:latin typeface="DejaVu Sans"/>
-                <a:ea typeface="DejaVu Sans"/>
-                <a:cs typeface="DejaVu Sans"/>
-              </a:defRPr>
-            </a:pPr>
-            <a:r>
-              <a:rPr sz="3300" b="1">
-                <a:solidFill>
-                  <a:srgbClr val="203149"/>
-                </a:solidFill>
-                <a:latin typeface="DejaVu Sans"/>
-                <a:ea typeface="DejaVu Sans"/>
-                <a:cs typeface="DejaVu Sans"/>
-              </a:rPr>
-              <a:t>Partículas e avisos</a:t>
-            </a:r>
-          </a:p>
-        </p:txBody>
-      </p:sp>
-      <p:sp>
-        <p:nvSpPr>
-          <p:cNvPr id="2" name="text-1">
-            <a:extLst xmlns:a="http://schemas.openxmlformats.org/drawingml/2006/main">
-              <a:ext uri="{FF2B5EF4-FFF2-40B4-BE49-F238E27FC236}">
-                <a16:creationId xmlns:a16="http://schemas.microsoft.com/office/drawing/2014/main" id="{C9ED14AD-2409-4EA9-AB8F-BCB1C3FF261A}"/>
-              </a:ext>
-            </a:extLst>
-          </p:cNvPr>
-          <p:cNvSpPr>
-            <a:spLocks xmlns:a="http://schemas.openxmlformats.org/drawingml/2006/main" noGrp="1"/>
-          </p:cNvSpPr>
-          <p:nvPr/>
-        </p:nvSpPr>
-        <p:spPr>
-          <a:xfrm xmlns:a="http://schemas.openxmlformats.org/drawingml/2006/main">
-            <a:off x="11239500" y="6419850"/>
-            <a:ext cx="457200" cy="238125"/>
-          </a:xfrm>
-          <a:prstGeom xmlns:a="http://schemas.openxmlformats.org/drawingml/2006/main" prst="rect">
-            <a:avLst/>
-          </a:prstGeom>
-          <a:noFill xmlns:a="http://schemas.openxmlformats.org/drawingml/2006/main"/>
-          <a:ln xmlns:a="http://schemas.openxmlformats.org/drawingml/2006/main" w="0">
-            <a:noFill/>
-            <a:prstDash val="solid"/>
-          </a:ln>
-        </p:spPr>
-        <p:txBody>
-          <a:bodyPr xmlns:a="http://schemas.openxmlformats.org/drawingml/2006/main">
-            <a:noAutofit/>
-          </a:bodyPr>
-          <a:lstStyle xmlns:a="http://schemas.openxmlformats.org/drawingml/2006/main">
-            <a:defPPr>
-              <a:defRPr sz="1350" b="0">
-                <a:solidFill>
-                  <a:srgbClr val="526773"/>
-                </a:solidFill>
-                <a:latin typeface="DejaVu Sans"/>
-                <a:ea typeface="DejaVu Sans"/>
-                <a:cs typeface="DejaVu Sans"/>
-              </a:defRPr>
-            </a:defPPr>
-          </a:lstStyle>
-          <a:p xmlns:a="http://schemas.openxmlformats.org/drawingml/2006/main">
-            <a:pPr>
-              <a:defRPr sz="1350" b="0">
-                <a:solidFill>
-                  <a:srgbClr val="526773"/>
-                </a:solidFill>
-                <a:latin typeface="DejaVu Sans"/>
-                <a:ea typeface="DejaVu Sans"/>
-                <a:cs typeface="DejaVu Sans"/>
-              </a:defRPr>
-            </a:pPr>
-            <a:r>
-              <a:rPr sz="1350" b="0">
-                <a:solidFill>
-                  <a:srgbClr val="526773"/>
-                </a:solidFill>
-                <a:latin typeface="DejaVu Sans"/>
-                <a:ea typeface="DejaVu Sans"/>
-                <a:cs typeface="DejaVu Sans"/>
-              </a:rPr>
-              <a:t>09</a:t>
-            </a:r>
-          </a:p>
-        </p:txBody>
-      </p:sp>
-      <p:pic>
-        <p:nvPicPr>
-          <p:cNvPr id="3" name="">
-            <a:extLst xmlns:a="http://schemas.openxmlformats.org/drawingml/2006/main">
-              <a:ext uri="{FF2B5EF4-FFF2-40B4-BE49-F238E27FC236}">
-                <a16:creationId xmlns:a16="http://schemas.microsoft.com/office/drawing/2014/main" id="{963854D3-583E-48A7-95D6-D0649FC997BA}"/>
-              </a:ext>
-            </a:extLst>
-          </p:cNvPr>
-          <p:cNvPicPr>
-            <a:picLocks xmlns:a="http://schemas.openxmlformats.org/drawingml/2006/main" noChangeAspect="1"/>
-          </p:cNvPicPr>
-          <p:nvPr/>
-        </p:nvPicPr>
-        <p:blipFill>
-          <a:blip xmlns:r="http://schemas.openxmlformats.org/officeDocument/2006/relationships" xmlns:a="http://schemas.openxmlformats.org/drawingml/2006/main" r:embed="R7884e53a681f4fff"/>
-          <a:stretch xmlns:a="http://schemas.openxmlformats.org/drawingml/2006/main"/>
-        </p:blipFill>
-        <p:spPr>
-          <a:xfrm xmlns:a="http://schemas.openxmlformats.org/drawingml/2006/main">
-            <a:off x="609600" y="1478756"/>
-            <a:ext cx="8001000" cy="4500563"/>
-          </a:xfrm>
-          <a:prstGeom xmlns:a="http://schemas.openxmlformats.org/drawingml/2006/main" prst="rect">
-            <a:avLst/>
-          </a:prstGeom>
-        </p:spPr>
-      </p:pic>
-      <p:sp>
-        <p:nvSpPr>
-          <p:cNvPr id="4" name="text-2">
-            <a:extLst xmlns:a="http://schemas.openxmlformats.org/drawingml/2006/main">
-              <a:ext uri="{FF2B5EF4-FFF2-40B4-BE49-F238E27FC236}">
-                <a16:creationId xmlns:a16="http://schemas.microsoft.com/office/drawing/2014/main" id="{31417248-14A1-4387-A248-63025A9120DB}"/>
-              </a:ext>
-            </a:extLst>
-          </p:cNvPr>
-          <p:cNvSpPr>
-            <a:spLocks xmlns:a="http://schemas.openxmlformats.org/drawingml/2006/main" noGrp="1"/>
-          </p:cNvSpPr>
-          <p:nvPr/>
-        </p:nvSpPr>
-        <p:spPr>
-          <a:xfrm xmlns:a="http://schemas.openxmlformats.org/drawingml/2006/main">
-            <a:off x="8991600" y="1628775"/>
-            <a:ext cx="2809875" cy="3790950"/>
-          </a:xfrm>
-          <a:prstGeom xmlns:a="http://schemas.openxmlformats.org/drawingml/2006/main" prst="rect">
-            <a:avLst/>
-          </a:prstGeom>
-          <a:noFill xmlns:a="http://schemas.openxmlformats.org/drawingml/2006/main"/>
-          <a:ln xmlns:a="http://schemas.openxmlformats.org/drawingml/2006/main" w="0">
-            <a:noFill/>
-            <a:prstDash val="solid"/>
-          </a:ln>
-        </p:spPr>
-        <p:txBody>
-          <a:bodyPr xmlns:a="http://schemas.openxmlformats.org/drawingml/2006/main">
-            <a:noAutofit/>
-          </a:bodyPr>
-          <a:lstStyle xmlns:a="http://schemas.openxmlformats.org/drawingml/2006/main">
-            <a:defPPr>
-              <a:defRPr sz="1875" b="0">
-                <a:solidFill>
-                  <a:srgbClr val="203149"/>
-                </a:solidFill>
-                <a:latin typeface="DejaVu Sans"/>
-                <a:ea typeface="DejaVu Sans"/>
-                <a:cs typeface="DejaVu Sans"/>
-              </a:defRPr>
-            </a:defPPr>
-          </a:lstStyle>
-          <a:p xmlns:a="http://schemas.openxmlformats.org/drawingml/2006/main">
-            <a:pPr>
-              <a:defRPr sz="1875" b="0">
-                <a:solidFill>
-                  <a:srgbClr val="203149"/>
-                </a:solidFill>
-                <a:latin typeface="DejaVu Sans"/>
-                <a:ea typeface="DejaVu Sans"/>
-                <a:cs typeface="DejaVu Sans"/>
-              </a:defRPr>
-            </a:pPr>
-            <a:r>
-              <a:rPr sz="1875" b="0">
-                <a:solidFill>
-                  <a:srgbClr val="203149"/>
-                </a:solidFill>
-                <a:latin typeface="DejaVu Sans"/>
-                <a:ea typeface="DejaVu Sans"/>
-                <a:cs typeface="DejaVu Sans"/>
-              </a:rPr>
-              <a:t>Cristais na coleta</a:t>
-            </a:r>
-          </a:p>
-          <a:p xmlns:a="http://schemas.openxmlformats.org/drawingml/2006/main">
-            <a:pPr>
-              <a:defRPr sz="1875" b="0">
-                <a:solidFill>
-                  <a:srgbClr val="203149"/>
-                </a:solidFill>
-                <a:latin typeface="DejaVu Sans"/>
-                <a:ea typeface="DejaVu Sans"/>
-                <a:cs typeface="DejaVu Sans"/>
-              </a:defRPr>
-            </a:pPr>
-            <a:r>
-              <a:rPr sz="1875" b="0">
-                <a:solidFill>
-                  <a:srgbClr val="203149"/>
-                </a:solidFill>
-                <a:latin typeface="DejaVu Sans"/>
-                <a:ea typeface="DejaVu Sans"/>
-                <a:cs typeface="DejaVu Sans"/>
-              </a:rPr>
-              <a:t>Faíscas no impacto</a:t>
-            </a:r>
-          </a:p>
-          <a:p xmlns:a="http://schemas.openxmlformats.org/drawingml/2006/main">
-            <a:pPr>
-              <a:defRPr sz="1875" b="0">
-                <a:solidFill>
-                  <a:srgbClr val="203149"/>
-                </a:solidFill>
-                <a:latin typeface="DejaVu Sans"/>
-                <a:ea typeface="DejaVu Sans"/>
-                <a:cs typeface="DejaVu Sans"/>
-              </a:defRPr>
-            </a:pPr>
-            <a:r>
-              <a:rPr sz="1875" b="0">
-                <a:solidFill>
-                  <a:srgbClr val="203149"/>
-                </a:solidFill>
-                <a:latin typeface="DejaVu Sans"/>
-                <a:ea typeface="DejaVu Sans"/>
-                <a:cs typeface="DejaVu Sans"/>
-              </a:rPr>
-              <a:t>Gotas no derretimento</a:t>
-            </a:r>
-          </a:p>
-          <a:p xmlns:a="http://schemas.openxmlformats.org/drawingml/2006/main">
-            <a:r>
-              <a:t/>
-            </a:r>
-          </a:p>
-          <a:p xmlns:a="http://schemas.openxmlformats.org/drawingml/2006/main">
-            <a:pPr>
-              <a:defRPr sz="1875" b="0">
-                <a:solidFill>
-                  <a:srgbClr val="203149"/>
-                </a:solidFill>
-                <a:latin typeface="DejaVu Sans"/>
-                <a:ea typeface="DejaVu Sans"/>
-                <a:cs typeface="DejaVu Sans"/>
-              </a:defRPr>
-            </a:pPr>
-            <a:r>
-              <a:rPr sz="1875" b="0">
-                <a:solidFill>
-                  <a:srgbClr val="203149"/>
-                </a:solidFill>
-                <a:latin typeface="DejaVu Sans"/>
-                <a:ea typeface="DejaVu Sans"/>
-                <a:cs typeface="DejaVu Sans"/>
-              </a:rPr>
-              <a:t>Cada efeito tem</a:t>
-            </a:r>
-          </a:p>
-          <a:p xmlns:a="http://schemas.openxmlformats.org/drawingml/2006/main">
-            <a:pPr>
-              <a:defRPr sz="1875" b="0">
-                <a:solidFill>
-                  <a:srgbClr val="203149"/>
-                </a:solidFill>
-                <a:latin typeface="DejaVu Sans"/>
-                <a:ea typeface="DejaVu Sans"/>
-                <a:cs typeface="DejaVu Sans"/>
-              </a:defRPr>
-            </a:pPr>
-            <a:r>
-              <a:rPr sz="1875" b="0">
-                <a:solidFill>
-                  <a:srgbClr val="203149"/>
-                </a:solidFill>
-                <a:latin typeface="DejaVu Sans"/>
-                <a:ea typeface="DejaVu Sans"/>
-                <a:cs typeface="DejaVu Sans"/>
-              </a:rPr>
-              <a:t>um tempo de vida.</a:t>
-            </a:r>
-          </a:p>
-          <a:p xmlns:a="http://schemas.openxmlformats.org/drawingml/2006/main">
-            <a:r>
-              <a:t/>
-            </a:r>
-          </a:p>
-          <a:p xmlns:a="http://schemas.openxmlformats.org/drawingml/2006/main">
-            <a:pPr>
-              <a:defRPr sz="1875" b="0">
-                <a:solidFill>
-                  <a:srgbClr val="203149"/>
-                </a:solidFill>
-                <a:latin typeface="DejaVu Sans"/>
-                <a:ea typeface="DejaVu Sans"/>
-                <a:cs typeface="DejaVu Sans"/>
-              </a:defRPr>
-            </a:pPr>
-            <a:r>
-              <a:rPr sz="1875" b="0">
-                <a:solidFill>
-                  <a:srgbClr val="203149"/>
-                </a:solidFill>
-                <a:latin typeface="DejaVu Sans"/>
-                <a:ea typeface="DejaVu Sans"/>
-                <a:cs typeface="DejaVu Sans"/>
-              </a:rPr>
-              <a:t>Limite de 100 partículas</a:t>
-            </a:r>
-          </a:p>
-        </p:txBody>
-      </p:sp>
-      <p:sp>
-        <p:nvSpPr>
-          <p:cNvPr id="5" name="text-3">
-            <a:extLst xmlns:a="http://schemas.openxmlformats.org/drawingml/2006/main">
-              <a:ext uri="{FF2B5EF4-FFF2-40B4-BE49-F238E27FC236}">
-                <a16:creationId xmlns:a16="http://schemas.microsoft.com/office/drawing/2014/main" id="{AF9FA5DE-38C1-4B23-894A-E8DC32500B28}"/>
-              </a:ext>
-            </a:extLst>
-          </p:cNvPr>
-          <p:cNvSpPr>
-            <a:spLocks xmlns:a="http://schemas.openxmlformats.org/drawingml/2006/main" noGrp="1"/>
-          </p:cNvSpPr>
-          <p:nvPr/>
-        </p:nvSpPr>
-        <p:spPr>
-          <a:xfrm xmlns:a="http://schemas.openxmlformats.org/drawingml/2006/main">
-            <a:off x="609600" y="6124575"/>
-            <a:ext cx="10763250" cy="238125"/>
-          </a:xfrm>
-          <a:prstGeom xmlns:a="http://schemas.openxmlformats.org/drawingml/2006/main" prst="rect">
-            <a:avLst/>
-          </a:prstGeom>
-          <a:noFill xmlns:a="http://schemas.openxmlformats.org/drawingml/2006/main"/>
-          <a:ln xmlns:a="http://schemas.openxmlformats.org/drawingml/2006/main" w="0">
-            <a:noFill/>
-            <a:prstDash val="solid"/>
-          </a:ln>
-        </p:spPr>
-        <p:txBody>
-          <a:bodyPr xmlns:a="http://schemas.openxmlformats.org/drawingml/2006/main">
-            <a:noAutofit/>
-          </a:bodyPr>
-          <a:lstStyle xmlns:a="http://schemas.openxmlformats.org/drawingml/2006/main">
-            <a:defPPr>
-              <a:defRPr sz="1350" b="0">
-                <a:solidFill>
-                  <a:srgbClr val="526773"/>
-                </a:solidFill>
-                <a:latin typeface="DejaVu Sans"/>
-                <a:ea typeface="DejaVu Sans"/>
-                <a:cs typeface="DejaVu Sans"/>
-              </a:defRPr>
-            </a:defPPr>
-          </a:lstStyle>
-          <a:p xmlns:a="http://schemas.openxmlformats.org/drawingml/2006/main">
-            <a:pPr>
-              <a:defRPr sz="1350" b="0">
-                <a:solidFill>
-                  <a:srgbClr val="526773"/>
-                </a:solidFill>
-                <a:latin typeface="DejaVu Sans"/>
-                <a:ea typeface="DejaVu Sans"/>
-                <a:cs typeface="DejaVu Sans"/>
-              </a:defRPr>
-            </a:pPr>
-            <a:r>
-              <a:rPr sz="1350" b="0">
-                <a:solidFill>
-                  <a:srgbClr val="526773"/>
-                </a:solidFill>
-                <a:latin typeface="DejaVu Sans"/>
-                <a:ea typeface="DejaVu Sans"/>
-                <a:cs typeface="DejaVu Sans"/>
-              </a:rPr>
-              <a:t>Cena preparada para mostrar os efeitos</a:t>
-            </a:r>
-          </a:p>
-        </p:txBody>
-      </p:sp>
-    </p:spTree>
-    <p:extLst>
-      <p:ext uri="{BB962C8B-B14F-4D97-AF65-F5344CB8AC3E}">
-        <p14:creationId xmlns:p14="http://schemas.microsoft.com/office/powerpoint/2010/main" val="286672225"/>
+        <p14:creationId xmlns:p14="http://schemas.microsoft.com/office/powerpoint/2010/main" val="359517383"/>
       </p:ext>
     </p:extLst>
   </p:cSld>

--- a/presentation/Corre_que_Derrete_Equipe_20261015.pptx
+++ b/presentation/Corre_que_Derrete_Equipe_20261015.pptx
@@ -2,19 +2,19 @@
 <file path=ppt/presentation.xml><?xml version="1.0" encoding="utf-8"?>
 <p:presentation xmlns:p="http://schemas.openxmlformats.org/presentationml/2006/main">
   <p:sldMasterIdLst>
-    <p:sldMasterId xmlns:r="http://schemas.openxmlformats.org/officeDocument/2006/relationships" id="2147483648" r:id="R1ad924c3e4804267"/>
+    <p:sldMasterId xmlns:r="http://schemas.openxmlformats.org/officeDocument/2006/relationships" id="2147483648" r:id="R548393883b7b480e"/>
   </p:sldMasterIdLst>
   <p:notesMasterIdLst>
-    <p:notesMasterId xmlns:r="http://schemas.openxmlformats.org/officeDocument/2006/relationships" r:id="R7ea4454c99ba46d7"/>
+    <p:notesMasterId xmlns:r="http://schemas.openxmlformats.org/officeDocument/2006/relationships" r:id="Rd6a4d966fc834c09"/>
   </p:notesMasterIdLst>
   <p:sldIdLst>
-    <p:sldId xmlns:r="http://schemas.openxmlformats.org/officeDocument/2006/relationships" id="256" r:id="R3cbbcaccc72b454d"/>
-    <p:sldId xmlns:r="http://schemas.openxmlformats.org/officeDocument/2006/relationships" id="257" r:id="R3d7d032826954c3a"/>
-    <p:sldId xmlns:r="http://schemas.openxmlformats.org/officeDocument/2006/relationships" id="258" r:id="Rbcabc42c86304589"/>
-    <p:sldId xmlns:r="http://schemas.openxmlformats.org/officeDocument/2006/relationships" id="259" r:id="R4dcac49bd9d14305"/>
-    <p:sldId xmlns:r="http://schemas.openxmlformats.org/officeDocument/2006/relationships" id="260" r:id="R081e0b3786344022"/>
-    <p:sldId xmlns:r="http://schemas.openxmlformats.org/officeDocument/2006/relationships" id="261" r:id="R4dd1a92b0f604b6c"/>
-    <p:sldId xmlns:r="http://schemas.openxmlformats.org/officeDocument/2006/relationships" id="262" r:id="R5780a82beb6c4f7b"/>
+    <p:sldId xmlns:r="http://schemas.openxmlformats.org/officeDocument/2006/relationships" id="256" r:id="R0f6d960b6fae454e"/>
+    <p:sldId xmlns:r="http://schemas.openxmlformats.org/officeDocument/2006/relationships" id="257" r:id="Ra79547fa11dc4ce4"/>
+    <p:sldId xmlns:r="http://schemas.openxmlformats.org/officeDocument/2006/relationships" id="258" r:id="R4facc099e2894d14"/>
+    <p:sldId xmlns:r="http://schemas.openxmlformats.org/officeDocument/2006/relationships" id="259" r:id="Re164705af37b4cdb"/>
+    <p:sldId xmlns:r="http://schemas.openxmlformats.org/officeDocument/2006/relationships" id="260" r:id="Rc63f8f7c1a824bef"/>
+    <p:sldId xmlns:r="http://schemas.openxmlformats.org/officeDocument/2006/relationships" id="261" r:id="R1572048c78104ad9"/>
+    <p:sldId xmlns:r="http://schemas.openxmlformats.org/officeDocument/2006/relationships" id="262" r:id="R6c0ee22aa20c4f66"/>
   </p:sldIdLst>
   <p:sldSz cx="12192000" cy="6858000"/>
   <p:notesSz cx="6858000" cy="9144000"/>
@@ -633,7 +633,7 @@
           </a:p>
           <a:p xmlns:a="http://schemas.openxmlformats.org/drawingml/2006/main">
             <a:r>
-              <a:t>O calor reduz a barra com o tempo. Bater tira vinte pontos percentuais, e pegar gelo recupera até quinze, sem passar de cem. Por exemplo, um impacto com oitenta deixa sessenta. A rota tem mil e oitocentos metros em três trechos, cada vez mais rápidos. Para vencer, é preciso chegar com conservação acima de zero. Os pontos somam a distância e cem por gelo.</a:t>
+              <a:t>O calor reduz a barra com o tempo. Bater tira vinte pontos percentuais, e pegar gelo recupera até quinze, sem passar de cem. Por exemplo, um impacto com oitenta deixa sessenta. A rota tem mil e oitocentos metros em três trechos. Ao chegar aos seiscentos e aos mil e duzentos metros, a velocidade aumenta e diminui o espaço entre os obstáculos. Para vencer, é preciso chegar com conservação acima de zero. Os pontos somam a distância e cem por gelo.</a:t>
             </a:r>
           </a:p>
           <a:p xmlns:a="http://schemas.openxmlformats.org/drawingml/2006/main">
@@ -1055,7 +1055,7 @@
           <p:cNvPr id="3" name="Title">
             <a:extLst xmlns:a="http://schemas.openxmlformats.org/drawingml/2006/main">
               <a:ext uri="{FF2B5EF4-FFF2-40B4-BE49-F238E27FC236}">
-                <a16:creationId xmlns:a16="http://schemas.microsoft.com/office/drawing/2014/main" id="{2D274616-BD5B-472A-B121-1864F5B3CCF4}"/>
+                <a16:creationId xmlns:a16="http://schemas.microsoft.com/office/drawing/2014/main" id="{31C10FDF-BDE2-4B57-8865-FA32CCEB4BC2}"/>
               </a:ext>
             </a:extLst>
           </p:cNvPr>
@@ -1212,7 +1212,7 @@
           <p:cNvPr id="2" name="Subtitle">
             <a:extLst xmlns:a="http://schemas.openxmlformats.org/drawingml/2006/main">
               <a:ext uri="{FF2B5EF4-FFF2-40B4-BE49-F238E27FC236}">
-                <a16:creationId xmlns:a16="http://schemas.microsoft.com/office/drawing/2014/main" id="{B6FC45D5-3E1D-4D82-9F88-B895462703DA}"/>
+                <a16:creationId xmlns:a16="http://schemas.microsoft.com/office/drawing/2014/main" id="{E2D914FA-2CB1-4248-A3DB-F9F0ED8C2E0C}"/>
               </a:ext>
             </a:extLst>
           </p:cNvPr>
@@ -1386,7 +1386,7 @@
           <p:cNvPr id="2" name="Section title">
             <a:extLst xmlns:a="http://schemas.openxmlformats.org/drawingml/2006/main">
               <a:ext uri="{FF2B5EF4-FFF2-40B4-BE49-F238E27FC236}">
-                <a16:creationId xmlns:a16="http://schemas.microsoft.com/office/drawing/2014/main" id="{9A075C84-4952-4BD8-A27E-E07D4DD86F11}"/>
+                <a16:creationId xmlns:a16="http://schemas.microsoft.com/office/drawing/2014/main" id="{B51B9B38-08AF-486A-A775-0CA9CA0E7D11}"/>
               </a:ext>
             </a:extLst>
           </p:cNvPr>
@@ -1560,7 +1560,7 @@
           <p:cNvPr id="3" name="Title">
             <a:extLst xmlns:a="http://schemas.openxmlformats.org/drawingml/2006/main">
               <a:ext uri="{FF2B5EF4-FFF2-40B4-BE49-F238E27FC236}">
-                <a16:creationId xmlns:a16="http://schemas.microsoft.com/office/drawing/2014/main" id="{B174C311-CA5D-4A53-A3F8-93FC8A7F7A20}"/>
+                <a16:creationId xmlns:a16="http://schemas.microsoft.com/office/drawing/2014/main" id="{2CB6BE5F-8556-49AA-81EA-290449F73ED9}"/>
               </a:ext>
             </a:extLst>
           </p:cNvPr>
@@ -1717,7 +1717,7 @@
           <p:cNvPr id="2" name="Body">
             <a:extLst xmlns:a="http://schemas.openxmlformats.org/drawingml/2006/main">
               <a:ext uri="{FF2B5EF4-FFF2-40B4-BE49-F238E27FC236}">
-                <a16:creationId xmlns:a16="http://schemas.microsoft.com/office/drawing/2014/main" id="{0EA195DE-FC60-4DB0-B15C-630AE386A519}"/>
+                <a16:creationId xmlns:a16="http://schemas.microsoft.com/office/drawing/2014/main" id="{75FBDCDC-7A49-4494-9B01-2A1A492E9EF6}"/>
               </a:ext>
             </a:extLst>
           </p:cNvPr>
@@ -1891,7 +1891,7 @@
           <p:cNvPr id="4" name="Title">
             <a:extLst xmlns:a="http://schemas.openxmlformats.org/drawingml/2006/main">
               <a:ext uri="{FF2B5EF4-FFF2-40B4-BE49-F238E27FC236}">
-                <a16:creationId xmlns:a16="http://schemas.microsoft.com/office/drawing/2014/main" id="{DB0D50FE-D0C5-4536-ABE1-D6344F6F1EC5}"/>
+                <a16:creationId xmlns:a16="http://schemas.microsoft.com/office/drawing/2014/main" id="{F621C1AD-DCED-40B8-8D41-627406CC4C63}"/>
               </a:ext>
             </a:extLst>
           </p:cNvPr>
@@ -2048,7 +2048,7 @@
           <p:cNvPr id="2" name="Left column">
             <a:extLst xmlns:a="http://schemas.openxmlformats.org/drawingml/2006/main">
               <a:ext uri="{FF2B5EF4-FFF2-40B4-BE49-F238E27FC236}">
-                <a16:creationId xmlns:a16="http://schemas.microsoft.com/office/drawing/2014/main" id="{8176B630-6EDE-4651-A72C-34DEBFE2D773}"/>
+                <a16:creationId xmlns:a16="http://schemas.microsoft.com/office/drawing/2014/main" id="{1D79E180-075E-43C5-B5CF-5535948B725F}"/>
               </a:ext>
             </a:extLst>
           </p:cNvPr>
@@ -2205,7 +2205,7 @@
           <p:cNvPr id="3" name="Right column">
             <a:extLst xmlns:a="http://schemas.openxmlformats.org/drawingml/2006/main">
               <a:ext uri="{FF2B5EF4-FFF2-40B4-BE49-F238E27FC236}">
-                <a16:creationId xmlns:a16="http://schemas.microsoft.com/office/drawing/2014/main" id="{F21633B5-454D-4930-A063-AC473A3BB95A}"/>
+                <a16:creationId xmlns:a16="http://schemas.microsoft.com/office/drawing/2014/main" id="{4CD6C8CE-8536-41AE-8AB0-3282C5B1581F}"/>
               </a:ext>
             </a:extLst>
           </p:cNvPr>
@@ -2379,7 +2379,7 @@
           <p:cNvPr id="3" name="Title">
             <a:extLst xmlns:a="http://schemas.openxmlformats.org/drawingml/2006/main">
               <a:ext uri="{FF2B5EF4-FFF2-40B4-BE49-F238E27FC236}">
-                <a16:creationId xmlns:a16="http://schemas.microsoft.com/office/drawing/2014/main" id="{DB2C0B70-A858-4E12-A677-B5A84B2CB840}"/>
+                <a16:creationId xmlns:a16="http://schemas.microsoft.com/office/drawing/2014/main" id="{94077CA9-1432-4F7F-9FA7-28600991B4AB}"/>
               </a:ext>
             </a:extLst>
           </p:cNvPr>
@@ -2536,7 +2536,7 @@
           <p:cNvPr id="2" name="Left column">
             <a:extLst xmlns:a="http://schemas.openxmlformats.org/drawingml/2006/main">
               <a:ext uri="{FF2B5EF4-FFF2-40B4-BE49-F238E27FC236}">
-                <a16:creationId xmlns:a16="http://schemas.microsoft.com/office/drawing/2014/main" id="{FDC4CB0E-12C2-4E14-97B8-0362F003646B}"/>
+                <a16:creationId xmlns:a16="http://schemas.microsoft.com/office/drawing/2014/main" id="{7B9CA8DF-1273-4705-B761-701C97319108}"/>
               </a:ext>
             </a:extLst>
           </p:cNvPr>
@@ -2731,12 +2731,12 @@
   </p:cSld>
   <p:clrMap bg1="lt1" tx1="dk1" bg2="lt2" tx2="dk2" accent1="accent1" accent2="accent2" accent3="accent3" accent4="accent4" accent5="accent5" accent6="accent6" hlink="hlink" folHlink="folHlink"/>
   <p:sldLayoutIdLst>
-    <p:sldLayoutId xmlns:r="http://schemas.openxmlformats.org/officeDocument/2006/relationships" id="2147483649" r:id="Rdfe9fa1b4a724aea"/>
-    <p:sldLayoutId xmlns:r="http://schemas.openxmlformats.org/officeDocument/2006/relationships" id="2147483650" r:id="R9231398769854e5c"/>
-    <p:sldLayoutId xmlns:r="http://schemas.openxmlformats.org/officeDocument/2006/relationships" id="2147483651" r:id="R574a3cab62a445db"/>
-    <p:sldLayoutId xmlns:r="http://schemas.openxmlformats.org/officeDocument/2006/relationships" id="2147483652" r:id="R7180337654ca47e6"/>
-    <p:sldLayoutId xmlns:r="http://schemas.openxmlformats.org/officeDocument/2006/relationships" id="2147483653" r:id="R9d047a5ee83d4b9d"/>
-    <p:sldLayoutId xmlns:r="http://schemas.openxmlformats.org/officeDocument/2006/relationships" id="2147483654" r:id="R753159e7f60a42c9"/>
+    <p:sldLayoutId xmlns:r="http://schemas.openxmlformats.org/officeDocument/2006/relationships" id="2147483649" r:id="R149b302c1fe14410"/>
+    <p:sldLayoutId xmlns:r="http://schemas.openxmlformats.org/officeDocument/2006/relationships" id="2147483650" r:id="R12bf642921b94e9b"/>
+    <p:sldLayoutId xmlns:r="http://schemas.openxmlformats.org/officeDocument/2006/relationships" id="2147483651" r:id="R6278e5edae4e48c2"/>
+    <p:sldLayoutId xmlns:r="http://schemas.openxmlformats.org/officeDocument/2006/relationships" id="2147483652" r:id="R6b3a7fe5056346f4"/>
+    <p:sldLayoutId xmlns:r="http://schemas.openxmlformats.org/officeDocument/2006/relationships" id="2147483653" r:id="R5b290155b1cd4359"/>
+    <p:sldLayoutId xmlns:r="http://schemas.openxmlformats.org/officeDocument/2006/relationships" id="2147483654" r:id="R23f25edcc1ee4064"/>
   </p:sldLayoutIdLst>
   <p:txStyles>
     <p:titleStyle>
@@ -3287,7 +3287,7 @@
           <p:cNvPr id="6" name="">
             <a:extLst xmlns:a="http://schemas.openxmlformats.org/drawingml/2006/main">
               <a:ext uri="{FF2B5EF4-FFF2-40B4-BE49-F238E27FC236}">
-                <a16:creationId xmlns:a16="http://schemas.microsoft.com/office/drawing/2014/main" id="{4A6931F2-2AAC-4301-9963-E492BA067A5F}"/>
+                <a16:creationId xmlns:a16="http://schemas.microsoft.com/office/drawing/2014/main" id="{AFD63064-80E1-47DC-9C91-DE747474EBEE}"/>
               </a:ext>
             </a:extLst>
           </p:cNvPr>
@@ -3356,7 +3356,7 @@
           <p:cNvPr id="2" name="">
             <a:extLst xmlns:a="http://schemas.openxmlformats.org/drawingml/2006/main">
               <a:ext uri="{FF2B5EF4-FFF2-40B4-BE49-F238E27FC236}">
-                <a16:creationId xmlns:a16="http://schemas.microsoft.com/office/drawing/2014/main" id="{A2F87812-282C-4200-91E4-75BAA93DFA99}"/>
+                <a16:creationId xmlns:a16="http://schemas.microsoft.com/office/drawing/2014/main" id="{7D1C45A1-547E-4BF5-936A-AFD58A0C8A03}"/>
               </a:ext>
             </a:extLst>
           </p:cNvPr>
@@ -3425,7 +3425,7 @@
           <p:cNvPr id="3" name="">
             <a:extLst xmlns:a="http://schemas.openxmlformats.org/drawingml/2006/main">
               <a:ext uri="{FF2B5EF4-FFF2-40B4-BE49-F238E27FC236}">
-                <a16:creationId xmlns:a16="http://schemas.microsoft.com/office/drawing/2014/main" id="{7655F3F0-586C-4162-8991-1DAEE9870CA2}"/>
+                <a16:creationId xmlns:a16="http://schemas.microsoft.com/office/drawing/2014/main" id="{2863CF29-4941-4432-A114-77A0154BFA76}"/>
               </a:ext>
             </a:extLst>
           </p:cNvPr>
@@ -3540,7 +3540,7 @@
           <p:cNvPr id="4" name="">
             <a:extLst xmlns:a="http://schemas.openxmlformats.org/drawingml/2006/main">
               <a:ext uri="{FF2B5EF4-FFF2-40B4-BE49-F238E27FC236}">
-                <a16:creationId xmlns:a16="http://schemas.microsoft.com/office/drawing/2014/main" id="{FA16CCDC-20B6-4096-A153-3FDD3C2E67B9}"/>
+                <a16:creationId xmlns:a16="http://schemas.microsoft.com/office/drawing/2014/main" id="{262F34B1-DAE0-4DB4-8895-2B5D17EA3863}"/>
               </a:ext>
             </a:extLst>
           </p:cNvPr>
@@ -3655,7 +3655,7 @@
           <p:cNvPr id="5" name="">
             <a:extLst xmlns:a="http://schemas.openxmlformats.org/drawingml/2006/main">
               <a:ext uri="{FF2B5EF4-FFF2-40B4-BE49-F238E27FC236}">
-                <a16:creationId xmlns:a16="http://schemas.microsoft.com/office/drawing/2014/main" id="{4B663C8D-7260-415E-A5B3-BA7C16495454}"/>
+                <a16:creationId xmlns:a16="http://schemas.microsoft.com/office/drawing/2014/main" id="{CF99DDCE-C27A-4F02-A45B-E7D2491FD414}"/>
               </a:ext>
             </a:extLst>
           </p:cNvPr>
@@ -3665,7 +3665,7 @@
           <p:nvPr/>
         </p:nvPicPr>
         <p:blipFill>
-          <a:blip xmlns:r="http://schemas.openxmlformats.org/officeDocument/2006/relationships" xmlns:a="http://schemas.openxmlformats.org/drawingml/2006/main" r:embed="R7535c247ea5843a8"/>
+          <a:blip xmlns:r="http://schemas.openxmlformats.org/officeDocument/2006/relationships" xmlns:a="http://schemas.openxmlformats.org/drawingml/2006/main" r:embed="R4c98bf847ad64cba"/>
           <a:stretch xmlns:a="http://schemas.openxmlformats.org/drawingml/2006/main"/>
         </p:blipFill>
         <p:spPr>
@@ -3681,7 +3681,7 @@
     </p:spTree>
     <p:extLst>
       <p:ext uri="{BB962C8B-B14F-4D97-AF65-F5344CB8AC3E}">
-        <p14:creationId xmlns:p14="http://schemas.microsoft.com/office/powerpoint/2010/main" val="799466445"/>
+        <p14:creationId xmlns:p14="http://schemas.microsoft.com/office/powerpoint/2010/main" val="1843058390"/>
       </p:ext>
     </p:extLst>
   </p:cSld>
@@ -3712,7 +3712,7 @@
           <p:cNvPr id="6" name="">
             <a:extLst xmlns:a="http://schemas.openxmlformats.org/drawingml/2006/main">
               <a:ext uri="{FF2B5EF4-FFF2-40B4-BE49-F238E27FC236}">
-                <a16:creationId xmlns:a16="http://schemas.microsoft.com/office/drawing/2014/main" id="{756DEEDB-2B1A-4823-859E-9B9B537A05DE}"/>
+                <a16:creationId xmlns:a16="http://schemas.microsoft.com/office/drawing/2014/main" id="{BF339C6A-1E20-4CC3-9C84-48E40865125C}"/>
               </a:ext>
             </a:extLst>
           </p:cNvPr>
@@ -3781,7 +3781,7 @@
           <p:cNvPr id="2" name="">
             <a:extLst xmlns:a="http://schemas.openxmlformats.org/drawingml/2006/main">
               <a:ext uri="{FF2B5EF4-FFF2-40B4-BE49-F238E27FC236}">
-                <a16:creationId xmlns:a16="http://schemas.microsoft.com/office/drawing/2014/main" id="{1B4FE1D3-1907-445C-A24D-C3E978856611}"/>
+                <a16:creationId xmlns:a16="http://schemas.microsoft.com/office/drawing/2014/main" id="{A05B2DB8-41A4-4236-AE82-90EDE123A1D8}"/>
               </a:ext>
             </a:extLst>
           </p:cNvPr>
@@ -3850,7 +3850,7 @@
           <p:cNvPr id="3" name="">
             <a:extLst xmlns:a="http://schemas.openxmlformats.org/drawingml/2006/main">
               <a:ext uri="{FF2B5EF4-FFF2-40B4-BE49-F238E27FC236}">
-                <a16:creationId xmlns:a16="http://schemas.microsoft.com/office/drawing/2014/main" id="{33B5C079-12F4-4F46-A253-C8A89F0DD013}"/>
+                <a16:creationId xmlns:a16="http://schemas.microsoft.com/office/drawing/2014/main" id="{67F69E58-FEF7-4F02-A34F-DDC842A97036}"/>
               </a:ext>
             </a:extLst>
           </p:cNvPr>
@@ -3993,7 +3993,7 @@
           <p:cNvPr id="4" name="">
             <a:extLst xmlns:a="http://schemas.openxmlformats.org/drawingml/2006/main">
               <a:ext uri="{FF2B5EF4-FFF2-40B4-BE49-F238E27FC236}">
-                <a16:creationId xmlns:a16="http://schemas.microsoft.com/office/drawing/2014/main" id="{8ED5CED6-7764-4294-A11C-A274842F9BCC}"/>
+                <a16:creationId xmlns:a16="http://schemas.microsoft.com/office/drawing/2014/main" id="{039A118D-C266-4F52-8B50-1C591CC5F86E}"/>
               </a:ext>
             </a:extLst>
           </p:cNvPr>
@@ -4108,7 +4108,7 @@
           <p:cNvPr id="5" name="">
             <a:extLst xmlns:a="http://schemas.openxmlformats.org/drawingml/2006/main">
               <a:ext uri="{FF2B5EF4-FFF2-40B4-BE49-F238E27FC236}">
-                <a16:creationId xmlns:a16="http://schemas.microsoft.com/office/drawing/2014/main" id="{96329649-CB58-4C8D-A3F1-4905B9FC6046}"/>
+                <a16:creationId xmlns:a16="http://schemas.microsoft.com/office/drawing/2014/main" id="{65C66954-6523-40EC-AB96-8ACF36BD6AE6}"/>
               </a:ext>
             </a:extLst>
           </p:cNvPr>
@@ -4118,7 +4118,7 @@
           <p:nvPr/>
         </p:nvPicPr>
         <p:blipFill>
-          <a:blip xmlns:r="http://schemas.openxmlformats.org/officeDocument/2006/relationships" xmlns:a="http://schemas.openxmlformats.org/drawingml/2006/main" r:embed="Raebd8e3ff6f94566"/>
+          <a:blip xmlns:r="http://schemas.openxmlformats.org/officeDocument/2006/relationships" xmlns:a="http://schemas.openxmlformats.org/drawingml/2006/main" r:embed="R9891d7a17db742d8"/>
           <a:stretch xmlns:a="http://schemas.openxmlformats.org/drawingml/2006/main"/>
         </p:blipFill>
         <p:spPr>
@@ -4134,7 +4134,7 @@
     </p:spTree>
     <p:extLst>
       <p:ext uri="{BB962C8B-B14F-4D97-AF65-F5344CB8AC3E}">
-        <p14:creationId xmlns:p14="http://schemas.microsoft.com/office/powerpoint/2010/main" val="2064444805"/>
+        <p14:creationId xmlns:p14="http://schemas.microsoft.com/office/powerpoint/2010/main" val="1804500904"/>
       </p:ext>
     </p:extLst>
   </p:cSld>
@@ -4165,7 +4165,7 @@
           <p:cNvPr id="7" name="">
             <a:extLst xmlns:a="http://schemas.openxmlformats.org/drawingml/2006/main">
               <a:ext uri="{FF2B5EF4-FFF2-40B4-BE49-F238E27FC236}">
-                <a16:creationId xmlns:a16="http://schemas.microsoft.com/office/drawing/2014/main" id="{724F66CC-1746-4DBF-83E8-6D49E7181566}"/>
+                <a16:creationId xmlns:a16="http://schemas.microsoft.com/office/drawing/2014/main" id="{1718E479-EC58-4650-B5DE-CA3BDC0FDF97}"/>
               </a:ext>
             </a:extLst>
           </p:cNvPr>
@@ -4234,7 +4234,7 @@
           <p:cNvPr id="2" name="">
             <a:extLst xmlns:a="http://schemas.openxmlformats.org/drawingml/2006/main">
               <a:ext uri="{FF2B5EF4-FFF2-40B4-BE49-F238E27FC236}">
-                <a16:creationId xmlns:a16="http://schemas.microsoft.com/office/drawing/2014/main" id="{38EAF7C9-0D0F-4705-8E21-B259F3638C48}"/>
+                <a16:creationId xmlns:a16="http://schemas.microsoft.com/office/drawing/2014/main" id="{8F822406-C9E6-4B31-B4CC-EF770295347E}"/>
               </a:ext>
             </a:extLst>
           </p:cNvPr>
@@ -4303,7 +4303,7 @@
           <p:cNvPr id="3" name="">
             <a:extLst xmlns:a="http://schemas.openxmlformats.org/drawingml/2006/main">
               <a:ext uri="{FF2B5EF4-FFF2-40B4-BE49-F238E27FC236}">
-                <a16:creationId xmlns:a16="http://schemas.microsoft.com/office/drawing/2014/main" id="{A5ABDC22-C29E-48D2-B5F9-839219F36756}"/>
+                <a16:creationId xmlns:a16="http://schemas.microsoft.com/office/drawing/2014/main" id="{B8C72D34-B559-49A2-B5D9-EB6FCFB307B5}"/>
               </a:ext>
             </a:extLst>
           </p:cNvPr>
@@ -4441,7 +4441,7 @@
           <p:cNvPr id="4" name="">
             <a:extLst xmlns:a="http://schemas.openxmlformats.org/drawingml/2006/main">
               <a:ext uri="{FF2B5EF4-FFF2-40B4-BE49-F238E27FC236}">
-                <a16:creationId xmlns:a16="http://schemas.microsoft.com/office/drawing/2014/main" id="{A6BB3AF7-E62D-4EE1-B6F7-B664F3B59810}"/>
+                <a16:creationId xmlns:a16="http://schemas.microsoft.com/office/drawing/2014/main" id="{702C6B53-5FB5-4376-899D-5AC1463C7CD4}"/>
               </a:ext>
             </a:extLst>
           </p:cNvPr>
@@ -4579,7 +4579,7 @@
           <p:cNvPr id="5" name="">
             <a:extLst xmlns:a="http://schemas.openxmlformats.org/drawingml/2006/main">
               <a:ext uri="{FF2B5EF4-FFF2-40B4-BE49-F238E27FC236}">
-                <a16:creationId xmlns:a16="http://schemas.microsoft.com/office/drawing/2014/main" id="{1C1F8629-ACCE-44D9-B3E4-8D7851F128C1}"/>
+                <a16:creationId xmlns:a16="http://schemas.microsoft.com/office/drawing/2014/main" id="{0FF93D83-1B98-45C6-939F-1A28ABEC63ED}"/>
               </a:ext>
             </a:extLst>
           </p:cNvPr>
@@ -4590,8 +4590,8 @@
         </p:nvSpPr>
         <p:spPr>
           <a:xfrm xmlns:a="http://schemas.openxmlformats.org/drawingml/2006/main">
-            <a:off x="609600" y="4295775"/>
-            <a:ext cx="10858500" cy="1009650"/>
+            <a:off x="609600" y="4105275"/>
+            <a:ext cx="10858500" cy="1266825"/>
           </a:xfrm>
           <a:prstGeom xmlns:a="http://schemas.openxmlformats.org/drawingml/2006/main" prst="rect">
             <a:avLst/>
@@ -4661,7 +4661,30 @@
                 <a:ea typeface="DejaVu Sans"/>
                 <a:cs typeface="DejaVu Sans"/>
               </a:rPr>
-              <a:t>Mais velocidade e obstáculos mais próximos</a:t>
+              <a:t>A cada 600 metros, a corrida fica mais rápida</a:t>
+            </a:r>
+          </a:p>
+          <a:p xmlns:a="http://schemas.openxmlformats.org/drawingml/2006/main">
+            <a:pPr>
+              <a:defRPr sz="2400" b="1">
+                <a:solidFill>
+                  <a:srgbClr val="275F83"/>
+                </a:solidFill>
+                <a:latin typeface="DejaVu Sans"/>
+                <a:ea typeface="DejaVu Sans"/>
+                <a:cs typeface="DejaVu Sans"/>
+              </a:defRPr>
+            </a:pPr>
+            <a:r>
+              <a:rPr sz="2400" b="1">
+                <a:solidFill>
+                  <a:srgbClr val="275F83"/>
+                </a:solidFill>
+                <a:latin typeface="DejaVu Sans"/>
+                <a:ea typeface="DejaVu Sans"/>
+                <a:cs typeface="DejaVu Sans"/>
+              </a:rPr>
+              <a:t>e diminui o espaço entre os obstáculos.</a:t>
             </a:r>
           </a:p>
         </p:txBody>
@@ -4671,7 +4694,7 @@
           <p:cNvPr id="6" name="">
             <a:extLst xmlns:a="http://schemas.openxmlformats.org/drawingml/2006/main">
               <a:ext uri="{FF2B5EF4-FFF2-40B4-BE49-F238E27FC236}">
-                <a16:creationId xmlns:a16="http://schemas.microsoft.com/office/drawing/2014/main" id="{993B8429-1F93-4BC5-B217-6D544A3D2C83}"/>
+                <a16:creationId xmlns:a16="http://schemas.microsoft.com/office/drawing/2014/main" id="{A5F69378-EB3B-422E-B4B8-D8DF855B48A3}"/>
               </a:ext>
             </a:extLst>
           </p:cNvPr>
@@ -4761,7 +4784,7 @@
     </p:spTree>
     <p:extLst>
       <p:ext uri="{BB962C8B-B14F-4D97-AF65-F5344CB8AC3E}">
-        <p14:creationId xmlns:p14="http://schemas.microsoft.com/office/powerpoint/2010/main" val="1691203680"/>
+        <p14:creationId xmlns:p14="http://schemas.microsoft.com/office/powerpoint/2010/main" val="2086348275"/>
       </p:ext>
     </p:extLst>
   </p:cSld>
@@ -4792,7 +4815,7 @@
           <p:cNvPr id="9" name="">
             <a:extLst xmlns:a="http://schemas.openxmlformats.org/drawingml/2006/main">
               <a:ext uri="{FF2B5EF4-FFF2-40B4-BE49-F238E27FC236}">
-                <a16:creationId xmlns:a16="http://schemas.microsoft.com/office/drawing/2014/main" id="{62A24E8A-E00A-4519-9695-255E80708C9F}"/>
+                <a16:creationId xmlns:a16="http://schemas.microsoft.com/office/drawing/2014/main" id="{D9D56A4F-CCC6-4DC9-BABE-DEE9CBF68333}"/>
               </a:ext>
             </a:extLst>
           </p:cNvPr>
@@ -4825,7 +4848,7 @@
           <p:cNvPr id="8" name="">
             <a:extLst xmlns:a="http://schemas.openxmlformats.org/drawingml/2006/main">
               <a:ext uri="{FF2B5EF4-FFF2-40B4-BE49-F238E27FC236}">
-                <a16:creationId xmlns:a16="http://schemas.microsoft.com/office/drawing/2014/main" id="{BBC8D208-B38A-4B93-82CC-01227DB8773A}"/>
+                <a16:creationId xmlns:a16="http://schemas.microsoft.com/office/drawing/2014/main" id="{C32E2FB7-951B-4734-8E29-DE1773CE4014}"/>
               </a:ext>
             </a:extLst>
           </p:cNvPr>
@@ -4858,7 +4881,7 @@
           <p:cNvPr id="7" name="">
             <a:extLst xmlns:a="http://schemas.openxmlformats.org/drawingml/2006/main">
               <a:ext uri="{FF2B5EF4-FFF2-40B4-BE49-F238E27FC236}">
-                <a16:creationId xmlns:a16="http://schemas.microsoft.com/office/drawing/2014/main" id="{7026317C-05B8-4AFE-B385-C5C64091DA5C}"/>
+                <a16:creationId xmlns:a16="http://schemas.microsoft.com/office/drawing/2014/main" id="{5D8ACADB-A8FE-4358-9614-7AAEDEF6F675}"/>
               </a:ext>
             </a:extLst>
           </p:cNvPr>
@@ -4890,7 +4913,7 @@
           <p:cNvPr id="15" name="">
             <a:extLst xmlns:a="http://schemas.openxmlformats.org/drawingml/2006/main">
               <a:ext uri="{FF2B5EF4-FFF2-40B4-BE49-F238E27FC236}">
-                <a16:creationId xmlns:a16="http://schemas.microsoft.com/office/drawing/2014/main" id="{9C494F90-D2C6-429D-AAE9-961FFF8D911F}"/>
+                <a16:creationId xmlns:a16="http://schemas.microsoft.com/office/drawing/2014/main" id="{C0F46653-1817-4F7A-A5AA-43F663BA0075}"/>
               </a:ext>
             </a:extLst>
           </p:cNvPr>
@@ -4959,7 +4982,7 @@
           <p:cNvPr id="2" name="">
             <a:extLst xmlns:a="http://schemas.openxmlformats.org/drawingml/2006/main">
               <a:ext uri="{FF2B5EF4-FFF2-40B4-BE49-F238E27FC236}">
-                <a16:creationId xmlns:a16="http://schemas.microsoft.com/office/drawing/2014/main" id="{0490E405-5362-4963-8AAB-22AB812AACAA}"/>
+                <a16:creationId xmlns:a16="http://schemas.microsoft.com/office/drawing/2014/main" id="{2BC88C1F-9D07-4078-8CF2-8094CEE26080}"/>
               </a:ext>
             </a:extLst>
           </p:cNvPr>
@@ -5028,7 +5051,7 @@
           <p:cNvPr id="3" name="">
             <a:extLst xmlns:a="http://schemas.openxmlformats.org/drawingml/2006/main">
               <a:ext uri="{FF2B5EF4-FFF2-40B4-BE49-F238E27FC236}">
-                <a16:creationId xmlns:a16="http://schemas.microsoft.com/office/drawing/2014/main" id="{0DDC8B51-27F4-475C-BF97-58F34A9CFECF}"/>
+                <a16:creationId xmlns:a16="http://schemas.microsoft.com/office/drawing/2014/main" id="{7D3ACFFC-2B2D-4D53-9A5E-8C98C5B8243F}"/>
               </a:ext>
             </a:extLst>
           </p:cNvPr>
@@ -5099,7 +5122,7 @@
           <p:cNvPr id="4" name="">
             <a:extLst xmlns:a="http://schemas.openxmlformats.org/drawingml/2006/main">
               <a:ext uri="{FF2B5EF4-FFF2-40B4-BE49-F238E27FC236}">
-                <a16:creationId xmlns:a16="http://schemas.microsoft.com/office/drawing/2014/main" id="{3918C05E-6B2C-45A0-BD06-E7C657BEB2D5}"/>
+                <a16:creationId xmlns:a16="http://schemas.microsoft.com/office/drawing/2014/main" id="{FFB1AECF-E34B-4C61-99D0-681C849E996B}"/>
               </a:ext>
             </a:extLst>
           </p:cNvPr>
@@ -5170,7 +5193,7 @@
           <p:cNvPr id="5" name="">
             <a:extLst xmlns:a="http://schemas.openxmlformats.org/drawingml/2006/main">
               <a:ext uri="{FF2B5EF4-FFF2-40B4-BE49-F238E27FC236}">
-                <a16:creationId xmlns:a16="http://schemas.microsoft.com/office/drawing/2014/main" id="{BAA9C532-76FC-4A7B-A31F-6AEF6B8AA349}"/>
+                <a16:creationId xmlns:a16="http://schemas.microsoft.com/office/drawing/2014/main" id="{E3B8AEE1-D741-48CD-8D60-CF7EEE31D759}"/>
               </a:ext>
             </a:extLst>
           </p:cNvPr>
@@ -5241,7 +5264,7 @@
           <p:cNvPr id="6" name="">
             <a:extLst xmlns:a="http://schemas.openxmlformats.org/drawingml/2006/main">
               <a:ext uri="{FF2B5EF4-FFF2-40B4-BE49-F238E27FC236}">
-                <a16:creationId xmlns:a16="http://schemas.microsoft.com/office/drawing/2014/main" id="{8E78D168-527B-4878-AE55-383415235705}"/>
+                <a16:creationId xmlns:a16="http://schemas.microsoft.com/office/drawing/2014/main" id="{945474B7-E6EB-437A-95A4-2C2CEF445927}"/>
               </a:ext>
             </a:extLst>
           </p:cNvPr>
@@ -5312,7 +5335,7 @@
           <p:cNvPr id="10" name="">
             <a:extLst xmlns:a="http://schemas.openxmlformats.org/drawingml/2006/main">
               <a:ext uri="{FF2B5EF4-FFF2-40B4-BE49-F238E27FC236}">
-                <a16:creationId xmlns:a16="http://schemas.microsoft.com/office/drawing/2014/main" id="{991D803E-C909-46A8-A99B-E328CCF8B6ED}"/>
+                <a16:creationId xmlns:a16="http://schemas.microsoft.com/office/drawing/2014/main" id="{49F13693-0660-46E0-B23D-584C63A4020F}"/>
               </a:ext>
             </a:extLst>
           </p:cNvPr>
@@ -5381,7 +5404,7 @@
           <p:cNvPr id="11" name="">
             <a:extLst xmlns:a="http://schemas.openxmlformats.org/drawingml/2006/main">
               <a:ext uri="{FF2B5EF4-FFF2-40B4-BE49-F238E27FC236}">
-                <a16:creationId xmlns:a16="http://schemas.microsoft.com/office/drawing/2014/main" id="{FBFA46FB-3387-49BD-B4DA-1009F74564CC}"/>
+                <a16:creationId xmlns:a16="http://schemas.microsoft.com/office/drawing/2014/main" id="{1D514914-9462-406A-A4DC-6A4481292701}"/>
               </a:ext>
             </a:extLst>
           </p:cNvPr>
@@ -5450,7 +5473,7 @@
           <p:cNvPr id="12" name="">
             <a:extLst xmlns:a="http://schemas.openxmlformats.org/drawingml/2006/main">
               <a:ext uri="{FF2B5EF4-FFF2-40B4-BE49-F238E27FC236}">
-                <a16:creationId xmlns:a16="http://schemas.microsoft.com/office/drawing/2014/main" id="{BE9D946A-0E89-42CC-B166-5DA9F68B6469}"/>
+                <a16:creationId xmlns:a16="http://schemas.microsoft.com/office/drawing/2014/main" id="{7FFD1361-1F86-4FC6-AE5A-C71D08921330}"/>
               </a:ext>
             </a:extLst>
           </p:cNvPr>
@@ -5519,7 +5542,7 @@
           <p:cNvPr id="13" name="">
             <a:extLst xmlns:a="http://schemas.openxmlformats.org/drawingml/2006/main">
               <a:ext uri="{FF2B5EF4-FFF2-40B4-BE49-F238E27FC236}">
-                <a16:creationId xmlns:a16="http://schemas.microsoft.com/office/drawing/2014/main" id="{66954529-2396-4595-8C7E-7CA07B527580}"/>
+                <a16:creationId xmlns:a16="http://schemas.microsoft.com/office/drawing/2014/main" id="{0020722B-5EFC-48C5-AB6A-854CC6159E86}"/>
               </a:ext>
             </a:extLst>
           </p:cNvPr>
@@ -5634,7 +5657,7 @@
           <p:cNvPr id="14" name="">
             <a:extLst xmlns:a="http://schemas.openxmlformats.org/drawingml/2006/main">
               <a:ext uri="{FF2B5EF4-FFF2-40B4-BE49-F238E27FC236}">
-                <a16:creationId xmlns:a16="http://schemas.microsoft.com/office/drawing/2014/main" id="{BFF32FFC-C977-4170-9148-D87FD7450771}"/>
+                <a16:creationId xmlns:a16="http://schemas.microsoft.com/office/drawing/2014/main" id="{1601FD40-370A-4E1B-9F19-A5989D28860F}"/>
               </a:ext>
             </a:extLst>
           </p:cNvPr>
@@ -5701,7 +5724,7 @@
     </p:spTree>
     <p:extLst>
       <p:ext uri="{BB962C8B-B14F-4D97-AF65-F5344CB8AC3E}">
-        <p14:creationId xmlns:p14="http://schemas.microsoft.com/office/powerpoint/2010/main" val="187808041"/>
+        <p14:creationId xmlns:p14="http://schemas.microsoft.com/office/powerpoint/2010/main" val="1219615934"/>
       </p:ext>
     </p:extLst>
   </p:cSld>
@@ -5732,7 +5755,7 @@
           <p:cNvPr id="15" name="">
             <a:extLst xmlns:a="http://schemas.openxmlformats.org/drawingml/2006/main">
               <a:ext uri="{FF2B5EF4-FFF2-40B4-BE49-F238E27FC236}">
-                <a16:creationId xmlns:a16="http://schemas.microsoft.com/office/drawing/2014/main" id="{5C7AADA1-D973-4E16-9A4D-A21780F17743}"/>
+                <a16:creationId xmlns:a16="http://schemas.microsoft.com/office/drawing/2014/main" id="{3E3BD4FD-68FF-4030-9B06-DA303D127DF4}"/>
               </a:ext>
             </a:extLst>
           </p:cNvPr>
@@ -5801,7 +5824,7 @@
           <p:cNvPr id="2" name="">
             <a:extLst xmlns:a="http://schemas.openxmlformats.org/drawingml/2006/main">
               <a:ext uri="{FF2B5EF4-FFF2-40B4-BE49-F238E27FC236}">
-                <a16:creationId xmlns:a16="http://schemas.microsoft.com/office/drawing/2014/main" id="{EF94554A-8615-4CA6-9BB5-638D559A03FD}"/>
+                <a16:creationId xmlns:a16="http://schemas.microsoft.com/office/drawing/2014/main" id="{82D781E1-FA29-4A84-A381-6F62507B892A}"/>
               </a:ext>
             </a:extLst>
           </p:cNvPr>
@@ -5870,7 +5893,7 @@
           <p:cNvPr id="3" name="">
             <a:extLst xmlns:a="http://schemas.openxmlformats.org/drawingml/2006/main">
               <a:ext uri="{FF2B5EF4-FFF2-40B4-BE49-F238E27FC236}">
-                <a16:creationId xmlns:a16="http://schemas.microsoft.com/office/drawing/2014/main" id="{B5475A9A-6FE9-456E-BBCF-442D2B8ACFEB}"/>
+                <a16:creationId xmlns:a16="http://schemas.microsoft.com/office/drawing/2014/main" id="{52DF642F-0601-4AF7-BCC6-3B92ACC0AF01}"/>
               </a:ext>
             </a:extLst>
           </p:cNvPr>
@@ -5939,7 +5962,7 @@
           <p:cNvPr id="4" name="">
             <a:extLst xmlns:a="http://schemas.openxmlformats.org/drawingml/2006/main">
               <a:ext uri="{FF2B5EF4-FFF2-40B4-BE49-F238E27FC236}">
-                <a16:creationId xmlns:a16="http://schemas.microsoft.com/office/drawing/2014/main" id="{8577D3CC-E4AA-4D58-94FE-77A99F92BF17}"/>
+                <a16:creationId xmlns:a16="http://schemas.microsoft.com/office/drawing/2014/main" id="{37E95FFB-DB2D-48F2-A073-8B3D5B556813}"/>
               </a:ext>
             </a:extLst>
           </p:cNvPr>
@@ -6008,7 +6031,7 @@
           <p:cNvPr id="5" name="">
             <a:extLst xmlns:a="http://schemas.openxmlformats.org/drawingml/2006/main">
               <a:ext uri="{FF2B5EF4-FFF2-40B4-BE49-F238E27FC236}">
-                <a16:creationId xmlns:a16="http://schemas.microsoft.com/office/drawing/2014/main" id="{D16D6BE5-A23A-44EF-B3AC-777F87C458F1}"/>
+                <a16:creationId xmlns:a16="http://schemas.microsoft.com/office/drawing/2014/main" id="{8EB5B5EC-3765-47C6-A347-FF1D4902D6AB}"/>
               </a:ext>
             </a:extLst>
           </p:cNvPr>
@@ -6077,7 +6100,7 @@
           <p:cNvPr id="6" name="">
             <a:extLst xmlns:a="http://schemas.openxmlformats.org/drawingml/2006/main">
               <a:ext uri="{FF2B5EF4-FFF2-40B4-BE49-F238E27FC236}">
-                <a16:creationId xmlns:a16="http://schemas.microsoft.com/office/drawing/2014/main" id="{20B00DBC-6CAA-4404-9E98-423085D90710}"/>
+                <a16:creationId xmlns:a16="http://schemas.microsoft.com/office/drawing/2014/main" id="{89095BAC-FD9D-4940-B003-D83A54611C15}"/>
               </a:ext>
             </a:extLst>
           </p:cNvPr>
@@ -6146,7 +6169,7 @@
           <p:cNvPr id="7" name="">
             <a:extLst xmlns:a="http://schemas.openxmlformats.org/drawingml/2006/main">
               <a:ext uri="{FF2B5EF4-FFF2-40B4-BE49-F238E27FC236}">
-                <a16:creationId xmlns:a16="http://schemas.microsoft.com/office/drawing/2014/main" id="{1AEE100D-6E65-48D4-8B0A-7D7F88295642}"/>
+                <a16:creationId xmlns:a16="http://schemas.microsoft.com/office/drawing/2014/main" id="{3CE7F249-6676-4990-BC17-DEC899080640}"/>
               </a:ext>
             </a:extLst>
           </p:cNvPr>
@@ -6215,7 +6238,7 @@
           <p:cNvPr id="8" name="">
             <a:extLst xmlns:a="http://schemas.openxmlformats.org/drawingml/2006/main">
               <a:ext uri="{FF2B5EF4-FFF2-40B4-BE49-F238E27FC236}">
-                <a16:creationId xmlns:a16="http://schemas.microsoft.com/office/drawing/2014/main" id="{A5364BB1-984D-4254-8E97-5D6F30C1A4B4}"/>
+                <a16:creationId xmlns:a16="http://schemas.microsoft.com/office/drawing/2014/main" id="{694709FD-0CB4-4FB6-AD83-0E44570D3E71}"/>
               </a:ext>
             </a:extLst>
           </p:cNvPr>
@@ -6284,7 +6307,7 @@
           <p:cNvPr id="9" name="">
             <a:extLst xmlns:a="http://schemas.openxmlformats.org/drawingml/2006/main">
               <a:ext uri="{FF2B5EF4-FFF2-40B4-BE49-F238E27FC236}">
-                <a16:creationId xmlns:a16="http://schemas.microsoft.com/office/drawing/2014/main" id="{E2CF1473-E87D-4A63-B863-AB503E213556}"/>
+                <a16:creationId xmlns:a16="http://schemas.microsoft.com/office/drawing/2014/main" id="{1B606414-B215-4D8B-8436-AA92E78C382C}"/>
               </a:ext>
             </a:extLst>
           </p:cNvPr>
@@ -6294,7 +6317,7 @@
           <p:nvPr/>
         </p:nvPicPr>
         <p:blipFill>
-          <a:blip xmlns:r="http://schemas.openxmlformats.org/officeDocument/2006/relationships" xmlns:a="http://schemas.openxmlformats.org/drawingml/2006/main" r:embed="R0fe1545247164721"/>
+          <a:blip xmlns:r="http://schemas.openxmlformats.org/officeDocument/2006/relationships" xmlns:a="http://schemas.openxmlformats.org/drawingml/2006/main" r:embed="Rbf0a021f48c4427d"/>
           <a:stretch xmlns:a="http://schemas.openxmlformats.org/drawingml/2006/main"/>
         </p:blipFill>
         <p:spPr>
@@ -6312,7 +6335,7 @@
           <p:cNvPr id="10" name="">
             <a:extLst xmlns:a="http://schemas.openxmlformats.org/drawingml/2006/main">
               <a:ext uri="{FF2B5EF4-FFF2-40B4-BE49-F238E27FC236}">
-                <a16:creationId xmlns:a16="http://schemas.microsoft.com/office/drawing/2014/main" id="{8F2F17D3-2080-455A-A45D-15D1F6E12417}"/>
+                <a16:creationId xmlns:a16="http://schemas.microsoft.com/office/drawing/2014/main" id="{D36CFE32-0D0C-4DC0-84E3-AD720B7661CE}"/>
               </a:ext>
             </a:extLst>
           </p:cNvPr>
@@ -6322,7 +6345,7 @@
           <p:nvPr/>
         </p:nvPicPr>
         <p:blipFill>
-          <a:blip xmlns:r="http://schemas.openxmlformats.org/officeDocument/2006/relationships" xmlns:a="http://schemas.openxmlformats.org/drawingml/2006/main" r:embed="Rb141184480854829"/>
+          <a:blip xmlns:r="http://schemas.openxmlformats.org/officeDocument/2006/relationships" xmlns:a="http://schemas.openxmlformats.org/drawingml/2006/main" r:embed="R65ebc3a016054394"/>
           <a:stretch xmlns:a="http://schemas.openxmlformats.org/drawingml/2006/main"/>
         </p:blipFill>
         <p:spPr>
@@ -6340,7 +6363,7 @@
           <p:cNvPr id="11" name="">
             <a:extLst xmlns:a="http://schemas.openxmlformats.org/drawingml/2006/main">
               <a:ext uri="{FF2B5EF4-FFF2-40B4-BE49-F238E27FC236}">
-                <a16:creationId xmlns:a16="http://schemas.microsoft.com/office/drawing/2014/main" id="{585A2D38-126F-4D75-930D-0D6CA991BE12}"/>
+                <a16:creationId xmlns:a16="http://schemas.microsoft.com/office/drawing/2014/main" id="{2210D06F-E880-4606-B96E-D37BAC0E86AE}"/>
               </a:ext>
             </a:extLst>
           </p:cNvPr>
@@ -6350,7 +6373,7 @@
           <p:nvPr/>
         </p:nvPicPr>
         <p:blipFill>
-          <a:blip xmlns:r="http://schemas.openxmlformats.org/officeDocument/2006/relationships" xmlns:a="http://schemas.openxmlformats.org/drawingml/2006/main" r:embed="Rfd71726878194350"/>
+          <a:blip xmlns:r="http://schemas.openxmlformats.org/officeDocument/2006/relationships" xmlns:a="http://schemas.openxmlformats.org/drawingml/2006/main" r:embed="R56df4d0949a047a9"/>
           <a:stretch xmlns:a="http://schemas.openxmlformats.org/drawingml/2006/main"/>
         </p:blipFill>
         <p:spPr>
@@ -6368,7 +6391,7 @@
           <p:cNvPr id="12" name="">
             <a:extLst xmlns:a="http://schemas.openxmlformats.org/drawingml/2006/main">
               <a:ext uri="{FF2B5EF4-FFF2-40B4-BE49-F238E27FC236}">
-                <a16:creationId xmlns:a16="http://schemas.microsoft.com/office/drawing/2014/main" id="{2F8A748D-5E22-4AE0-BEDB-27D104457E52}"/>
+                <a16:creationId xmlns:a16="http://schemas.microsoft.com/office/drawing/2014/main" id="{3E341630-AD6B-448C-87B8-75879CE6D1E6}"/>
               </a:ext>
             </a:extLst>
           </p:cNvPr>
@@ -6483,7 +6506,7 @@
           <p:cNvPr id="13" name="">
             <a:extLst xmlns:a="http://schemas.openxmlformats.org/drawingml/2006/main">
               <a:ext uri="{FF2B5EF4-FFF2-40B4-BE49-F238E27FC236}">
-                <a16:creationId xmlns:a16="http://schemas.microsoft.com/office/drawing/2014/main" id="{0C0230B7-2D2B-4372-B7A1-43D2200E7B3E}"/>
+                <a16:creationId xmlns:a16="http://schemas.microsoft.com/office/drawing/2014/main" id="{BC4ED9E9-1C0C-4F25-B8DD-5778C826F3EA}"/>
               </a:ext>
             </a:extLst>
           </p:cNvPr>
@@ -6598,7 +6621,7 @@
           <p:cNvPr id="14" name="">
             <a:extLst xmlns:a="http://schemas.openxmlformats.org/drawingml/2006/main">
               <a:ext uri="{FF2B5EF4-FFF2-40B4-BE49-F238E27FC236}">
-                <a16:creationId xmlns:a16="http://schemas.microsoft.com/office/drawing/2014/main" id="{62176768-9869-46BF-8194-468AF677CD0A}"/>
+                <a16:creationId xmlns:a16="http://schemas.microsoft.com/office/drawing/2014/main" id="{7946499D-6C22-4A5D-ABE8-503CB9FB3F2E}"/>
               </a:ext>
             </a:extLst>
           </p:cNvPr>
@@ -6711,7 +6734,7 @@
     </p:spTree>
     <p:extLst>
       <p:ext uri="{BB962C8B-B14F-4D97-AF65-F5344CB8AC3E}">
-        <p14:creationId xmlns:p14="http://schemas.microsoft.com/office/powerpoint/2010/main" val="865186744"/>
+        <p14:creationId xmlns:p14="http://schemas.microsoft.com/office/powerpoint/2010/main" val="247656820"/>
       </p:ext>
     </p:extLst>
   </p:cSld>
@@ -6742,7 +6765,7 @@
           <p:cNvPr id="10" name="">
             <a:extLst xmlns:a="http://schemas.openxmlformats.org/drawingml/2006/main">
               <a:ext uri="{FF2B5EF4-FFF2-40B4-BE49-F238E27FC236}">
-                <a16:creationId xmlns:a16="http://schemas.microsoft.com/office/drawing/2014/main" id="{1031C314-E538-4C03-BA49-A241848F64F0}"/>
+                <a16:creationId xmlns:a16="http://schemas.microsoft.com/office/drawing/2014/main" id="{277F4CCB-67D3-4B97-A074-559F379B5726}"/>
               </a:ext>
             </a:extLst>
           </p:cNvPr>
@@ -6811,7 +6834,7 @@
           <p:cNvPr id="2" name="">
             <a:extLst xmlns:a="http://schemas.openxmlformats.org/drawingml/2006/main">
               <a:ext uri="{FF2B5EF4-FFF2-40B4-BE49-F238E27FC236}">
-                <a16:creationId xmlns:a16="http://schemas.microsoft.com/office/drawing/2014/main" id="{E49CADE9-CC8A-4FB4-840A-111C27A26411}"/>
+                <a16:creationId xmlns:a16="http://schemas.microsoft.com/office/drawing/2014/main" id="{1DE4CD3B-252B-44AB-B0A8-E056EAEA079C}"/>
               </a:ext>
             </a:extLst>
           </p:cNvPr>
@@ -6880,7 +6903,7 @@
           <p:cNvPr id="3" name="">
             <a:extLst xmlns:a="http://schemas.openxmlformats.org/drawingml/2006/main">
               <a:ext uri="{FF2B5EF4-FFF2-40B4-BE49-F238E27FC236}">
-                <a16:creationId xmlns:a16="http://schemas.microsoft.com/office/drawing/2014/main" id="{16E74437-69EA-4E4F-B37E-2CD432C8033D}"/>
+                <a16:creationId xmlns:a16="http://schemas.microsoft.com/office/drawing/2014/main" id="{FFE7378A-DB14-4990-BE4D-4DCC82BA9443}"/>
               </a:ext>
             </a:extLst>
           </p:cNvPr>
@@ -6890,7 +6913,7 @@
           <p:nvPr/>
         </p:nvPicPr>
         <p:blipFill>
-          <a:blip xmlns:r="http://schemas.openxmlformats.org/officeDocument/2006/relationships" xmlns:a="http://schemas.openxmlformats.org/drawingml/2006/main" r:embed="R631de31c43564de3"/>
+          <a:blip xmlns:r="http://schemas.openxmlformats.org/officeDocument/2006/relationships" xmlns:a="http://schemas.openxmlformats.org/drawingml/2006/main" r:embed="Rf500820161fc4dbb"/>
           <a:stretch xmlns:a="http://schemas.openxmlformats.org/drawingml/2006/main"/>
         </p:blipFill>
         <p:spPr>
@@ -6908,7 +6931,7 @@
           <p:cNvPr id="4" name="">
             <a:extLst xmlns:a="http://schemas.openxmlformats.org/drawingml/2006/main">
               <a:ext uri="{FF2B5EF4-FFF2-40B4-BE49-F238E27FC236}">
-                <a16:creationId xmlns:a16="http://schemas.microsoft.com/office/drawing/2014/main" id="{FCE16820-E36A-4AD8-80B5-3502F3C7283F}"/>
+                <a16:creationId xmlns:a16="http://schemas.microsoft.com/office/drawing/2014/main" id="{0D4ABF7A-F56F-491F-B4D7-66A9C7419D9F}"/>
               </a:ext>
             </a:extLst>
           </p:cNvPr>
@@ -6918,7 +6941,7 @@
           <p:nvPr/>
         </p:nvPicPr>
         <p:blipFill>
-          <a:blip xmlns:r="http://schemas.openxmlformats.org/officeDocument/2006/relationships" xmlns:a="http://schemas.openxmlformats.org/drawingml/2006/main" r:embed="R49e0596575b1497b"/>
+          <a:blip xmlns:r="http://schemas.openxmlformats.org/officeDocument/2006/relationships" xmlns:a="http://schemas.openxmlformats.org/drawingml/2006/main" r:embed="R45b9f7249dac412f"/>
           <a:stretch xmlns:a="http://schemas.openxmlformats.org/drawingml/2006/main"/>
         </p:blipFill>
         <p:spPr>
@@ -6936,7 +6959,7 @@
           <p:cNvPr id="5" name="">
             <a:extLst xmlns:a="http://schemas.openxmlformats.org/drawingml/2006/main">
               <a:ext uri="{FF2B5EF4-FFF2-40B4-BE49-F238E27FC236}">
-                <a16:creationId xmlns:a16="http://schemas.microsoft.com/office/drawing/2014/main" id="{70521CF4-2324-4263-B202-F3F41DB2B7CB}"/>
+                <a16:creationId xmlns:a16="http://schemas.microsoft.com/office/drawing/2014/main" id="{35720C57-A5BE-455A-BD0A-3A9AB9BD2157}"/>
               </a:ext>
             </a:extLst>
           </p:cNvPr>
@@ -6946,7 +6969,7 @@
           <p:nvPr/>
         </p:nvPicPr>
         <p:blipFill>
-          <a:blip xmlns:r="http://schemas.openxmlformats.org/officeDocument/2006/relationships" xmlns:a="http://schemas.openxmlformats.org/drawingml/2006/main" r:embed="R6c2b527a09864f83"/>
+          <a:blip xmlns:r="http://schemas.openxmlformats.org/officeDocument/2006/relationships" xmlns:a="http://schemas.openxmlformats.org/drawingml/2006/main" r:embed="R16d5bd1e03974727"/>
           <a:stretch xmlns:a="http://schemas.openxmlformats.org/drawingml/2006/main"/>
         </p:blipFill>
         <p:spPr>
@@ -6964,7 +6987,7 @@
           <p:cNvPr id="6" name="">
             <a:extLst xmlns:a="http://schemas.openxmlformats.org/drawingml/2006/main">
               <a:ext uri="{FF2B5EF4-FFF2-40B4-BE49-F238E27FC236}">
-                <a16:creationId xmlns:a16="http://schemas.microsoft.com/office/drawing/2014/main" id="{F18DDF4D-5523-4F9B-BE5A-7437EC784D41}"/>
+                <a16:creationId xmlns:a16="http://schemas.microsoft.com/office/drawing/2014/main" id="{40B5E8CA-941B-4DB6-99BB-2479783DB79B}"/>
               </a:ext>
             </a:extLst>
           </p:cNvPr>
@@ -7056,7 +7079,7 @@
           <p:cNvPr id="7" name="">
             <a:extLst xmlns:a="http://schemas.openxmlformats.org/drawingml/2006/main">
               <a:ext uri="{FF2B5EF4-FFF2-40B4-BE49-F238E27FC236}">
-                <a16:creationId xmlns:a16="http://schemas.microsoft.com/office/drawing/2014/main" id="{541CABC3-3270-467D-8030-A7A558D835F8}"/>
+                <a16:creationId xmlns:a16="http://schemas.microsoft.com/office/drawing/2014/main" id="{B21693FB-F244-427F-AE7A-17D5548BDFE8}"/>
               </a:ext>
             </a:extLst>
           </p:cNvPr>
@@ -7148,7 +7171,7 @@
           <p:cNvPr id="8" name="">
             <a:extLst xmlns:a="http://schemas.openxmlformats.org/drawingml/2006/main">
               <a:ext uri="{FF2B5EF4-FFF2-40B4-BE49-F238E27FC236}">
-                <a16:creationId xmlns:a16="http://schemas.microsoft.com/office/drawing/2014/main" id="{E93BB553-6A0E-4CF8-BE97-F1A24918F690}"/>
+                <a16:creationId xmlns:a16="http://schemas.microsoft.com/office/drawing/2014/main" id="{3A468031-58C1-4583-9704-7C41B8F17097}"/>
               </a:ext>
             </a:extLst>
           </p:cNvPr>
@@ -7240,7 +7263,7 @@
           <p:cNvPr id="9" name="">
             <a:extLst xmlns:a="http://schemas.openxmlformats.org/drawingml/2006/main">
               <a:ext uri="{FF2B5EF4-FFF2-40B4-BE49-F238E27FC236}">
-                <a16:creationId xmlns:a16="http://schemas.microsoft.com/office/drawing/2014/main" id="{182D930A-D170-4A3D-9B23-3CECC8CC8F1B}"/>
+                <a16:creationId xmlns:a16="http://schemas.microsoft.com/office/drawing/2014/main" id="{4B7A315F-FF35-4478-8AB0-3D569BA57388}"/>
               </a:ext>
             </a:extLst>
           </p:cNvPr>
@@ -7307,7 +7330,7 @@
     </p:spTree>
     <p:extLst>
       <p:ext uri="{BB962C8B-B14F-4D97-AF65-F5344CB8AC3E}">
-        <p14:creationId xmlns:p14="http://schemas.microsoft.com/office/powerpoint/2010/main" val="1123907060"/>
+        <p14:creationId xmlns:p14="http://schemas.microsoft.com/office/powerpoint/2010/main" val="459494329"/>
       </p:ext>
     </p:extLst>
   </p:cSld>
@@ -7338,7 +7361,7 @@
           <p:cNvPr id="6" name="">
             <a:extLst xmlns:a="http://schemas.openxmlformats.org/drawingml/2006/main">
               <a:ext uri="{FF2B5EF4-FFF2-40B4-BE49-F238E27FC236}">
-                <a16:creationId xmlns:a16="http://schemas.microsoft.com/office/drawing/2014/main" id="{B81C7A6A-AC6A-4720-AAF0-5EA402C25151}"/>
+                <a16:creationId xmlns:a16="http://schemas.microsoft.com/office/drawing/2014/main" id="{B9B102C4-B919-49DD-89CB-8F40F4F652E8}"/>
               </a:ext>
             </a:extLst>
           </p:cNvPr>
@@ -7407,7 +7430,7 @@
           <p:cNvPr id="2" name="">
             <a:extLst xmlns:a="http://schemas.openxmlformats.org/drawingml/2006/main">
               <a:ext uri="{FF2B5EF4-FFF2-40B4-BE49-F238E27FC236}">
-                <a16:creationId xmlns:a16="http://schemas.microsoft.com/office/drawing/2014/main" id="{474C6F3D-F74D-4C91-9EFC-73614E397CAD}"/>
+                <a16:creationId xmlns:a16="http://schemas.microsoft.com/office/drawing/2014/main" id="{D58E2D6A-F27B-4820-89F6-E6BAAF5BBBFB}"/>
               </a:ext>
             </a:extLst>
           </p:cNvPr>
@@ -7476,7 +7499,7 @@
           <p:cNvPr id="3" name="">
             <a:extLst xmlns:a="http://schemas.openxmlformats.org/drawingml/2006/main">
               <a:ext uri="{FF2B5EF4-FFF2-40B4-BE49-F238E27FC236}">
-                <a16:creationId xmlns:a16="http://schemas.microsoft.com/office/drawing/2014/main" id="{D38A732A-DDEA-4916-809A-5F000B89F9FB}"/>
+                <a16:creationId xmlns:a16="http://schemas.microsoft.com/office/drawing/2014/main" id="{1B8057A1-8E63-4E6F-A937-2C2F667723EC}"/>
               </a:ext>
             </a:extLst>
           </p:cNvPr>
@@ -7486,7 +7509,7 @@
           <p:nvPr/>
         </p:nvPicPr>
         <p:blipFill>
-          <a:blip xmlns:r="http://schemas.openxmlformats.org/officeDocument/2006/relationships" xmlns:a="http://schemas.openxmlformats.org/drawingml/2006/main" r:embed="R9f05c02cc84f486c"/>
+          <a:blip xmlns:r="http://schemas.openxmlformats.org/officeDocument/2006/relationships" xmlns:a="http://schemas.openxmlformats.org/drawingml/2006/main" r:embed="R41556c33e60845e0"/>
           <a:stretch xmlns:a="http://schemas.openxmlformats.org/drawingml/2006/main"/>
         </p:blipFill>
         <p:spPr>
@@ -7504,7 +7527,7 @@
           <p:cNvPr id="4" name="">
             <a:extLst xmlns:a="http://schemas.openxmlformats.org/drawingml/2006/main">
               <a:ext uri="{FF2B5EF4-FFF2-40B4-BE49-F238E27FC236}">
-                <a16:creationId xmlns:a16="http://schemas.microsoft.com/office/drawing/2014/main" id="{ABC5C081-AD52-4535-9B75-18BE9F7D10D3}"/>
+                <a16:creationId xmlns:a16="http://schemas.microsoft.com/office/drawing/2014/main" id="{A26BB3A3-FE65-44B5-B272-B903B11B64EA}"/>
               </a:ext>
             </a:extLst>
           </p:cNvPr>
@@ -7629,7 +7652,7 @@
           <p:cNvPr id="5" name="">
             <a:extLst xmlns:a="http://schemas.openxmlformats.org/drawingml/2006/main">
               <a:ext uri="{FF2B5EF4-FFF2-40B4-BE49-F238E27FC236}">
-                <a16:creationId xmlns:a16="http://schemas.microsoft.com/office/drawing/2014/main" id="{4731660C-C43C-4A7C-B9B0-C7D5C0D0C055}"/>
+                <a16:creationId xmlns:a16="http://schemas.microsoft.com/office/drawing/2014/main" id="{B5B69F05-E741-4263-98DF-0EF83811A6CC}"/>
               </a:ext>
             </a:extLst>
           </p:cNvPr>
@@ -7742,7 +7765,7 @@
     </p:spTree>
     <p:extLst>
       <p:ext uri="{BB962C8B-B14F-4D97-AF65-F5344CB8AC3E}">
-        <p14:creationId xmlns:p14="http://schemas.microsoft.com/office/powerpoint/2010/main" val="359517383"/>
+        <p14:creationId xmlns:p14="http://schemas.microsoft.com/office/powerpoint/2010/main" val="606047075"/>
       </p:ext>
     </p:extLst>
   </p:cSld>
